--- a/Tuan 4/bao-cao-tuan4-apexmem.pptx
+++ b/Tuan 4/bao-cao-tuan4-apexmem.pptx
@@ -4,6 +4,9 @@
   <p:sldMasterIdLst>
     <p:sldMasterId id="2147483648" r:id="rId1"/>
   </p:sldMasterIdLst>
+  <p:notesMasterIdLst>
+    <p:notesMasterId r:id="rId16"/>
+  </p:notesMasterIdLst>
   <p:sldIdLst>
     <p:sldId id="256" r:id="rId2"/>
     <p:sldId id="257" r:id="rId3"/>
@@ -20,9 +23,6 @@
     <p:sldId id="268" r:id="rId14"/>
     <p:sldId id="269" r:id="rId15"/>
   </p:sldIdLst>
-  <p:notesMasterIdLst>
-    <p:notesMasterId r:id="rId16"/>
-  </p:notesMasterIdLst>
   <p:sldSz cx="12192000" cy="6858000"/>
   <p:notesSz cx="6858000" cy="12192000"/>
   <p:defaultTextStyle>
@@ -117,13 +117,20 @@
       </a:defRPr>
     </a:lvl9pPr>
   </p:defaultTextStyle>
+  <p:extLst>
+    <p:ext uri="{EFAFB233-063F-42B5-8137-9DF3F51BA10A}">
+      <p15:sldGuideLst xmlns:p15="http://schemas.microsoft.com/office/powerpoint/2012/main"/>
+    </p:ext>
+  </p:extLst>
 </p:presentation>
 </file>
 
 <file path=ppt/charts/chart1.xml><?xml version="1.0" encoding="utf-8"?>
-<c:chartSpace xmlns:c="http://schemas.openxmlformats.org/drawingml/2006/chart" xmlns:a="http://schemas.openxmlformats.org/drawingml/2006/main" xmlns:r="http://schemas.openxmlformats.org/officeDocument/2006/relationships">
+<c:chartSpace xmlns:c="http://schemas.openxmlformats.org/drawingml/2006/chart" xmlns:a="http://schemas.openxmlformats.org/drawingml/2006/main" xmlns:r="http://schemas.openxmlformats.org/officeDocument/2006/relationships" xmlns:c16r2="http://schemas.microsoft.com/office/drawing/2015/06/chart">
   <c:date1904 val="0"/>
+  <c:lang val="en-US"/>
   <c:roundedCorners val="1"/>
+  <c:style val="2"/>
   <c:chart>
     <c:title>
       <c:tx>
@@ -140,7 +147,7 @@
               </a:defRPr>
             </a:pPr>
             <a:r>
-              <a:rPr sz="1200" b="0" i="0" u="none" strike="noStrike">
+              <a:rPr lang="en-US" sz="1200" b="0" i="0" u="none" strike="noStrike">
                 <a:solidFill>
                   <a:srgbClr val="1E2A32"/>
                 </a:solidFill>
@@ -151,7 +158,6 @@
           </a:p>
         </c:rich>
       </c:tx>
-      <c:layout/>
       <c:overlay val="0"/>
     </c:title>
     <c:autoTitleDeleted val="0"/>
@@ -184,18 +190,26 @@
           <c:invertIfNegative val="0"/>
           <c:dLbls>
             <c:numFmt formatCode="0.0" sourceLinked="0"/>
+            <c:spPr>
+              <a:noFill/>
+              <a:ln>
+                <a:noFill/>
+              </a:ln>
+              <a:effectLst/>
+            </c:spPr>
             <c:txPr>
               <a:bodyPr/>
               <a:lstStyle/>
               <a:p>
                 <a:pPr>
-                  <a:defRPr b="0" i="0" strike="noStrike" sz="900" u="none">
+                  <a:defRPr sz="900" b="0" i="0" u="none" strike="noStrike">
                     <a:solidFill>
                       <a:srgbClr val="000000"/>
                     </a:solidFill>
                     <a:latin typeface="Arial"/>
                   </a:defRPr>
                 </a:pPr>
+                <a:endParaRPr lang="en-US"/>
               </a:p>
             </c:txPr>
             <c:showLegendKey val="0"/>
@@ -205,34 +219,37 @@
             <c:showPercent val="0"/>
             <c:showBubbleSize val="0"/>
             <c:showLeaderLines val="0"/>
+            <c:extLst>
+              <c:ext xmlns:c15="http://schemas.microsoft.com/office/drawing/2012/chart" uri="{CE6537A1-D6FC-4f65-9D91-7224C49458BB}">
+                <c15:showLeaderLines val="0"/>
+              </c:ext>
+            </c:extLst>
           </c:dLbls>
           <c:cat>
-            <c:multiLvlStrRef>
+            <c:strRef>
               <c:f>Sheet1!$A$2:$A$7</c:f>
-              <c:multiLvlStrCache>
+              <c:strCache>
                 <c:ptCount val="6"/>
-                <c:lvl>
-                  <c:pt idx="0">
-                    <c:v>single-session-user (3)</c:v>
-                  </c:pt>
-                  <c:pt idx="1">
-                    <c:v>single-session-assistant (3)</c:v>
-                  </c:pt>
-                  <c:pt idx="2">
-                    <c:v>single-session-preference (2)</c:v>
-                  </c:pt>
-                  <c:pt idx="3">
-                    <c:v>multi-session (7)</c:v>
-                  </c:pt>
-                  <c:pt idx="4">
-                    <c:v>temporal-reasoning (1)</c:v>
-                  </c:pt>
-                  <c:pt idx="5">
-                    <c:v>knowledge-update (4)</c:v>
-                  </c:pt>
-                </c:lvl>
-              </c:multiLvlStrCache>
-            </c:multiLvlStrRef>
+                <c:pt idx="0">
+                  <c:v>single-session-user (3)</c:v>
+                </c:pt>
+                <c:pt idx="1">
+                  <c:v>single-session-assistant (3)</c:v>
+                </c:pt>
+                <c:pt idx="2">
+                  <c:v>single-session-preference (2)</c:v>
+                </c:pt>
+                <c:pt idx="3">
+                  <c:v>multi-session (7)</c:v>
+                </c:pt>
+                <c:pt idx="4">
+                  <c:v>temporal-reasoning (1)</c:v>
+                </c:pt>
+                <c:pt idx="5">
+                  <c:v>knowledge-update (4)</c:v>
+                </c:pt>
+              </c:strCache>
+            </c:strRef>
           </c:cat>
           <c:val>
             <c:numRef>
@@ -261,6 +278,11 @@
               </c:numCache>
             </c:numRef>
           </c:val>
+          <c:extLst>
+            <c:ext xmlns:c16="http://schemas.microsoft.com/office/drawing/2014/chart" uri="{C3380CC4-5D6E-409C-BE32-E72D297353CC}">
+              <c16:uniqueId val="{00000000-F374-4379-AFAB-9ECE596BCA03}"/>
+            </c:ext>
+          </c:extLst>
         </c:ser>
         <c:ser>
           <c:idx val="1"/>
@@ -285,18 +307,26 @@
           <c:invertIfNegative val="0"/>
           <c:dLbls>
             <c:numFmt formatCode="0.0" sourceLinked="0"/>
+            <c:spPr>
+              <a:noFill/>
+              <a:ln>
+                <a:noFill/>
+              </a:ln>
+              <a:effectLst/>
+            </c:spPr>
             <c:txPr>
               <a:bodyPr/>
               <a:lstStyle/>
               <a:p>
                 <a:pPr>
-                  <a:defRPr b="0" i="0" strike="noStrike" sz="900" u="none">
+                  <a:defRPr sz="900" b="0" i="0" u="none" strike="noStrike">
                     <a:solidFill>
                       <a:srgbClr val="000000"/>
                     </a:solidFill>
                     <a:latin typeface="Arial"/>
                   </a:defRPr>
                 </a:pPr>
+                <a:endParaRPr lang="en-US"/>
               </a:p>
             </c:txPr>
             <c:showLegendKey val="0"/>
@@ -306,34 +336,37 @@
             <c:showPercent val="0"/>
             <c:showBubbleSize val="0"/>
             <c:showLeaderLines val="0"/>
+            <c:extLst>
+              <c:ext xmlns:c15="http://schemas.microsoft.com/office/drawing/2012/chart" uri="{CE6537A1-D6FC-4f65-9D91-7224C49458BB}">
+                <c15:showLeaderLines val="0"/>
+              </c:ext>
+            </c:extLst>
           </c:dLbls>
           <c:cat>
-            <c:multiLvlStrRef>
+            <c:strRef>
               <c:f>Sheet1!$A$2:$A$7</c:f>
-              <c:multiLvlStrCache>
+              <c:strCache>
                 <c:ptCount val="6"/>
-                <c:lvl>
-                  <c:pt idx="0">
-                    <c:v>single-session-user (3)</c:v>
-                  </c:pt>
-                  <c:pt idx="1">
-                    <c:v>single-session-assistant (3)</c:v>
-                  </c:pt>
-                  <c:pt idx="2">
-                    <c:v>single-session-preference (2)</c:v>
-                  </c:pt>
-                  <c:pt idx="3">
-                    <c:v>multi-session (7)</c:v>
-                  </c:pt>
-                  <c:pt idx="4">
-                    <c:v>temporal-reasoning (1)</c:v>
-                  </c:pt>
-                  <c:pt idx="5">
-                    <c:v>knowledge-update (4)</c:v>
-                  </c:pt>
-                </c:lvl>
-              </c:multiLvlStrCache>
-            </c:multiLvlStrRef>
+                <c:pt idx="0">
+                  <c:v>single-session-user (3)</c:v>
+                </c:pt>
+                <c:pt idx="1">
+                  <c:v>single-session-assistant (3)</c:v>
+                </c:pt>
+                <c:pt idx="2">
+                  <c:v>single-session-preference (2)</c:v>
+                </c:pt>
+                <c:pt idx="3">
+                  <c:v>multi-session (7)</c:v>
+                </c:pt>
+                <c:pt idx="4">
+                  <c:v>temporal-reasoning (1)</c:v>
+                </c:pt>
+                <c:pt idx="5">
+                  <c:v>knowledge-update (4)</c:v>
+                </c:pt>
+              </c:strCache>
+            </c:strRef>
           </c:cat>
           <c:val>
             <c:numRef>
@@ -362,36 +395,23 @@
               </c:numCache>
             </c:numRef>
           </c:val>
+          <c:extLst>
+            <c:ext xmlns:c16="http://schemas.microsoft.com/office/drawing/2014/chart" uri="{C3380CC4-5D6E-409C-BE32-E72D297353CC}">
+              <c16:uniqueId val="{00000001-F374-4379-AFAB-9ECE596BCA03}"/>
+            </c:ext>
+          </c:extLst>
         </c:ser>
         <c:dLbls>
-          <c:numFmt formatCode="0.0" sourceLinked="0"/>
-          <c:txPr>
-            <a:bodyPr/>
-            <a:lstStyle/>
-            <a:p>
-              <a:pPr>
-                <a:defRPr b="0" i="0" strike="noStrike" sz="900" u="none">
-                  <a:solidFill>
-                    <a:srgbClr val="000000"/>
-                  </a:solidFill>
-                  <a:latin typeface="Arial"/>
-                </a:defRPr>
-              </a:pPr>
-            </a:p>
-          </c:txPr>
           <c:showLegendKey val="0"/>
           <c:showVal val="1"/>
           <c:showCatName val="0"/>
           <c:showSerName val="0"/>
           <c:showPercent val="0"/>
           <c:showBubbleSize val="0"/>
-          <c:showLeaderLines val="0"/>
         </c:dLbls>
         <c:gapWidth val="60"/>
-        <c:overlap val="0"/>
         <c:axId val="2094734554"/>
         <c:axId val="2094734552"/>
-        <c:axId val="2094734556"/>
       </c:barChart>
       <c:catAx>
         <c:axId val="2094734554"/>
@@ -432,6 +452,7 @@
         <c:crosses val="autoZero"/>
         <c:auto val="1"/>
         <c:lblAlgn val="ctr"/>
+        <c:lblOffset val="100"/>
         <c:noMultiLvlLbl val="1"/>
       </c:catAx>
       <c:valAx>
@@ -442,35 +463,11 @@
           <c:min val="0"/>
         </c:scaling>
         <c:delete val="1"/>
-        <c:axPos val="b"/>
+        <c:axPos val="t"/>
         <c:numFmt formatCode="General" sourceLinked="0"/>
         <c:majorTickMark val="out"/>
         <c:minorTickMark val="none"/>
         <c:tickLblPos val="low"/>
-        <c:spPr>
-          <a:ln w="12700" cap="flat">
-            <a:solidFill>
-              <a:srgbClr val="888888"/>
-            </a:solidFill>
-            <a:prstDash val="solid"/>
-            <a:round/>
-          </a:ln>
-        </c:spPr>
-        <c:txPr>
-          <a:bodyPr/>
-          <a:lstStyle/>
-          <a:p>
-            <a:pPr>
-              <a:defRPr sz="1200" b="0" i="0" u="none" strike="noStrike">
-                <a:solidFill>
-                  <a:srgbClr val="000000"/>
-                </a:solidFill>
-                <a:latin typeface="Arial"/>
-              </a:defRPr>
-            </a:pPr>
-            <a:endParaRPr lang="en-US"/>
-          </a:p>
-        </c:txPr>
         <c:crossAx val="2094734554"/>
         <c:crosses val="autoZero"/>
         <c:crossBetween val="between"/>
@@ -491,7 +488,7 @@
         <a:lstStyle/>
         <a:p>
           <a:pPr>
-            <a:defRPr sz="1100">      </a:defRPr>
+            <a:defRPr sz="1100"/>
           </a:pPr>
           <a:endParaRPr lang="en-US"/>
         </a:p>
@@ -499,6 +496,7 @@
     </c:legend>
     <c:plotVisOnly val="1"/>
     <c:dispBlanksAs val="span"/>
+    <c:showDLblsOverMax val="1"/>
   </c:chart>
   <c:spPr>
     <a:noFill/>
@@ -514,9 +512,11 @@
 </file>
 
 <file path=ppt/charts/chart2.xml><?xml version="1.0" encoding="utf-8"?>
-<c:chartSpace xmlns:c="http://schemas.openxmlformats.org/drawingml/2006/chart" xmlns:a="http://schemas.openxmlformats.org/drawingml/2006/main" xmlns:r="http://schemas.openxmlformats.org/officeDocument/2006/relationships">
+<c:chartSpace xmlns:c="http://schemas.openxmlformats.org/drawingml/2006/chart" xmlns:a="http://schemas.openxmlformats.org/drawingml/2006/main" xmlns:r="http://schemas.openxmlformats.org/officeDocument/2006/relationships" xmlns:c16r2="http://schemas.microsoft.com/office/drawing/2015/06/chart">
   <c:date1904 val="0"/>
+  <c:lang val="en-US"/>
   <c:roundedCorners val="1"/>
+  <c:style val="2"/>
   <c:chart>
     <c:title>
       <c:tx>
@@ -533,7 +533,7 @@
               </a:defRPr>
             </a:pPr>
             <a:r>
-              <a:rPr sz="1200" b="0" i="0" u="none" strike="noStrike">
+              <a:rPr lang="en-US" sz="1200" b="0" i="0" u="none" strike="noStrike">
                 <a:solidFill>
                   <a:srgbClr val="1E2A32"/>
                 </a:solidFill>
@@ -544,7 +544,6 @@
           </a:p>
         </c:rich>
       </c:tx>
-      <c:layout/>
       <c:overlay val="0"/>
     </c:title>
     <c:autoTitleDeleted val="0"/>
@@ -577,18 +576,26 @@
           <c:invertIfNegative val="0"/>
           <c:dLbls>
             <c:numFmt formatCode="#,##0" sourceLinked="0"/>
+            <c:spPr>
+              <a:noFill/>
+              <a:ln>
+                <a:noFill/>
+              </a:ln>
+              <a:effectLst/>
+            </c:spPr>
             <c:txPr>
               <a:bodyPr/>
               <a:lstStyle/>
               <a:p>
                 <a:pPr>
-                  <a:defRPr b="0" i="0" strike="noStrike" sz="1000" u="none">
+                  <a:defRPr sz="1000" b="0" i="0" u="none" strike="noStrike">
                     <a:solidFill>
                       <a:srgbClr val="000000"/>
                     </a:solidFill>
                     <a:latin typeface="Arial"/>
                   </a:defRPr>
                 </a:pPr>
+                <a:endParaRPr lang="en-US"/>
               </a:p>
             </c:txPr>
             <c:showLegendKey val="0"/>
@@ -598,31 +605,34 @@
             <c:showPercent val="0"/>
             <c:showBubbleSize val="0"/>
             <c:showLeaderLines val="0"/>
+            <c:extLst>
+              <c:ext xmlns:c15="http://schemas.microsoft.com/office/drawing/2012/chart" uri="{CE6537A1-D6FC-4f65-9D91-7224C49458BB}">
+                <c15:showLeaderLines val="0"/>
+              </c:ext>
+            </c:extLst>
           </c:dLbls>
           <c:cat>
-            <c:multiLvlStrRef>
+            <c:strRef>
               <c:f>Sheet1!$A$2:$A$6</c:f>
-              <c:multiLvlStrCache>
+              <c:strCache>
                 <c:ptCount val="5"/>
-                <c:lvl>
-                  <c:pt idx="0">
-                    <c:v>Search</c:v>
-                  </c:pt>
-                  <c:pt idx="1">
-                    <c:v>GraphSQL</c:v>
-                  </c:pt>
-                  <c:pt idx="2">
-                    <c:v>SchemaViewer</c:v>
-                  </c:pt>
-                  <c:pt idx="3">
-                    <c:v>EntityLookup</c:v>
-                  </c:pt>
-                  <c:pt idx="4">
-                    <c:v>PropertySearch</c:v>
-                  </c:pt>
-                </c:lvl>
-              </c:multiLvlStrCache>
-            </c:multiLvlStrRef>
+                <c:pt idx="0">
+                  <c:v>Search</c:v>
+                </c:pt>
+                <c:pt idx="1">
+                  <c:v>GraphSQL</c:v>
+                </c:pt>
+                <c:pt idx="2">
+                  <c:v>SchemaViewer</c:v>
+                </c:pt>
+                <c:pt idx="3">
+                  <c:v>EntityLookup</c:v>
+                </c:pt>
+                <c:pt idx="4">
+                  <c:v>PropertySearch</c:v>
+                </c:pt>
+              </c:strCache>
+            </c:strRef>
           </c:cat>
           <c:val>
             <c:numRef>
@@ -648,36 +658,23 @@
               </c:numCache>
             </c:numRef>
           </c:val>
+          <c:extLst>
+            <c:ext xmlns:c16="http://schemas.microsoft.com/office/drawing/2014/chart" uri="{C3380CC4-5D6E-409C-BE32-E72D297353CC}">
+              <c16:uniqueId val="{00000000-0315-4477-BC7B-6EE7DCB56D8E}"/>
+            </c:ext>
+          </c:extLst>
         </c:ser>
         <c:dLbls>
-          <c:numFmt formatCode="#,##0" sourceLinked="0"/>
-          <c:txPr>
-            <a:bodyPr/>
-            <a:lstStyle/>
-            <a:p>
-              <a:pPr>
-                <a:defRPr b="0" i="0" strike="noStrike" sz="1000" u="none">
-                  <a:solidFill>
-                    <a:srgbClr val="000000"/>
-                  </a:solidFill>
-                  <a:latin typeface="Arial"/>
-                </a:defRPr>
-              </a:pPr>
-            </a:p>
-          </c:txPr>
           <c:showLegendKey val="0"/>
           <c:showVal val="1"/>
           <c:showCatName val="0"/>
           <c:showSerName val="0"/>
           <c:showPercent val="0"/>
           <c:showBubbleSize val="0"/>
-          <c:showLeaderLines val="0"/>
         </c:dLbls>
         <c:gapWidth val="150"/>
-        <c:overlap val="0"/>
         <c:axId val="2094734554"/>
         <c:axId val="2094734552"/>
-        <c:axId val="2094734556"/>
       </c:barChart>
       <c:catAx>
         <c:axId val="2094734554"/>
@@ -718,6 +715,7 @@
         <c:crosses val="autoZero"/>
         <c:auto val="1"/>
         <c:lblAlgn val="ctr"/>
+        <c:lblOffset val="100"/>
         <c:noMultiLvlLbl val="1"/>
       </c:catAx>
       <c:valAx>
@@ -727,35 +725,11 @@
           <c:max val="27"/>
         </c:scaling>
         <c:delete val="1"/>
-        <c:axPos val="b"/>
+        <c:axPos val="t"/>
         <c:numFmt formatCode="General" sourceLinked="0"/>
         <c:majorTickMark val="out"/>
         <c:minorTickMark val="none"/>
         <c:tickLblPos val="low"/>
-        <c:spPr>
-          <a:ln w="12700" cap="flat">
-            <a:solidFill>
-              <a:srgbClr val="888888"/>
-            </a:solidFill>
-            <a:prstDash val="solid"/>
-            <a:round/>
-          </a:ln>
-        </c:spPr>
-        <c:txPr>
-          <a:bodyPr/>
-          <a:lstStyle/>
-          <a:p>
-            <a:pPr>
-              <a:defRPr sz="1200" b="0" i="0" u="none" strike="noStrike">
-                <a:solidFill>
-                  <a:srgbClr val="000000"/>
-                </a:solidFill>
-                <a:latin typeface="Arial"/>
-              </a:defRPr>
-            </a:pPr>
-            <a:endParaRPr lang="en-US"/>
-          </a:p>
-        </c:txPr>
         <c:crossAx val="2094734554"/>
         <c:crosses val="autoZero"/>
         <c:crossBetween val="between"/>
@@ -770,6 +744,7 @@
     </c:plotArea>
     <c:plotVisOnly val="1"/>
     <c:dispBlanksAs val="span"/>
+    <c:showDLblsOverMax val="1"/>
   </c:chart>
   <c:spPr>
     <a:noFill/>
@@ -806,234 +781,10 @@
           <a:chExt cx="0" cy="0"/>
         </a:xfrm>
       </p:grpSpPr>
-      <p:sp>
-        <p:nvSpPr>
-          <p:cNvPr id="2" name="Header Placeholder 1"/>
-          <p:cNvSpPr>
-            <a:spLocks noGrp="1"/>
-          </p:cNvSpPr>
-          <p:nvPr>
-            <p:ph type="hdr" sz="quarter"/>
-          </p:nvPr>
-        </p:nvSpPr>
-        <p:spPr>
-          <a:xfrm>
-            <a:off x="0" y="0"/>
-            <a:ext cx="2971800" cy="458788"/>
-          </a:xfrm>
-          <a:prstGeom prst="rect">
-            <a:avLst/>
-          </a:prstGeom>
-        </p:spPr>
-        <p:txBody>
-          <a:bodyPr vert="horz" lIns="91440" tIns="45720" rIns="91440" bIns="45720" rtlCol="0"/>
-          <a:lstStyle>
-            <a:lvl1pPr algn="l">
-              <a:defRPr sz="1200"/>
-            </a:lvl1pPr>
-          </a:lstStyle>
-          <a:p>
-            <a:endParaRPr lang="en-US"/>
-          </a:p>
-        </p:txBody>
-      </p:sp>
-      <p:sp>
-        <p:nvSpPr>
-          <p:cNvPr id="3" name="Date Placeholder 2"/>
-          <p:cNvSpPr>
-            <a:spLocks noGrp="1"/>
-          </p:cNvSpPr>
-          <p:nvPr>
-            <p:ph type="dt" idx="1"/>
-          </p:nvPr>
-        </p:nvSpPr>
-        <p:spPr>
-          <a:xfrm>
-            <a:off x="3884613" y="0"/>
-            <a:ext cx="2971800" cy="458788"/>
-          </a:xfrm>
-          <a:prstGeom prst="rect">
-            <a:avLst/>
-          </a:prstGeom>
-        </p:spPr>
-        <p:txBody>
-          <a:bodyPr vert="horz" lIns="91440" tIns="45720" rIns="91440" bIns="45720" rtlCol="0"/>
-          <a:lstStyle>
-            <a:lvl1pPr algn="r">
-              <a:defRPr sz="1200"/>
-            </a:lvl1pPr>
-          </a:lstStyle>
-          <a:p>
-            <a:fld id="{5282F153-3F37-0F45-9E97-73ACFA13230C}" type="datetimeFigureOut">
-              <a:rPr lang="en-US"/>
-              <a:t>7/23/19</a:t>
-            </a:fld>
-            <a:endParaRPr lang="en-US"/>
-          </a:p>
-        </p:txBody>
-      </p:sp>
-      <p:sp>
-        <p:nvSpPr>
-          <p:cNvPr id="4" name="Slide Image Placeholder 3"/>
-          <p:cNvSpPr>
-            <a:spLocks noGrp="1" noRot="1" noChangeAspect="1"/>
-          </p:cNvSpPr>
-          <p:nvPr>
-            <p:ph type="sldImg" idx="2"/>
-          </p:nvPr>
-        </p:nvSpPr>
-        <p:spPr>
-          <a:xfrm>
-            <a:off x="685800" y="1143000"/>
-            <a:ext cx="5486400" cy="3086100"/>
-          </a:xfrm>
-          <a:prstGeom prst="rect">
-            <a:avLst/>
-          </a:prstGeom>
-          <a:noFill/>
-          <a:ln w="12700">
-            <a:solidFill>
-              <a:prstClr val="black"/>
-            </a:solidFill>
-          </a:ln>
-        </p:spPr>
-        <p:txBody>
-          <a:bodyPr vert="horz" lIns="91440" tIns="45720" rIns="91440" bIns="45720" rtlCol="0" anchor="ctr"/>
-          <a:lstStyle/>
-          <a:p>
-            <a:endParaRPr lang="en-US"/>
-          </a:p>
-        </p:txBody>
-      </p:sp>
-      <p:sp>
-        <p:nvSpPr>
-          <p:cNvPr id="5" name="Notes Placeholder 4"/>
-          <p:cNvSpPr>
-            <a:spLocks noGrp="1"/>
-          </p:cNvSpPr>
-          <p:nvPr>
-            <p:ph type="body" sz="quarter" idx="3"/>
-          </p:nvPr>
-        </p:nvSpPr>
-        <p:spPr>
-          <a:xfrm>
-            <a:off x="685800" y="4400550"/>
-            <a:ext cx="5486400" cy="3600450"/>
-          </a:xfrm>
-          <a:prstGeom prst="rect">
-            <a:avLst/>
-          </a:prstGeom>
-        </p:spPr>
-        <p:txBody>
-          <a:bodyPr vert="horz" lIns="91440" tIns="45720" rIns="91440" bIns="45720" rtlCol="0"/>
-          <a:lstStyle/>
-          <a:p>
-            <a:pPr lvl="0"/>
-            <a:r>
-              <a:rPr lang="en-US"/>
-              <a:t>Click to edit Master text styles</a:t>
-            </a:r>
-          </a:p>
-          <a:p>
-            <a:pPr lvl="1"/>
-            <a:r>
-              <a:rPr lang="en-US"/>
-              <a:t>Second level</a:t>
-            </a:r>
-          </a:p>
-          <a:p>
-            <a:pPr lvl="2"/>
-            <a:r>
-              <a:rPr lang="en-US"/>
-              <a:t>Third level</a:t>
-            </a:r>
-          </a:p>
-          <a:p>
-            <a:pPr lvl="3"/>
-            <a:r>
-              <a:rPr lang="en-US"/>
-              <a:t>Fourth level</a:t>
-            </a:r>
-          </a:p>
-          <a:p>
-            <a:pPr lvl="4"/>
-            <a:r>
-              <a:rPr lang="en-US"/>
-              <a:t>Fifth level</a:t>
-            </a:r>
-          </a:p>
-        </p:txBody>
-      </p:sp>
-      <p:sp>
-        <p:nvSpPr>
-          <p:cNvPr id="6" name="Footer Placeholder 5"/>
-          <p:cNvSpPr>
-            <a:spLocks noGrp="1"/>
-          </p:cNvSpPr>
-          <p:nvPr>
-            <p:ph type="ftr" sz="quarter" idx="4"/>
-          </p:nvPr>
-        </p:nvSpPr>
-        <p:spPr>
-          <a:xfrm>
-            <a:off x="0" y="8685213"/>
-            <a:ext cx="2971800" cy="458787"/>
-          </a:xfrm>
-          <a:prstGeom prst="rect">
-            <a:avLst/>
-          </a:prstGeom>
-        </p:spPr>
-        <p:txBody>
-          <a:bodyPr vert="horz" lIns="91440" tIns="45720" rIns="91440" bIns="45720" rtlCol="0" anchor="b"/>
-          <a:lstStyle>
-            <a:lvl1pPr algn="l">
-              <a:defRPr sz="1200"/>
-            </a:lvl1pPr>
-          </a:lstStyle>
-          <a:p>
-            <a:endParaRPr lang="en-US"/>
-          </a:p>
-        </p:txBody>
-      </p:sp>
-      <p:sp>
-        <p:nvSpPr>
-          <p:cNvPr id="7" name="Slide Number Placeholder 6"/>
-          <p:cNvSpPr>
-            <a:spLocks noGrp="1"/>
-          </p:cNvSpPr>
-          <p:nvPr>
-            <p:ph type="sldNum" sz="quarter" idx="5"/>
-          </p:nvPr>
-        </p:nvSpPr>
-        <p:spPr>
-          <a:xfrm>
-            <a:off x="3884613" y="8685213"/>
-            <a:ext cx="2971800" cy="458787"/>
-          </a:xfrm>
-          <a:prstGeom prst="rect">
-            <a:avLst/>
-          </a:prstGeom>
-        </p:spPr>
-        <p:txBody>
-          <a:bodyPr vert="horz" lIns="91440" tIns="45720" rIns="91440" bIns="45720" rtlCol="0" anchor="b"/>
-          <a:lstStyle>
-            <a:lvl1pPr algn="r">
-              <a:defRPr sz="1200"/>
-            </a:lvl1pPr>
-          </a:lstStyle>
-          <a:p>
-            <a:fld id="{CE5E9CC1-C706-0F49-92D6-E571CC5EEA8F}" type="slidenum">
-              <a:rPr lang="en-US"/>
-              <a:t>‹#›</a:t>
-            </a:fld>
-            <a:endParaRPr lang="en-US"/>
-          </a:p>
-        </p:txBody>
-      </p:sp>
     </p:spTree>
     <p:extLst>
       <p:ext uri="{BB962C8B-B14F-4D97-AF65-F5344CB8AC3E}">
-        <p14:creationId xmlns:p14="http://schemas.microsoft.com/office/powerpoint/2010/main" val="1024086991"/>
+        <p14:creationId xmlns:p14="http://schemas.microsoft.com/office/powerpoint/2010/main" val="3970332740"/>
       </p:ext>
     </p:extLst>
   </p:cSld>
@@ -1181,7 +932,6 @@
               <a:rPr lang="en-US" dirty="0"/>
               <a:t>Em xin chào anh. Tuần này nhóm đã triển khai xong toàn bộ hệ thống theo APEX-MEM và chạy được những kết quả đầu tiên. Báo cáo gồm ba phần: một là lược đồ bộ nhớ, hai là luồng chạy của hệ trên một câu hỏi thật — từng bước gọi công cụ nào, để làm gì — và ba là các kết quả hiện có.</a:t>
             </a:r>
-            <a:endParaRPr lang="en-US" dirty="0"/>
           </a:p>
         </p:txBody>
       </p:sp>
@@ -1269,7 +1019,6 @@
               <a:rPr lang="en-US" dirty="0"/>
               <a:t>Trước khi chạy LLM, nhóm chọn ngưỡng lọc phiên bằng số đo trên 150 câu dev, hoàn toàn không tốn lời gọi LLM. Hai thang đo: recall là tỉ lệ phiên bằng chứng được giữ, so với nhãn answer_session_ids của LongMemEval; 'đủ bằng chứng' là phần trăm câu giữ được tất cả phiên bằng chứng — thang này quan trọng hơn vì câu đa phiên thiếu một phiên là sai. Ngưỡng 0,475 chỉ giữ trung bình 7,7 phiên nhưng bằng hoặc tốt hơn top-10 ở mọi cột. Nhóm không dùng con số 0,2 của bài báo vì bài không nói điểm đó đo trên thang nào; với BGE-M3, hai câu không liên quan đã có cosine khoảng 0,4.</a:t>
             </a:r>
-            <a:endParaRPr lang="en-US" dirty="0"/>
           </a:p>
         </p:txBody>
       </p:sp>
@@ -1357,7 +1106,6 @@
               <a:rPr lang="en-US" dirty="0"/>
               <a:t>Kết quả chính: hệ đầy đủ đúng 18/20, baseline SimpleSearch đúng 16/20. Hai câu hệ đầy đủ thắng là một câu preference và một câu knowledge-update. Nhưng em xin nói rõ: với 20 câu, khoảng tin cậy của 90% là khoảng 70 đến 97%, và chênh lệch 2 câu có p bằng 0,5 theo kiểm định McNemar, nên chưa thể khẳng định hệ đầy đủ tốt hơn baseline. Các ô có 1–2 câu như temporal chỉ để tham khảo. Đây là lý do bước tiếp theo là mở rộng số câu.</a:t>
             </a:r>
-            <a:endParaRPr lang="en-US" dirty="0"/>
           </a:p>
         </p:txBody>
       </p:sp>
@@ -1445,7 +1193,6 @@
               <a:rPr lang="en-US" dirty="0"/>
               <a:t>Về chi phí: mỗi câu hệ đầy đủ tốn khoảng 18 lời gọi LLM, trong đó gần 14 là để dựng đồ thị, chiếm 87% token. Nên muốn giảm chi phí phải nhắm vào pha dựng. Pha trả lời của hệ đầy đủ lại tốn ít token hơn baseline vì chỉ đọc fact liên quan, nhưng chậm hơn vì nhiều vòng gọi công cụ. Biểu đồ bên phải: Search là công cụ được dùng nhiều nhất, GraphSQL xuất hiện ở 12 trên 20 câu, chủ yếu cho phép cộng, đếm và xếp theo thời gian.</a:t>
             </a:r>
-            <a:endParaRPr lang="en-US" dirty="0"/>
           </a:p>
         </p:txBody>
       </p:sp>
@@ -1533,7 +1280,6 @@
               <a:rPr lang="en-US" dirty="0"/>
               <a:t>Hai câu sai đều sai ở cả hai hệ. Câu thứ nhất là câu cần từ chối: người dùng chưa từng nói giá vé bus, nhưng trợ lý trong hội thoại cũ đã ước lượng giá; agent lấy luôn con số đó như thông tin của người dùng. Câu thứ hai là câu thời gian: 'hai tháng trước' là 11/1, lúc đó người dùng đi nghe giảng ở bảo tàng một mình; nhưng bước trích xuất làm mất chi tiết bảo tàng và người đi cùng, và agent không quy đổi 'hai tháng trước' ra ngày cụ thể, nên chọn nhầm lần đi gần nhất. Để kiểm tra việc Luna tự chấm cho chính mình, em đã chấm lại độc lập 20 câu bằng một mô hình khác: trùng cả 20. Nhóm sẽ chấm tay thêm.</a:t>
             </a:r>
-            <a:endParaRPr lang="en-US" dirty="0"/>
           </a:p>
         </p:txBody>
       </p:sp>
@@ -1621,7 +1367,6 @@
               <a:rPr lang="en-US" dirty="0"/>
               <a:t>Em xin tổng kết bằng ba hạn chế nhóm tự nhận thấy: mẫu còn nhỏ; bộ lọc biết trước câu hỏi — giống bài báo nhưng khác trợ lý thật; và mô hình chấm trùng mô hình trả lời. Kế hoạch tuần tới: sửa prompt agent cho hai lỗi vừa thấy — việc rẻ vì không phải dựng lại đồ thị; chạy thêm câu temporal và mở rộng tập dev, đo trên câu khác với câu đã soi lỗi; làm thí nghiệm không lọc phiên; và chấm tay. Em xin hỏi anh một câu: nên ưu tiên mở rộng số câu hay thí nghiệm không lọc phiên trước ạ?</a:t>
             </a:r>
-            <a:endParaRPr lang="en-US" dirty="0"/>
           </a:p>
         </p:txBody>
       </p:sp>
@@ -1709,7 +1454,6 @@
               <a:rPr lang="en-US" dirty="0"/>
               <a:t>Tóm tắt nhanh bốn việc. Điểm quan trọng: hệ đã chạy thông từ đầu đến cuối, và mọi số liệu hôm nay đều từ lần chạy thật trên dữ liệu LongMemEval-S, không phải số ước lượng. Mô hình nền đổi từ GPT-5.5 sang GPT-5.6 Luna vì giới hạn tài khoản; mọi cấu hình so sánh đều dùng cùng một mô hình nên so sánh nội bộ vẫn hợp lệ.</a:t>
             </a:r>
-            <a:endParaRPr lang="en-US" dirty="0"/>
           </a:p>
         </p:txBody>
       </p:sp>
@@ -1797,7 +1541,6 @@
               <a:rPr lang="en-US" dirty="0"/>
               <a:t>Đây là lược đồ bộ nhớ. Ô màu cam ở giữa là bảng facts — trái tim của hệ. Mỗi fact là một bộ ba chủ thể, thuộc tính, giá trị, kèm khoảng thời gian hiệu lực t_from, t_to. Chủ thể trỏ sang bảng entities — người, nơi chốn, đồ vật; người dùng luôn là thực thể tên User. Tên thuộc tính nằm ở bảng properties, bắt buộc snake_case tiếng Anh. Mỗi fact thuộc một sự kiện ở bảng events, sự kiện có mốc thời gian anchor_datetime đã quy về chuẩn ISO lúc ghi — ví dụ người dùng nói 'last week' trong phiên ngày 27/5 thì mốc là 20/5. Cuối cùng, mỗi fact có ít nhất một dòng evidence trỏ về đúng lượt hội thoại gốc trong bảng turns, nên luôn truy ngược được vì sao hệ nhớ điều đó. Chỉ mục vector và tìm kiếm từ khóa chỉ là dẫn xuất, xóa đi dựng lại được.</a:t>
             </a:r>
-            <a:endParaRPr lang="en-US" dirty="0"/>
           </a:p>
         </p:txBody>
       </p:sp>
@@ -1885,7 +1628,6 @@
               <a:rPr lang="en-US" dirty="0"/>
               <a:t>Slide này cho thấy lược đồ hoạt động thế nào với câu hỏi cập nhật kiến thức — đúng tình huống N5 lên N4 anh hỏi ở tuần 1. Người dùng nói có 500 follower ở phiên ngày 27/5 — 'tuần trước' nên t_from là 20/5 — rồi phiên sau nói đã lên 600. Hệ không ghi đè: cả hai dòng cùng nằm trong bảng facts. Ba bất biến bên phải: một, append-only được chặn bằng trigger ngay trong SQLite; hai, bản mới nhất được chọn lúc đọc theo thời điểm hiệu lực, bằng SQL tất định chứ không để LLM đoán; ba, agent chỉ có quyền đọc, với ba lớp chặn.</a:t>
             </a:r>
-            <a:endParaRPr lang="en-US" dirty="0"/>
           </a:p>
         </p:txBody>
       </p:sp>
@@ -1973,7 +1715,6 @@
               <a:rPr lang="en-US" dirty="0"/>
               <a:t>Bây giờ em đi qua luồng chạy trên một câu hỏi thật: tổng tiền người dùng kiếm được khi bán hàng ở các chợ, đáp án 495 đô, bằng chứng rải ở 3 phiên trong 47 phiên. Bước 1 lọc phiên, không gọi LLM: chấm điểm từng phiên bằng embedding, giữ 9 phiên, trong đó có đủ 3 phiên bằng chứng. Bước 2 trích xuất: 9 lời gọi LLM, mỗi phiên một lời gọi, ra 64 sự kiện và 149 fact; mọi kiểm tra kiểu dữ liệu làm bằng Python. Bước 3 giải quyết thực thể: User và Assistant là cố định, trùng tên thì dùng lại, không có ứng viên gần thì tạo mới luôn — chỉ khi mơ hồ mới hỏi LLM, như 'Harvest Festival Market' ở đây. Bước 4 ghi append-only. Tổng cộng 13 lời gọi, khoảng 5 phút.</a:t>
             </a:r>
-            <a:endParaRPr lang="en-US" dirty="0"/>
           </a:p>
         </p:txBody>
       </p:sp>
@@ -2061,7 +1802,6 @@
               <a:rPr lang="en-US" dirty="0"/>
               <a:t>Đây là bên trong bước trích xuất với đúng một lượt thật. Câu người dùng nói trong phiên ngày 1/6: vừa bán 15 hũ mứt ở chợ Homemade and Handmade ngày 29/5, thu 225 đô. LLM trả về JSON: một sự kiện market_sale, mốc thời gian là 29/5 chứ không phải ngày của phiên, kèm hai fact là số hũ và doanh thu, đúng kiểu int và float để sau này SQL cộng được. Python kiểm tra tên thuộc tính, kiểu dữ liệu, ngày tháng rồi mới ghi. Bảng dưới là các dòng thực sự được ghi vào 4 bảng; mỗi fact có bằng chứng trỏ về lượt số 99.</a:t>
             </a:r>
-            <a:endParaRPr lang="en-US" dirty="0"/>
           </a:p>
         </p:txBody>
       </p:sp>
@@ -2149,7 +1889,6 @@
               <a:rPr lang="en-US" dirty="0"/>
               <a:t>Sau khi có đồ thị, agent ReAct bắt đầu trả lời. Với câu này agent gọi 4 công cụ. Đầu tiên SchemaViewer để biết có những bảng và thuộc tính nào. Thứ hai Search — tìm lai giữa vector và từ khóa — trả về ngay ba khoản thu 150, 225, 120 từ đúng ba phiên bằng chứng. Thứ ba EntityLookup để xem hồ sơ người dùng. Thứ tư GraphSQL để liệt kê đủ mọi khoản thu, tránh sót. Kết quả 495 đô, đúng. Cả quá trình 3 lời gọi LLM, khoảng 25 giây. Một điểm em muốn nêu thẳng: cùng ý doanh thu nhưng có hai tên thuộc tính khác nhau, bước giải quyết thuộc tính chưa gộp được — ở đây SQL cứu, nhưng đây là chỗ cần cải thiện.</a:t>
             </a:r>
-            <a:endParaRPr lang="en-US" dirty="0"/>
           </a:p>
         </p:txBody>
       </p:sp>
@@ -2237,7 +1976,6 @@
               <a:rPr lang="en-US" dirty="0"/>
               <a:t>Ví dụ thứ hai cho loại câu cập nhật kiến thức. Search trả về cả 600 lẫn 500, mỗi dòng kèm thời điểm hiệu lực. EntityLookup cho thấy bảng giá trị mới nhất của User chỉ còn 600. Agent trả lời 600 và nêu cả mốc 28/5. Tại sao không ghi đè ngay lúc ghi như Mem0? Vì những câu như 'trước đây tôi có bao nhiêu' hay 'tăng bao nhiêu' cần cả bản cũ. Trong 20 câu, 4 câu knowledge-update đều đúng, nhưng số còn nhỏ.</a:t>
             </a:r>
-            <a:endParaRPr lang="en-US" dirty="0"/>
           </a:p>
         </p:txBody>
       </p:sp>
@@ -2325,7 +2063,6 @@
               <a:rPr lang="en-US" dirty="0"/>
               <a:t>Thiết lập: mô hình nền là GPT-5.6 Luna cho mọi vai trò; em ghi lại mô hình thực sự phục vụ ở mọi lời gọi và cả 362 lời gọi đều là Luna, nghĩa là router không lén đổi mô hình. Embedding BGE-M3 nhúng sẵn trên Kaggle, máy local chỉ đọc cache. Tập dev trùng đúng tập dev của notebook tuần 2, tập test chưa mở. Hôm nay em báo cáo trên 20 câu đầu của dev, so hai cấu hình: hệ đầy đủ và baseline SimpleSearch của chính LongMemEval.</a:t>
             </a:r>
-            <a:endParaRPr lang="en-US" dirty="0"/>
           </a:p>
         </p:txBody>
       </p:sp>
@@ -2398,6 +2135,11 @@
 <file path=ppt/slideMasters/slideMaster1.xml><?xml version="1.0" encoding="utf-8"?>
 <p:sldMaster xmlns:a="http://schemas.openxmlformats.org/drawingml/2006/main" xmlns:r="http://schemas.openxmlformats.org/officeDocument/2006/relationships" xmlns:p="http://schemas.openxmlformats.org/presentationml/2006/main">
   <p:cSld>
+    <p:bg>
+      <p:bgRef idx="1001">
+        <a:schemeClr val="bg1"/>
+      </p:bgRef>
+    </p:bg>
     <p:spTree>
       <p:nvGrpSpPr>
         <p:cNvPr id="1" name=""/>
@@ -2680,6 +2422,7 @@
         <a:solidFill>
           <a:srgbClr val="12232E"/>
         </a:solidFill>
+        <a:effectLst/>
       </p:bgPr>
     </p:bg>
     <p:spTree>
@@ -2717,11 +2460,11 @@
           <a:bodyPr wrap="square" lIns="0" tIns="0" rIns="0" bIns="0" rtlCol="0" anchor="t"/>
           <a:lstStyle/>
           <a:p>
-            <a:pPr indent="0" marL="0">
+            <a:pPr marL="0" indent="0">
               <a:buNone/>
             </a:pPr>
             <a:r>
-              <a:rPr lang="en-US" sz="1200" b="1" spc="300" kern="0" dirty="0">
+              <a:rPr lang="en-US" sz="1200" b="1" kern="0" spc="300" dirty="0">
                 <a:solidFill>
                   <a:srgbClr val="D98C1F"/>
                 </a:solidFill>
@@ -2756,7 +2499,7 @@
           <a:bodyPr wrap="square" lIns="0" tIns="0" rIns="0" bIns="0" rtlCol="0" anchor="t"/>
           <a:lstStyle/>
           <a:p>
-            <a:pPr indent="0" marL="0">
+            <a:pPr marL="0" indent="0">
               <a:buNone/>
             </a:pPr>
             <a:r>
@@ -2795,7 +2538,7 @@
           <a:bodyPr wrap="square" lIns="0" tIns="0" rIns="0" bIns="0" rtlCol="0" anchor="t"/>
           <a:lstStyle/>
           <a:p>
-            <a:pPr indent="0" marL="0">
+            <a:pPr marL="0" indent="0">
               <a:buNone/>
             </a:pPr>
             <a:r>
@@ -2812,7 +2555,7 @@
             <a:endParaRPr lang="en-US" sz="1600" dirty="0"/>
           </a:p>
           <a:p>
-            <a:pPr indent="0" marL="0">
+            <a:pPr marL="0" indent="0">
               <a:buNone/>
             </a:pPr>
             <a:r>
@@ -2851,9 +2594,6 @@
           <a:bodyPr wrap="square" lIns="0" tIns="0" rIns="0" bIns="0" rtlCol="0" anchor="t"/>
           <a:lstStyle/>
           <a:p>
-            <a:pPr indent="0" marL="0">
-              <a:buNone/>
-            </a:pPr>
             <a:r>
               <a:rPr lang="en-US" sz="1200" dirty="0">
                 <a:solidFill>
@@ -2863,7 +2603,29 @@
                 <a:ea typeface="Calibri" pitchFamily="34" charset="-122"/>
                 <a:cs typeface="Calibri" pitchFamily="34" charset="-120"/>
               </a:rPr>
-              <a:t>Nhóm 2 thành viên  ·  09/2026</a:t>
+              <a:t> </a:t>
+            </a:r>
+            <a:r>
+              <a:rPr lang="en-US" sz="1200" b="1" dirty="0">
+                <a:solidFill>
+                  <a:srgbClr val="8FA3AB"/>
+                </a:solidFill>
+                <a:latin typeface="Calibri" pitchFamily="34" charset="0"/>
+                <a:ea typeface="Calibri" pitchFamily="34" charset="-122"/>
+                <a:cs typeface="Calibri" pitchFamily="34" charset="-120"/>
+              </a:rPr>
+              <a:t>Đặng Tuấn Phong - Nguyễn Trí Dũng </a:t>
+            </a:r>
+            <a:r>
+              <a:rPr lang="en-US" sz="1200" dirty="0">
+                <a:solidFill>
+                  <a:srgbClr val="8FA3AB"/>
+                </a:solidFill>
+                <a:latin typeface="Calibri" pitchFamily="34" charset="0"/>
+                <a:ea typeface="Calibri" pitchFamily="34" charset="-122"/>
+                <a:cs typeface="Calibri" pitchFamily="34" charset="-120"/>
+              </a:rPr>
+              <a:t>·  09/2026</a:t>
             </a:r>
             <a:endParaRPr lang="en-US" sz="1200" dirty="0"/>
           </a:p>
@@ -2891,6 +2653,13 @@
             <a:prstDash val="solid"/>
           </a:ln>
         </p:spPr>
+        <p:txBody>
+          <a:bodyPr/>
+          <a:lstStyle/>
+          <a:p>
+            <a:endParaRPr lang="en-US"/>
+          </a:p>
+        </p:txBody>
       </p:sp>
       <p:sp>
         <p:nvSpPr>
@@ -2914,6 +2683,13 @@
             <a:prstDash val="solid"/>
           </a:ln>
         </p:spPr>
+        <p:txBody>
+          <a:bodyPr/>
+          <a:lstStyle/>
+          <a:p>
+            <a:endParaRPr lang="en-US"/>
+          </a:p>
+        </p:txBody>
       </p:sp>
       <p:sp>
         <p:nvSpPr>
@@ -2937,6 +2713,13 @@
             <a:prstDash val="solid"/>
           </a:ln>
         </p:spPr>
+        <p:txBody>
+          <a:bodyPr/>
+          <a:lstStyle/>
+          <a:p>
+            <a:endParaRPr lang="en-US"/>
+          </a:p>
+        </p:txBody>
       </p:sp>
       <p:sp>
         <p:nvSpPr>
@@ -2960,6 +2743,13 @@
             <a:prstDash val="solid"/>
           </a:ln>
         </p:spPr>
+        <p:txBody>
+          <a:bodyPr/>
+          <a:lstStyle/>
+          <a:p>
+            <a:endParaRPr lang="en-US"/>
+          </a:p>
+        </p:txBody>
       </p:sp>
       <p:sp>
         <p:nvSpPr>
@@ -2983,6 +2773,13 @@
             <a:prstDash val="solid"/>
           </a:ln>
         </p:spPr>
+        <p:txBody>
+          <a:bodyPr/>
+          <a:lstStyle/>
+          <a:p>
+            <a:endParaRPr lang="en-US"/>
+          </a:p>
+        </p:txBody>
       </p:sp>
       <p:sp>
         <p:nvSpPr>
@@ -3006,6 +2803,13 @@
             <a:prstDash val="solid"/>
           </a:ln>
         </p:spPr>
+        <p:txBody>
+          <a:bodyPr/>
+          <a:lstStyle/>
+          <a:p>
+            <a:endParaRPr lang="en-US"/>
+          </a:p>
+        </p:txBody>
       </p:sp>
       <p:sp>
         <p:nvSpPr>
@@ -3029,6 +2833,13 @@
             <a:prstDash val="solid"/>
           </a:ln>
         </p:spPr>
+        <p:txBody>
+          <a:bodyPr/>
+          <a:lstStyle/>
+          <a:p>
+            <a:endParaRPr lang="en-US"/>
+          </a:p>
+        </p:txBody>
       </p:sp>
       <p:sp>
         <p:nvSpPr>
@@ -3052,6 +2863,13 @@
             <a:prstDash val="solid"/>
           </a:ln>
         </p:spPr>
+        <p:txBody>
+          <a:bodyPr/>
+          <a:lstStyle/>
+          <a:p>
+            <a:endParaRPr lang="en-US"/>
+          </a:p>
+        </p:txBody>
       </p:sp>
       <p:sp>
         <p:nvSpPr>
@@ -3077,6 +2895,13 @@
             <a:prstDash val="solid"/>
           </a:ln>
         </p:spPr>
+        <p:txBody>
+          <a:bodyPr/>
+          <a:lstStyle/>
+          <a:p>
+            <a:endParaRPr lang="en-US"/>
+          </a:p>
+        </p:txBody>
       </p:sp>
       <p:sp>
         <p:nvSpPr>
@@ -3102,6 +2927,13 @@
             <a:prstDash val="solid"/>
           </a:ln>
         </p:spPr>
+        <p:txBody>
+          <a:bodyPr/>
+          <a:lstStyle/>
+          <a:p>
+            <a:endParaRPr lang="en-US"/>
+          </a:p>
+        </p:txBody>
       </p:sp>
       <p:sp>
         <p:nvSpPr>
@@ -3127,6 +2959,13 @@
             <a:prstDash val="solid"/>
           </a:ln>
         </p:spPr>
+        <p:txBody>
+          <a:bodyPr/>
+          <a:lstStyle/>
+          <a:p>
+            <a:endParaRPr lang="en-US"/>
+          </a:p>
+        </p:txBody>
       </p:sp>
       <p:sp>
         <p:nvSpPr>
@@ -3152,6 +2991,13 @@
             <a:prstDash val="solid"/>
           </a:ln>
         </p:spPr>
+        <p:txBody>
+          <a:bodyPr/>
+          <a:lstStyle/>
+          <a:p>
+            <a:endParaRPr lang="en-US"/>
+          </a:p>
+        </p:txBody>
       </p:sp>
       <p:sp>
         <p:nvSpPr>
@@ -3177,6 +3023,13 @@
             <a:prstDash val="solid"/>
           </a:ln>
         </p:spPr>
+        <p:txBody>
+          <a:bodyPr/>
+          <a:lstStyle/>
+          <a:p>
+            <a:endParaRPr lang="en-US"/>
+          </a:p>
+        </p:txBody>
       </p:sp>
       <p:sp>
         <p:nvSpPr>
@@ -3202,6 +3055,13 @@
             <a:prstDash val="solid"/>
           </a:ln>
         </p:spPr>
+        <p:txBody>
+          <a:bodyPr/>
+          <a:lstStyle/>
+          <a:p>
+            <a:endParaRPr lang="en-US"/>
+          </a:p>
+        </p:txBody>
       </p:sp>
       <p:sp>
         <p:nvSpPr>
@@ -3227,6 +3087,13 @@
             <a:prstDash val="solid"/>
           </a:ln>
         </p:spPr>
+        <p:txBody>
+          <a:bodyPr/>
+          <a:lstStyle/>
+          <a:p>
+            <a:endParaRPr lang="en-US"/>
+          </a:p>
+        </p:txBody>
       </p:sp>
     </p:spTree>
   </p:cSld>
@@ -3244,6 +3111,7 @@
         <a:solidFill>
           <a:srgbClr val="FFFFFF"/>
         </a:solidFill>
+        <a:effectLst/>
       </p:bgPr>
     </p:bg>
     <p:spTree>
@@ -3281,11 +3149,11 @@
           <a:bodyPr wrap="square" lIns="0" tIns="0" rIns="0" bIns="0" rtlCol="0" anchor="t"/>
           <a:lstStyle/>
           <a:p>
-            <a:pPr indent="0" marL="0">
+            <a:pPr marL="0" indent="0">
               <a:buNone/>
             </a:pPr>
             <a:r>
-              <a:rPr lang="en-US" sz="1100" b="1" spc="200" kern="0" dirty="0">
+              <a:rPr lang="en-US" sz="1100" b="1" kern="0" spc="200" dirty="0">
                 <a:solidFill>
                   <a:srgbClr val="D98C1F"/>
                 </a:solidFill>
@@ -3320,7 +3188,7 @@
           <a:bodyPr wrap="square" lIns="0" tIns="0" rIns="0" bIns="0" rtlCol="0" anchor="ctr"/>
           <a:lstStyle/>
           <a:p>
-            <a:pPr indent="0" marL="0">
+            <a:pPr marL="0" indent="0">
               <a:buNone/>
             </a:pPr>
             <a:r>
@@ -3354,20 +3222,62 @@
         </p:nvGraphicFramePr>
         <p:xfrm>
           <a:off x="548640" y="1371600"/>
-          <a:ext cx="7223760" cy="914400"/>
+          <a:ext cx="7223760" cy="2731008"/>
         </p:xfrm>
         <a:graphic>
           <a:graphicData uri="http://schemas.openxmlformats.org/drawingml/2006/table">
             <a:tbl>
               <a:tblPr/>
               <a:tblGrid>
-                <a:gridCol w="2651760"/>
-                <a:gridCol w="731520"/>
-                <a:gridCol w="1051560"/>
-                <a:gridCol w="960120"/>
-                <a:gridCol w="594360"/>
-                <a:gridCol w="594360"/>
-                <a:gridCol w="640080"/>
+                <a:gridCol w="2651760">
+                  <a:extLst>
+                    <a:ext uri="{9D8B030D-6E8A-4147-A177-3AD203B41FA5}">
+                      <a16:colId xmlns:a16="http://schemas.microsoft.com/office/drawing/2014/main" val="20000"/>
+                    </a:ext>
+                  </a:extLst>
+                </a:gridCol>
+                <a:gridCol w="731520">
+                  <a:extLst>
+                    <a:ext uri="{9D8B030D-6E8A-4147-A177-3AD203B41FA5}">
+                      <a16:colId xmlns:a16="http://schemas.microsoft.com/office/drawing/2014/main" val="20001"/>
+                    </a:ext>
+                  </a:extLst>
+                </a:gridCol>
+                <a:gridCol w="1051560">
+                  <a:extLst>
+                    <a:ext uri="{9D8B030D-6E8A-4147-A177-3AD203B41FA5}">
+                      <a16:colId xmlns:a16="http://schemas.microsoft.com/office/drawing/2014/main" val="20002"/>
+                    </a:ext>
+                  </a:extLst>
+                </a:gridCol>
+                <a:gridCol w="960120">
+                  <a:extLst>
+                    <a:ext uri="{9D8B030D-6E8A-4147-A177-3AD203B41FA5}">
+                      <a16:colId xmlns:a16="http://schemas.microsoft.com/office/drawing/2014/main" val="20003"/>
+                    </a:ext>
+                  </a:extLst>
+                </a:gridCol>
+                <a:gridCol w="594360">
+                  <a:extLst>
+                    <a:ext uri="{9D8B030D-6E8A-4147-A177-3AD203B41FA5}">
+                      <a16:colId xmlns:a16="http://schemas.microsoft.com/office/drawing/2014/main" val="20004"/>
+                    </a:ext>
+                  </a:extLst>
+                </a:gridCol>
+                <a:gridCol w="594360">
+                  <a:extLst>
+                    <a:ext uri="{9D8B030D-6E8A-4147-A177-3AD203B41FA5}">
+                      <a16:colId xmlns:a16="http://schemas.microsoft.com/office/drawing/2014/main" val="20005"/>
+                    </a:ext>
+                  </a:extLst>
+                </a:gridCol>
+                <a:gridCol w="640080">
+                  <a:extLst>
+                    <a:ext uri="{9D8B030D-6E8A-4147-A177-3AD203B41FA5}">
+                      <a16:colId xmlns:a16="http://schemas.microsoft.com/office/drawing/2014/main" val="20006"/>
+                    </a:ext>
+                  </a:extLst>
+                </a:gridCol>
               </a:tblGrid>
               <a:tr h="384048">
                 <a:tc>
@@ -3375,7 +3285,7 @@
                     <a:bodyPr/>
                     <a:lstStyle/>
                     <a:p>
-                      <a:pPr indent="0" marL="0">
+                      <a:pPr marL="0" indent="0">
                         <a:buNone/>
                       </a:pPr>
                       <a:r>
@@ -3396,7 +3306,7 @@
                       </a:endParaRPr>
                     </a:p>
                   </a:txBody>
-                  <a:tcPr marL="91440" marR="91440" marT="45720" marB="45720" anchor="ctr">
+                  <a:tcPr anchor="ctr">
                     <a:lnL w="9525" cap="flat" cmpd="sng" algn="ctr">
                       <a:solidFill>
                         <a:srgbClr val="BFD8DD"/>
@@ -3443,7 +3353,7 @@
                     <a:bodyPr/>
                     <a:lstStyle/>
                     <a:p>
-                      <a:pPr algn="ctr" indent="0" marL="0">
+                      <a:pPr marL="0" indent="0" algn="ctr">
                         <a:buNone/>
                       </a:pPr>
                       <a:r>
@@ -3464,7 +3374,7 @@
                       </a:endParaRPr>
                     </a:p>
                   </a:txBody>
-                  <a:tcPr marL="91440" marR="91440" marT="45720" marB="45720" anchor="ctr">
+                  <a:tcPr anchor="ctr">
                     <a:lnL w="9525" cap="flat" cmpd="sng" algn="ctr">
                       <a:solidFill>
                         <a:srgbClr val="BFD8DD"/>
@@ -3511,7 +3421,7 @@
                     <a:bodyPr/>
                     <a:lstStyle/>
                     <a:p>
-                      <a:pPr algn="ctr" indent="0" marL="0">
+                      <a:pPr marL="0" indent="0" algn="ctr">
                         <a:buNone/>
                       </a:pPr>
                       <a:r>
@@ -3532,7 +3442,7 @@
                       </a:endParaRPr>
                     </a:p>
                   </a:txBody>
-                  <a:tcPr marL="91440" marR="91440" marT="45720" marB="45720" anchor="ctr">
+                  <a:tcPr anchor="ctr">
                     <a:lnL w="9525" cap="flat" cmpd="sng" algn="ctr">
                       <a:solidFill>
                         <a:srgbClr val="BFD8DD"/>
@@ -3579,7 +3489,7 @@
                     <a:bodyPr/>
                     <a:lstStyle/>
                     <a:p>
-                      <a:pPr algn="ctr" indent="0" marL="0">
+                      <a:pPr marL="0" indent="0" algn="ctr">
                         <a:buNone/>
                       </a:pPr>
                       <a:r>
@@ -3600,7 +3510,7 @@
                       </a:endParaRPr>
                     </a:p>
                   </a:txBody>
-                  <a:tcPr marL="91440" marR="91440" marT="45720" marB="45720" anchor="ctr">
+                  <a:tcPr anchor="ctr">
                     <a:lnL w="9525" cap="flat" cmpd="sng" algn="ctr">
                       <a:solidFill>
                         <a:srgbClr val="BFD8DD"/>
@@ -3647,7 +3557,7 @@
                     <a:bodyPr/>
                     <a:lstStyle/>
                     <a:p>
-                      <a:pPr algn="ctr" indent="0" marL="0">
+                      <a:pPr marL="0" indent="0" algn="ctr">
                         <a:buNone/>
                       </a:pPr>
                       <a:r>
@@ -3668,7 +3578,7 @@
                       </a:endParaRPr>
                     </a:p>
                   </a:txBody>
-                  <a:tcPr marL="91440" marR="91440" marT="45720" marB="45720" anchor="ctr">
+                  <a:tcPr anchor="ctr">
                     <a:lnL w="9525" cap="flat" cmpd="sng" algn="ctr">
                       <a:solidFill>
                         <a:srgbClr val="BFD8DD"/>
@@ -3715,7 +3625,7 @@
                     <a:bodyPr/>
                     <a:lstStyle/>
                     <a:p>
-                      <a:pPr algn="ctr" indent="0" marL="0">
+                      <a:pPr marL="0" indent="0" algn="ctr">
                         <a:buNone/>
                       </a:pPr>
                       <a:r>
@@ -3736,7 +3646,7 @@
                       </a:endParaRPr>
                     </a:p>
                   </a:txBody>
-                  <a:tcPr marL="91440" marR="91440" marT="45720" marB="45720" anchor="ctr">
+                  <a:tcPr anchor="ctr">
                     <a:lnL w="9525" cap="flat" cmpd="sng" algn="ctr">
                       <a:solidFill>
                         <a:srgbClr val="BFD8DD"/>
@@ -3783,7 +3693,7 @@
                     <a:bodyPr/>
                     <a:lstStyle/>
                     <a:p>
-                      <a:pPr algn="ctr" indent="0" marL="0">
+                      <a:pPr marL="0" indent="0" algn="ctr">
                         <a:buNone/>
                       </a:pPr>
                       <a:r>
@@ -3804,7 +3714,7 @@
                       </a:endParaRPr>
                     </a:p>
                   </a:txBody>
-                  <a:tcPr marL="91440" marR="91440" marT="45720" marB="45720" anchor="ctr">
+                  <a:tcPr anchor="ctr">
                     <a:lnL w="9525" cap="flat" cmpd="sng" algn="ctr">
                       <a:solidFill>
                         <a:srgbClr val="BFD8DD"/>
@@ -3846,6 +3756,11 @@
                     </a:solidFill>
                   </a:tcPr>
                 </a:tc>
+                <a:extLst>
+                  <a:ext uri="{0D108BD9-81ED-4DB2-BD59-A6C34878D82A}">
+                    <a16:rowId xmlns:a16="http://schemas.microsoft.com/office/drawing/2014/main" val="10000"/>
+                  </a:ext>
+                </a:extLst>
               </a:tr>
               <a:tr h="384048">
                 <a:tc>
@@ -3853,7 +3768,7 @@
                     <a:bodyPr/>
                     <a:lstStyle/>
                     <a:p>
-                      <a:pPr algn="l" indent="0" marL="0">
+                      <a:pPr marL="0" indent="0" algn="l">
                         <a:buNone/>
                       </a:pPr>
                       <a:r>
@@ -3874,7 +3789,7 @@
                       </a:endParaRPr>
                     </a:p>
                   </a:txBody>
-                  <a:tcPr marL="91440" marR="91440" marT="45720" marB="45720" anchor="ctr">
+                  <a:tcPr anchor="ctr">
                     <a:lnL w="9525" cap="flat" cmpd="sng" algn="ctr">
                       <a:solidFill>
                         <a:srgbClr val="BFD8DD"/>
@@ -3921,7 +3836,7 @@
                     <a:bodyPr/>
                     <a:lstStyle/>
                     <a:p>
-                      <a:pPr algn="ctr" indent="0" marL="0">
+                      <a:pPr marL="0" indent="0" algn="ctr">
                         <a:buNone/>
                       </a:pPr>
                       <a:r>
@@ -3942,7 +3857,7 @@
                       </a:endParaRPr>
                     </a:p>
                   </a:txBody>
-                  <a:tcPr marL="91440" marR="91440" marT="45720" marB="45720" anchor="ctr">
+                  <a:tcPr anchor="ctr">
                     <a:lnL w="9525" cap="flat" cmpd="sng" algn="ctr">
                       <a:solidFill>
                         <a:srgbClr val="BFD8DD"/>
@@ -3989,7 +3904,7 @@
                     <a:bodyPr/>
                     <a:lstStyle/>
                     <a:p>
-                      <a:pPr algn="ctr" indent="0" marL="0">
+                      <a:pPr marL="0" indent="0" algn="ctr">
                         <a:buNone/>
                       </a:pPr>
                       <a:r>
@@ -4010,7 +3925,7 @@
                       </a:endParaRPr>
                     </a:p>
                   </a:txBody>
-                  <a:tcPr marL="91440" marR="91440" marT="45720" marB="45720" anchor="ctr">
+                  <a:tcPr anchor="ctr">
                     <a:lnL w="9525" cap="flat" cmpd="sng" algn="ctr">
                       <a:solidFill>
                         <a:srgbClr val="BFD8DD"/>
@@ -4057,7 +3972,7 @@
                     <a:bodyPr/>
                     <a:lstStyle/>
                     <a:p>
-                      <a:pPr algn="ctr" indent="0" marL="0">
+                      <a:pPr marL="0" indent="0" algn="ctr">
                         <a:buNone/>
                       </a:pPr>
                       <a:r>
@@ -4078,7 +3993,7 @@
                       </a:endParaRPr>
                     </a:p>
                   </a:txBody>
-                  <a:tcPr marL="91440" marR="91440" marT="45720" marB="45720" anchor="ctr">
+                  <a:tcPr anchor="ctr">
                     <a:lnL w="9525" cap="flat" cmpd="sng" algn="ctr">
                       <a:solidFill>
                         <a:srgbClr val="BFD8DD"/>
@@ -4125,7 +4040,7 @@
                     <a:bodyPr/>
                     <a:lstStyle/>
                     <a:p>
-                      <a:pPr algn="ctr" indent="0" marL="0">
+                      <a:pPr marL="0" indent="0" algn="ctr">
                         <a:buNone/>
                       </a:pPr>
                       <a:r>
@@ -4146,7 +4061,7 @@
                       </a:endParaRPr>
                     </a:p>
                   </a:txBody>
-                  <a:tcPr marL="91440" marR="91440" marT="45720" marB="45720" anchor="ctr">
+                  <a:tcPr anchor="ctr">
                     <a:lnL w="9525" cap="flat" cmpd="sng" algn="ctr">
                       <a:solidFill>
                         <a:srgbClr val="BFD8DD"/>
@@ -4193,7 +4108,7 @@
                     <a:bodyPr/>
                     <a:lstStyle/>
                     <a:p>
-                      <a:pPr algn="ctr" indent="0" marL="0">
+                      <a:pPr marL="0" indent="0" algn="ctr">
                         <a:buNone/>
                       </a:pPr>
                       <a:r>
@@ -4214,7 +4129,7 @@
                       </a:endParaRPr>
                     </a:p>
                   </a:txBody>
-                  <a:tcPr marL="91440" marR="91440" marT="45720" marB="45720" anchor="ctr">
+                  <a:tcPr anchor="ctr">
                     <a:lnL w="9525" cap="flat" cmpd="sng" algn="ctr">
                       <a:solidFill>
                         <a:srgbClr val="BFD8DD"/>
@@ -4261,7 +4176,7 @@
                     <a:bodyPr/>
                     <a:lstStyle/>
                     <a:p>
-                      <a:pPr algn="ctr" indent="0" marL="0">
+                      <a:pPr marL="0" indent="0" algn="ctr">
                         <a:buNone/>
                       </a:pPr>
                       <a:r>
@@ -4282,7 +4197,7 @@
                       </a:endParaRPr>
                     </a:p>
                   </a:txBody>
-                  <a:tcPr marL="91440" marR="91440" marT="45720" marB="45720" anchor="ctr">
+                  <a:tcPr anchor="ctr">
                     <a:lnL w="9525" cap="flat" cmpd="sng" algn="ctr">
                       <a:solidFill>
                         <a:srgbClr val="BFD8DD"/>
@@ -4324,6 +4239,11 @@
                     </a:solidFill>
                   </a:tcPr>
                 </a:tc>
+                <a:extLst>
+                  <a:ext uri="{0D108BD9-81ED-4DB2-BD59-A6C34878D82A}">
+                    <a16:rowId xmlns:a16="http://schemas.microsoft.com/office/drawing/2014/main" val="10001"/>
+                  </a:ext>
+                </a:extLst>
               </a:tr>
               <a:tr h="384048">
                 <a:tc>
@@ -4331,7 +4251,7 @@
                     <a:bodyPr/>
                     <a:lstStyle/>
                     <a:p>
-                      <a:pPr algn="l" indent="0" marL="0">
+                      <a:pPr marL="0" indent="0" algn="l">
                         <a:buNone/>
                       </a:pPr>
                       <a:r>
@@ -4352,7 +4272,7 @@
                       </a:endParaRPr>
                     </a:p>
                   </a:txBody>
-                  <a:tcPr marL="91440" marR="91440" marT="45720" marB="45720" anchor="ctr">
+                  <a:tcPr anchor="ctr">
                     <a:lnL w="9525" cap="flat" cmpd="sng" algn="ctr">
                       <a:solidFill>
                         <a:srgbClr val="BFD8DD"/>
@@ -4399,7 +4319,7 @@
                     <a:bodyPr/>
                     <a:lstStyle/>
                     <a:p>
-                      <a:pPr algn="ctr" indent="0" marL="0">
+                      <a:pPr marL="0" indent="0" algn="ctr">
                         <a:buNone/>
                       </a:pPr>
                       <a:r>
@@ -4420,7 +4340,7 @@
                       </a:endParaRPr>
                     </a:p>
                   </a:txBody>
-                  <a:tcPr marL="91440" marR="91440" marT="45720" marB="45720" anchor="ctr">
+                  <a:tcPr anchor="ctr">
                     <a:lnL w="9525" cap="flat" cmpd="sng" algn="ctr">
                       <a:solidFill>
                         <a:srgbClr val="BFD8DD"/>
@@ -4467,7 +4387,7 @@
                     <a:bodyPr/>
                     <a:lstStyle/>
                     <a:p>
-                      <a:pPr algn="ctr" indent="0" marL="0">
+                      <a:pPr marL="0" indent="0" algn="ctr">
                         <a:buNone/>
                       </a:pPr>
                       <a:r>
@@ -4488,7 +4408,7 @@
                       </a:endParaRPr>
                     </a:p>
                   </a:txBody>
-                  <a:tcPr marL="91440" marR="91440" marT="45720" marB="45720" anchor="ctr">
+                  <a:tcPr anchor="ctr">
                     <a:lnL w="9525" cap="flat" cmpd="sng" algn="ctr">
                       <a:solidFill>
                         <a:srgbClr val="BFD8DD"/>
@@ -4535,7 +4455,7 @@
                     <a:bodyPr/>
                     <a:lstStyle/>
                     <a:p>
-                      <a:pPr algn="ctr" indent="0" marL="0">
+                      <a:pPr marL="0" indent="0" algn="ctr">
                         <a:buNone/>
                       </a:pPr>
                       <a:r>
@@ -4556,7 +4476,7 @@
                       </a:endParaRPr>
                     </a:p>
                   </a:txBody>
-                  <a:tcPr marL="91440" marR="91440" marT="45720" marB="45720" anchor="ctr">
+                  <a:tcPr anchor="ctr">
                     <a:lnL w="9525" cap="flat" cmpd="sng" algn="ctr">
                       <a:solidFill>
                         <a:srgbClr val="BFD8DD"/>
@@ -4603,7 +4523,7 @@
                     <a:bodyPr/>
                     <a:lstStyle/>
                     <a:p>
-                      <a:pPr algn="ctr" indent="0" marL="0">
+                      <a:pPr marL="0" indent="0" algn="ctr">
                         <a:buNone/>
                       </a:pPr>
                       <a:r>
@@ -4624,7 +4544,7 @@
                       </a:endParaRPr>
                     </a:p>
                   </a:txBody>
-                  <a:tcPr marL="91440" marR="91440" marT="45720" marB="45720" anchor="ctr">
+                  <a:tcPr anchor="ctr">
                     <a:lnL w="9525" cap="flat" cmpd="sng" algn="ctr">
                       <a:solidFill>
                         <a:srgbClr val="BFD8DD"/>
@@ -4671,7 +4591,7 @@
                     <a:bodyPr/>
                     <a:lstStyle/>
                     <a:p>
-                      <a:pPr algn="ctr" indent="0" marL="0">
+                      <a:pPr marL="0" indent="0" algn="ctr">
                         <a:buNone/>
                       </a:pPr>
                       <a:r>
@@ -4692,7 +4612,7 @@
                       </a:endParaRPr>
                     </a:p>
                   </a:txBody>
-                  <a:tcPr marL="91440" marR="91440" marT="45720" marB="45720" anchor="ctr">
+                  <a:tcPr anchor="ctr">
                     <a:lnL w="9525" cap="flat" cmpd="sng" algn="ctr">
                       <a:solidFill>
                         <a:srgbClr val="BFD8DD"/>
@@ -4739,7 +4659,7 @@
                     <a:bodyPr/>
                     <a:lstStyle/>
                     <a:p>
-                      <a:pPr algn="ctr" indent="0" marL="0">
+                      <a:pPr marL="0" indent="0" algn="ctr">
                         <a:buNone/>
                       </a:pPr>
                       <a:r>
@@ -4760,7 +4680,7 @@
                       </a:endParaRPr>
                     </a:p>
                   </a:txBody>
-                  <a:tcPr marL="91440" marR="91440" marT="45720" marB="45720" anchor="ctr">
+                  <a:tcPr anchor="ctr">
                     <a:lnL w="9525" cap="flat" cmpd="sng" algn="ctr">
                       <a:solidFill>
                         <a:srgbClr val="BFD8DD"/>
@@ -4802,6 +4722,11 @@
                     </a:solidFill>
                   </a:tcPr>
                 </a:tc>
+                <a:extLst>
+                  <a:ext uri="{0D108BD9-81ED-4DB2-BD59-A6C34878D82A}">
+                    <a16:rowId xmlns:a16="http://schemas.microsoft.com/office/drawing/2014/main" val="10002"/>
+                  </a:ext>
+                </a:extLst>
               </a:tr>
               <a:tr h="384048">
                 <a:tc>
@@ -4809,7 +4734,7 @@
                     <a:bodyPr/>
                     <a:lstStyle/>
                     <a:p>
-                      <a:pPr algn="l" indent="0" marL="0">
+                      <a:pPr marL="0" indent="0" algn="l">
                         <a:buNone/>
                       </a:pPr>
                       <a:r>
@@ -4830,7 +4755,7 @@
                       </a:endParaRPr>
                     </a:p>
                   </a:txBody>
-                  <a:tcPr marL="91440" marR="91440" marT="45720" marB="45720" anchor="ctr">
+                  <a:tcPr anchor="ctr">
                     <a:lnL w="9525" cap="flat" cmpd="sng" algn="ctr">
                       <a:solidFill>
                         <a:srgbClr val="BFD8DD"/>
@@ -4877,7 +4802,7 @@
                     <a:bodyPr/>
                     <a:lstStyle/>
                     <a:p>
-                      <a:pPr algn="ctr" indent="0" marL="0">
+                      <a:pPr marL="0" indent="0" algn="ctr">
                         <a:buNone/>
                       </a:pPr>
                       <a:r>
@@ -4898,7 +4823,7 @@
                       </a:endParaRPr>
                     </a:p>
                   </a:txBody>
-                  <a:tcPr marL="91440" marR="91440" marT="45720" marB="45720" anchor="ctr">
+                  <a:tcPr anchor="ctr">
                     <a:lnL w="9525" cap="flat" cmpd="sng" algn="ctr">
                       <a:solidFill>
                         <a:srgbClr val="BFD8DD"/>
@@ -4945,7 +4870,7 @@
                     <a:bodyPr/>
                     <a:lstStyle/>
                     <a:p>
-                      <a:pPr algn="ctr" indent="0" marL="0">
+                      <a:pPr marL="0" indent="0" algn="ctr">
                         <a:buNone/>
                       </a:pPr>
                       <a:r>
@@ -4966,7 +4891,7 @@
                       </a:endParaRPr>
                     </a:p>
                   </a:txBody>
-                  <a:tcPr marL="91440" marR="91440" marT="45720" marB="45720" anchor="ctr">
+                  <a:tcPr anchor="ctr">
                     <a:lnL w="9525" cap="flat" cmpd="sng" algn="ctr">
                       <a:solidFill>
                         <a:srgbClr val="BFD8DD"/>
@@ -5013,7 +4938,7 @@
                     <a:bodyPr/>
                     <a:lstStyle/>
                     <a:p>
-                      <a:pPr algn="ctr" indent="0" marL="0">
+                      <a:pPr marL="0" indent="0" algn="ctr">
                         <a:buNone/>
                       </a:pPr>
                       <a:r>
@@ -5034,7 +4959,7 @@
                       </a:endParaRPr>
                     </a:p>
                   </a:txBody>
-                  <a:tcPr marL="91440" marR="91440" marT="45720" marB="45720" anchor="ctr">
+                  <a:tcPr anchor="ctr">
                     <a:lnL w="9525" cap="flat" cmpd="sng" algn="ctr">
                       <a:solidFill>
                         <a:srgbClr val="BFD8DD"/>
@@ -5081,7 +5006,7 @@
                     <a:bodyPr/>
                     <a:lstStyle/>
                     <a:p>
-                      <a:pPr algn="ctr" indent="0" marL="0">
+                      <a:pPr marL="0" indent="0" algn="ctr">
                         <a:buNone/>
                       </a:pPr>
                       <a:r>
@@ -5102,7 +5027,7 @@
                       </a:endParaRPr>
                     </a:p>
                   </a:txBody>
-                  <a:tcPr marL="91440" marR="91440" marT="45720" marB="45720" anchor="ctr">
+                  <a:tcPr anchor="ctr">
                     <a:lnL w="9525" cap="flat" cmpd="sng" algn="ctr">
                       <a:solidFill>
                         <a:srgbClr val="BFD8DD"/>
@@ -5149,7 +5074,7 @@
                     <a:bodyPr/>
                     <a:lstStyle/>
                     <a:p>
-                      <a:pPr algn="ctr" indent="0" marL="0">
+                      <a:pPr marL="0" indent="0" algn="ctr">
                         <a:buNone/>
                       </a:pPr>
                       <a:r>
@@ -5170,7 +5095,7 @@
                       </a:endParaRPr>
                     </a:p>
                   </a:txBody>
-                  <a:tcPr marL="91440" marR="91440" marT="45720" marB="45720" anchor="ctr">
+                  <a:tcPr anchor="ctr">
                     <a:lnL w="9525" cap="flat" cmpd="sng" algn="ctr">
                       <a:solidFill>
                         <a:srgbClr val="BFD8DD"/>
@@ -5217,7 +5142,7 @@
                     <a:bodyPr/>
                     <a:lstStyle/>
                     <a:p>
-                      <a:pPr algn="ctr" indent="0" marL="0">
+                      <a:pPr marL="0" indent="0" algn="ctr">
                         <a:buNone/>
                       </a:pPr>
                       <a:r>
@@ -5238,7 +5163,7 @@
                       </a:endParaRPr>
                     </a:p>
                   </a:txBody>
-                  <a:tcPr marL="91440" marR="91440" marT="45720" marB="45720" anchor="ctr">
+                  <a:tcPr anchor="ctr">
                     <a:lnL w="9525" cap="flat" cmpd="sng" algn="ctr">
                       <a:solidFill>
                         <a:srgbClr val="BFD8DD"/>
@@ -5280,6 +5205,11 @@
                     </a:solidFill>
                   </a:tcPr>
                 </a:tc>
+                <a:extLst>
+                  <a:ext uri="{0D108BD9-81ED-4DB2-BD59-A6C34878D82A}">
+                    <a16:rowId xmlns:a16="http://schemas.microsoft.com/office/drawing/2014/main" val="10003"/>
+                  </a:ext>
+                </a:extLst>
               </a:tr>
               <a:tr h="384048">
                 <a:tc>
@@ -5287,7 +5217,7 @@
                     <a:bodyPr/>
                     <a:lstStyle/>
                     <a:p>
-                      <a:pPr algn="l" indent="0" marL="0">
+                      <a:pPr marL="0" indent="0" algn="l">
                         <a:buNone/>
                       </a:pPr>
                       <a:r>
@@ -5308,7 +5238,7 @@
                       </a:endParaRPr>
                     </a:p>
                   </a:txBody>
-                  <a:tcPr marL="91440" marR="91440" marT="45720" marB="45720" anchor="ctr">
+                  <a:tcPr anchor="ctr">
                     <a:lnL w="9525" cap="flat" cmpd="sng" algn="ctr">
                       <a:solidFill>
                         <a:srgbClr val="BFD8DD"/>
@@ -5355,7 +5285,7 @@
                     <a:bodyPr/>
                     <a:lstStyle/>
                     <a:p>
-                      <a:pPr algn="ctr" indent="0" marL="0">
+                      <a:pPr marL="0" indent="0" algn="ctr">
                         <a:buNone/>
                       </a:pPr>
                       <a:r>
@@ -5376,7 +5306,7 @@
                       </a:endParaRPr>
                     </a:p>
                   </a:txBody>
-                  <a:tcPr marL="91440" marR="91440" marT="45720" marB="45720" anchor="ctr">
+                  <a:tcPr anchor="ctr">
                     <a:lnL w="9525" cap="flat" cmpd="sng" algn="ctr">
                       <a:solidFill>
                         <a:srgbClr val="BFD8DD"/>
@@ -5423,7 +5353,7 @@
                     <a:bodyPr/>
                     <a:lstStyle/>
                     <a:p>
-                      <a:pPr algn="ctr" indent="0" marL="0">
+                      <a:pPr marL="0" indent="0" algn="ctr">
                         <a:buNone/>
                       </a:pPr>
                       <a:r>
@@ -5444,7 +5374,7 @@
                       </a:endParaRPr>
                     </a:p>
                   </a:txBody>
-                  <a:tcPr marL="91440" marR="91440" marT="45720" marB="45720" anchor="ctr">
+                  <a:tcPr anchor="ctr">
                     <a:lnL w="9525" cap="flat" cmpd="sng" algn="ctr">
                       <a:solidFill>
                         <a:srgbClr val="BFD8DD"/>
@@ -5491,7 +5421,7 @@
                     <a:bodyPr/>
                     <a:lstStyle/>
                     <a:p>
-                      <a:pPr algn="ctr" indent="0" marL="0">
+                      <a:pPr marL="0" indent="0" algn="ctr">
                         <a:buNone/>
                       </a:pPr>
                       <a:r>
@@ -5512,7 +5442,7 @@
                       </a:endParaRPr>
                     </a:p>
                   </a:txBody>
-                  <a:tcPr marL="91440" marR="91440" marT="45720" marB="45720" anchor="ctr">
+                  <a:tcPr anchor="ctr">
                     <a:lnL w="9525" cap="flat" cmpd="sng" algn="ctr">
                       <a:solidFill>
                         <a:srgbClr val="BFD8DD"/>
@@ -5559,7 +5489,7 @@
                     <a:bodyPr/>
                     <a:lstStyle/>
                     <a:p>
-                      <a:pPr algn="ctr" indent="0" marL="0">
+                      <a:pPr marL="0" indent="0" algn="ctr">
                         <a:buNone/>
                       </a:pPr>
                       <a:r>
@@ -5580,7 +5510,7 @@
                       </a:endParaRPr>
                     </a:p>
                   </a:txBody>
-                  <a:tcPr marL="91440" marR="91440" marT="45720" marB="45720" anchor="ctr">
+                  <a:tcPr anchor="ctr">
                     <a:lnL w="9525" cap="flat" cmpd="sng" algn="ctr">
                       <a:solidFill>
                         <a:srgbClr val="BFD8DD"/>
@@ -5627,7 +5557,7 @@
                     <a:bodyPr/>
                     <a:lstStyle/>
                     <a:p>
-                      <a:pPr algn="ctr" indent="0" marL="0">
+                      <a:pPr marL="0" indent="0" algn="ctr">
                         <a:buNone/>
                       </a:pPr>
                       <a:r>
@@ -5648,7 +5578,7 @@
                       </a:endParaRPr>
                     </a:p>
                   </a:txBody>
-                  <a:tcPr marL="91440" marR="91440" marT="45720" marB="45720" anchor="ctr">
+                  <a:tcPr anchor="ctr">
                     <a:lnL w="9525" cap="flat" cmpd="sng" algn="ctr">
                       <a:solidFill>
                         <a:srgbClr val="BFD8DD"/>
@@ -5695,7 +5625,7 @@
                     <a:bodyPr/>
                     <a:lstStyle/>
                     <a:p>
-                      <a:pPr algn="ctr" indent="0" marL="0">
+                      <a:pPr marL="0" indent="0" algn="ctr">
                         <a:buNone/>
                       </a:pPr>
                       <a:r>
@@ -5716,7 +5646,7 @@
                       </a:endParaRPr>
                     </a:p>
                   </a:txBody>
-                  <a:tcPr marL="91440" marR="91440" marT="45720" marB="45720" anchor="ctr">
+                  <a:tcPr anchor="ctr">
                     <a:lnL w="9525" cap="flat" cmpd="sng" algn="ctr">
                       <a:solidFill>
                         <a:srgbClr val="BFD8DD"/>
@@ -5758,6 +5688,11 @@
                     </a:solidFill>
                   </a:tcPr>
                 </a:tc>
+                <a:extLst>
+                  <a:ext uri="{0D108BD9-81ED-4DB2-BD59-A6C34878D82A}">
+                    <a16:rowId xmlns:a16="http://schemas.microsoft.com/office/drawing/2014/main" val="10004"/>
+                  </a:ext>
+                </a:extLst>
               </a:tr>
               <a:tr h="384048">
                 <a:tc>
@@ -5765,7 +5700,7 @@
                     <a:bodyPr/>
                     <a:lstStyle/>
                     <a:p>
-                      <a:pPr algn="l" indent="0" marL="0">
+                      <a:pPr marL="0" indent="0" algn="l">
                         <a:buNone/>
                       </a:pPr>
                       <a:r>
@@ -5786,7 +5721,7 @@
                       </a:endParaRPr>
                     </a:p>
                   </a:txBody>
-                  <a:tcPr marL="91440" marR="91440" marT="45720" marB="45720" anchor="ctr">
+                  <a:tcPr anchor="ctr">
                     <a:lnL w="9525" cap="flat" cmpd="sng" algn="ctr">
                       <a:solidFill>
                         <a:srgbClr val="BFD8DD"/>
@@ -5833,7 +5768,7 @@
                     <a:bodyPr/>
                     <a:lstStyle/>
                     <a:p>
-                      <a:pPr algn="ctr" indent="0" marL="0">
+                      <a:pPr marL="0" indent="0" algn="ctr">
                         <a:buNone/>
                       </a:pPr>
                       <a:r>
@@ -5854,7 +5789,7 @@
                       </a:endParaRPr>
                     </a:p>
                   </a:txBody>
-                  <a:tcPr marL="91440" marR="91440" marT="45720" marB="45720" anchor="ctr">
+                  <a:tcPr anchor="ctr">
                     <a:lnL w="9525" cap="flat" cmpd="sng" algn="ctr">
                       <a:solidFill>
                         <a:srgbClr val="BFD8DD"/>
@@ -5901,7 +5836,7 @@
                     <a:bodyPr/>
                     <a:lstStyle/>
                     <a:p>
-                      <a:pPr algn="ctr" indent="0" marL="0">
+                      <a:pPr marL="0" indent="0" algn="ctr">
                         <a:buNone/>
                       </a:pPr>
                       <a:r>
@@ -5922,7 +5857,7 @@
                       </a:endParaRPr>
                     </a:p>
                   </a:txBody>
-                  <a:tcPr marL="91440" marR="91440" marT="45720" marB="45720" anchor="ctr">
+                  <a:tcPr anchor="ctr">
                     <a:lnL w="9525" cap="flat" cmpd="sng" algn="ctr">
                       <a:solidFill>
                         <a:srgbClr val="BFD8DD"/>
@@ -5969,7 +5904,7 @@
                     <a:bodyPr/>
                     <a:lstStyle/>
                     <a:p>
-                      <a:pPr algn="ctr" indent="0" marL="0">
+                      <a:pPr marL="0" indent="0" algn="ctr">
                         <a:buNone/>
                       </a:pPr>
                       <a:r>
@@ -5990,7 +5925,7 @@
                       </a:endParaRPr>
                     </a:p>
                   </a:txBody>
-                  <a:tcPr marL="91440" marR="91440" marT="45720" marB="45720" anchor="ctr">
+                  <a:tcPr anchor="ctr">
                     <a:lnL w="9525" cap="flat" cmpd="sng" algn="ctr">
                       <a:solidFill>
                         <a:srgbClr val="BFD8DD"/>
@@ -6037,7 +5972,7 @@
                     <a:bodyPr/>
                     <a:lstStyle/>
                     <a:p>
-                      <a:pPr algn="ctr" indent="0" marL="0">
+                      <a:pPr marL="0" indent="0" algn="ctr">
                         <a:buNone/>
                       </a:pPr>
                       <a:r>
@@ -6058,7 +5993,7 @@
                       </a:endParaRPr>
                     </a:p>
                   </a:txBody>
-                  <a:tcPr marL="91440" marR="91440" marT="45720" marB="45720" anchor="ctr">
+                  <a:tcPr anchor="ctr">
                     <a:lnL w="9525" cap="flat" cmpd="sng" algn="ctr">
                       <a:solidFill>
                         <a:srgbClr val="BFD8DD"/>
@@ -6105,7 +6040,7 @@
                     <a:bodyPr/>
                     <a:lstStyle/>
                     <a:p>
-                      <a:pPr algn="ctr" indent="0" marL="0">
+                      <a:pPr marL="0" indent="0" algn="ctr">
                         <a:buNone/>
                       </a:pPr>
                       <a:r>
@@ -6126,7 +6061,7 @@
                       </a:endParaRPr>
                     </a:p>
                   </a:txBody>
-                  <a:tcPr marL="91440" marR="91440" marT="45720" marB="45720" anchor="ctr">
+                  <a:tcPr anchor="ctr">
                     <a:lnL w="9525" cap="flat" cmpd="sng" algn="ctr">
                       <a:solidFill>
                         <a:srgbClr val="BFD8DD"/>
@@ -6173,7 +6108,7 @@
                     <a:bodyPr/>
                     <a:lstStyle/>
                     <a:p>
-                      <a:pPr algn="ctr" indent="0" marL="0">
+                      <a:pPr marL="0" indent="0" algn="ctr">
                         <a:buNone/>
                       </a:pPr>
                       <a:r>
@@ -6194,7 +6129,7 @@
                       </a:endParaRPr>
                     </a:p>
                   </a:txBody>
-                  <a:tcPr marL="91440" marR="91440" marT="45720" marB="45720" anchor="ctr">
+                  <a:tcPr anchor="ctr">
                     <a:lnL w="9525" cap="flat" cmpd="sng" algn="ctr">
                       <a:solidFill>
                         <a:srgbClr val="BFD8DD"/>
@@ -6236,6 +6171,11 @@
                     </a:solidFill>
                   </a:tcPr>
                 </a:tc>
+                <a:extLst>
+                  <a:ext uri="{0D108BD9-81ED-4DB2-BD59-A6C34878D82A}">
+                    <a16:rowId xmlns:a16="http://schemas.microsoft.com/office/drawing/2014/main" val="10005"/>
+                  </a:ext>
+                </a:extLst>
               </a:tr>
               <a:tr h="384048">
                 <a:tc>
@@ -6243,7 +6183,7 @@
                     <a:bodyPr/>
                     <a:lstStyle/>
                     <a:p>
-                      <a:pPr algn="l" indent="0" marL="0">
+                      <a:pPr marL="0" indent="0" algn="l">
                         <a:buNone/>
                       </a:pPr>
                       <a:r>
@@ -6264,7 +6204,7 @@
                       </a:endParaRPr>
                     </a:p>
                   </a:txBody>
-                  <a:tcPr marL="91440" marR="91440" marT="45720" marB="45720" anchor="ctr">
+                  <a:tcPr anchor="ctr">
                     <a:lnL w="9525" cap="flat" cmpd="sng" algn="ctr">
                       <a:solidFill>
                         <a:srgbClr val="BFD8DD"/>
@@ -6311,7 +6251,7 @@
                     <a:bodyPr/>
                     <a:lstStyle/>
                     <a:p>
-                      <a:pPr algn="ctr" indent="0" marL="0">
+                      <a:pPr marL="0" indent="0" algn="ctr">
                         <a:buNone/>
                       </a:pPr>
                       <a:r>
@@ -6332,7 +6272,7 @@
                       </a:endParaRPr>
                     </a:p>
                   </a:txBody>
-                  <a:tcPr marL="91440" marR="91440" marT="45720" marB="45720" anchor="ctr">
+                  <a:tcPr anchor="ctr">
                     <a:lnL w="9525" cap="flat" cmpd="sng" algn="ctr">
                       <a:solidFill>
                         <a:srgbClr val="BFD8DD"/>
@@ -6379,7 +6319,7 @@
                     <a:bodyPr/>
                     <a:lstStyle/>
                     <a:p>
-                      <a:pPr algn="ctr" indent="0" marL="0">
+                      <a:pPr marL="0" indent="0" algn="ctr">
                         <a:buNone/>
                       </a:pPr>
                       <a:r>
@@ -6400,7 +6340,7 @@
                       </a:endParaRPr>
                     </a:p>
                   </a:txBody>
-                  <a:tcPr marL="91440" marR="91440" marT="45720" marB="45720" anchor="ctr">
+                  <a:tcPr anchor="ctr">
                     <a:lnL w="9525" cap="flat" cmpd="sng" algn="ctr">
                       <a:solidFill>
                         <a:srgbClr val="BFD8DD"/>
@@ -6447,7 +6387,7 @@
                     <a:bodyPr/>
                     <a:lstStyle/>
                     <a:p>
-                      <a:pPr algn="ctr" indent="0" marL="0">
+                      <a:pPr marL="0" indent="0" algn="ctr">
                         <a:buNone/>
                       </a:pPr>
                       <a:r>
@@ -6468,7 +6408,7 @@
                       </a:endParaRPr>
                     </a:p>
                   </a:txBody>
-                  <a:tcPr marL="91440" marR="91440" marT="45720" marB="45720" anchor="ctr">
+                  <a:tcPr anchor="ctr">
                     <a:lnL w="9525" cap="flat" cmpd="sng" algn="ctr">
                       <a:solidFill>
                         <a:srgbClr val="BFD8DD"/>
@@ -6515,7 +6455,7 @@
                     <a:bodyPr/>
                     <a:lstStyle/>
                     <a:p>
-                      <a:pPr algn="ctr" indent="0" marL="0">
+                      <a:pPr marL="0" indent="0" algn="ctr">
                         <a:buNone/>
                       </a:pPr>
                       <a:r>
@@ -6536,7 +6476,7 @@
                       </a:endParaRPr>
                     </a:p>
                   </a:txBody>
-                  <a:tcPr marL="91440" marR="91440" marT="45720" marB="45720" anchor="ctr">
+                  <a:tcPr anchor="ctr">
                     <a:lnL w="9525" cap="flat" cmpd="sng" algn="ctr">
                       <a:solidFill>
                         <a:srgbClr val="BFD8DD"/>
@@ -6583,7 +6523,7 @@
                     <a:bodyPr/>
                     <a:lstStyle/>
                     <a:p>
-                      <a:pPr algn="ctr" indent="0" marL="0">
+                      <a:pPr marL="0" indent="0" algn="ctr">
                         <a:buNone/>
                       </a:pPr>
                       <a:r>
@@ -6604,7 +6544,7 @@
                       </a:endParaRPr>
                     </a:p>
                   </a:txBody>
-                  <a:tcPr marL="91440" marR="91440" marT="45720" marB="45720" anchor="ctr">
+                  <a:tcPr anchor="ctr">
                     <a:lnL w="9525" cap="flat" cmpd="sng" algn="ctr">
                       <a:solidFill>
                         <a:srgbClr val="BFD8DD"/>
@@ -6651,7 +6591,7 @@
                     <a:bodyPr/>
                     <a:lstStyle/>
                     <a:p>
-                      <a:pPr algn="ctr" indent="0" marL="0">
+                      <a:pPr marL="0" indent="0" algn="ctr">
                         <a:buNone/>
                       </a:pPr>
                       <a:r>
@@ -6672,7 +6612,7 @@
                       </a:endParaRPr>
                     </a:p>
                   </a:txBody>
-                  <a:tcPr marL="91440" marR="91440" marT="45720" marB="45720" anchor="ctr">
+                  <a:tcPr anchor="ctr">
                     <a:lnL w="9525" cap="flat" cmpd="sng" algn="ctr">
                       <a:solidFill>
                         <a:srgbClr val="BFD8DD"/>
@@ -6714,6 +6654,11 @@
                     </a:solidFill>
                   </a:tcPr>
                 </a:tc>
+                <a:extLst>
+                  <a:ext uri="{0D108BD9-81ED-4DB2-BD59-A6C34878D82A}">
+                    <a16:rowId xmlns:a16="http://schemas.microsoft.com/office/drawing/2014/main" val="10006"/>
+                  </a:ext>
+                </a:extLst>
               </a:tr>
             </a:tbl>
           </a:graphicData>
@@ -6740,7 +6685,7 @@
           <a:bodyPr wrap="square" lIns="0" tIns="0" rIns="0" bIns="0" rtlCol="0" anchor="t"/>
           <a:lstStyle/>
           <a:p>
-            <a:pPr indent="0" marL="0">
+            <a:pPr marL="0" indent="0">
               <a:buNone/>
             </a:pPr>
             <a:r>
@@ -6754,9 +6699,6 @@
               </a:rPr>
               <a:t>Recall</a:t>
             </a:r>
-            <a:pPr indent="0" marL="0">
-              <a:buNone/>
-            </a:pPr>
             <a:r>
               <a:rPr lang="en-US" sz="1100" dirty="0">
                 <a:solidFill>
@@ -6768,9 +6710,6 @@
               </a:rPr>
               <a:t>: tỉ lệ phiên bằng chứng (answer_session_ids — nhãn của LongMemEval) được giữ, TB theo câu.  </a:t>
             </a:r>
-            <a:pPr indent="0" marL="0">
-              <a:buNone/>
-            </a:pPr>
             <a:r>
               <a:rPr lang="en-US" sz="1100" b="1" dirty="0">
                 <a:solidFill>
@@ -6782,9 +6721,6 @@
               </a:rPr>
               <a:t>Đủ bằng chứng</a:t>
             </a:r>
-            <a:pPr indent="0" marL="0">
-              <a:buNone/>
-            </a:pPr>
             <a:r>
               <a:rPr lang="en-US" sz="1100" dirty="0">
                 <a:solidFill>
@@ -6826,6 +6762,13 @@
             <a:prstDash val="solid"/>
           </a:ln>
         </p:spPr>
+        <p:txBody>
+          <a:bodyPr/>
+          <a:lstStyle/>
+          <a:p>
+            <a:endParaRPr lang="en-US"/>
+          </a:p>
+        </p:txBody>
       </p:sp>
       <p:sp>
         <p:nvSpPr>
@@ -6848,7 +6791,7 @@
           <a:bodyPr wrap="square" lIns="0" tIns="0" rIns="0" bIns="0" rtlCol="0" anchor="t"/>
           <a:lstStyle/>
           <a:p>
-            <a:pPr indent="0" marL="0">
+            <a:pPr marL="0" indent="0">
               <a:buNone/>
             </a:pPr>
             <a:r>
@@ -6887,7 +6830,7 @@
           <a:bodyPr wrap="square" lIns="0" tIns="0" rIns="0" bIns="0" rtlCol="0" anchor="t"/>
           <a:lstStyle/>
           <a:p>
-            <a:pPr indent="0" marL="0">
+            <a:pPr marL="0" indent="0">
               <a:buNone/>
             </a:pPr>
             <a:r>
@@ -6931,6 +6874,13 @@
             <a:prstDash val="solid"/>
           </a:ln>
         </p:spPr>
+        <p:txBody>
+          <a:bodyPr/>
+          <a:lstStyle/>
+          <a:p>
+            <a:endParaRPr lang="en-US"/>
+          </a:p>
+        </p:txBody>
       </p:sp>
       <p:sp>
         <p:nvSpPr>
@@ -6953,7 +6903,7 @@
           <a:bodyPr wrap="square" lIns="0" tIns="0" rIns="0" bIns="0" rtlCol="0" anchor="t"/>
           <a:lstStyle/>
           <a:p>
-            <a:pPr indent="0" marL="0">
+            <a:pPr marL="0" indent="0">
               <a:buNone/>
             </a:pPr>
             <a:r>
@@ -6973,7 +6923,7 @@
       </p:sp>
       <p:sp>
         <p:nvSpPr>
-          <p:cNvPr id="11" name="Text 8"/>
+          <p:cNvPr id="4" name="Text 8"/>
           <p:cNvSpPr txBox="1"/>
           <p:nvPr/>
         </p:nvSpPr>
@@ -6992,7 +6942,7 @@
           <a:bodyPr wrap="square" lIns="0" tIns="0" rIns="0" bIns="0" rtlCol="0" anchor="t"/>
           <a:lstStyle/>
           <a:p>
-            <a:pPr indent="0" marL="0">
+            <a:pPr marL="0" indent="0">
               <a:buNone/>
             </a:pPr>
             <a:r>
@@ -7009,7 +6959,7 @@
             <a:endParaRPr lang="en-US" sz="1150" dirty="0"/>
           </a:p>
           <a:p>
-            <a:pPr indent="0" marL="0">
+            <a:pPr marL="0" indent="0">
               <a:buNone/>
             </a:pPr>
             <a:r>
@@ -7026,7 +6976,7 @@
             <a:endParaRPr lang="en-US" sz="1150" dirty="0"/>
           </a:p>
           <a:p>
-            <a:pPr indent="0" marL="0">
+            <a:pPr marL="0" indent="0">
               <a:buNone/>
             </a:pPr>
             <a:r>
@@ -7070,6 +7020,13 @@
             <a:prstDash val="solid"/>
           </a:ln>
         </p:spPr>
+        <p:txBody>
+          <a:bodyPr/>
+          <a:lstStyle/>
+          <a:p>
+            <a:endParaRPr lang="en-US"/>
+          </a:p>
+        </p:txBody>
       </p:sp>
       <p:sp>
         <p:nvSpPr>
@@ -7092,7 +7049,7 @@
           <a:bodyPr wrap="square" lIns="0" tIns="0" rIns="0" bIns="0" rtlCol="0" anchor="ctr"/>
           <a:lstStyle/>
           <a:p>
-            <a:pPr indent="0" marL="0">
+            <a:pPr marL="0" indent="0">
               <a:buNone/>
             </a:pPr>
             <a:r>
@@ -7106,9 +7063,6 @@
               </a:rPr>
               <a:t>Vì sao không dùng Θ = 0,2 như bài báo?  </a:t>
             </a:r>
-            <a:pPr indent="0" marL="0">
-              <a:buNone/>
-            </a:pPr>
             <a:r>
               <a:rPr lang="en-US" sz="1200" dirty="0">
                 <a:solidFill>
@@ -7145,7 +7099,7 @@
           <a:bodyPr wrap="square" lIns="0" tIns="0" rIns="0" bIns="0" rtlCol="0" anchor="t"/>
           <a:lstStyle/>
           <a:p>
-            <a:pPr indent="0" marL="0">
+            <a:pPr marL="0" indent="0">
               <a:buNone/>
             </a:pPr>
             <a:r>
@@ -7179,6 +7133,7 @@
         <a:solidFill>
           <a:srgbClr val="FFFFFF"/>
         </a:solidFill>
+        <a:effectLst/>
       </p:bgPr>
     </p:bg>
     <p:spTree>
@@ -7216,11 +7171,11 @@
           <a:bodyPr wrap="square" lIns="0" tIns="0" rIns="0" bIns="0" rtlCol="0" anchor="t"/>
           <a:lstStyle/>
           <a:p>
-            <a:pPr indent="0" marL="0">
+            <a:pPr marL="0" indent="0">
               <a:buNone/>
             </a:pPr>
             <a:r>
-              <a:rPr lang="en-US" sz="1100" b="1" spc="200" kern="0" dirty="0">
+              <a:rPr lang="en-US" sz="1100" b="1" kern="0" spc="200" dirty="0">
                 <a:solidFill>
                   <a:srgbClr val="D98C1F"/>
                 </a:solidFill>
@@ -7255,7 +7210,7 @@
           <a:bodyPr wrap="square" lIns="0" tIns="0" rIns="0" bIns="0" rtlCol="0" anchor="ctr"/>
           <a:lstStyle/>
           <a:p>
-            <a:pPr indent="0" marL="0">
+            <a:pPr marL="0" indent="0">
               <a:buNone/>
             </a:pPr>
             <a:r>
@@ -7275,7 +7230,7 @@
       </p:sp>
       <p:graphicFrame>
         <p:nvGraphicFramePr>
-          <p:cNvPr id="4" name="Chart 0" descr=""/>
+          <p:cNvPr id="4" name="Chart 0"/>
           <p:cNvGraphicFramePr/>
           <p:nvPr/>
         </p:nvGraphicFramePr>
@@ -7283,9 +7238,9 @@
           <a:off x="457200" y="1325880"/>
           <a:ext cx="7223760" cy="4846320"/>
         </p:xfrm>
-        <a:graphic xmlns:a="http://schemas.openxmlformats.org/drawingml/2006/main">
+        <a:graphic>
           <a:graphicData uri="http://schemas.openxmlformats.org/drawingml/2006/chart">
-            <c:chart xmlns:c="http://schemas.openxmlformats.org/drawingml/2006/chart" r:id="rId1"/>
+            <c:chart xmlns:c="http://schemas.openxmlformats.org/drawingml/2006/chart" xmlns:r="http://schemas.openxmlformats.org/officeDocument/2006/relationships" r:id="rId3"/>
           </a:graphicData>
         </a:graphic>
       </p:graphicFrame>
@@ -7315,6 +7270,13 @@
             <a:prstDash val="solid"/>
           </a:ln>
         </p:spPr>
+        <p:txBody>
+          <a:bodyPr/>
+          <a:lstStyle/>
+          <a:p>
+            <a:endParaRPr lang="en-US"/>
+          </a:p>
+        </p:txBody>
       </p:sp>
       <p:sp>
         <p:nvSpPr>
@@ -7337,7 +7299,7 @@
           <a:bodyPr wrap="square" lIns="0" tIns="0" rIns="0" bIns="0" rtlCol="0" anchor="ctr"/>
           <a:lstStyle/>
           <a:p>
-            <a:pPr indent="0" marL="0">
+            <a:pPr marL="0" indent="0">
               <a:buNone/>
             </a:pPr>
             <a:r>
@@ -7376,7 +7338,7 @@
           <a:bodyPr wrap="square" lIns="0" tIns="0" rIns="0" bIns="0" rtlCol="0" anchor="ctr"/>
           <a:lstStyle/>
           <a:p>
-            <a:pPr indent="0" marL="0">
+            <a:pPr marL="0" indent="0">
               <a:buNone/>
             </a:pPr>
             <a:r>
@@ -7420,6 +7382,13 @@
             <a:prstDash val="solid"/>
           </a:ln>
         </p:spPr>
+        <p:txBody>
+          <a:bodyPr/>
+          <a:lstStyle/>
+          <a:p>
+            <a:endParaRPr lang="en-US"/>
+          </a:p>
+        </p:txBody>
       </p:sp>
       <p:sp>
         <p:nvSpPr>
@@ -7442,7 +7411,7 @@
           <a:bodyPr wrap="square" lIns="0" tIns="0" rIns="0" bIns="0" rtlCol="0" anchor="ctr"/>
           <a:lstStyle/>
           <a:p>
-            <a:pPr indent="0" marL="0">
+            <a:pPr marL="0" indent="0">
               <a:buNone/>
             </a:pPr>
             <a:r>
@@ -7481,7 +7450,7 @@
           <a:bodyPr wrap="square" lIns="0" tIns="0" rIns="0" bIns="0" rtlCol="0" anchor="ctr"/>
           <a:lstStyle/>
           <a:p>
-            <a:pPr indent="0" marL="0">
+            <a:pPr marL="0" indent="0">
               <a:buNone/>
             </a:pPr>
             <a:r>
@@ -7525,6 +7494,13 @@
             <a:prstDash val="solid"/>
           </a:ln>
         </p:spPr>
+        <p:txBody>
+          <a:bodyPr/>
+          <a:lstStyle/>
+          <a:p>
+            <a:endParaRPr lang="en-US"/>
+          </a:p>
+        </p:txBody>
       </p:sp>
       <p:sp>
         <p:nvSpPr>
@@ -7547,7 +7523,7 @@
           <a:bodyPr wrap="square" lIns="0" tIns="0" rIns="0" bIns="0" rtlCol="0" anchor="t"/>
           <a:lstStyle/>
           <a:p>
-            <a:pPr indent="0" marL="0">
+            <a:pPr marL="0" indent="0">
               <a:buNone/>
             </a:pPr>
             <a:r>
@@ -7671,7 +7647,7 @@
           <a:bodyPr wrap="square" lIns="0" tIns="0" rIns="0" bIns="0" rtlCol="0" anchor="t"/>
           <a:lstStyle/>
           <a:p>
-            <a:pPr indent="0" marL="0">
+            <a:pPr marL="0" indent="0">
               <a:buNone/>
             </a:pPr>
             <a:r>
@@ -7705,6 +7681,7 @@
         <a:solidFill>
           <a:srgbClr val="FFFFFF"/>
         </a:solidFill>
+        <a:effectLst/>
       </p:bgPr>
     </p:bg>
     <p:spTree>
@@ -7742,11 +7719,11 @@
           <a:bodyPr wrap="square" lIns="0" tIns="0" rIns="0" bIns="0" rtlCol="0" anchor="t"/>
           <a:lstStyle/>
           <a:p>
-            <a:pPr indent="0" marL="0">
+            <a:pPr marL="0" indent="0">
               <a:buNone/>
             </a:pPr>
             <a:r>
-              <a:rPr lang="en-US" sz="1100" b="1" spc="200" kern="0" dirty="0">
+              <a:rPr lang="en-US" sz="1100" b="1" kern="0" spc="200" dirty="0">
                 <a:solidFill>
                   <a:srgbClr val="D98C1F"/>
                 </a:solidFill>
@@ -7781,7 +7758,7 @@
           <a:bodyPr wrap="square" lIns="0" tIns="0" rIns="0" bIns="0" rtlCol="0" anchor="ctr"/>
           <a:lstStyle/>
           <a:p>
-            <a:pPr indent="0" marL="0">
+            <a:pPr marL="0" indent="0">
               <a:buNone/>
             </a:pPr>
             <a:r>
@@ -7815,16 +7792,34 @@
         </p:nvGraphicFramePr>
         <p:xfrm>
           <a:off x="548640" y="1371600"/>
-          <a:ext cx="5669280" cy="914400"/>
+          <a:ext cx="5669280" cy="3072384"/>
         </p:xfrm>
         <a:graphic>
           <a:graphicData uri="http://schemas.openxmlformats.org/drawingml/2006/table">
             <a:tbl>
               <a:tblPr/>
               <a:tblGrid>
-                <a:gridCol w="2651760"/>
-                <a:gridCol w="1508760"/>
-                <a:gridCol w="1508760"/>
+                <a:gridCol w="2651760">
+                  <a:extLst>
+                    <a:ext uri="{9D8B030D-6E8A-4147-A177-3AD203B41FA5}">
+                      <a16:colId xmlns:a16="http://schemas.microsoft.com/office/drawing/2014/main" val="20000"/>
+                    </a:ext>
+                  </a:extLst>
+                </a:gridCol>
+                <a:gridCol w="1508760">
+                  <a:extLst>
+                    <a:ext uri="{9D8B030D-6E8A-4147-A177-3AD203B41FA5}">
+                      <a16:colId xmlns:a16="http://schemas.microsoft.com/office/drawing/2014/main" val="20001"/>
+                    </a:ext>
+                  </a:extLst>
+                </a:gridCol>
+                <a:gridCol w="1508760">
+                  <a:extLst>
+                    <a:ext uri="{9D8B030D-6E8A-4147-A177-3AD203B41FA5}">
+                      <a16:colId xmlns:a16="http://schemas.microsoft.com/office/drawing/2014/main" val="20002"/>
+                    </a:ext>
+                  </a:extLst>
+                </a:gridCol>
               </a:tblGrid>
               <a:tr h="384048">
                 <a:tc>
@@ -7832,7 +7827,7 @@
                     <a:bodyPr/>
                     <a:lstStyle/>
                     <a:p>
-                      <a:pPr indent="0" marL="0">
+                      <a:pPr marL="0" indent="0">
                         <a:buNone/>
                       </a:pPr>
                       <a:r>
@@ -7853,7 +7848,7 @@
                       </a:endParaRPr>
                     </a:p>
                   </a:txBody>
-                  <a:tcPr marL="91440" marR="91440" marT="45720" marB="45720" anchor="ctr">
+                  <a:tcPr anchor="ctr">
                     <a:lnL w="9525" cap="flat" cmpd="sng" algn="ctr">
                       <a:solidFill>
                         <a:srgbClr val="BFD8DD"/>
@@ -7900,7 +7895,7 @@
                     <a:bodyPr/>
                     <a:lstStyle/>
                     <a:p>
-                      <a:pPr algn="ctr" indent="0" marL="0">
+                      <a:pPr marL="0" indent="0" algn="ctr">
                         <a:buNone/>
                       </a:pPr>
                       <a:r>
@@ -7921,7 +7916,7 @@
                       </a:endParaRPr>
                     </a:p>
                   </a:txBody>
-                  <a:tcPr marL="91440" marR="91440" marT="45720" marB="45720" anchor="ctr">
+                  <a:tcPr anchor="ctr">
                     <a:lnL w="9525" cap="flat" cmpd="sng" algn="ctr">
                       <a:solidFill>
                         <a:srgbClr val="BFD8DD"/>
@@ -7968,7 +7963,7 @@
                     <a:bodyPr/>
                     <a:lstStyle/>
                     <a:p>
-                      <a:pPr algn="ctr" indent="0" marL="0">
+                      <a:pPr marL="0" indent="0" algn="ctr">
                         <a:buNone/>
                       </a:pPr>
                       <a:r>
@@ -7989,7 +7984,7 @@
                       </a:endParaRPr>
                     </a:p>
                   </a:txBody>
-                  <a:tcPr marL="91440" marR="91440" marT="45720" marB="45720" anchor="ctr">
+                  <a:tcPr anchor="ctr">
                     <a:lnL w="9525" cap="flat" cmpd="sng" algn="ctr">
                       <a:solidFill>
                         <a:srgbClr val="BFD8DD"/>
@@ -8031,6 +8026,11 @@
                     </a:solidFill>
                   </a:tcPr>
                 </a:tc>
+                <a:extLst>
+                  <a:ext uri="{0D108BD9-81ED-4DB2-BD59-A6C34878D82A}">
+                    <a16:rowId xmlns:a16="http://schemas.microsoft.com/office/drawing/2014/main" val="10000"/>
+                  </a:ext>
+                </a:extLst>
               </a:tr>
               <a:tr h="384048">
                 <a:tc>
@@ -8038,7 +8038,7 @@
                     <a:bodyPr/>
                     <a:lstStyle/>
                     <a:p>
-                      <a:pPr indent="0" marL="0">
+                      <a:pPr marL="0" indent="0">
                         <a:buNone/>
                       </a:pPr>
                       <a:r>
@@ -8059,7 +8059,7 @@
                       </a:endParaRPr>
                     </a:p>
                   </a:txBody>
-                  <a:tcPr marL="91440" marR="91440" marT="45720" marB="45720" anchor="ctr">
+                  <a:tcPr anchor="ctr">
                     <a:lnL w="9525" cap="flat" cmpd="sng" algn="ctr">
                       <a:solidFill>
                         <a:srgbClr val="BFD8DD"/>
@@ -8106,7 +8106,7 @@
                     <a:bodyPr/>
                     <a:lstStyle/>
                     <a:p>
-                      <a:pPr algn="ctr" indent="0" marL="0">
+                      <a:pPr marL="0" indent="0" algn="ctr">
                         <a:buNone/>
                       </a:pPr>
                       <a:r>
@@ -8127,7 +8127,7 @@
                       </a:endParaRPr>
                     </a:p>
                   </a:txBody>
-                  <a:tcPr marL="91440" marR="91440" marT="45720" marB="45720" anchor="ctr">
+                  <a:tcPr anchor="ctr">
                     <a:lnL w="9525" cap="flat" cmpd="sng" algn="ctr">
                       <a:solidFill>
                         <a:srgbClr val="BFD8DD"/>
@@ -8174,7 +8174,7 @@
                     <a:bodyPr/>
                     <a:lstStyle/>
                     <a:p>
-                      <a:pPr algn="ctr" indent="0" marL="0">
+                      <a:pPr marL="0" indent="0" algn="ctr">
                         <a:buNone/>
                       </a:pPr>
                       <a:r>
@@ -8195,7 +8195,7 @@
                       </a:endParaRPr>
                     </a:p>
                   </a:txBody>
-                  <a:tcPr marL="91440" marR="91440" marT="45720" marB="45720" anchor="ctr">
+                  <a:tcPr anchor="ctr">
                     <a:lnL w="9525" cap="flat" cmpd="sng" algn="ctr">
                       <a:solidFill>
                         <a:srgbClr val="BFD8DD"/>
@@ -8237,6 +8237,11 @@
                     </a:solidFill>
                   </a:tcPr>
                 </a:tc>
+                <a:extLst>
+                  <a:ext uri="{0D108BD9-81ED-4DB2-BD59-A6C34878D82A}">
+                    <a16:rowId xmlns:a16="http://schemas.microsoft.com/office/drawing/2014/main" val="10001"/>
+                  </a:ext>
+                </a:extLst>
               </a:tr>
               <a:tr h="384048">
                 <a:tc>
@@ -8244,7 +8249,7 @@
                     <a:bodyPr/>
                     <a:lstStyle/>
                     <a:p>
-                      <a:pPr indent="0" marL="0">
+                      <a:pPr marL="0" indent="0">
                         <a:buNone/>
                       </a:pPr>
                       <a:r>
@@ -8265,7 +8270,7 @@
                       </a:endParaRPr>
                     </a:p>
                   </a:txBody>
-                  <a:tcPr marL="91440" marR="91440" marT="45720" marB="45720" anchor="ctr">
+                  <a:tcPr anchor="ctr">
                     <a:lnL w="9525" cap="flat" cmpd="sng" algn="ctr">
                       <a:solidFill>
                         <a:srgbClr val="BFD8DD"/>
@@ -8312,7 +8317,7 @@
                     <a:bodyPr/>
                     <a:lstStyle/>
                     <a:p>
-                      <a:pPr algn="ctr" indent="0" marL="0">
+                      <a:pPr marL="0" indent="0" algn="ctr">
                         <a:buNone/>
                       </a:pPr>
                       <a:r>
@@ -8333,7 +8338,7 @@
                       </a:endParaRPr>
                     </a:p>
                   </a:txBody>
-                  <a:tcPr marL="91440" marR="91440" marT="45720" marB="45720" anchor="ctr">
+                  <a:tcPr anchor="ctr">
                     <a:lnL w="9525" cap="flat" cmpd="sng" algn="ctr">
                       <a:solidFill>
                         <a:srgbClr val="BFD8DD"/>
@@ -8380,7 +8385,7 @@
                     <a:bodyPr/>
                     <a:lstStyle/>
                     <a:p>
-                      <a:pPr algn="ctr" indent="0" marL="0">
+                      <a:pPr marL="0" indent="0" algn="ctr">
                         <a:buNone/>
                       </a:pPr>
                       <a:r>
@@ -8401,7 +8406,7 @@
                       </a:endParaRPr>
                     </a:p>
                   </a:txBody>
-                  <a:tcPr marL="91440" marR="91440" marT="45720" marB="45720" anchor="ctr">
+                  <a:tcPr anchor="ctr">
                     <a:lnL w="9525" cap="flat" cmpd="sng" algn="ctr">
                       <a:solidFill>
                         <a:srgbClr val="BFD8DD"/>
@@ -8443,6 +8448,11 @@
                     </a:solidFill>
                   </a:tcPr>
                 </a:tc>
+                <a:extLst>
+                  <a:ext uri="{0D108BD9-81ED-4DB2-BD59-A6C34878D82A}">
+                    <a16:rowId xmlns:a16="http://schemas.microsoft.com/office/drawing/2014/main" val="10002"/>
+                  </a:ext>
+                </a:extLst>
               </a:tr>
               <a:tr h="384048">
                 <a:tc>
@@ -8450,7 +8460,7 @@
                     <a:bodyPr/>
                     <a:lstStyle/>
                     <a:p>
-                      <a:pPr indent="0" marL="0">
+                      <a:pPr marL="0" indent="0">
                         <a:buNone/>
                       </a:pPr>
                       <a:r>
@@ -8471,7 +8481,7 @@
                       </a:endParaRPr>
                     </a:p>
                   </a:txBody>
-                  <a:tcPr marL="91440" marR="91440" marT="45720" marB="45720" anchor="ctr">
+                  <a:tcPr anchor="ctr">
                     <a:lnL w="9525" cap="flat" cmpd="sng" algn="ctr">
                       <a:solidFill>
                         <a:srgbClr val="BFD8DD"/>
@@ -8518,7 +8528,7 @@
                     <a:bodyPr/>
                     <a:lstStyle/>
                     <a:p>
-                      <a:pPr algn="ctr" indent="0" marL="0">
+                      <a:pPr marL="0" indent="0" algn="ctr">
                         <a:buNone/>
                       </a:pPr>
                       <a:r>
@@ -8539,7 +8549,7 @@
                       </a:endParaRPr>
                     </a:p>
                   </a:txBody>
-                  <a:tcPr marL="91440" marR="91440" marT="45720" marB="45720" anchor="ctr">
+                  <a:tcPr anchor="ctr">
                     <a:lnL w="9525" cap="flat" cmpd="sng" algn="ctr">
                       <a:solidFill>
                         <a:srgbClr val="BFD8DD"/>
@@ -8586,7 +8596,7 @@
                     <a:bodyPr/>
                     <a:lstStyle/>
                     <a:p>
-                      <a:pPr algn="ctr" indent="0" marL="0">
+                      <a:pPr marL="0" indent="0" algn="ctr">
                         <a:buNone/>
                       </a:pPr>
                       <a:r>
@@ -8607,7 +8617,7 @@
                       </a:endParaRPr>
                     </a:p>
                   </a:txBody>
-                  <a:tcPr marL="91440" marR="91440" marT="45720" marB="45720" anchor="ctr">
+                  <a:tcPr anchor="ctr">
                     <a:lnL w="9525" cap="flat" cmpd="sng" algn="ctr">
                       <a:solidFill>
                         <a:srgbClr val="BFD8DD"/>
@@ -8649,6 +8659,11 @@
                     </a:solidFill>
                   </a:tcPr>
                 </a:tc>
+                <a:extLst>
+                  <a:ext uri="{0D108BD9-81ED-4DB2-BD59-A6C34878D82A}">
+                    <a16:rowId xmlns:a16="http://schemas.microsoft.com/office/drawing/2014/main" val="10003"/>
+                  </a:ext>
+                </a:extLst>
               </a:tr>
               <a:tr h="384048">
                 <a:tc>
@@ -8656,7 +8671,7 @@
                     <a:bodyPr/>
                     <a:lstStyle/>
                     <a:p>
-                      <a:pPr indent="0" marL="0">
+                      <a:pPr marL="0" indent="0">
                         <a:buNone/>
                       </a:pPr>
                       <a:r>
@@ -8677,7 +8692,7 @@
                       </a:endParaRPr>
                     </a:p>
                   </a:txBody>
-                  <a:tcPr marL="91440" marR="91440" marT="45720" marB="45720" anchor="ctr">
+                  <a:tcPr anchor="ctr">
                     <a:lnL w="9525" cap="flat" cmpd="sng" algn="ctr">
                       <a:solidFill>
                         <a:srgbClr val="BFD8DD"/>
@@ -8724,7 +8739,7 @@
                     <a:bodyPr/>
                     <a:lstStyle/>
                     <a:p>
-                      <a:pPr algn="ctr" indent="0" marL="0">
+                      <a:pPr marL="0" indent="0" algn="ctr">
                         <a:buNone/>
                       </a:pPr>
                       <a:r>
@@ -8745,7 +8760,7 @@
                       </a:endParaRPr>
                     </a:p>
                   </a:txBody>
-                  <a:tcPr marL="91440" marR="91440" marT="45720" marB="45720" anchor="ctr">
+                  <a:tcPr anchor="ctr">
                     <a:lnL w="9525" cap="flat" cmpd="sng" algn="ctr">
                       <a:solidFill>
                         <a:srgbClr val="BFD8DD"/>
@@ -8792,7 +8807,7 @@
                     <a:bodyPr/>
                     <a:lstStyle/>
                     <a:p>
-                      <a:pPr algn="ctr" indent="0" marL="0">
+                      <a:pPr marL="0" indent="0" algn="ctr">
                         <a:buNone/>
                       </a:pPr>
                       <a:r>
@@ -8813,7 +8828,7 @@
                       </a:endParaRPr>
                     </a:p>
                   </a:txBody>
-                  <a:tcPr marL="91440" marR="91440" marT="45720" marB="45720" anchor="ctr">
+                  <a:tcPr anchor="ctr">
                     <a:lnL w="9525" cap="flat" cmpd="sng" algn="ctr">
                       <a:solidFill>
                         <a:srgbClr val="BFD8DD"/>
@@ -8855,6 +8870,11 @@
                     </a:solidFill>
                   </a:tcPr>
                 </a:tc>
+                <a:extLst>
+                  <a:ext uri="{0D108BD9-81ED-4DB2-BD59-A6C34878D82A}">
+                    <a16:rowId xmlns:a16="http://schemas.microsoft.com/office/drawing/2014/main" val="10004"/>
+                  </a:ext>
+                </a:extLst>
               </a:tr>
               <a:tr h="384048">
                 <a:tc>
@@ -8862,7 +8882,7 @@
                     <a:bodyPr/>
                     <a:lstStyle/>
                     <a:p>
-                      <a:pPr indent="0" marL="0">
+                      <a:pPr marL="0" indent="0">
                         <a:buNone/>
                       </a:pPr>
                       <a:r>
@@ -8883,7 +8903,7 @@
                       </a:endParaRPr>
                     </a:p>
                   </a:txBody>
-                  <a:tcPr marL="91440" marR="91440" marT="45720" marB="45720" anchor="ctr">
+                  <a:tcPr anchor="ctr">
                     <a:lnL w="9525" cap="flat" cmpd="sng" algn="ctr">
                       <a:solidFill>
                         <a:srgbClr val="BFD8DD"/>
@@ -8930,7 +8950,7 @@
                     <a:bodyPr/>
                     <a:lstStyle/>
                     <a:p>
-                      <a:pPr algn="ctr" indent="0" marL="0">
+                      <a:pPr marL="0" indent="0" algn="ctr">
                         <a:buNone/>
                       </a:pPr>
                       <a:r>
@@ -8951,7 +8971,7 @@
                       </a:endParaRPr>
                     </a:p>
                   </a:txBody>
-                  <a:tcPr marL="91440" marR="91440" marT="45720" marB="45720" anchor="ctr">
+                  <a:tcPr anchor="ctr">
                     <a:lnL w="9525" cap="flat" cmpd="sng" algn="ctr">
                       <a:solidFill>
                         <a:srgbClr val="BFD8DD"/>
@@ -8998,7 +9018,7 @@
                     <a:bodyPr/>
                     <a:lstStyle/>
                     <a:p>
-                      <a:pPr algn="ctr" indent="0" marL="0">
+                      <a:pPr marL="0" indent="0" algn="ctr">
                         <a:buNone/>
                       </a:pPr>
                       <a:r>
@@ -9019,7 +9039,7 @@
                       </a:endParaRPr>
                     </a:p>
                   </a:txBody>
-                  <a:tcPr marL="91440" marR="91440" marT="45720" marB="45720" anchor="ctr">
+                  <a:tcPr anchor="ctr">
                     <a:lnL w="9525" cap="flat" cmpd="sng" algn="ctr">
                       <a:solidFill>
                         <a:srgbClr val="BFD8DD"/>
@@ -9061,6 +9081,11 @@
                     </a:solidFill>
                   </a:tcPr>
                 </a:tc>
+                <a:extLst>
+                  <a:ext uri="{0D108BD9-81ED-4DB2-BD59-A6C34878D82A}">
+                    <a16:rowId xmlns:a16="http://schemas.microsoft.com/office/drawing/2014/main" val="10005"/>
+                  </a:ext>
+                </a:extLst>
               </a:tr>
               <a:tr h="384048">
                 <a:tc>
@@ -9068,7 +9093,7 @@
                     <a:bodyPr/>
                     <a:lstStyle/>
                     <a:p>
-                      <a:pPr indent="0" marL="0">
+                      <a:pPr marL="0" indent="0">
                         <a:buNone/>
                       </a:pPr>
                       <a:r>
@@ -9089,7 +9114,7 @@
                       </a:endParaRPr>
                     </a:p>
                   </a:txBody>
-                  <a:tcPr marL="91440" marR="91440" marT="45720" marB="45720" anchor="ctr">
+                  <a:tcPr anchor="ctr">
                     <a:lnL w="9525" cap="flat" cmpd="sng" algn="ctr">
                       <a:solidFill>
                         <a:srgbClr val="BFD8DD"/>
@@ -9136,7 +9161,7 @@
                     <a:bodyPr/>
                     <a:lstStyle/>
                     <a:p>
-                      <a:pPr algn="ctr" indent="0" marL="0">
+                      <a:pPr marL="0" indent="0" algn="ctr">
                         <a:buNone/>
                       </a:pPr>
                       <a:r>
@@ -9157,7 +9182,7 @@
                       </a:endParaRPr>
                     </a:p>
                   </a:txBody>
-                  <a:tcPr marL="91440" marR="91440" marT="45720" marB="45720" anchor="ctr">
+                  <a:tcPr anchor="ctr">
                     <a:lnL w="9525" cap="flat" cmpd="sng" algn="ctr">
                       <a:solidFill>
                         <a:srgbClr val="BFD8DD"/>
@@ -9204,7 +9229,7 @@
                     <a:bodyPr/>
                     <a:lstStyle/>
                     <a:p>
-                      <a:pPr algn="ctr" indent="0" marL="0">
+                      <a:pPr marL="0" indent="0" algn="ctr">
                         <a:buNone/>
                       </a:pPr>
                       <a:r>
@@ -9225,7 +9250,7 @@
                       </a:endParaRPr>
                     </a:p>
                   </a:txBody>
-                  <a:tcPr marL="91440" marR="91440" marT="45720" marB="45720" anchor="ctr">
+                  <a:tcPr anchor="ctr">
                     <a:lnL w="9525" cap="flat" cmpd="sng" algn="ctr">
                       <a:solidFill>
                         <a:srgbClr val="BFD8DD"/>
@@ -9267,6 +9292,11 @@
                     </a:solidFill>
                   </a:tcPr>
                 </a:tc>
+                <a:extLst>
+                  <a:ext uri="{0D108BD9-81ED-4DB2-BD59-A6C34878D82A}">
+                    <a16:rowId xmlns:a16="http://schemas.microsoft.com/office/drawing/2014/main" val="10006"/>
+                  </a:ext>
+                </a:extLst>
               </a:tr>
               <a:tr h="384048">
                 <a:tc>
@@ -9274,7 +9304,7 @@
                     <a:bodyPr/>
                     <a:lstStyle/>
                     <a:p>
-                      <a:pPr indent="0" marL="0">
+                      <a:pPr marL="0" indent="0">
                         <a:buNone/>
                       </a:pPr>
                       <a:r>
@@ -9295,7 +9325,7 @@
                       </a:endParaRPr>
                     </a:p>
                   </a:txBody>
-                  <a:tcPr marL="91440" marR="91440" marT="45720" marB="45720" anchor="ctr">
+                  <a:tcPr anchor="ctr">
                     <a:lnL w="9525" cap="flat" cmpd="sng" algn="ctr">
                       <a:solidFill>
                         <a:srgbClr val="BFD8DD"/>
@@ -9342,7 +9372,7 @@
                     <a:bodyPr/>
                     <a:lstStyle/>
                     <a:p>
-                      <a:pPr algn="ctr" indent="0" marL="0">
+                      <a:pPr marL="0" indent="0" algn="ctr">
                         <a:buNone/>
                       </a:pPr>
                       <a:r>
@@ -9363,7 +9393,7 @@
                       </a:endParaRPr>
                     </a:p>
                   </a:txBody>
-                  <a:tcPr marL="91440" marR="91440" marT="45720" marB="45720" anchor="ctr">
+                  <a:tcPr anchor="ctr">
                     <a:lnL w="9525" cap="flat" cmpd="sng" algn="ctr">
                       <a:solidFill>
                         <a:srgbClr val="BFD8DD"/>
@@ -9410,7 +9440,7 @@
                     <a:bodyPr/>
                     <a:lstStyle/>
                     <a:p>
-                      <a:pPr algn="ctr" indent="0" marL="0">
+                      <a:pPr marL="0" indent="0" algn="ctr">
                         <a:buNone/>
                       </a:pPr>
                       <a:r>
@@ -9431,7 +9461,7 @@
                       </a:endParaRPr>
                     </a:p>
                   </a:txBody>
-                  <a:tcPr marL="91440" marR="91440" marT="45720" marB="45720" anchor="ctr">
+                  <a:tcPr anchor="ctr">
                     <a:lnL w="9525" cap="flat" cmpd="sng" algn="ctr">
                       <a:solidFill>
                         <a:srgbClr val="BFD8DD"/>
@@ -9473,6 +9503,11 @@
                     </a:solidFill>
                   </a:tcPr>
                 </a:tc>
+                <a:extLst>
+                  <a:ext uri="{0D108BD9-81ED-4DB2-BD59-A6C34878D82A}">
+                    <a16:rowId xmlns:a16="http://schemas.microsoft.com/office/drawing/2014/main" val="10007"/>
+                  </a:ext>
+                </a:extLst>
               </a:tr>
             </a:tbl>
           </a:graphicData>
@@ -9504,6 +9539,13 @@
             <a:prstDash val="solid"/>
           </a:ln>
         </p:spPr>
+        <p:txBody>
+          <a:bodyPr/>
+          <a:lstStyle/>
+          <a:p>
+            <a:endParaRPr lang="en-US"/>
+          </a:p>
+        </p:txBody>
       </p:sp>
       <p:sp>
         <p:nvSpPr>
@@ -9526,7 +9568,7 @@
           <a:bodyPr wrap="square" lIns="0" tIns="0" rIns="0" bIns="0" rtlCol="0" anchor="ctr"/>
           <a:lstStyle/>
           <a:p>
-            <a:pPr indent="0" marL="0">
+            <a:pPr marL="0" indent="0">
               <a:buNone/>
             </a:pPr>
             <a:r>
@@ -9540,9 +9582,6 @@
               </a:rPr>
               <a:t>Ý nghĩa: </a:t>
             </a:r>
-            <a:pPr indent="0" marL="0">
-              <a:buNone/>
-            </a:pPr>
             <a:r>
               <a:rPr lang="en-US" sz="1200" dirty="0">
                 <a:solidFill>
@@ -9560,7 +9599,7 @@
       </p:sp>
       <p:graphicFrame>
         <p:nvGraphicFramePr>
-          <p:cNvPr id="7" name="Chart 0" descr=""/>
+          <p:cNvPr id="7" name="Chart 0"/>
           <p:cNvGraphicFramePr/>
           <p:nvPr/>
         </p:nvGraphicFramePr>
@@ -9568,9 +9607,9 @@
           <a:off x="6583680" y="1325880"/>
           <a:ext cx="5029200" cy="3566160"/>
         </p:xfrm>
-        <a:graphic xmlns:a="http://schemas.openxmlformats.org/drawingml/2006/main">
+        <a:graphic>
           <a:graphicData uri="http://schemas.openxmlformats.org/drawingml/2006/chart">
-            <c:chart xmlns:c="http://schemas.openxmlformats.org/drawingml/2006/chart" r:id="rId1"/>
+            <c:chart xmlns:c="http://schemas.openxmlformats.org/drawingml/2006/chart" xmlns:r="http://schemas.openxmlformats.org/officeDocument/2006/relationships" r:id="rId3"/>
           </a:graphicData>
         </a:graphic>
       </p:graphicFrame>
@@ -9600,6 +9639,13 @@
             <a:prstDash val="solid"/>
           </a:ln>
         </p:spPr>
+        <p:txBody>
+          <a:bodyPr/>
+          <a:lstStyle/>
+          <a:p>
+            <a:endParaRPr lang="en-US"/>
+          </a:p>
+        </p:txBody>
       </p:sp>
       <p:sp>
         <p:nvSpPr>
@@ -9622,7 +9668,7 @@
           <a:bodyPr wrap="square" lIns="0" tIns="0" rIns="0" bIns="0" rtlCol="0" anchor="ctr"/>
           <a:lstStyle/>
           <a:p>
-            <a:pPr indent="0" marL="0">
+            <a:pPr marL="0" indent="0">
               <a:buNone/>
             </a:pPr>
             <a:r>
@@ -9661,7 +9707,7 @@
           <a:bodyPr wrap="square" lIns="0" tIns="0" rIns="0" bIns="0" rtlCol="0" anchor="t"/>
           <a:lstStyle/>
           <a:p>
-            <a:pPr indent="0" marL="0">
+            <a:pPr marL="0" indent="0">
               <a:buNone/>
             </a:pPr>
             <a:r>
@@ -9695,6 +9741,7 @@
         <a:solidFill>
           <a:srgbClr val="FFFFFF"/>
         </a:solidFill>
+        <a:effectLst/>
       </p:bgPr>
     </p:bg>
     <p:spTree>
@@ -9732,11 +9779,11 @@
           <a:bodyPr wrap="square" lIns="0" tIns="0" rIns="0" bIns="0" rtlCol="0" anchor="t"/>
           <a:lstStyle/>
           <a:p>
-            <a:pPr indent="0" marL="0">
+            <a:pPr marL="0" indent="0">
               <a:buNone/>
             </a:pPr>
             <a:r>
-              <a:rPr lang="en-US" sz="1100" b="1" spc="200" kern="0" dirty="0">
+              <a:rPr lang="en-US" sz="1100" b="1" kern="0" spc="200" dirty="0">
                 <a:solidFill>
                   <a:srgbClr val="D98C1F"/>
                 </a:solidFill>
@@ -9771,7 +9818,7 @@
           <a:bodyPr wrap="square" lIns="0" tIns="0" rIns="0" bIns="0" rtlCol="0" anchor="ctr"/>
           <a:lstStyle/>
           <a:p>
-            <a:pPr indent="0" marL="0">
+            <a:pPr marL="0" indent="0">
               <a:buNone/>
             </a:pPr>
             <a:r>
@@ -9815,6 +9862,13 @@
             <a:prstDash val="solid"/>
           </a:ln>
         </p:spPr>
+        <p:txBody>
+          <a:bodyPr/>
+          <a:lstStyle/>
+          <a:p>
+            <a:endParaRPr lang="en-US"/>
+          </a:p>
+        </p:txBody>
       </p:sp>
       <p:sp>
         <p:nvSpPr>
@@ -9837,7 +9891,7 @@
           <a:bodyPr wrap="square" lIns="0" tIns="0" rIns="0" bIns="0" rtlCol="0" anchor="t"/>
           <a:lstStyle/>
           <a:p>
-            <a:pPr indent="0" marL="0">
+            <a:pPr marL="0" indent="0">
               <a:buNone/>
             </a:pPr>
             <a:r>
@@ -9876,7 +9930,7 @@
           <a:bodyPr wrap="square" lIns="0" tIns="0" rIns="0" bIns="0" rtlCol="0" anchor="t"/>
           <a:lstStyle/>
           <a:p>
-            <a:pPr indent="0" marL="0">
+            <a:pPr marL="0" indent="0">
               <a:buNone/>
             </a:pPr>
             <a:r>
@@ -9915,7 +9969,7 @@
           <a:bodyPr wrap="square" lIns="0" tIns="0" rIns="0" bIns="0" rtlCol="0" anchor="t"/>
           <a:lstStyle/>
           <a:p>
-            <a:pPr indent="0" marL="0">
+            <a:pPr marL="0" indent="0">
               <a:buNone/>
             </a:pPr>
             <a:r>
@@ -9929,9 +9983,6 @@
               </a:rPr>
               <a:t>Đúng ra: </a:t>
             </a:r>
-            <a:pPr indent="0" marL="0">
-              <a:buNone/>
-            </a:pPr>
             <a:r>
               <a:rPr lang="en-US" sz="1250" dirty="0">
                 <a:solidFill>
@@ -9968,7 +10019,7 @@
           <a:bodyPr wrap="square" lIns="0" tIns="0" rIns="0" bIns="0" rtlCol="0" anchor="t"/>
           <a:lstStyle/>
           <a:p>
-            <a:pPr indent="0" marL="0">
+            <a:pPr marL="0" indent="0">
               <a:buNone/>
             </a:pPr>
             <a:r>
@@ -9982,9 +10033,6 @@
               </a:rPr>
               <a:t>Hệ trả lời: </a:t>
             </a:r>
-            <a:pPr indent="0" marL="0">
-              <a:buNone/>
-            </a:pPr>
             <a:r>
               <a:rPr lang="en-US" sz="1250" dirty="0">
                 <a:solidFill>
@@ -10026,6 +10074,13 @@
             <a:prstDash val="solid"/>
           </a:ln>
         </p:spPr>
+        <p:txBody>
+          <a:bodyPr/>
+          <a:lstStyle/>
+          <a:p>
+            <a:endParaRPr lang="en-US"/>
+          </a:p>
+        </p:txBody>
       </p:sp>
       <p:sp>
         <p:nvSpPr>
@@ -10048,7 +10103,7 @@
           <a:bodyPr wrap="square" lIns="0" tIns="0" rIns="0" bIns="0" rtlCol="0" anchor="ctr"/>
           <a:lstStyle/>
           <a:p>
-            <a:pPr indent="0" marL="0">
+            <a:pPr marL="0" indent="0">
               <a:buNone/>
             </a:pPr>
             <a:r>
@@ -10062,9 +10117,6 @@
               </a:rPr>
               <a:t>Nguyên nhân: </a:t>
             </a:r>
-            <a:pPr indent="0" marL="0">
-              <a:buNone/>
-            </a:pPr>
             <a:r>
               <a:rPr lang="en-US" sz="1250" dirty="0">
                 <a:solidFill>
@@ -10106,6 +10158,13 @@
             <a:prstDash val="solid"/>
           </a:ln>
         </p:spPr>
+        <p:txBody>
+          <a:bodyPr/>
+          <a:lstStyle/>
+          <a:p>
+            <a:endParaRPr lang="en-US"/>
+          </a:p>
+        </p:txBody>
       </p:sp>
       <p:sp>
         <p:nvSpPr>
@@ -10128,7 +10187,7 @@
           <a:bodyPr wrap="square" lIns="0" tIns="0" rIns="0" bIns="0" rtlCol="0" anchor="t"/>
           <a:lstStyle/>
           <a:p>
-            <a:pPr indent="0" marL="0">
+            <a:pPr marL="0" indent="0">
               <a:buNone/>
             </a:pPr>
             <a:r>
@@ -10167,7 +10226,7 @@
           <a:bodyPr wrap="square" lIns="0" tIns="0" rIns="0" bIns="0" rtlCol="0" anchor="t"/>
           <a:lstStyle/>
           <a:p>
-            <a:pPr indent="0" marL="0">
+            <a:pPr marL="0" indent="0">
               <a:buNone/>
             </a:pPr>
             <a:r>
@@ -10206,7 +10265,7 @@
           <a:bodyPr wrap="square" lIns="0" tIns="0" rIns="0" bIns="0" rtlCol="0" anchor="t"/>
           <a:lstStyle/>
           <a:p>
-            <a:pPr indent="0" marL="0">
+            <a:pPr marL="0" indent="0">
               <a:buNone/>
             </a:pPr>
             <a:r>
@@ -10220,9 +10279,6 @@
               </a:rPr>
               <a:t>Đúng ra: </a:t>
             </a:r>
-            <a:pPr indent="0" marL="0">
-              <a:buNone/>
-            </a:pPr>
             <a:r>
               <a:rPr lang="en-US" sz="1250" dirty="0">
                 <a:solidFill>
@@ -10259,7 +10315,7 @@
           <a:bodyPr wrap="square" lIns="0" tIns="0" rIns="0" bIns="0" rtlCol="0" anchor="t"/>
           <a:lstStyle/>
           <a:p>
-            <a:pPr indent="0" marL="0">
+            <a:pPr marL="0" indent="0">
               <a:buNone/>
             </a:pPr>
             <a:r>
@@ -10273,9 +10329,6 @@
               </a:rPr>
               <a:t>Hệ trả lời: </a:t>
             </a:r>
-            <a:pPr indent="0" marL="0">
-              <a:buNone/>
-            </a:pPr>
             <a:r>
               <a:rPr lang="en-US" sz="1250" dirty="0">
                 <a:solidFill>
@@ -10317,6 +10370,13 @@
             <a:prstDash val="solid"/>
           </a:ln>
         </p:spPr>
+        <p:txBody>
+          <a:bodyPr/>
+          <a:lstStyle/>
+          <a:p>
+            <a:endParaRPr lang="en-US"/>
+          </a:p>
+        </p:txBody>
       </p:sp>
       <p:sp>
         <p:nvSpPr>
@@ -10339,7 +10399,7 @@
           <a:bodyPr wrap="square" lIns="0" tIns="0" rIns="0" bIns="0" rtlCol="0" anchor="ctr"/>
           <a:lstStyle/>
           <a:p>
-            <a:pPr indent="0" marL="0">
+            <a:pPr marL="0" indent="0">
               <a:buNone/>
             </a:pPr>
             <a:r>
@@ -10353,9 +10413,6 @@
               </a:rPr>
               <a:t>Nguyên nhân: </a:t>
             </a:r>
-            <a:pPr indent="0" marL="0">
-              <a:buNone/>
-            </a:pPr>
             <a:r>
               <a:rPr lang="en-US" sz="1250" dirty="0">
                 <a:solidFill>
@@ -10397,6 +10454,13 @@
             <a:prstDash val="solid"/>
           </a:ln>
         </p:spPr>
+        <p:txBody>
+          <a:bodyPr/>
+          <a:lstStyle/>
+          <a:p>
+            <a:endParaRPr lang="en-US"/>
+          </a:p>
+        </p:txBody>
       </p:sp>
       <p:sp>
         <p:nvSpPr>
@@ -10419,7 +10483,7 @@
           <a:bodyPr wrap="square" lIns="0" tIns="0" rIns="0" bIns="0" rtlCol="0" anchor="ctr"/>
           <a:lstStyle/>
           <a:p>
-            <a:pPr indent="0" marL="0">
+            <a:pPr marL="0" indent="0">
               <a:buNone/>
             </a:pPr>
             <a:r>
@@ -10433,9 +10497,6 @@
               </a:rPr>
               <a:t>Đối chiếu nhãn chấm: </a:t>
             </a:r>
-            <a:pPr indent="0" marL="0">
-              <a:buNone/>
-            </a:pPr>
             <a:r>
               <a:rPr lang="en-US" sz="1150" dirty="0">
                 <a:solidFill>
@@ -10472,7 +10533,7 @@
           <a:bodyPr wrap="square" lIns="0" tIns="0" rIns="0" bIns="0" rtlCol="0" anchor="t"/>
           <a:lstStyle/>
           <a:p>
-            <a:pPr indent="0" marL="0">
+            <a:pPr marL="0" indent="0">
               <a:buNone/>
             </a:pPr>
             <a:r>
@@ -10506,6 +10567,7 @@
         <a:solidFill>
           <a:srgbClr val="FFFFFF"/>
         </a:solidFill>
+        <a:effectLst/>
       </p:bgPr>
     </p:bg>
     <p:spTree>
@@ -10543,11 +10605,11 @@
           <a:bodyPr wrap="square" lIns="0" tIns="0" rIns="0" bIns="0" rtlCol="0" anchor="t"/>
           <a:lstStyle/>
           <a:p>
-            <a:pPr indent="0" marL="0">
+            <a:pPr marL="0" indent="0">
               <a:buNone/>
             </a:pPr>
             <a:r>
-              <a:rPr lang="en-US" sz="1100" b="1" spc="200" kern="0" dirty="0">
+              <a:rPr lang="en-US" sz="1100" b="1" kern="0" spc="200" dirty="0">
                 <a:solidFill>
                   <a:srgbClr val="D98C1F"/>
                 </a:solidFill>
@@ -10582,7 +10644,7 @@
           <a:bodyPr wrap="square" lIns="0" tIns="0" rIns="0" bIns="0" rtlCol="0" anchor="ctr"/>
           <a:lstStyle/>
           <a:p>
-            <a:pPr indent="0" marL="0">
+            <a:pPr marL="0" indent="0">
               <a:buNone/>
             </a:pPr>
             <a:r>
@@ -10621,7 +10683,7 @@
           <a:bodyPr wrap="square" lIns="0" tIns="0" rIns="0" bIns="0" rtlCol="0" anchor="t"/>
           <a:lstStyle/>
           <a:p>
-            <a:pPr indent="0" marL="0">
+            <a:pPr marL="0" indent="0">
               <a:buNone/>
             </a:pPr>
             <a:r>
@@ -10665,6 +10727,13 @@
             <a:prstDash val="solid"/>
           </a:ln>
         </p:spPr>
+        <p:txBody>
+          <a:bodyPr/>
+          <a:lstStyle/>
+          <a:p>
+            <a:endParaRPr lang="en-US"/>
+          </a:p>
+        </p:txBody>
       </p:sp>
       <p:sp>
         <p:nvSpPr>
@@ -10687,7 +10756,7 @@
           <a:bodyPr wrap="square" lIns="0" tIns="0" rIns="0" bIns="0" rtlCol="0" anchor="t"/>
           <a:lstStyle/>
           <a:p>
-            <a:pPr indent="0" marL="0">
+            <a:pPr marL="0" indent="0">
               <a:buNone/>
             </a:pPr>
             <a:r>
@@ -10726,7 +10795,7 @@
           <a:bodyPr wrap="square" lIns="0" tIns="0" rIns="0" bIns="0" rtlCol="0" anchor="t"/>
           <a:lstStyle/>
           <a:p>
-            <a:pPr indent="0" marL="0">
+            <a:pPr marL="0" indent="0">
               <a:buNone/>
             </a:pPr>
             <a:r>
@@ -10770,6 +10839,13 @@
             <a:prstDash val="solid"/>
           </a:ln>
         </p:spPr>
+        <p:txBody>
+          <a:bodyPr/>
+          <a:lstStyle/>
+          <a:p>
+            <a:endParaRPr lang="en-US"/>
+          </a:p>
+        </p:txBody>
       </p:sp>
       <p:sp>
         <p:nvSpPr>
@@ -10792,7 +10868,7 @@
           <a:bodyPr wrap="square" lIns="0" tIns="0" rIns="0" bIns="0" rtlCol="0" anchor="t"/>
           <a:lstStyle/>
           <a:p>
-            <a:pPr indent="0" marL="0">
+            <a:pPr marL="0" indent="0">
               <a:buNone/>
             </a:pPr>
             <a:r>
@@ -10831,7 +10907,7 @@
           <a:bodyPr wrap="square" lIns="0" tIns="0" rIns="0" bIns="0" rtlCol="0" anchor="t"/>
           <a:lstStyle/>
           <a:p>
-            <a:pPr indent="0" marL="0">
+            <a:pPr marL="0" indent="0">
               <a:buNone/>
             </a:pPr>
             <a:r>
@@ -10851,41 +10927,14 @@
       </p:sp>
       <p:sp>
         <p:nvSpPr>
-          <p:cNvPr id="11" name="Shape 9"/>
-          <p:cNvSpPr/>
-          <p:nvPr/>
-        </p:nvSpPr>
-        <p:spPr>
-          <a:xfrm>
-            <a:off x="548640" y="4114800"/>
-            <a:ext cx="5303520" cy="1005840"/>
-          </a:xfrm>
-          <a:prstGeom prst="roundRect">
-            <a:avLst>
-              <a:gd name="adj" fmla="val 5455"/>
-            </a:avLst>
-          </a:prstGeom>
-          <a:solidFill>
-            <a:srgbClr val="FBE9E7"/>
-          </a:solidFill>
-          <a:ln w="12700">
-            <a:solidFill>
-              <a:srgbClr val="FBE9E7"/>
-            </a:solidFill>
-            <a:prstDash val="solid"/>
-          </a:ln>
-        </p:spPr>
-      </p:sp>
-      <p:sp>
-        <p:nvSpPr>
-          <p:cNvPr id="12" name="Text 10"/>
+          <p:cNvPr id="14" name="Text 12"/>
           <p:cNvSpPr txBox="1"/>
           <p:nvPr/>
         </p:nvSpPr>
         <p:spPr>
           <a:xfrm>
-            <a:off x="777240" y="4224528"/>
-            <a:ext cx="4937760" cy="320040"/>
+            <a:off x="6309360" y="1371600"/>
+            <a:ext cx="5303520" cy="274320"/>
           </a:xfrm>
           <a:prstGeom prst="rect">
             <a:avLst/>
@@ -10897,85 +10946,7 @@
           <a:bodyPr wrap="square" lIns="0" tIns="0" rIns="0" bIns="0" rtlCol="0" anchor="t"/>
           <a:lstStyle/>
           <a:p>
-            <a:pPr indent="0" marL="0">
-              <a:buNone/>
-            </a:pPr>
-            <a:r>
-              <a:rPr lang="en-US" sz="1350" b="1" dirty="0">
-                <a:solidFill>
-                  <a:srgbClr val="12232E"/>
-                </a:solidFill>
-                <a:latin typeface="Calibri" pitchFamily="34" charset="0"/>
-                <a:ea typeface="Calibri" pitchFamily="34" charset="-122"/>
-                <a:cs typeface="Calibri" pitchFamily="34" charset="-120"/>
-              </a:rPr>
-              <a:t>Judge trùng mô hình trả lời</a:t>
-            </a:r>
-            <a:endParaRPr lang="en-US" sz="1350" dirty="0"/>
-          </a:p>
-        </p:txBody>
-      </p:sp>
-      <p:sp>
-        <p:nvSpPr>
-          <p:cNvPr id="13" name="Text 11"/>
-          <p:cNvSpPr txBox="1"/>
-          <p:nvPr/>
-        </p:nvSpPr>
-        <p:spPr>
-          <a:xfrm>
-            <a:off x="777240" y="4572000"/>
-            <a:ext cx="4937760" cy="502920"/>
-          </a:xfrm>
-          <a:prstGeom prst="rect">
-            <a:avLst/>
-          </a:prstGeom>
-          <a:noFill/>
-          <a:ln/>
-        </p:spPr>
-        <p:txBody>
-          <a:bodyPr wrap="square" lIns="0" tIns="0" rIns="0" bIns="0" rtlCol="0" anchor="t"/>
-          <a:lstStyle/>
-          <a:p>
-            <a:pPr indent="0" marL="0">
-              <a:buNone/>
-            </a:pPr>
-            <a:r>
-              <a:rPr lang="en-US" sz="1150" dirty="0">
-                <a:solidFill>
-                  <a:srgbClr val="1E2A32"/>
-                </a:solidFill>
-                <a:latin typeface="Calibri" pitchFamily="34" charset="0"/>
-                <a:ea typeface="Calibri" pitchFamily="34" charset="-122"/>
-                <a:cs typeface="Calibri" pitchFamily="34" charset="-120"/>
-              </a:rPr>
-              <a:t>Luna tự chấm bài của mình; mới đối chiếu bằng mô hình khác, chưa chấm tay.</a:t>
-            </a:r>
-            <a:endParaRPr lang="en-US" sz="1150" dirty="0"/>
-          </a:p>
-        </p:txBody>
-      </p:sp>
-      <p:sp>
-        <p:nvSpPr>
-          <p:cNvPr id="14" name="Text 12"/>
-          <p:cNvSpPr txBox="1"/>
-          <p:nvPr/>
-        </p:nvSpPr>
-        <p:spPr>
-          <a:xfrm>
-            <a:off x="6309360" y="1371600"/>
-            <a:ext cx="5303520" cy="274320"/>
-          </a:xfrm>
-          <a:prstGeom prst="rect">
-            <a:avLst/>
-          </a:prstGeom>
-          <a:noFill/>
-          <a:ln/>
-        </p:spPr>
-        <p:txBody>
-          <a:bodyPr wrap="square" lIns="0" tIns="0" rIns="0" bIns="0" rtlCol="0" anchor="t"/>
-          <a:lstStyle/>
-          <a:p>
-            <a:pPr indent="0" marL="0">
+            <a:pPr marL="0" indent="0">
               <a:buNone/>
             </a:pPr>
             <a:r>
@@ -11017,6 +10988,13 @@
             <a:prstDash val="solid"/>
           </a:ln>
         </p:spPr>
+        <p:txBody>
+          <a:bodyPr/>
+          <a:lstStyle/>
+          <a:p>
+            <a:endParaRPr lang="en-US"/>
+          </a:p>
+        </p:txBody>
       </p:sp>
       <p:sp>
         <p:nvSpPr>
@@ -11039,7 +11017,7 @@
           <a:bodyPr wrap="square" lIns="0" tIns="0" rIns="0" bIns="0" rtlCol="0" anchor="ctr"/>
           <a:lstStyle/>
           <a:p>
-            <a:pPr algn="ctr" indent="0" marL="0">
+            <a:pPr marL="0" indent="0" algn="ctr">
               <a:buNone/>
             </a:pPr>
             <a:r>
@@ -11078,7 +11056,7 @@
           <a:bodyPr wrap="square" lIns="0" tIns="0" rIns="0" bIns="0" rtlCol="0" anchor="t"/>
           <a:lstStyle/>
           <a:p>
-            <a:pPr indent="0" marL="0">
+            <a:pPr marL="0" indent="0">
               <a:buNone/>
             </a:pPr>
             <a:r>
@@ -11117,7 +11095,7 @@
           <a:bodyPr wrap="square" lIns="0" tIns="0" rIns="0" bIns="0" rtlCol="0" anchor="t"/>
           <a:lstStyle/>
           <a:p>
-            <a:pPr indent="0" marL="0">
+            <a:pPr marL="0" indent="0">
               <a:buNone/>
             </a:pPr>
             <a:r>
@@ -11159,6 +11137,13 @@
             <a:prstDash val="solid"/>
           </a:ln>
         </p:spPr>
+        <p:txBody>
+          <a:bodyPr/>
+          <a:lstStyle/>
+          <a:p>
+            <a:endParaRPr lang="en-US"/>
+          </a:p>
+        </p:txBody>
       </p:sp>
       <p:sp>
         <p:nvSpPr>
@@ -11181,7 +11166,7 @@
           <a:bodyPr wrap="square" lIns="0" tIns="0" rIns="0" bIns="0" rtlCol="0" anchor="ctr"/>
           <a:lstStyle/>
           <a:p>
-            <a:pPr algn="ctr" indent="0" marL="0">
+            <a:pPr marL="0" indent="0" algn="ctr">
               <a:buNone/>
             </a:pPr>
             <a:r>
@@ -11220,7 +11205,7 @@
           <a:bodyPr wrap="square" lIns="0" tIns="0" rIns="0" bIns="0" rtlCol="0" anchor="t"/>
           <a:lstStyle/>
           <a:p>
-            <a:pPr indent="0" marL="0">
+            <a:pPr marL="0" indent="0">
               <a:buNone/>
             </a:pPr>
             <a:r>
@@ -11232,7 +11217,29 @@
                 <a:ea typeface="Calibri" pitchFamily="34" charset="-122"/>
                 <a:cs typeface="Calibri" pitchFamily="34" charset="-120"/>
               </a:rPr>
-              <a:t>Chạy thêm 10 câu temporal + mở rộng dev</a:t>
+              <a:t>Chạy </a:t>
+            </a:r>
+            <a:r>
+              <a:rPr lang="en-US" sz="1350" b="1" dirty="0" err="1">
+                <a:solidFill>
+                  <a:srgbClr val="12232E"/>
+                </a:solidFill>
+                <a:latin typeface="Calibri" pitchFamily="34" charset="0"/>
+                <a:ea typeface="Calibri" pitchFamily="34" charset="-122"/>
+                <a:cs typeface="Calibri" pitchFamily="34" charset="-120"/>
+              </a:rPr>
+              <a:t>thêm</a:t>
+            </a:r>
+            <a:r>
+              <a:rPr lang="en-US" sz="1350" b="1" dirty="0">
+                <a:solidFill>
+                  <a:srgbClr val="12232E"/>
+                </a:solidFill>
+                <a:latin typeface="Calibri" pitchFamily="34" charset="0"/>
+                <a:ea typeface="Calibri" pitchFamily="34" charset="-122"/>
+                <a:cs typeface="Calibri" pitchFamily="34" charset="-120"/>
+              </a:rPr>
+              <a:t> + mở rộng dev</a:t>
             </a:r>
             <a:endParaRPr lang="en-US" sz="1350" dirty="0"/>
           </a:p>
@@ -11259,7 +11266,7 @@
           <a:bodyPr wrap="square" lIns="0" tIns="0" rIns="0" bIns="0" rtlCol="0" anchor="t"/>
           <a:lstStyle/>
           <a:p>
-            <a:pPr indent="0" marL="0">
+            <a:pPr marL="0" indent="0">
               <a:buNone/>
             </a:pPr>
             <a:r>
@@ -11301,6 +11308,13 @@
             <a:prstDash val="solid"/>
           </a:ln>
         </p:spPr>
+        <p:txBody>
+          <a:bodyPr/>
+          <a:lstStyle/>
+          <a:p>
+            <a:endParaRPr lang="en-US"/>
+          </a:p>
+        </p:txBody>
       </p:sp>
       <p:sp>
         <p:nvSpPr>
@@ -11323,7 +11337,7 @@
           <a:bodyPr wrap="square" lIns="0" tIns="0" rIns="0" bIns="0" rtlCol="0" anchor="ctr"/>
           <a:lstStyle/>
           <a:p>
-            <a:pPr algn="ctr" indent="0" marL="0">
+            <a:pPr marL="0" indent="0" algn="ctr">
               <a:buNone/>
             </a:pPr>
             <a:r>
@@ -11362,7 +11376,7 @@
           <a:bodyPr wrap="square" lIns="0" tIns="0" rIns="0" bIns="0" rtlCol="0" anchor="t"/>
           <a:lstStyle/>
           <a:p>
-            <a:pPr indent="0" marL="0">
+            <a:pPr marL="0" indent="0">
               <a:buNone/>
             </a:pPr>
             <a:r>
@@ -11401,7 +11415,7 @@
           <a:bodyPr wrap="square" lIns="0" tIns="0" rIns="0" bIns="0" rtlCol="0" anchor="t"/>
           <a:lstStyle/>
           <a:p>
-            <a:pPr indent="0" marL="0">
+            <a:pPr marL="0" indent="0">
               <a:buNone/>
             </a:pPr>
             <a:r>
@@ -11443,6 +11457,13 @@
             <a:prstDash val="solid"/>
           </a:ln>
         </p:spPr>
+        <p:txBody>
+          <a:bodyPr/>
+          <a:lstStyle/>
+          <a:p>
+            <a:endParaRPr lang="en-US"/>
+          </a:p>
+        </p:txBody>
       </p:sp>
       <p:sp>
         <p:nvSpPr>
@@ -11465,7 +11486,7 @@
           <a:bodyPr wrap="square" lIns="0" tIns="0" rIns="0" bIns="0" rtlCol="0" anchor="ctr"/>
           <a:lstStyle/>
           <a:p>
-            <a:pPr algn="ctr" indent="0" marL="0">
+            <a:pPr marL="0" indent="0" algn="ctr">
               <a:buNone/>
             </a:pPr>
             <a:r>
@@ -11504,7 +11525,7 @@
           <a:bodyPr wrap="square" lIns="0" tIns="0" rIns="0" bIns="0" rtlCol="0" anchor="t"/>
           <a:lstStyle/>
           <a:p>
-            <a:pPr indent="0" marL="0">
+            <a:pPr marL="0" indent="0">
               <a:buNone/>
             </a:pPr>
             <a:r>
@@ -11543,7 +11564,7 @@
           <a:bodyPr wrap="square" lIns="0" tIns="0" rIns="0" bIns="0" rtlCol="0" anchor="t"/>
           <a:lstStyle/>
           <a:p>
-            <a:pPr indent="0" marL="0">
+            <a:pPr marL="0" indent="0">
               <a:buNone/>
             </a:pPr>
             <a:r>
@@ -11587,6 +11608,13 @@
             <a:prstDash val="solid"/>
           </a:ln>
         </p:spPr>
+        <p:txBody>
+          <a:bodyPr/>
+          <a:lstStyle/>
+          <a:p>
+            <a:endParaRPr lang="en-US"/>
+          </a:p>
+        </p:txBody>
       </p:sp>
       <p:sp>
         <p:nvSpPr>
@@ -11609,7 +11637,7 @@
           <a:bodyPr wrap="square" lIns="0" tIns="0" rIns="0" bIns="0" rtlCol="0" anchor="ctr"/>
           <a:lstStyle/>
           <a:p>
-            <a:pPr indent="0" marL="0">
+            <a:pPr marL="0" indent="0">
               <a:buNone/>
             </a:pPr>
             <a:r>
@@ -11643,6 +11671,7 @@
         <a:solidFill>
           <a:srgbClr val="FFFFFF"/>
         </a:solidFill>
+        <a:effectLst/>
       </p:bgPr>
     </p:bg>
     <p:spTree>
@@ -11680,11 +11709,11 @@
           <a:bodyPr wrap="square" lIns="0" tIns="0" rIns="0" bIns="0" rtlCol="0" anchor="t"/>
           <a:lstStyle/>
           <a:p>
-            <a:pPr indent="0" marL="0">
+            <a:pPr marL="0" indent="0">
               <a:buNone/>
             </a:pPr>
             <a:r>
-              <a:rPr lang="en-US" sz="1100" b="1" spc="200" kern="0" dirty="0">
+              <a:rPr lang="en-US" sz="1100" b="1" kern="0" spc="200" dirty="0">
                 <a:solidFill>
                   <a:srgbClr val="D98C1F"/>
                 </a:solidFill>
@@ -11719,7 +11748,7 @@
           <a:bodyPr wrap="square" lIns="0" tIns="0" rIns="0" bIns="0" rtlCol="0" anchor="ctr"/>
           <a:lstStyle/>
           <a:p>
-            <a:pPr indent="0" marL="0">
+            <a:pPr marL="0" indent="0">
               <a:buNone/>
             </a:pPr>
             <a:r>
@@ -11763,6 +11792,13 @@
             <a:prstDash val="solid"/>
           </a:ln>
         </p:spPr>
+        <p:txBody>
+          <a:bodyPr/>
+          <a:lstStyle/>
+          <a:p>
+            <a:endParaRPr lang="en-US"/>
+          </a:p>
+        </p:txBody>
       </p:sp>
       <p:sp>
         <p:nvSpPr>
@@ -11788,6 +11824,13 @@
             <a:prstDash val="solid"/>
           </a:ln>
         </p:spPr>
+        <p:txBody>
+          <a:bodyPr/>
+          <a:lstStyle/>
+          <a:p>
+            <a:endParaRPr lang="en-US"/>
+          </a:p>
+        </p:txBody>
       </p:sp>
       <p:sp>
         <p:nvSpPr>
@@ -11810,7 +11853,7 @@
           <a:bodyPr wrap="square" lIns="0" tIns="0" rIns="0" bIns="0" rtlCol="0" anchor="ctr"/>
           <a:lstStyle/>
           <a:p>
-            <a:pPr algn="ctr" indent="0" marL="0">
+            <a:pPr marL="0" indent="0" algn="ctr">
               <a:buNone/>
             </a:pPr>
             <a:r>
@@ -11849,7 +11892,7 @@
           <a:bodyPr wrap="square" lIns="0" tIns="0" rIns="0" bIns="0" rtlCol="0" anchor="t"/>
           <a:lstStyle/>
           <a:p>
-            <a:pPr indent="0" marL="0">
+            <a:pPr marL="0" indent="0">
               <a:buNone/>
             </a:pPr>
             <a:r>
@@ -11888,7 +11931,7 @@
           <a:bodyPr wrap="square" lIns="0" tIns="0" rIns="0" bIns="0" rtlCol="0" anchor="t"/>
           <a:lstStyle/>
           <a:p>
-            <a:pPr indent="0" marL="0">
+            <a:pPr marL="0" indent="0">
               <a:buNone/>
             </a:pPr>
             <a:r>
@@ -11932,6 +11975,13 @@
             <a:prstDash val="solid"/>
           </a:ln>
         </p:spPr>
+        <p:txBody>
+          <a:bodyPr/>
+          <a:lstStyle/>
+          <a:p>
+            <a:endParaRPr lang="en-US"/>
+          </a:p>
+        </p:txBody>
       </p:sp>
       <p:sp>
         <p:nvSpPr>
@@ -11957,6 +12007,13 @@
             <a:prstDash val="solid"/>
           </a:ln>
         </p:spPr>
+        <p:txBody>
+          <a:bodyPr/>
+          <a:lstStyle/>
+          <a:p>
+            <a:endParaRPr lang="en-US"/>
+          </a:p>
+        </p:txBody>
       </p:sp>
       <p:sp>
         <p:nvSpPr>
@@ -11979,7 +12036,7 @@
           <a:bodyPr wrap="square" lIns="0" tIns="0" rIns="0" bIns="0" rtlCol="0" anchor="ctr"/>
           <a:lstStyle/>
           <a:p>
-            <a:pPr algn="ctr" indent="0" marL="0">
+            <a:pPr marL="0" indent="0" algn="ctr">
               <a:buNone/>
             </a:pPr>
             <a:r>
@@ -12018,7 +12075,7 @@
           <a:bodyPr wrap="square" lIns="0" tIns="0" rIns="0" bIns="0" rtlCol="0" anchor="t"/>
           <a:lstStyle/>
           <a:p>
-            <a:pPr indent="0" marL="0">
+            <a:pPr marL="0" indent="0">
               <a:buNone/>
             </a:pPr>
             <a:r>
@@ -12057,7 +12114,7 @@
           <a:bodyPr wrap="square" lIns="0" tIns="0" rIns="0" bIns="0" rtlCol="0" anchor="t"/>
           <a:lstStyle/>
           <a:p>
-            <a:pPr indent="0" marL="0">
+            <a:pPr marL="0" indent="0">
               <a:buNone/>
             </a:pPr>
             <a:r>
@@ -12101,6 +12158,13 @@
             <a:prstDash val="solid"/>
           </a:ln>
         </p:spPr>
+        <p:txBody>
+          <a:bodyPr/>
+          <a:lstStyle/>
+          <a:p>
+            <a:endParaRPr lang="en-US"/>
+          </a:p>
+        </p:txBody>
       </p:sp>
       <p:sp>
         <p:nvSpPr>
@@ -12126,6 +12190,13 @@
             <a:prstDash val="solid"/>
           </a:ln>
         </p:spPr>
+        <p:txBody>
+          <a:bodyPr/>
+          <a:lstStyle/>
+          <a:p>
+            <a:endParaRPr lang="en-US"/>
+          </a:p>
+        </p:txBody>
       </p:sp>
       <p:sp>
         <p:nvSpPr>
@@ -12148,7 +12219,7 @@
           <a:bodyPr wrap="square" lIns="0" tIns="0" rIns="0" bIns="0" rtlCol="0" anchor="ctr"/>
           <a:lstStyle/>
           <a:p>
-            <a:pPr algn="ctr" indent="0" marL="0">
+            <a:pPr marL="0" indent="0" algn="ctr">
               <a:buNone/>
             </a:pPr>
             <a:r>
@@ -12187,7 +12258,7 @@
           <a:bodyPr wrap="square" lIns="0" tIns="0" rIns="0" bIns="0" rtlCol="0" anchor="t"/>
           <a:lstStyle/>
           <a:p>
-            <a:pPr indent="0" marL="0">
+            <a:pPr marL="0" indent="0">
               <a:buNone/>
             </a:pPr>
             <a:r>
@@ -12226,7 +12297,7 @@
           <a:bodyPr wrap="square" lIns="0" tIns="0" rIns="0" bIns="0" rtlCol="0" anchor="t"/>
           <a:lstStyle/>
           <a:p>
-            <a:pPr indent="0" marL="0">
+            <a:pPr marL="0" indent="0">
               <a:buNone/>
             </a:pPr>
             <a:r>
@@ -12270,6 +12341,13 @@
             <a:prstDash val="solid"/>
           </a:ln>
         </p:spPr>
+        <p:txBody>
+          <a:bodyPr/>
+          <a:lstStyle/>
+          <a:p>
+            <a:endParaRPr lang="en-US"/>
+          </a:p>
+        </p:txBody>
       </p:sp>
       <p:sp>
         <p:nvSpPr>
@@ -12295,6 +12373,13 @@
             <a:prstDash val="solid"/>
           </a:ln>
         </p:spPr>
+        <p:txBody>
+          <a:bodyPr/>
+          <a:lstStyle/>
+          <a:p>
+            <a:endParaRPr lang="en-US"/>
+          </a:p>
+        </p:txBody>
       </p:sp>
       <p:sp>
         <p:nvSpPr>
@@ -12317,7 +12402,7 @@
           <a:bodyPr wrap="square" lIns="0" tIns="0" rIns="0" bIns="0" rtlCol="0" anchor="ctr"/>
           <a:lstStyle/>
           <a:p>
-            <a:pPr algn="ctr" indent="0" marL="0">
+            <a:pPr marL="0" indent="0" algn="ctr">
               <a:buNone/>
             </a:pPr>
             <a:r>
@@ -12356,7 +12441,7 @@
           <a:bodyPr wrap="square" lIns="0" tIns="0" rIns="0" bIns="0" rtlCol="0" anchor="t"/>
           <a:lstStyle/>
           <a:p>
-            <a:pPr indent="0" marL="0">
+            <a:pPr marL="0" indent="0">
               <a:buNone/>
             </a:pPr>
             <a:r>
@@ -12395,7 +12480,7 @@
           <a:bodyPr wrap="square" lIns="0" tIns="0" rIns="0" bIns="0" rtlCol="0" anchor="t"/>
           <a:lstStyle/>
           <a:p>
-            <a:pPr indent="0" marL="0">
+            <a:pPr marL="0" indent="0">
               <a:buNone/>
             </a:pPr>
             <a:r>
@@ -12439,6 +12524,13 @@
             <a:prstDash val="solid"/>
           </a:ln>
         </p:spPr>
+        <p:txBody>
+          <a:bodyPr/>
+          <a:lstStyle/>
+          <a:p>
+            <a:endParaRPr lang="en-US"/>
+          </a:p>
+        </p:txBody>
       </p:sp>
       <p:sp>
         <p:nvSpPr>
@@ -12461,7 +12553,7 @@
           <a:bodyPr wrap="square" lIns="0" tIns="0" rIns="0" bIns="0" rtlCol="0" anchor="ctr"/>
           <a:lstStyle/>
           <a:p>
-            <a:pPr indent="0" marL="0">
+            <a:pPr marL="0" indent="0">
               <a:buNone/>
             </a:pPr>
             <a:r>
@@ -12475,9 +12567,6 @@
               </a:rPr>
               <a:t>Mô hình nền: </a:t>
             </a:r>
-            <a:pPr indent="0" marL="0">
-              <a:buNone/>
-            </a:pPr>
             <a:r>
               <a:rPr lang="en-US" sz="1300" dirty="0">
                 <a:solidFill>
@@ -12509,6 +12598,7 @@
         <a:solidFill>
           <a:srgbClr val="FFFFFF"/>
         </a:solidFill>
+        <a:effectLst/>
       </p:bgPr>
     </p:bg>
     <p:spTree>
@@ -12546,11 +12636,11 @@
           <a:bodyPr wrap="square" lIns="0" tIns="0" rIns="0" bIns="0" rtlCol="0" anchor="t"/>
           <a:lstStyle/>
           <a:p>
-            <a:pPr indent="0" marL="0">
+            <a:pPr marL="0" indent="0">
               <a:buNone/>
             </a:pPr>
             <a:r>
-              <a:rPr lang="en-US" sz="1100" b="1" spc="200" kern="0" dirty="0">
+              <a:rPr lang="en-US" sz="1100" b="1" kern="0" spc="200" dirty="0">
                 <a:solidFill>
                   <a:srgbClr val="D98C1F"/>
                 </a:solidFill>
@@ -12585,7 +12675,7 @@
           <a:bodyPr wrap="square" lIns="0" tIns="0" rIns="0" bIns="0" rtlCol="0" anchor="ctr"/>
           <a:lstStyle/>
           <a:p>
-            <a:pPr indent="0" marL="0">
+            <a:pPr marL="0" indent="0">
               <a:buNone/>
             </a:pPr>
             <a:r>
@@ -12629,6 +12719,13 @@
             <a:prstDash val="solid"/>
           </a:ln>
         </p:spPr>
+        <p:txBody>
+          <a:bodyPr/>
+          <a:lstStyle/>
+          <a:p>
+            <a:endParaRPr lang="en-US"/>
+          </a:p>
+        </p:txBody>
       </p:sp>
       <p:sp>
         <p:nvSpPr>
@@ -12654,6 +12751,13 @@
             <a:prstDash val="solid"/>
           </a:ln>
         </p:spPr>
+        <p:txBody>
+          <a:bodyPr/>
+          <a:lstStyle/>
+          <a:p>
+            <a:endParaRPr lang="en-US"/>
+          </a:p>
+        </p:txBody>
       </p:sp>
       <p:sp>
         <p:nvSpPr>
@@ -12676,7 +12780,7 @@
           <a:bodyPr wrap="square" lIns="0" tIns="0" rIns="0" bIns="0" rtlCol="0" anchor="ctr"/>
           <a:lstStyle/>
           <a:p>
-            <a:pPr indent="0" marL="0">
+            <a:pPr marL="0" indent="0">
               <a:buNone/>
             </a:pPr>
             <a:r>
@@ -12715,7 +12819,7 @@
           <a:bodyPr wrap="square" lIns="0" tIns="0" rIns="0" bIns="0" rtlCol="0" anchor="ctr"/>
           <a:lstStyle/>
           <a:p>
-            <a:pPr indent="0" marL="0">
+            <a:pPr marL="0" indent="0">
               <a:buNone/>
             </a:pPr>
             <a:r>
@@ -12754,7 +12858,7 @@
           <a:bodyPr wrap="square" lIns="0" tIns="0" rIns="0" bIns="0" rtlCol="0" anchor="ctr"/>
           <a:lstStyle/>
           <a:p>
-            <a:pPr indent="0" marL="0">
+            <a:pPr marL="0" indent="0">
               <a:buNone/>
             </a:pPr>
             <a:r>
@@ -12793,7 +12897,7 @@
           <a:bodyPr wrap="square" lIns="0" tIns="0" rIns="0" bIns="0" rtlCol="0" anchor="ctr"/>
           <a:lstStyle/>
           <a:p>
-            <a:pPr indent="0" marL="0">
+            <a:pPr marL="0" indent="0">
               <a:buNone/>
             </a:pPr>
             <a:r>
@@ -12805,7 +12909,7 @@
                 <a:ea typeface="Courier New" pitchFamily="34" charset="-122"/>
                 <a:cs typeface="Courier New" pitchFamily="34" charset="-120"/>
               </a:rPr>
-              <a:t>type   (35 lớp)</a:t>
+              <a:t>type   </a:t>
             </a:r>
             <a:endParaRPr lang="en-US" sz="950" dirty="0"/>
           </a:p>
@@ -12832,7 +12936,7 @@
           <a:bodyPr wrap="square" lIns="0" tIns="0" rIns="0" bIns="0" rtlCol="0" anchor="ctr"/>
           <a:lstStyle/>
           <a:p>
-            <a:pPr indent="0" marL="0">
+            <a:pPr marL="0" indent="0">
               <a:buNone/>
             </a:pPr>
             <a:r>
@@ -12871,7 +12975,7 @@
           <a:bodyPr wrap="square" lIns="0" tIns="0" rIns="0" bIns="0" rtlCol="0" anchor="ctr"/>
           <a:lstStyle/>
           <a:p>
-            <a:pPr indent="0" marL="0">
+            <a:pPr marL="0" indent="0">
               <a:buNone/>
             </a:pPr>
             <a:r>
@@ -12915,6 +13019,13 @@
             <a:prstDash val="solid"/>
           </a:ln>
         </p:spPr>
+        <p:txBody>
+          <a:bodyPr/>
+          <a:lstStyle/>
+          <a:p>
+            <a:endParaRPr lang="en-US"/>
+          </a:p>
+        </p:txBody>
       </p:sp>
       <p:sp>
         <p:nvSpPr>
@@ -12940,6 +13051,13 @@
             <a:prstDash val="solid"/>
           </a:ln>
         </p:spPr>
+        <p:txBody>
+          <a:bodyPr/>
+          <a:lstStyle/>
+          <a:p>
+            <a:endParaRPr lang="en-US"/>
+          </a:p>
+        </p:txBody>
       </p:sp>
       <p:sp>
         <p:nvSpPr>
@@ -12962,7 +13080,7 @@
           <a:bodyPr wrap="square" lIns="0" tIns="0" rIns="0" bIns="0" rtlCol="0" anchor="ctr"/>
           <a:lstStyle/>
           <a:p>
-            <a:pPr indent="0" marL="0">
+            <a:pPr marL="0" indent="0">
               <a:buNone/>
             </a:pPr>
             <a:r>
@@ -13001,11 +13119,11 @@
           <a:bodyPr wrap="square" lIns="0" tIns="0" rIns="0" bIns="0" rtlCol="0" anchor="ctr"/>
           <a:lstStyle/>
           <a:p>
-            <a:pPr indent="0" marL="0">
+            <a:pPr marL="0" indent="0">
               <a:buNone/>
             </a:pPr>
             <a:r>
-              <a:rPr lang="en-US" sz="950" dirty="0">
+              <a:rPr lang="en-US" sz="950" dirty="0" err="1">
                 <a:solidFill>
                   <a:srgbClr val="1E2A32"/>
                 </a:solidFill>
@@ -13013,36 +13131,8 @@
                 <a:ea typeface="Courier New" pitchFamily="34" charset="-122"/>
                 <a:cs typeface="Courier New" pitchFamily="34" charset="-120"/>
               </a:rPr>
-              <a:t>event_id  → events</a:t>
-            </a:r>
-            <a:endParaRPr lang="en-US" sz="950" dirty="0"/>
-          </a:p>
-        </p:txBody>
-      </p:sp>
-      <p:sp>
-        <p:nvSpPr>
-          <p:cNvPr id="16" name="Text 14"/>
-          <p:cNvSpPr txBox="1"/>
-          <p:nvPr/>
-        </p:nvSpPr>
-        <p:spPr>
-          <a:xfrm>
-            <a:off x="3310128" y="2016252"/>
-            <a:ext cx="2011680" cy="214884"/>
-          </a:xfrm>
-          <a:prstGeom prst="rect">
-            <a:avLst/>
-          </a:prstGeom>
-          <a:noFill/>
-          <a:ln/>
-        </p:spPr>
-        <p:txBody>
-          <a:bodyPr wrap="square" lIns="0" tIns="0" rIns="0" bIns="0" rtlCol="0" anchor="ctr"/>
-          <a:lstStyle/>
-          <a:p>
-            <a:pPr indent="0" marL="0">
-              <a:buNone/>
-            </a:pPr>
+              <a:t>event_id</a:t>
+            </a:r>
             <a:r>
               <a:rPr lang="en-US" sz="950" dirty="0">
                 <a:solidFill>
@@ -13052,7 +13142,57 @@
                 <a:ea typeface="Courier New" pitchFamily="34" charset="-122"/>
                 <a:cs typeface="Courier New" pitchFamily="34" charset="-120"/>
               </a:rPr>
-              <a:t>entity_id → entities</a:t>
+              <a:t> </a:t>
+            </a:r>
+            <a:endParaRPr lang="en-US" sz="950" dirty="0"/>
+          </a:p>
+        </p:txBody>
+      </p:sp>
+      <p:sp>
+        <p:nvSpPr>
+          <p:cNvPr id="16" name="Text 14"/>
+          <p:cNvSpPr txBox="1"/>
+          <p:nvPr/>
+        </p:nvSpPr>
+        <p:spPr>
+          <a:xfrm>
+            <a:off x="3310128" y="2016252"/>
+            <a:ext cx="2011680" cy="214884"/>
+          </a:xfrm>
+          <a:prstGeom prst="rect">
+            <a:avLst/>
+          </a:prstGeom>
+          <a:noFill/>
+          <a:ln/>
+        </p:spPr>
+        <p:txBody>
+          <a:bodyPr wrap="square" lIns="0" tIns="0" rIns="0" bIns="0" rtlCol="0" anchor="ctr"/>
+          <a:lstStyle/>
+          <a:p>
+            <a:pPr marL="0" indent="0">
+              <a:buNone/>
+            </a:pPr>
+            <a:r>
+              <a:rPr lang="en-US" sz="950" dirty="0" err="1">
+                <a:solidFill>
+                  <a:srgbClr val="1E2A32"/>
+                </a:solidFill>
+                <a:latin typeface="Courier New" pitchFamily="34" charset="0"/>
+                <a:ea typeface="Courier New" pitchFamily="34" charset="-122"/>
+                <a:cs typeface="Courier New" pitchFamily="34" charset="-120"/>
+              </a:rPr>
+              <a:t>entity_id</a:t>
+            </a:r>
+            <a:r>
+              <a:rPr lang="en-US" sz="950" dirty="0">
+                <a:solidFill>
+                  <a:srgbClr val="1E2A32"/>
+                </a:solidFill>
+                <a:latin typeface="Courier New" pitchFamily="34" charset="0"/>
+                <a:ea typeface="Courier New" pitchFamily="34" charset="-122"/>
+                <a:cs typeface="Courier New" pitchFamily="34" charset="-120"/>
+              </a:rPr>
+              <a:t> </a:t>
             </a:r>
             <a:endParaRPr lang="en-US" sz="950" dirty="0"/>
           </a:p>
@@ -13084,6 +13224,13 @@
             <a:prstDash val="solid"/>
           </a:ln>
         </p:spPr>
+        <p:txBody>
+          <a:bodyPr/>
+          <a:lstStyle/>
+          <a:p>
+            <a:endParaRPr lang="en-US"/>
+          </a:p>
+        </p:txBody>
       </p:sp>
       <p:sp>
         <p:nvSpPr>
@@ -13109,6 +13256,13 @@
             <a:prstDash val="solid"/>
           </a:ln>
         </p:spPr>
+        <p:txBody>
+          <a:bodyPr/>
+          <a:lstStyle/>
+          <a:p>
+            <a:endParaRPr lang="en-US"/>
+          </a:p>
+        </p:txBody>
       </p:sp>
       <p:sp>
         <p:nvSpPr>
@@ -13131,7 +13285,7 @@
           <a:bodyPr wrap="square" lIns="0" tIns="0" rIns="0" bIns="0" rtlCol="0" anchor="ctr"/>
           <a:lstStyle/>
           <a:p>
-            <a:pPr indent="0" marL="0">
+            <a:pPr marL="0" indent="0">
               <a:buNone/>
             </a:pPr>
             <a:r>
@@ -13170,7 +13324,7 @@
           <a:bodyPr wrap="square" lIns="0" tIns="0" rIns="0" bIns="0" rtlCol="0" anchor="ctr"/>
           <a:lstStyle/>
           <a:p>
-            <a:pPr indent="0" marL="0">
+            <a:pPr marL="0" indent="0">
               <a:buNone/>
             </a:pPr>
             <a:r>
@@ -13209,7 +13363,7 @@
           <a:bodyPr wrap="square" lIns="0" tIns="0" rIns="0" bIns="0" rtlCol="0" anchor="ctr"/>
           <a:lstStyle/>
           <a:p>
-            <a:pPr indent="0" marL="0">
+            <a:pPr marL="0" indent="0">
               <a:buNone/>
             </a:pPr>
             <a:r>
@@ -13248,7 +13402,7 @@
           <a:bodyPr wrap="square" lIns="0" tIns="0" rIns="0" bIns="0" rtlCol="0" anchor="ctr"/>
           <a:lstStyle/>
           <a:p>
-            <a:pPr indent="0" marL="0">
+            <a:pPr marL="0" indent="0">
               <a:buNone/>
             </a:pPr>
             <a:r>
@@ -13287,7 +13441,7 @@
           <a:bodyPr wrap="square" lIns="0" tIns="0" rIns="0" bIns="0" rtlCol="0" anchor="ctr"/>
           <a:lstStyle/>
           <a:p>
-            <a:pPr indent="0" marL="0">
+            <a:pPr marL="0" indent="0">
               <a:buNone/>
             </a:pPr>
             <a:r>
@@ -13326,7 +13480,7 @@
           <a:bodyPr wrap="square" lIns="0" tIns="0" rIns="0" bIns="0" rtlCol="0" anchor="ctr"/>
           <a:lstStyle/>
           <a:p>
-            <a:pPr indent="0" marL="0">
+            <a:pPr marL="0" indent="0">
               <a:buNone/>
             </a:pPr>
             <a:r>
@@ -13370,6 +13524,13 @@
             <a:prstDash val="solid"/>
           </a:ln>
         </p:spPr>
+        <p:txBody>
+          <a:bodyPr/>
+          <a:lstStyle/>
+          <a:p>
+            <a:endParaRPr lang="en-US"/>
+          </a:p>
+        </p:txBody>
       </p:sp>
       <p:sp>
         <p:nvSpPr>
@@ -13395,6 +13556,13 @@
             <a:prstDash val="solid"/>
           </a:ln>
         </p:spPr>
+        <p:txBody>
+          <a:bodyPr/>
+          <a:lstStyle/>
+          <a:p>
+            <a:endParaRPr lang="en-US"/>
+          </a:p>
+        </p:txBody>
       </p:sp>
       <p:sp>
         <p:nvSpPr>
@@ -13417,7 +13585,7 @@
           <a:bodyPr wrap="square" lIns="0" tIns="0" rIns="0" bIns="0" rtlCol="0" anchor="ctr"/>
           <a:lstStyle/>
           <a:p>
-            <a:pPr indent="0" marL="0">
+            <a:pPr marL="0" indent="0">
               <a:buNone/>
             </a:pPr>
             <a:r>
@@ -13456,7 +13624,7 @@
           <a:bodyPr wrap="square" lIns="0" tIns="0" rIns="0" bIns="0" rtlCol="0" anchor="ctr"/>
           <a:lstStyle/>
           <a:p>
-            <a:pPr indent="0" marL="0">
+            <a:pPr marL="0" indent="0">
               <a:buNone/>
             </a:pPr>
             <a:r>
@@ -13495,7 +13663,7 @@
           <a:bodyPr wrap="square" lIns="0" tIns="0" rIns="0" bIns="0" rtlCol="0" anchor="ctr"/>
           <a:lstStyle/>
           <a:p>
-            <a:pPr indent="0" marL="0">
+            <a:pPr marL="0" indent="0">
               <a:buNone/>
             </a:pPr>
             <a:r>
@@ -13507,7 +13675,7 @@
                 <a:ea typeface="Courier New" pitchFamily="34" charset="-122"/>
                 <a:cs typeface="Courier New" pitchFamily="34" charset="-120"/>
               </a:rPr>
-              <a:t>name   (snake_case)</a:t>
+              <a:t>name   </a:t>
             </a:r>
             <a:endParaRPr lang="en-US" sz="950" dirty="0"/>
           </a:p>
@@ -13534,7 +13702,7 @@
           <a:bodyPr wrap="square" lIns="0" tIns="0" rIns="0" bIns="0" rtlCol="0" anchor="ctr"/>
           <a:lstStyle/>
           <a:p>
-            <a:pPr indent="0" marL="0">
+            <a:pPr marL="0" indent="0">
               <a:buNone/>
             </a:pPr>
             <a:r>
@@ -13578,6 +13746,13 @@
             <a:prstDash val="solid"/>
           </a:ln>
         </p:spPr>
+        <p:txBody>
+          <a:bodyPr/>
+          <a:lstStyle/>
+          <a:p>
+            <a:endParaRPr lang="en-US"/>
+          </a:p>
+        </p:txBody>
       </p:sp>
       <p:sp>
         <p:nvSpPr>
@@ -13603,6 +13778,13 @@
             <a:prstDash val="solid"/>
           </a:ln>
         </p:spPr>
+        <p:txBody>
+          <a:bodyPr/>
+          <a:lstStyle/>
+          <a:p>
+            <a:endParaRPr lang="en-US"/>
+          </a:p>
+        </p:txBody>
       </p:sp>
       <p:sp>
         <p:nvSpPr>
@@ -13625,7 +13807,7 @@
           <a:bodyPr wrap="square" lIns="0" tIns="0" rIns="0" bIns="0" rtlCol="0" anchor="ctr"/>
           <a:lstStyle/>
           <a:p>
-            <a:pPr indent="0" marL="0">
+            <a:pPr marL="0" indent="0">
               <a:buNone/>
             </a:pPr>
             <a:r>
@@ -13664,7 +13846,7 @@
           <a:bodyPr wrap="square" lIns="0" tIns="0" rIns="0" bIns="0" rtlCol="0" anchor="ctr"/>
           <a:lstStyle/>
           <a:p>
-            <a:pPr indent="0" marL="0">
+            <a:pPr marL="0" indent="0">
               <a:buNone/>
             </a:pPr>
             <a:r>
@@ -13703,11 +13885,11 @@
           <a:bodyPr wrap="square" lIns="0" tIns="0" rIns="0" bIns="0" rtlCol="0" anchor="ctr"/>
           <a:lstStyle/>
           <a:p>
-            <a:pPr indent="0" marL="0">
+            <a:pPr marL="0" indent="0">
               <a:buNone/>
             </a:pPr>
             <a:r>
-              <a:rPr lang="en-US" sz="950" dirty="0">
+              <a:rPr lang="en-US" sz="950" dirty="0" err="1">
                 <a:solidFill>
                   <a:srgbClr val="1E2A32"/>
                 </a:solidFill>
@@ -13715,36 +13897,8 @@
                 <a:ea typeface="Courier New" pitchFamily="34" charset="-122"/>
                 <a:cs typeface="Courier New" pitchFamily="34" charset="-120"/>
               </a:rPr>
-              <a:t>subject_id  → entities</a:t>
-            </a:r>
-            <a:endParaRPr lang="en-US" sz="950" dirty="0"/>
-          </a:p>
-        </p:txBody>
-      </p:sp>
-      <p:sp>
-        <p:nvSpPr>
-          <p:cNvPr id="36" name="Text 34"/>
-          <p:cNvSpPr txBox="1"/>
-          <p:nvPr/>
-        </p:nvSpPr>
-        <p:spPr>
-          <a:xfrm>
-            <a:off x="3310128" y="3511296"/>
-            <a:ext cx="2011680" cy="214884"/>
-          </a:xfrm>
-          <a:prstGeom prst="rect">
-            <a:avLst/>
-          </a:prstGeom>
-          <a:noFill/>
-          <a:ln/>
-        </p:spPr>
-        <p:txBody>
-          <a:bodyPr wrap="square" lIns="0" tIns="0" rIns="0" bIns="0" rtlCol="0" anchor="ctr"/>
-          <a:lstStyle/>
-          <a:p>
-            <a:pPr indent="0" marL="0">
-              <a:buNone/>
-            </a:pPr>
+              <a:t>subject_id</a:t>
+            </a:r>
             <a:r>
               <a:rPr lang="en-US" sz="950" dirty="0">
                 <a:solidFill>
@@ -13754,7 +13908,7 @@
                 <a:ea typeface="Courier New" pitchFamily="34" charset="-122"/>
                 <a:cs typeface="Courier New" pitchFamily="34" charset="-120"/>
               </a:rPr>
-              <a:t>property_id → properties</a:t>
+              <a:t>  </a:t>
             </a:r>
             <a:endParaRPr lang="en-US" sz="950" dirty="0"/>
           </a:p>
@@ -13762,13 +13916,13 @@
       </p:sp>
       <p:sp>
         <p:nvSpPr>
-          <p:cNvPr id="37" name="Text 35"/>
+          <p:cNvPr id="36" name="Text 34"/>
           <p:cNvSpPr txBox="1"/>
           <p:nvPr/>
         </p:nvSpPr>
         <p:spPr>
           <a:xfrm>
-            <a:off x="3310128" y="3726180"/>
+            <a:off x="3310128" y="3511296"/>
             <a:ext cx="2011680" cy="214884"/>
           </a:xfrm>
           <a:prstGeom prst="rect">
@@ -13781,11 +13935,11 @@
           <a:bodyPr wrap="square" lIns="0" tIns="0" rIns="0" bIns="0" rtlCol="0" anchor="ctr"/>
           <a:lstStyle/>
           <a:p>
-            <a:pPr indent="0" marL="0">
+            <a:pPr marL="0" indent="0">
               <a:buNone/>
             </a:pPr>
             <a:r>
-              <a:rPr lang="en-US" sz="950" dirty="0">
+              <a:rPr lang="en-US" sz="950" dirty="0" err="1">
                 <a:solidFill>
                   <a:srgbClr val="1E2A32"/>
                 </a:solidFill>
@@ -13793,36 +13947,8 @@
                 <a:ea typeface="Courier New" pitchFamily="34" charset="-122"/>
                 <a:cs typeface="Courier New" pitchFamily="34" charset="-120"/>
               </a:rPr>
-              <a:t>value_json · dtype</a:t>
-            </a:r>
-            <a:endParaRPr lang="en-US" sz="950" dirty="0"/>
-          </a:p>
-        </p:txBody>
-      </p:sp>
-      <p:sp>
-        <p:nvSpPr>
-          <p:cNvPr id="38" name="Text 36"/>
-          <p:cNvSpPr txBox="1"/>
-          <p:nvPr/>
-        </p:nvSpPr>
-        <p:spPr>
-          <a:xfrm>
-            <a:off x="3310128" y="3941064"/>
-            <a:ext cx="2011680" cy="214884"/>
-          </a:xfrm>
-          <a:prstGeom prst="rect">
-            <a:avLst/>
-          </a:prstGeom>
-          <a:noFill/>
-          <a:ln/>
-        </p:spPr>
-        <p:txBody>
-          <a:bodyPr wrap="square" lIns="0" tIns="0" rIns="0" bIns="0" rtlCol="0" anchor="ctr"/>
-          <a:lstStyle/>
-          <a:p>
-            <a:pPr indent="0" marL="0">
-              <a:buNone/>
-            </a:pPr>
+              <a:t>property_id</a:t>
+            </a:r>
             <a:r>
               <a:rPr lang="en-US" sz="950" dirty="0">
                 <a:solidFill>
@@ -13832,7 +13958,7 @@
                 <a:ea typeface="Courier New" pitchFamily="34" charset="-122"/>
                 <a:cs typeface="Courier New" pitchFamily="34" charset="-120"/>
               </a:rPr>
-              <a:t>t_from · t_to</a:t>
+              <a:t> </a:t>
             </a:r>
             <a:endParaRPr lang="en-US" sz="950" dirty="0"/>
           </a:p>
@@ -13840,13 +13966,13 @@
       </p:sp>
       <p:sp>
         <p:nvSpPr>
-          <p:cNvPr id="39" name="Text 37"/>
+          <p:cNvPr id="37" name="Text 35"/>
           <p:cNvSpPr txBox="1"/>
           <p:nvPr/>
         </p:nvSpPr>
         <p:spPr>
           <a:xfrm>
-            <a:off x="3310128" y="4155948"/>
+            <a:off x="3310128" y="3726180"/>
             <a:ext cx="2011680" cy="214884"/>
           </a:xfrm>
           <a:prstGeom prst="rect">
@@ -13859,11 +13985,11 @@
           <a:bodyPr wrap="square" lIns="0" tIns="0" rIns="0" bIns="0" rtlCol="0" anchor="ctr"/>
           <a:lstStyle/>
           <a:p>
-            <a:pPr indent="0" marL="0">
+            <a:pPr marL="0" indent="0">
               <a:buNone/>
             </a:pPr>
             <a:r>
-              <a:rPr lang="en-US" sz="950" dirty="0">
+              <a:rPr lang="en-US" sz="950" dirty="0" err="1">
                 <a:solidFill>
                   <a:srgbClr val="1E2A32"/>
                 </a:solidFill>
@@ -13871,7 +13997,7 @@
                 <a:ea typeface="Courier New" pitchFamily="34" charset="-122"/>
                 <a:cs typeface="Courier New" pitchFamily="34" charset="-120"/>
               </a:rPr>
-              <a:t>confidence</a:t>
+              <a:t>value_json</a:t>
             </a:r>
             <a:endParaRPr lang="en-US" sz="950" dirty="0"/>
           </a:p>
@@ -13879,13 +14005,13 @@
       </p:sp>
       <p:sp>
         <p:nvSpPr>
-          <p:cNvPr id="40" name="Text 38"/>
+          <p:cNvPr id="38" name="Text 36"/>
           <p:cNvSpPr txBox="1"/>
           <p:nvPr/>
         </p:nvSpPr>
         <p:spPr>
           <a:xfrm>
-            <a:off x="3310128" y="4370832"/>
+            <a:off x="3310128" y="3941064"/>
             <a:ext cx="2011680" cy="214884"/>
           </a:xfrm>
           <a:prstGeom prst="rect">
@@ -13898,7 +14024,7 @@
           <a:bodyPr wrap="square" lIns="0" tIns="0" rIns="0" bIns="0" rtlCol="0" anchor="ctr"/>
           <a:lstStyle/>
           <a:p>
-            <a:pPr indent="0" marL="0">
+            <a:pPr marL="0" indent="0">
               <a:buNone/>
             </a:pPr>
             <a:r>
@@ -13910,7 +14036,96 @@
                 <a:ea typeface="Courier New" pitchFamily="34" charset="-122"/>
                 <a:cs typeface="Courier New" pitchFamily="34" charset="-120"/>
               </a:rPr>
-              <a:t>event_id    → events</a:t>
+              <a:t>t_from · t_to</a:t>
+            </a:r>
+            <a:endParaRPr lang="en-US" sz="950" dirty="0"/>
+          </a:p>
+        </p:txBody>
+      </p:sp>
+      <p:sp>
+        <p:nvSpPr>
+          <p:cNvPr id="39" name="Text 37"/>
+          <p:cNvSpPr txBox="1"/>
+          <p:nvPr/>
+        </p:nvSpPr>
+        <p:spPr>
+          <a:xfrm>
+            <a:off x="3310128" y="4155948"/>
+            <a:ext cx="2011680" cy="214884"/>
+          </a:xfrm>
+          <a:prstGeom prst="rect">
+            <a:avLst/>
+          </a:prstGeom>
+          <a:noFill/>
+          <a:ln/>
+        </p:spPr>
+        <p:txBody>
+          <a:bodyPr wrap="square" lIns="0" tIns="0" rIns="0" bIns="0" rtlCol="0" anchor="ctr"/>
+          <a:lstStyle/>
+          <a:p>
+            <a:pPr marL="0" indent="0">
+              <a:buNone/>
+            </a:pPr>
+            <a:r>
+              <a:rPr lang="en-US" sz="950" dirty="0">
+                <a:solidFill>
+                  <a:srgbClr val="1E2A32"/>
+                </a:solidFill>
+                <a:latin typeface="Courier New" pitchFamily="34" charset="0"/>
+                <a:ea typeface="Courier New" pitchFamily="34" charset="-122"/>
+                <a:cs typeface="Courier New" pitchFamily="34" charset="-120"/>
+              </a:rPr>
+              <a:t>confidence</a:t>
+            </a:r>
+            <a:endParaRPr lang="en-US" sz="950" dirty="0"/>
+          </a:p>
+        </p:txBody>
+      </p:sp>
+      <p:sp>
+        <p:nvSpPr>
+          <p:cNvPr id="40" name="Text 38"/>
+          <p:cNvSpPr txBox="1"/>
+          <p:nvPr/>
+        </p:nvSpPr>
+        <p:spPr>
+          <a:xfrm>
+            <a:off x="3310128" y="4370832"/>
+            <a:ext cx="2011680" cy="214884"/>
+          </a:xfrm>
+          <a:prstGeom prst="rect">
+            <a:avLst/>
+          </a:prstGeom>
+          <a:noFill/>
+          <a:ln/>
+        </p:spPr>
+        <p:txBody>
+          <a:bodyPr wrap="square" lIns="0" tIns="0" rIns="0" bIns="0" rtlCol="0" anchor="ctr"/>
+          <a:lstStyle/>
+          <a:p>
+            <a:pPr marL="0" indent="0">
+              <a:buNone/>
+            </a:pPr>
+            <a:r>
+              <a:rPr lang="en-US" sz="950" dirty="0" err="1">
+                <a:solidFill>
+                  <a:srgbClr val="1E2A32"/>
+                </a:solidFill>
+                <a:latin typeface="Courier New" pitchFamily="34" charset="0"/>
+                <a:ea typeface="Courier New" pitchFamily="34" charset="-122"/>
+                <a:cs typeface="Courier New" pitchFamily="34" charset="-120"/>
+              </a:rPr>
+              <a:t>event_id</a:t>
+            </a:r>
+            <a:r>
+              <a:rPr lang="en-US" sz="950" dirty="0">
+                <a:solidFill>
+                  <a:srgbClr val="1E2A32"/>
+                </a:solidFill>
+                <a:latin typeface="Courier New" pitchFamily="34" charset="0"/>
+                <a:ea typeface="Courier New" pitchFamily="34" charset="-122"/>
+                <a:cs typeface="Courier New" pitchFamily="34" charset="-120"/>
+              </a:rPr>
+              <a:t>    </a:t>
             </a:r>
             <a:endParaRPr lang="en-US" sz="950" dirty="0"/>
           </a:p>
@@ -13942,6 +14157,13 @@
             <a:prstDash val="solid"/>
           </a:ln>
         </p:spPr>
+        <p:txBody>
+          <a:bodyPr/>
+          <a:lstStyle/>
+          <a:p>
+            <a:endParaRPr lang="en-US"/>
+          </a:p>
+        </p:txBody>
       </p:sp>
       <p:sp>
         <p:nvSpPr>
@@ -13967,6 +14189,13 @@
             <a:prstDash val="solid"/>
           </a:ln>
         </p:spPr>
+        <p:txBody>
+          <a:bodyPr/>
+          <a:lstStyle/>
+          <a:p>
+            <a:endParaRPr lang="en-US"/>
+          </a:p>
+        </p:txBody>
       </p:sp>
       <p:sp>
         <p:nvSpPr>
@@ -13989,7 +14218,7 @@
           <a:bodyPr wrap="square" lIns="0" tIns="0" rIns="0" bIns="0" rtlCol="0" anchor="ctr"/>
           <a:lstStyle/>
           <a:p>
-            <a:pPr indent="0" marL="0">
+            <a:pPr marL="0" indent="0">
               <a:buNone/>
             </a:pPr>
             <a:r>
@@ -14028,11 +14257,11 @@
           <a:bodyPr wrap="square" lIns="0" tIns="0" rIns="0" bIns="0" rtlCol="0" anchor="ctr"/>
           <a:lstStyle/>
           <a:p>
-            <a:pPr indent="0" marL="0">
+            <a:pPr marL="0" indent="0">
               <a:buNone/>
             </a:pPr>
             <a:r>
-              <a:rPr lang="en-US" sz="950" dirty="0">
+              <a:rPr lang="en-US" sz="950" dirty="0" err="1">
                 <a:solidFill>
                   <a:srgbClr val="1E2A32"/>
                 </a:solidFill>
@@ -14040,36 +14269,8 @@
                 <a:ea typeface="Courier New" pitchFamily="34" charset="-122"/>
                 <a:cs typeface="Courier New" pitchFamily="34" charset="-120"/>
               </a:rPr>
-              <a:t>fact_id → facts</a:t>
-            </a:r>
-            <a:endParaRPr lang="en-US" sz="950" dirty="0"/>
-          </a:p>
-        </p:txBody>
-      </p:sp>
-      <p:sp>
-        <p:nvSpPr>
-          <p:cNvPr id="45" name="Text 43"/>
-          <p:cNvSpPr txBox="1"/>
-          <p:nvPr/>
-        </p:nvSpPr>
-        <p:spPr>
-          <a:xfrm>
-            <a:off x="3310128" y="5490972"/>
-            <a:ext cx="2011680" cy="214884"/>
-          </a:xfrm>
-          <a:prstGeom prst="rect">
-            <a:avLst/>
-          </a:prstGeom>
-          <a:noFill/>
-          <a:ln/>
-        </p:spPr>
-        <p:txBody>
-          <a:bodyPr wrap="square" lIns="0" tIns="0" rIns="0" bIns="0" rtlCol="0" anchor="ctr"/>
-          <a:lstStyle/>
-          <a:p>
-            <a:pPr indent="0" marL="0">
-              <a:buNone/>
-            </a:pPr>
+              <a:t>fact_id</a:t>
+            </a:r>
             <a:r>
               <a:rPr lang="en-US" sz="950" dirty="0">
                 <a:solidFill>
@@ -14079,7 +14280,7 @@
                 <a:ea typeface="Courier New" pitchFamily="34" charset="-122"/>
                 <a:cs typeface="Courier New" pitchFamily="34" charset="-120"/>
               </a:rPr>
-              <a:t>turn_id → turns</a:t>
+              <a:t> </a:t>
             </a:r>
             <a:endParaRPr lang="en-US" sz="950" dirty="0"/>
           </a:p>
@@ -14087,13 +14288,13 @@
       </p:sp>
       <p:sp>
         <p:nvSpPr>
-          <p:cNvPr id="46" name="Text 44"/>
+          <p:cNvPr id="45" name="Text 43"/>
           <p:cNvSpPr txBox="1"/>
           <p:nvPr/>
         </p:nvSpPr>
         <p:spPr>
           <a:xfrm>
-            <a:off x="3310128" y="5705856"/>
+            <a:off x="3310128" y="5490972"/>
             <a:ext cx="2011680" cy="214884"/>
           </a:xfrm>
           <a:prstGeom prst="rect">
@@ -14106,11 +14307,11 @@
           <a:bodyPr wrap="square" lIns="0" tIns="0" rIns="0" bIns="0" rtlCol="0" anchor="ctr"/>
           <a:lstStyle/>
           <a:p>
-            <a:pPr indent="0" marL="0">
+            <a:pPr marL="0" indent="0">
               <a:buNone/>
             </a:pPr>
             <a:r>
-              <a:rPr lang="en-US" sz="950" dirty="0">
+              <a:rPr lang="en-US" sz="950" dirty="0" err="1">
                 <a:solidFill>
                   <a:srgbClr val="1E2A32"/>
                 </a:solidFill>
@@ -14118,7 +14319,57 @@
                 <a:ea typeface="Courier New" pitchFamily="34" charset="-122"/>
                 <a:cs typeface="Courier New" pitchFamily="34" charset="-120"/>
               </a:rPr>
-              <a:t>span  (trích nguyên văn)</a:t>
+              <a:t>turn_id</a:t>
+            </a:r>
+            <a:r>
+              <a:rPr lang="en-US" sz="950" dirty="0">
+                <a:solidFill>
+                  <a:srgbClr val="1E2A32"/>
+                </a:solidFill>
+                <a:latin typeface="Courier New" pitchFamily="34" charset="0"/>
+                <a:ea typeface="Courier New" pitchFamily="34" charset="-122"/>
+                <a:cs typeface="Courier New" pitchFamily="34" charset="-120"/>
+              </a:rPr>
+              <a:t> </a:t>
+            </a:r>
+            <a:endParaRPr lang="en-US" sz="950" dirty="0"/>
+          </a:p>
+        </p:txBody>
+      </p:sp>
+      <p:sp>
+        <p:nvSpPr>
+          <p:cNvPr id="46" name="Text 44"/>
+          <p:cNvSpPr txBox="1"/>
+          <p:nvPr/>
+        </p:nvSpPr>
+        <p:spPr>
+          <a:xfrm>
+            <a:off x="3310128" y="5705856"/>
+            <a:ext cx="2011680" cy="214884"/>
+          </a:xfrm>
+          <a:prstGeom prst="rect">
+            <a:avLst/>
+          </a:prstGeom>
+          <a:noFill/>
+          <a:ln/>
+        </p:spPr>
+        <p:txBody>
+          <a:bodyPr wrap="square" lIns="0" tIns="0" rIns="0" bIns="0" rtlCol="0" anchor="ctr"/>
+          <a:lstStyle/>
+          <a:p>
+            <a:pPr marL="0" indent="0">
+              <a:buNone/>
+            </a:pPr>
+            <a:r>
+              <a:rPr lang="en-US" sz="950" dirty="0">
+                <a:solidFill>
+                  <a:srgbClr val="1E2A32"/>
+                </a:solidFill>
+                <a:latin typeface="Courier New" pitchFamily="34" charset="0"/>
+                <a:ea typeface="Courier New" pitchFamily="34" charset="-122"/>
+                <a:cs typeface="Courier New" pitchFamily="34" charset="-120"/>
+              </a:rPr>
+              <a:t>span  </a:t>
             </a:r>
             <a:endParaRPr lang="en-US" sz="950" dirty="0"/>
           </a:p>
@@ -14133,7 +14384,7 @@
         <p:spPr>
           <a:xfrm>
             <a:off x="5897880" y="4526280"/>
-            <a:ext cx="2057400" cy="1298448"/>
+            <a:ext cx="2057400" cy="1593800"/>
           </a:xfrm>
           <a:prstGeom prst="roundRect">
             <a:avLst>
@@ -14150,6 +14401,13 @@
             <a:prstDash val="solid"/>
           </a:ln>
         </p:spPr>
+        <p:txBody>
+          <a:bodyPr/>
+          <a:lstStyle/>
+          <a:p>
+            <a:endParaRPr lang="en-US"/>
+          </a:p>
+        </p:txBody>
       </p:sp>
       <p:sp>
         <p:nvSpPr>
@@ -14175,6 +14433,13 @@
             <a:prstDash val="solid"/>
           </a:ln>
         </p:spPr>
+        <p:txBody>
+          <a:bodyPr/>
+          <a:lstStyle/>
+          <a:p>
+            <a:endParaRPr lang="en-US"/>
+          </a:p>
+        </p:txBody>
       </p:sp>
       <p:sp>
         <p:nvSpPr>
@@ -14197,7 +14462,7 @@
           <a:bodyPr wrap="square" lIns="0" tIns="0" rIns="0" bIns="0" rtlCol="0" anchor="ctr"/>
           <a:lstStyle/>
           <a:p>
-            <a:pPr indent="0" marL="0">
+            <a:pPr marL="0" indent="0">
               <a:buNone/>
             </a:pPr>
             <a:r>
@@ -14236,7 +14501,7 @@
           <a:bodyPr wrap="square" lIns="0" tIns="0" rIns="0" bIns="0" rtlCol="0" anchor="ctr"/>
           <a:lstStyle/>
           <a:p>
-            <a:pPr indent="0" marL="0">
+            <a:pPr marL="0" indent="0">
               <a:buNone/>
             </a:pPr>
             <a:r>
@@ -14275,7 +14540,7 @@
           <a:bodyPr wrap="square" lIns="0" tIns="0" rIns="0" bIns="0" rtlCol="0" anchor="ctr"/>
           <a:lstStyle/>
           <a:p>
-            <a:pPr indent="0" marL="0">
+            <a:pPr marL="0" indent="0">
               <a:buNone/>
             </a:pPr>
             <a:r>
@@ -14314,7 +14579,7 @@
           <a:bodyPr wrap="square" lIns="0" tIns="0" rIns="0" bIns="0" rtlCol="0" anchor="ctr"/>
           <a:lstStyle/>
           <a:p>
-            <a:pPr indent="0" marL="0">
+            <a:pPr marL="0" indent="0">
               <a:buNone/>
             </a:pPr>
             <a:r>
@@ -14326,7 +14591,7 @@
                 <a:ea typeface="Courier New" pitchFamily="34" charset="-122"/>
                 <a:cs typeface="Courier New" pitchFamily="34" charset="-120"/>
               </a:rPr>
-              <a:t>speaker · text</a:t>
+              <a:t>speaker </a:t>
             </a:r>
             <a:endParaRPr lang="en-US" sz="950" dirty="0"/>
           </a:p>
@@ -14353,7 +14618,7 @@
           <a:bodyPr wrap="square" lIns="0" tIns="0" rIns="0" bIns="0" rtlCol="0" anchor="ctr"/>
           <a:lstStyle/>
           <a:p>
-            <a:pPr indent="0" marL="0">
+            <a:pPr marL="0" indent="0">
               <a:buNone/>
             </a:pPr>
             <a:r>
@@ -14394,6 +14659,13 @@
             <a:tailEnd type="triangle"/>
           </a:ln>
         </p:spPr>
+        <p:txBody>
+          <a:bodyPr/>
+          <a:lstStyle/>
+          <a:p>
+            <a:endParaRPr lang="en-US"/>
+          </a:p>
+        </p:txBody>
       </p:sp>
       <p:sp>
         <p:nvSpPr>
@@ -14418,6 +14690,13 @@
             <a:tailEnd type="triangle"/>
           </a:ln>
         </p:spPr>
+        <p:txBody>
+          <a:bodyPr/>
+          <a:lstStyle/>
+          <a:p>
+            <a:endParaRPr lang="en-US"/>
+          </a:p>
+        </p:txBody>
       </p:sp>
       <p:sp>
         <p:nvSpPr>
@@ -14442,6 +14721,13 @@
             <a:tailEnd type="triangle"/>
           </a:ln>
         </p:spPr>
+        <p:txBody>
+          <a:bodyPr/>
+          <a:lstStyle/>
+          <a:p>
+            <a:endParaRPr lang="en-US"/>
+          </a:p>
+        </p:txBody>
       </p:sp>
       <p:sp>
         <p:nvSpPr>
@@ -14466,6 +14752,13 @@
             <a:tailEnd type="triangle"/>
           </a:ln>
         </p:spPr>
+        <p:txBody>
+          <a:bodyPr/>
+          <a:lstStyle/>
+          <a:p>
+            <a:endParaRPr lang="en-US"/>
+          </a:p>
+        </p:txBody>
       </p:sp>
       <p:sp>
         <p:nvSpPr>
@@ -14490,6 +14783,13 @@
             <a:tailEnd type="triangle"/>
           </a:ln>
         </p:spPr>
+        <p:txBody>
+          <a:bodyPr/>
+          <a:lstStyle/>
+          <a:p>
+            <a:endParaRPr lang="en-US"/>
+          </a:p>
+        </p:txBody>
       </p:sp>
       <p:sp>
         <p:nvSpPr>
@@ -14514,6 +14814,13 @@
             <a:tailEnd type="triangle"/>
           </a:ln>
         </p:spPr>
+        <p:txBody>
+          <a:bodyPr/>
+          <a:lstStyle/>
+          <a:p>
+            <a:endParaRPr lang="en-US"/>
+          </a:p>
+        </p:txBody>
       </p:sp>
       <p:sp>
         <p:nvSpPr>
@@ -14538,6 +14845,13 @@
             <a:tailEnd type="triangle"/>
           </a:ln>
         </p:spPr>
+        <p:txBody>
+          <a:bodyPr/>
+          <a:lstStyle/>
+          <a:p>
+            <a:endParaRPr lang="en-US"/>
+          </a:p>
+        </p:txBody>
       </p:sp>
       <p:sp>
         <p:nvSpPr>
@@ -14563,6 +14877,13 @@
             <a:prstDash val="solid"/>
           </a:ln>
         </p:spPr>
+        <p:txBody>
+          <a:bodyPr/>
+          <a:lstStyle/>
+          <a:p>
+            <a:endParaRPr lang="en-US"/>
+          </a:p>
+        </p:txBody>
       </p:sp>
       <p:sp>
         <p:nvSpPr>
@@ -14585,7 +14906,7 @@
           <a:bodyPr wrap="square" lIns="0" tIns="0" rIns="0" bIns="0" rtlCol="0" anchor="ctr"/>
           <a:lstStyle/>
           <a:p>
-            <a:pPr algn="ctr" indent="0" marL="0">
+            <a:pPr marL="0" indent="0" algn="ctr">
               <a:buNone/>
             </a:pPr>
             <a:r>
@@ -14624,7 +14945,7 @@
           <a:bodyPr wrap="square" lIns="0" tIns="0" rIns="0" bIns="0" rtlCol="0" anchor="t"/>
           <a:lstStyle/>
           <a:p>
-            <a:pPr indent="0" marL="0">
+            <a:pPr marL="0" indent="0">
               <a:buNone/>
             </a:pPr>
             <a:r>
@@ -14663,7 +14984,7 @@
           <a:bodyPr wrap="square" lIns="0" tIns="0" rIns="0" bIns="0" rtlCol="0" anchor="t"/>
           <a:lstStyle/>
           <a:p>
-            <a:pPr indent="0" marL="0">
+            <a:pPr marL="0" indent="0">
               <a:buNone/>
             </a:pPr>
             <a:r>
@@ -14705,6 +15026,13 @@
             <a:prstDash val="solid"/>
           </a:ln>
         </p:spPr>
+        <p:txBody>
+          <a:bodyPr/>
+          <a:lstStyle/>
+          <a:p>
+            <a:endParaRPr lang="en-US"/>
+          </a:p>
+        </p:txBody>
       </p:sp>
       <p:sp>
         <p:nvSpPr>
@@ -14727,7 +15055,7 @@
           <a:bodyPr wrap="square" lIns="0" tIns="0" rIns="0" bIns="0" rtlCol="0" anchor="ctr"/>
           <a:lstStyle/>
           <a:p>
-            <a:pPr algn="ctr" indent="0" marL="0">
+            <a:pPr marL="0" indent="0" algn="ctr">
               <a:buNone/>
             </a:pPr>
             <a:r>
@@ -14766,7 +15094,7 @@
           <a:bodyPr wrap="square" lIns="0" tIns="0" rIns="0" bIns="0" rtlCol="0" anchor="t"/>
           <a:lstStyle/>
           <a:p>
-            <a:pPr indent="0" marL="0">
+            <a:pPr marL="0" indent="0">
               <a:buNone/>
             </a:pPr>
             <a:r>
@@ -14805,7 +15133,7 @@
           <a:bodyPr wrap="square" lIns="0" tIns="0" rIns="0" bIns="0" rtlCol="0" anchor="t"/>
           <a:lstStyle/>
           <a:p>
-            <a:pPr indent="0" marL="0">
+            <a:pPr marL="0" indent="0">
               <a:buNone/>
             </a:pPr>
             <a:r>
@@ -14847,6 +15175,13 @@
             <a:prstDash val="solid"/>
           </a:ln>
         </p:spPr>
+        <p:txBody>
+          <a:bodyPr/>
+          <a:lstStyle/>
+          <a:p>
+            <a:endParaRPr lang="en-US"/>
+          </a:p>
+        </p:txBody>
       </p:sp>
       <p:sp>
         <p:nvSpPr>
@@ -14869,7 +15204,7 @@
           <a:bodyPr wrap="square" lIns="0" tIns="0" rIns="0" bIns="0" rtlCol="0" anchor="ctr"/>
           <a:lstStyle/>
           <a:p>
-            <a:pPr algn="ctr" indent="0" marL="0">
+            <a:pPr marL="0" indent="0" algn="ctr">
               <a:buNone/>
             </a:pPr>
             <a:r>
@@ -14908,7 +15243,7 @@
           <a:bodyPr wrap="square" lIns="0" tIns="0" rIns="0" bIns="0" rtlCol="0" anchor="t"/>
           <a:lstStyle/>
           <a:p>
-            <a:pPr indent="0" marL="0">
+            <a:pPr marL="0" indent="0">
               <a:buNone/>
             </a:pPr>
             <a:r>
@@ -14947,7 +15282,7 @@
           <a:bodyPr wrap="square" lIns="0" tIns="0" rIns="0" bIns="0" rtlCol="0" anchor="t"/>
           <a:lstStyle/>
           <a:p>
-            <a:pPr indent="0" marL="0">
+            <a:pPr marL="0" indent="0">
               <a:buNone/>
             </a:pPr>
             <a:r>
@@ -14991,6 +15326,13 @@
             <a:prstDash val="solid"/>
           </a:ln>
         </p:spPr>
+        <p:txBody>
+          <a:bodyPr/>
+          <a:lstStyle/>
+          <a:p>
+            <a:endParaRPr lang="en-US"/>
+          </a:p>
+        </p:txBody>
       </p:sp>
       <p:sp>
         <p:nvSpPr>
@@ -15013,7 +15355,7 @@
           <a:bodyPr wrap="square" lIns="0" tIns="0" rIns="0" bIns="0" rtlCol="0" anchor="ctr"/>
           <a:lstStyle/>
           <a:p>
-            <a:pPr indent="0" marL="0">
+            <a:pPr marL="0" indent="0">
               <a:buNone/>
             </a:pPr>
             <a:r>
@@ -15052,7 +15394,7 @@
           <a:bodyPr wrap="square" lIns="0" tIns="0" rIns="0" bIns="0" rtlCol="0" anchor="t"/>
           <a:lstStyle/>
           <a:p>
-            <a:pPr indent="0" marL="0">
+            <a:pPr marL="0" indent="0">
               <a:buNone/>
             </a:pPr>
             <a:r>
@@ -15067,6 +15409,47 @@
               <a:t>Tên 7 bảng theo Banerjee et al., APEX-MEM, ACL 2026 (§4.3); cột do nhóm thiết kế từ định nghĩa hình thức ở §3.1.</a:t>
             </a:r>
             <a:endParaRPr lang="en-US" sz="900" dirty="0"/>
+          </a:p>
+        </p:txBody>
+      </p:sp>
+      <p:sp>
+        <p:nvSpPr>
+          <p:cNvPr id="77" name="Text 51">
+            <a:extLst>
+              <a:ext uri="{FF2B5EF4-FFF2-40B4-BE49-F238E27FC236}">
+                <a16:creationId xmlns:a16="http://schemas.microsoft.com/office/drawing/2014/main" id="{E810F1AA-709C-6F96-802C-33D22A66680A}"/>
+              </a:ext>
+            </a:extLst>
+          </p:cNvPr>
+          <p:cNvSpPr txBox="1"/>
+          <p:nvPr/>
+        </p:nvSpPr>
+        <p:spPr>
+          <a:xfrm>
+            <a:off x="6007608" y="5777179"/>
+            <a:ext cx="1874520" cy="214884"/>
+          </a:xfrm>
+          <a:prstGeom prst="rect">
+            <a:avLst/>
+          </a:prstGeom>
+          <a:noFill/>
+          <a:ln/>
+        </p:spPr>
+        <p:txBody>
+          <a:bodyPr wrap="square" lIns="0" tIns="0" rIns="0" bIns="0" rtlCol="0" anchor="ctr"/>
+          <a:lstStyle/>
+          <a:p>
+            <a:r>
+              <a:rPr lang="en-US" sz="950" dirty="0">
+                <a:solidFill>
+                  <a:srgbClr val="1E2A32"/>
+                </a:solidFill>
+                <a:latin typeface="Courier New" pitchFamily="34" charset="0"/>
+                <a:cs typeface="Courier New" pitchFamily="34" charset="-120"/>
+              </a:rPr>
+              <a:t>text</a:t>
+            </a:r>
+            <a:endParaRPr lang="en-US" sz="950" dirty="0"/>
           </a:p>
         </p:txBody>
       </p:sp>
@@ -15086,6 +15469,7 @@
         <a:solidFill>
           <a:srgbClr val="FFFFFF"/>
         </a:solidFill>
+        <a:effectLst/>
       </p:bgPr>
     </p:bg>
     <p:spTree>
@@ -15123,11 +15507,11 @@
           <a:bodyPr wrap="square" lIns="0" tIns="0" rIns="0" bIns="0" rtlCol="0" anchor="t"/>
           <a:lstStyle/>
           <a:p>
-            <a:pPr indent="0" marL="0">
+            <a:pPr marL="0" indent="0">
               <a:buNone/>
             </a:pPr>
             <a:r>
-              <a:rPr lang="en-US" sz="1100" b="1" spc="200" kern="0" dirty="0">
+              <a:rPr lang="en-US" sz="1100" b="1" kern="0" spc="200" dirty="0">
                 <a:solidFill>
                   <a:srgbClr val="D98C1F"/>
                 </a:solidFill>
@@ -15162,7 +15546,7 @@
           <a:bodyPr wrap="square" lIns="0" tIns="0" rIns="0" bIns="0" rtlCol="0" anchor="ctr"/>
           <a:lstStyle/>
           <a:p>
-            <a:pPr indent="0" marL="0">
+            <a:pPr marL="0" indent="0">
               <a:buNone/>
             </a:pPr>
             <a:r>
@@ -15201,7 +15585,7 @@
           <a:bodyPr wrap="square" lIns="0" tIns="0" rIns="0" bIns="0" rtlCol="0" anchor="t"/>
           <a:lstStyle/>
           <a:p>
-            <a:pPr indent="0" marL="0">
+            <a:pPr marL="0" indent="0">
               <a:buNone/>
             </a:pPr>
             <a:r>
@@ -15245,6 +15629,13 @@
             <a:prstDash val="solid"/>
           </a:ln>
         </p:spPr>
+        <p:txBody>
+          <a:bodyPr/>
+          <a:lstStyle/>
+          <a:p>
+            <a:endParaRPr lang="en-US"/>
+          </a:p>
+        </p:txBody>
       </p:sp>
       <p:sp>
         <p:nvSpPr>
@@ -15267,7 +15658,7 @@
           <a:bodyPr wrap="square" lIns="0" tIns="0" rIns="0" bIns="0" rtlCol="0" anchor="t"/>
           <a:lstStyle/>
           <a:p>
-            <a:pPr indent="0" marL="0">
+            <a:pPr marL="0" indent="0">
               <a:buNone/>
             </a:pPr>
             <a:r>
@@ -15306,7 +15697,7 @@
           <a:bodyPr wrap="square" lIns="0" tIns="0" rIns="0" bIns="0" rtlCol="0" anchor="t"/>
           <a:lstStyle/>
           <a:p>
-            <a:pPr indent="0" marL="0">
+            <a:pPr marL="0" indent="0">
               <a:buNone/>
             </a:pPr>
             <a:r>
@@ -15345,7 +15736,7 @@
           <a:bodyPr wrap="square" lIns="0" tIns="0" rIns="0" bIns="0" rtlCol="0" anchor="t"/>
           <a:lstStyle/>
           <a:p>
-            <a:pPr indent="0" marL="0">
+            <a:pPr marL="0" indent="0">
               <a:buNone/>
             </a:pPr>
             <a:r>
@@ -15389,6 +15780,13 @@
             <a:prstDash val="solid"/>
           </a:ln>
         </p:spPr>
+        <p:txBody>
+          <a:bodyPr/>
+          <a:lstStyle/>
+          <a:p>
+            <a:endParaRPr lang="en-US"/>
+          </a:p>
+        </p:txBody>
       </p:sp>
       <p:sp>
         <p:nvSpPr>
@@ -15411,7 +15809,7 @@
           <a:bodyPr wrap="square" lIns="0" tIns="0" rIns="0" bIns="0" rtlCol="0" anchor="t"/>
           <a:lstStyle/>
           <a:p>
-            <a:pPr indent="0" marL="0">
+            <a:pPr marL="0" indent="0">
               <a:buNone/>
             </a:pPr>
             <a:r>
@@ -15450,7 +15848,7 @@
           <a:bodyPr wrap="square" lIns="0" tIns="0" rIns="0" bIns="0" rtlCol="0" anchor="t"/>
           <a:lstStyle/>
           <a:p>
-            <a:pPr indent="0" marL="0">
+            <a:pPr marL="0" indent="0">
               <a:buNone/>
             </a:pPr>
             <a:r>
@@ -15489,7 +15887,7 @@
           <a:bodyPr wrap="square" lIns="0" tIns="0" rIns="0" bIns="0" rtlCol="0" anchor="t"/>
           <a:lstStyle/>
           <a:p>
-            <a:pPr indent="0" marL="0">
+            <a:pPr marL="0" indent="0">
               <a:buNone/>
             </a:pPr>
             <a:r>
@@ -15509,7 +15907,7 @@
       </p:sp>
       <p:graphicFrame>
         <p:nvGraphicFramePr>
-          <p:cNvPr id="5" name="Table 0"/>
+          <p:cNvPr id="13" name="Table 0"/>
           <p:cNvGraphicFramePr>
             <a:graphicFrameLocks noGrp="1"/>
           </p:cNvGraphicFramePr>
@@ -15523,17 +15921,41 @@
         </p:nvGraphicFramePr>
         <p:xfrm>
           <a:off x="548640" y="4114800"/>
-          <a:ext cx="5120640" cy="914400"/>
+          <a:ext cx="5120640" cy="932688"/>
         </p:xfrm>
         <a:graphic>
           <a:graphicData uri="http://schemas.openxmlformats.org/drawingml/2006/table">
             <a:tbl>
               <a:tblPr/>
               <a:tblGrid>
-                <a:gridCol w="731520"/>
-                <a:gridCol w="2514600"/>
-                <a:gridCol w="685800"/>
-                <a:gridCol w="1188720"/>
+                <a:gridCol w="731520">
+                  <a:extLst>
+                    <a:ext uri="{9D8B030D-6E8A-4147-A177-3AD203B41FA5}">
+                      <a16:colId xmlns:a16="http://schemas.microsoft.com/office/drawing/2014/main" val="20000"/>
+                    </a:ext>
+                  </a:extLst>
+                </a:gridCol>
+                <a:gridCol w="2514600">
+                  <a:extLst>
+                    <a:ext uri="{9D8B030D-6E8A-4147-A177-3AD203B41FA5}">
+                      <a16:colId xmlns:a16="http://schemas.microsoft.com/office/drawing/2014/main" val="20001"/>
+                    </a:ext>
+                  </a:extLst>
+                </a:gridCol>
+                <a:gridCol w="685800">
+                  <a:extLst>
+                    <a:ext uri="{9D8B030D-6E8A-4147-A177-3AD203B41FA5}">
+                      <a16:colId xmlns:a16="http://schemas.microsoft.com/office/drawing/2014/main" val="20002"/>
+                    </a:ext>
+                  </a:extLst>
+                </a:gridCol>
+                <a:gridCol w="1188720">
+                  <a:extLst>
+                    <a:ext uri="{9D8B030D-6E8A-4147-A177-3AD203B41FA5}">
+                      <a16:colId xmlns:a16="http://schemas.microsoft.com/office/drawing/2014/main" val="20003"/>
+                    </a:ext>
+                  </a:extLst>
+                </a:gridCol>
               </a:tblGrid>
               <a:tr h="310896">
                 <a:tc>
@@ -15541,7 +15963,7 @@
                     <a:bodyPr/>
                     <a:lstStyle/>
                     <a:p>
-                      <a:pPr indent="0" marL="0">
+                      <a:pPr marL="0" indent="0">
                         <a:buNone/>
                       </a:pPr>
                       <a:r>
@@ -15562,7 +15984,7 @@
                       </a:endParaRPr>
                     </a:p>
                   </a:txBody>
-                  <a:tcPr marL="91440" marR="91440" marT="45720" marB="45720" anchor="ctr">
+                  <a:tcPr anchor="ctr">
                     <a:lnL w="9525" cap="flat" cmpd="sng" algn="ctr">
                       <a:solidFill>
                         <a:srgbClr val="BFD8DD"/>
@@ -15609,7 +16031,7 @@
                     <a:bodyPr/>
                     <a:lstStyle/>
                     <a:p>
-                      <a:pPr indent="0" marL="0">
+                      <a:pPr marL="0" indent="0">
                         <a:buNone/>
                       </a:pPr>
                       <a:r>
@@ -15630,7 +16052,7 @@
                       </a:endParaRPr>
                     </a:p>
                   </a:txBody>
-                  <a:tcPr marL="91440" marR="91440" marT="45720" marB="45720" anchor="ctr">
+                  <a:tcPr anchor="ctr">
                     <a:lnL w="9525" cap="flat" cmpd="sng" algn="ctr">
                       <a:solidFill>
                         <a:srgbClr val="BFD8DD"/>
@@ -15677,7 +16099,7 @@
                     <a:bodyPr/>
                     <a:lstStyle/>
                     <a:p>
-                      <a:pPr indent="0" marL="0">
+                      <a:pPr marL="0" indent="0">
                         <a:buNone/>
                       </a:pPr>
                       <a:r>
@@ -15698,7 +16120,7 @@
                       </a:endParaRPr>
                     </a:p>
                   </a:txBody>
-                  <a:tcPr marL="91440" marR="91440" marT="45720" marB="45720" anchor="ctr">
+                  <a:tcPr anchor="ctr">
                     <a:lnL w="9525" cap="flat" cmpd="sng" algn="ctr">
                       <a:solidFill>
                         <a:srgbClr val="BFD8DD"/>
@@ -15745,7 +16167,7 @@
                     <a:bodyPr/>
                     <a:lstStyle/>
                     <a:p>
-                      <a:pPr indent="0" marL="0">
+                      <a:pPr marL="0" indent="0">
                         <a:buNone/>
                       </a:pPr>
                       <a:r>
@@ -15766,7 +16188,7 @@
                       </a:endParaRPr>
                     </a:p>
                   </a:txBody>
-                  <a:tcPr marL="91440" marR="91440" marT="45720" marB="45720" anchor="ctr">
+                  <a:tcPr anchor="ctr">
                     <a:lnL w="9525" cap="flat" cmpd="sng" algn="ctr">
                       <a:solidFill>
                         <a:srgbClr val="BFD8DD"/>
@@ -15808,6 +16230,11 @@
                     </a:solidFill>
                   </a:tcPr>
                 </a:tc>
+                <a:extLst>
+                  <a:ext uri="{0D108BD9-81ED-4DB2-BD59-A6C34878D82A}">
+                    <a16:rowId xmlns:a16="http://schemas.microsoft.com/office/drawing/2014/main" val="10000"/>
+                  </a:ext>
+                </a:extLst>
               </a:tr>
               <a:tr h="310896">
                 <a:tc>
@@ -15815,7 +16242,7 @@
                     <a:bodyPr/>
                     <a:lstStyle/>
                     <a:p>
-                      <a:pPr indent="0" marL="0">
+                      <a:pPr marL="0" indent="0">
                         <a:buNone/>
                       </a:pPr>
                       <a:r>
@@ -15836,7 +16263,7 @@
                       </a:endParaRPr>
                     </a:p>
                   </a:txBody>
-                  <a:tcPr marL="91440" marR="91440" marT="45720" marB="45720" anchor="ctr">
+                  <a:tcPr anchor="ctr">
                     <a:lnL w="9525" cap="flat" cmpd="sng" algn="ctr">
                       <a:solidFill>
                         <a:srgbClr val="BFD8DD"/>
@@ -15883,7 +16310,7 @@
                     <a:bodyPr/>
                     <a:lstStyle/>
                     <a:p>
-                      <a:pPr indent="0" marL="0">
+                      <a:pPr marL="0" indent="0">
                         <a:buNone/>
                       </a:pPr>
                       <a:r>
@@ -15904,7 +16331,7 @@
                       </a:endParaRPr>
                     </a:p>
                   </a:txBody>
-                  <a:tcPr marL="91440" marR="91440" marT="45720" marB="45720" anchor="ctr">
+                  <a:tcPr anchor="ctr">
                     <a:lnL w="9525" cap="flat" cmpd="sng" algn="ctr">
                       <a:solidFill>
                         <a:srgbClr val="BFD8DD"/>
@@ -15951,7 +16378,7 @@
                     <a:bodyPr/>
                     <a:lstStyle/>
                     <a:p>
-                      <a:pPr indent="0" marL="0">
+                      <a:pPr marL="0" indent="0">
                         <a:buNone/>
                       </a:pPr>
                       <a:r>
@@ -15972,7 +16399,7 @@
                       </a:endParaRPr>
                     </a:p>
                   </a:txBody>
-                  <a:tcPr marL="91440" marR="91440" marT="45720" marB="45720" anchor="ctr">
+                  <a:tcPr anchor="ctr">
                     <a:lnL w="9525" cap="flat" cmpd="sng" algn="ctr">
                       <a:solidFill>
                         <a:srgbClr val="BFD8DD"/>
@@ -16019,7 +16446,7 @@
                     <a:bodyPr/>
                     <a:lstStyle/>
                     <a:p>
-                      <a:pPr indent="0" marL="0">
+                      <a:pPr marL="0" indent="0">
                         <a:buNone/>
                       </a:pPr>
                       <a:r>
@@ -16040,7 +16467,7 @@
                       </a:endParaRPr>
                     </a:p>
                   </a:txBody>
-                  <a:tcPr marL="91440" marR="91440" marT="45720" marB="45720" anchor="ctr">
+                  <a:tcPr anchor="ctr">
                     <a:lnL w="9525" cap="flat" cmpd="sng" algn="ctr">
                       <a:solidFill>
                         <a:srgbClr val="BFD8DD"/>
@@ -16082,6 +16509,11 @@
                     </a:solidFill>
                   </a:tcPr>
                 </a:tc>
+                <a:extLst>
+                  <a:ext uri="{0D108BD9-81ED-4DB2-BD59-A6C34878D82A}">
+                    <a16:rowId xmlns:a16="http://schemas.microsoft.com/office/drawing/2014/main" val="10001"/>
+                  </a:ext>
+                </a:extLst>
               </a:tr>
               <a:tr h="310896">
                 <a:tc>
@@ -16089,7 +16521,7 @@
                     <a:bodyPr/>
                     <a:lstStyle/>
                     <a:p>
-                      <a:pPr indent="0" marL="0">
+                      <a:pPr marL="0" indent="0">
                         <a:buNone/>
                       </a:pPr>
                       <a:r>
@@ -16110,7 +16542,7 @@
                       </a:endParaRPr>
                     </a:p>
                   </a:txBody>
-                  <a:tcPr marL="91440" marR="91440" marT="45720" marB="45720" anchor="ctr">
+                  <a:tcPr anchor="ctr">
                     <a:lnL w="9525" cap="flat" cmpd="sng" algn="ctr">
                       <a:solidFill>
                         <a:srgbClr val="BFD8DD"/>
@@ -16157,7 +16589,7 @@
                     <a:bodyPr/>
                     <a:lstStyle/>
                     <a:p>
-                      <a:pPr indent="0" marL="0">
+                      <a:pPr marL="0" indent="0">
                         <a:buNone/>
                       </a:pPr>
                       <a:r>
@@ -16178,7 +16610,7 @@
                       </a:endParaRPr>
                     </a:p>
                   </a:txBody>
-                  <a:tcPr marL="91440" marR="91440" marT="45720" marB="45720" anchor="ctr">
+                  <a:tcPr anchor="ctr">
                     <a:lnL w="9525" cap="flat" cmpd="sng" algn="ctr">
                       <a:solidFill>
                         <a:srgbClr val="BFD8DD"/>
@@ -16225,7 +16657,7 @@
                     <a:bodyPr/>
                     <a:lstStyle/>
                     <a:p>
-                      <a:pPr indent="0" marL="0">
+                      <a:pPr marL="0" indent="0">
                         <a:buNone/>
                       </a:pPr>
                       <a:r>
@@ -16246,7 +16678,7 @@
                       </a:endParaRPr>
                     </a:p>
                   </a:txBody>
-                  <a:tcPr marL="91440" marR="91440" marT="45720" marB="45720" anchor="ctr">
+                  <a:tcPr anchor="ctr">
                     <a:lnL w="9525" cap="flat" cmpd="sng" algn="ctr">
                       <a:solidFill>
                         <a:srgbClr val="BFD8DD"/>
@@ -16293,7 +16725,7 @@
                     <a:bodyPr/>
                     <a:lstStyle/>
                     <a:p>
-                      <a:pPr indent="0" marL="0">
+                      <a:pPr marL="0" indent="0">
                         <a:buNone/>
                       </a:pPr>
                       <a:r>
@@ -16314,7 +16746,7 @@
                       </a:endParaRPr>
                     </a:p>
                   </a:txBody>
-                  <a:tcPr marL="91440" marR="91440" marT="45720" marB="45720" anchor="ctr">
+                  <a:tcPr anchor="ctr">
                     <a:lnL w="9525" cap="flat" cmpd="sng" algn="ctr">
                       <a:solidFill>
                         <a:srgbClr val="BFD8DD"/>
@@ -16356,6 +16788,11 @@
                     </a:solidFill>
                   </a:tcPr>
                 </a:tc>
+                <a:extLst>
+                  <a:ext uri="{0D108BD9-81ED-4DB2-BD59-A6C34878D82A}">
+                    <a16:rowId xmlns:a16="http://schemas.microsoft.com/office/drawing/2014/main" val="10002"/>
+                  </a:ext>
+                </a:extLst>
               </a:tr>
             </a:tbl>
           </a:graphicData>
@@ -16387,6 +16824,13 @@
             <a:prstDash val="solid"/>
           </a:ln>
         </p:spPr>
+        <p:txBody>
+          <a:bodyPr/>
+          <a:lstStyle/>
+          <a:p>
+            <a:endParaRPr lang="en-US"/>
+          </a:p>
+        </p:txBody>
       </p:sp>
       <p:sp>
         <p:nvSpPr>
@@ -16409,7 +16853,7 @@
           <a:bodyPr wrap="square" lIns="0" tIns="0" rIns="0" bIns="0" rtlCol="0" anchor="ctr"/>
           <a:lstStyle/>
           <a:p>
-            <a:pPr indent="0" marL="0">
+            <a:pPr marL="0" indent="0">
               <a:buNone/>
             </a:pPr>
             <a:r>
@@ -16453,6 +16897,13 @@
             <a:prstDash val="solid"/>
           </a:ln>
         </p:spPr>
+        <p:txBody>
+          <a:bodyPr/>
+          <a:lstStyle/>
+          <a:p>
+            <a:endParaRPr lang="en-US"/>
+          </a:p>
+        </p:txBody>
       </p:sp>
       <p:sp>
         <p:nvSpPr>
@@ -16478,6 +16929,13 @@
             <a:prstDash val="solid"/>
           </a:ln>
         </p:spPr>
+        <p:txBody>
+          <a:bodyPr/>
+          <a:lstStyle/>
+          <a:p>
+            <a:endParaRPr lang="en-US"/>
+          </a:p>
+        </p:txBody>
       </p:sp>
       <p:sp>
         <p:nvSpPr>
@@ -16500,7 +16958,7 @@
           <a:bodyPr wrap="square" lIns="0" tIns="0" rIns="0" bIns="0" rtlCol="0" anchor="ctr"/>
           <a:lstStyle/>
           <a:p>
-            <a:pPr algn="ctr" indent="0" marL="0">
+            <a:pPr marL="0" indent="0" algn="ctr">
               <a:buNone/>
             </a:pPr>
             <a:r>
@@ -16539,7 +16997,7 @@
           <a:bodyPr wrap="square" lIns="0" tIns="0" rIns="0" bIns="0" rtlCol="0" anchor="t"/>
           <a:lstStyle/>
           <a:p>
-            <a:pPr indent="0" marL="0">
+            <a:pPr marL="0" indent="0">
               <a:buNone/>
             </a:pPr>
             <a:r>
@@ -16578,7 +17036,7 @@
           <a:bodyPr wrap="square" lIns="0" tIns="0" rIns="0" bIns="0" rtlCol="0" anchor="t"/>
           <a:lstStyle/>
           <a:p>
-            <a:pPr indent="0" marL="0">
+            <a:pPr marL="0" indent="0">
               <a:buNone/>
             </a:pPr>
             <a:r>
@@ -16622,6 +17080,13 @@
             <a:prstDash val="solid"/>
           </a:ln>
         </p:spPr>
+        <p:txBody>
+          <a:bodyPr/>
+          <a:lstStyle/>
+          <a:p>
+            <a:endParaRPr lang="en-US"/>
+          </a:p>
+        </p:txBody>
       </p:sp>
       <p:sp>
         <p:nvSpPr>
@@ -16647,6 +17112,13 @@
             <a:prstDash val="solid"/>
           </a:ln>
         </p:spPr>
+        <p:txBody>
+          <a:bodyPr/>
+          <a:lstStyle/>
+          <a:p>
+            <a:endParaRPr lang="en-US"/>
+          </a:p>
+        </p:txBody>
       </p:sp>
       <p:sp>
         <p:nvSpPr>
@@ -16669,7 +17141,7 @@
           <a:bodyPr wrap="square" lIns="0" tIns="0" rIns="0" bIns="0" rtlCol="0" anchor="ctr"/>
           <a:lstStyle/>
           <a:p>
-            <a:pPr algn="ctr" indent="0" marL="0">
+            <a:pPr marL="0" indent="0" algn="ctr">
               <a:buNone/>
             </a:pPr>
             <a:r>
@@ -16708,7 +17180,7 @@
           <a:bodyPr wrap="square" lIns="0" tIns="0" rIns="0" bIns="0" rtlCol="0" anchor="t"/>
           <a:lstStyle/>
           <a:p>
-            <a:pPr indent="0" marL="0">
+            <a:pPr marL="0" indent="0">
               <a:buNone/>
             </a:pPr>
             <a:r>
@@ -16747,7 +17219,7 @@
           <a:bodyPr wrap="square" lIns="0" tIns="0" rIns="0" bIns="0" rtlCol="0" anchor="t"/>
           <a:lstStyle/>
           <a:p>
-            <a:pPr indent="0" marL="0">
+            <a:pPr marL="0" indent="0">
               <a:buNone/>
             </a:pPr>
             <a:r>
@@ -16791,6 +17263,13 @@
             <a:prstDash val="solid"/>
           </a:ln>
         </p:spPr>
+        <p:txBody>
+          <a:bodyPr/>
+          <a:lstStyle/>
+          <a:p>
+            <a:endParaRPr lang="en-US"/>
+          </a:p>
+        </p:txBody>
       </p:sp>
       <p:sp>
         <p:nvSpPr>
@@ -16816,6 +17295,13 @@
             <a:prstDash val="solid"/>
           </a:ln>
         </p:spPr>
+        <p:txBody>
+          <a:bodyPr/>
+          <a:lstStyle/>
+          <a:p>
+            <a:endParaRPr lang="en-US"/>
+          </a:p>
+        </p:txBody>
       </p:sp>
       <p:sp>
         <p:nvSpPr>
@@ -16838,7 +17324,7 @@
           <a:bodyPr wrap="square" lIns="0" tIns="0" rIns="0" bIns="0" rtlCol="0" anchor="ctr"/>
           <a:lstStyle/>
           <a:p>
-            <a:pPr algn="ctr" indent="0" marL="0">
+            <a:pPr marL="0" indent="0" algn="ctr">
               <a:buNone/>
             </a:pPr>
             <a:r>
@@ -16877,7 +17363,7 @@
           <a:bodyPr wrap="square" lIns="0" tIns="0" rIns="0" bIns="0" rtlCol="0" anchor="t"/>
           <a:lstStyle/>
           <a:p>
-            <a:pPr indent="0" marL="0">
+            <a:pPr marL="0" indent="0">
               <a:buNone/>
             </a:pPr>
             <a:r>
@@ -16916,7 +17402,7 @@
           <a:bodyPr wrap="square" lIns="0" tIns="0" rIns="0" bIns="0" rtlCol="0" anchor="t"/>
           <a:lstStyle/>
           <a:p>
-            <a:pPr indent="0" marL="0">
+            <a:pPr marL="0" indent="0">
               <a:buNone/>
             </a:pPr>
             <a:r>
@@ -16955,7 +17441,7 @@
           <a:bodyPr wrap="square" lIns="0" tIns="0" rIns="0" bIns="0" rtlCol="0" anchor="t"/>
           <a:lstStyle/>
           <a:p>
-            <a:pPr indent="0" marL="0">
+            <a:pPr marL="0" indent="0">
               <a:buNone/>
             </a:pPr>
             <a:r>
@@ -16989,6 +17475,7 @@
         <a:solidFill>
           <a:srgbClr val="FFFFFF"/>
         </a:solidFill>
+        <a:effectLst/>
       </p:bgPr>
     </p:bg>
     <p:spTree>
@@ -17026,11 +17513,11 @@
           <a:bodyPr wrap="square" lIns="0" tIns="0" rIns="0" bIns="0" rtlCol="0" anchor="t"/>
           <a:lstStyle/>
           <a:p>
-            <a:pPr indent="0" marL="0">
+            <a:pPr marL="0" indent="0">
               <a:buNone/>
             </a:pPr>
             <a:r>
-              <a:rPr lang="en-US" sz="1100" b="1" spc="200" kern="0" dirty="0">
+              <a:rPr lang="en-US" sz="1100" b="1" kern="0" spc="200" dirty="0">
                 <a:solidFill>
                   <a:srgbClr val="D98C1F"/>
                 </a:solidFill>
@@ -17065,7 +17552,7 @@
           <a:bodyPr wrap="square" lIns="0" tIns="0" rIns="0" bIns="0" rtlCol="0" anchor="ctr"/>
           <a:lstStyle/>
           <a:p>
-            <a:pPr indent="0" marL="0">
+            <a:pPr marL="0" indent="0">
               <a:buNone/>
             </a:pPr>
             <a:r>
@@ -17109,6 +17596,13 @@
             <a:prstDash val="solid"/>
           </a:ln>
         </p:spPr>
+        <p:txBody>
+          <a:bodyPr/>
+          <a:lstStyle/>
+          <a:p>
+            <a:endParaRPr lang="en-US"/>
+          </a:p>
+        </p:txBody>
       </p:sp>
       <p:sp>
         <p:nvSpPr>
@@ -17131,7 +17625,7 @@
           <a:bodyPr wrap="square" lIns="0" tIns="0" rIns="0" bIns="0" rtlCol="0" anchor="ctr"/>
           <a:lstStyle/>
           <a:p>
-            <a:pPr indent="0" marL="0">
+            <a:pPr marL="0" indent="0">
               <a:buNone/>
             </a:pPr>
             <a:r>
@@ -17145,9 +17639,6 @@
               </a:rPr>
               <a:t>Ví dụ: câu multi-session 2b8f3739 — </a:t>
             </a:r>
-            <a:pPr indent="0" marL="0">
-              <a:buNone/>
-            </a:pPr>
             <a:r>
               <a:rPr lang="en-US" sz="1250" dirty="0">
                 <a:solidFill>
@@ -17189,6 +17680,13 @@
             <a:prstDash val="solid"/>
           </a:ln>
         </p:spPr>
+        <p:txBody>
+          <a:bodyPr/>
+          <a:lstStyle/>
+          <a:p>
+            <a:endParaRPr lang="en-US"/>
+          </a:p>
+        </p:txBody>
       </p:sp>
       <p:sp>
         <p:nvSpPr>
@@ -17214,6 +17712,13 @@
             <a:prstDash val="solid"/>
           </a:ln>
         </p:spPr>
+        <p:txBody>
+          <a:bodyPr/>
+          <a:lstStyle/>
+          <a:p>
+            <a:endParaRPr lang="en-US"/>
+          </a:p>
+        </p:txBody>
       </p:sp>
       <p:sp>
         <p:nvSpPr>
@@ -17236,7 +17741,7 @@
           <a:bodyPr wrap="square" lIns="0" tIns="0" rIns="0" bIns="0" rtlCol="0" anchor="ctr"/>
           <a:lstStyle/>
           <a:p>
-            <a:pPr algn="ctr" indent="0" marL="0">
+            <a:pPr marL="0" indent="0" algn="ctr">
               <a:buNone/>
             </a:pPr>
             <a:r>
@@ -17280,6 +17785,13 @@
             <a:prstDash val="solid"/>
           </a:ln>
         </p:spPr>
+        <p:txBody>
+          <a:bodyPr/>
+          <a:lstStyle/>
+          <a:p>
+            <a:endParaRPr lang="en-US"/>
+          </a:p>
+        </p:txBody>
       </p:sp>
       <p:sp>
         <p:nvSpPr>
@@ -17302,7 +17814,7 @@
           <a:bodyPr wrap="square" lIns="0" tIns="0" rIns="0" bIns="0" rtlCol="0" anchor="ctr"/>
           <a:lstStyle/>
           <a:p>
-            <a:pPr algn="ctr" indent="0" marL="0">
+            <a:pPr marL="0" indent="0" algn="ctr">
               <a:buNone/>
             </a:pPr>
             <a:r>
@@ -17341,7 +17853,7 @@
           <a:bodyPr wrap="square" lIns="0" tIns="0" rIns="0" bIns="0" rtlCol="0" anchor="t"/>
           <a:lstStyle/>
           <a:p>
-            <a:pPr indent="0" marL="0">
+            <a:pPr marL="0" indent="0">
               <a:buNone/>
             </a:pPr>
             <a:r>
@@ -17380,7 +17892,7 @@
           <a:bodyPr wrap="square" lIns="0" tIns="0" rIns="0" bIns="0" rtlCol="0" anchor="t"/>
           <a:lstStyle/>
           <a:p>
-            <a:pPr indent="0" marL="0">
+            <a:pPr marL="0" indent="0">
               <a:buNone/>
             </a:pPr>
             <a:r>
@@ -17397,7 +17909,7 @@
             <a:endParaRPr lang="en-US" sz="1250" dirty="0"/>
           </a:p>
           <a:p>
-            <a:pPr indent="0" marL="0">
+            <a:pPr marL="0" indent="0">
               <a:buNone/>
             </a:pPr>
             <a:r>
@@ -17441,6 +17953,13 @@
             <a:prstDash val="solid"/>
           </a:ln>
         </p:spPr>
+        <p:txBody>
+          <a:bodyPr/>
+          <a:lstStyle/>
+          <a:p>
+            <a:endParaRPr lang="en-US"/>
+          </a:p>
+        </p:txBody>
       </p:sp>
       <p:sp>
         <p:nvSpPr>
@@ -17463,7 +17982,7 @@
           <a:bodyPr wrap="square" lIns="0" tIns="0" rIns="0" bIns="0" rtlCol="0" anchor="ctr"/>
           <a:lstStyle/>
           <a:p>
-            <a:pPr indent="0" marL="0">
+            <a:pPr marL="0" indent="0">
               <a:buNone/>
             </a:pPr>
             <a:r>
@@ -17480,7 +17999,7 @@
             <a:endParaRPr lang="en-US" sz="1250" dirty="0"/>
           </a:p>
           <a:p>
-            <a:pPr indent="0" marL="0">
+            <a:pPr marL="0" indent="0">
               <a:buNone/>
             </a:pPr>
             <a:r>
@@ -17521,6 +18040,13 @@
             <a:tailEnd type="triangle"/>
           </a:ln>
         </p:spPr>
+        <p:txBody>
+          <a:bodyPr/>
+          <a:lstStyle/>
+          <a:p>
+            <a:endParaRPr lang="en-US"/>
+          </a:p>
+        </p:txBody>
       </p:sp>
       <p:sp>
         <p:nvSpPr>
@@ -17548,6 +18074,13 @@
             <a:prstDash val="solid"/>
           </a:ln>
         </p:spPr>
+        <p:txBody>
+          <a:bodyPr/>
+          <a:lstStyle/>
+          <a:p>
+            <a:endParaRPr lang="en-US"/>
+          </a:p>
+        </p:txBody>
       </p:sp>
       <p:sp>
         <p:nvSpPr>
@@ -17573,6 +18106,13 @@
             <a:prstDash val="solid"/>
           </a:ln>
         </p:spPr>
+        <p:txBody>
+          <a:bodyPr/>
+          <a:lstStyle/>
+          <a:p>
+            <a:endParaRPr lang="en-US"/>
+          </a:p>
+        </p:txBody>
       </p:sp>
       <p:sp>
         <p:nvSpPr>
@@ -17595,7 +18135,7 @@
           <a:bodyPr wrap="square" lIns="0" tIns="0" rIns="0" bIns="0" rtlCol="0" anchor="ctr"/>
           <a:lstStyle/>
           <a:p>
-            <a:pPr algn="ctr" indent="0" marL="0">
+            <a:pPr marL="0" indent="0" algn="ctr">
               <a:buNone/>
             </a:pPr>
             <a:r>
@@ -17639,6 +18179,13 @@
             <a:prstDash val="solid"/>
           </a:ln>
         </p:spPr>
+        <p:txBody>
+          <a:bodyPr/>
+          <a:lstStyle/>
+          <a:p>
+            <a:endParaRPr lang="en-US"/>
+          </a:p>
+        </p:txBody>
       </p:sp>
       <p:sp>
         <p:nvSpPr>
@@ -17661,7 +18208,7 @@
           <a:bodyPr wrap="square" lIns="0" tIns="0" rIns="0" bIns="0" rtlCol="0" anchor="ctr"/>
           <a:lstStyle/>
           <a:p>
-            <a:pPr algn="ctr" indent="0" marL="0">
+            <a:pPr marL="0" indent="0" algn="ctr">
               <a:buNone/>
             </a:pPr>
             <a:r>
@@ -17700,7 +18247,7 @@
           <a:bodyPr wrap="square" lIns="0" tIns="0" rIns="0" bIns="0" rtlCol="0" anchor="t"/>
           <a:lstStyle/>
           <a:p>
-            <a:pPr indent="0" marL="0">
+            <a:pPr marL="0" indent="0">
               <a:buNone/>
             </a:pPr>
             <a:r>
@@ -17739,7 +18286,7 @@
           <a:bodyPr wrap="square" lIns="0" tIns="0" rIns="0" bIns="0" rtlCol="0" anchor="t"/>
           <a:lstStyle/>
           <a:p>
-            <a:pPr indent="0" marL="0">
+            <a:pPr marL="0" indent="0">
               <a:buNone/>
             </a:pPr>
             <a:r>
@@ -17756,7 +18303,7 @@
             <a:endParaRPr lang="en-US" sz="1250" dirty="0"/>
           </a:p>
           <a:p>
-            <a:pPr indent="0" marL="0">
+            <a:pPr marL="0" indent="0">
               <a:buNone/>
             </a:pPr>
             <a:r>
@@ -17800,6 +18347,13 @@
             <a:prstDash val="solid"/>
           </a:ln>
         </p:spPr>
+        <p:txBody>
+          <a:bodyPr/>
+          <a:lstStyle/>
+          <a:p>
+            <a:endParaRPr lang="en-US"/>
+          </a:p>
+        </p:txBody>
       </p:sp>
       <p:sp>
         <p:nvSpPr>
@@ -17822,7 +18376,7 @@
           <a:bodyPr wrap="square" lIns="0" tIns="0" rIns="0" bIns="0" rtlCol="0" anchor="ctr"/>
           <a:lstStyle/>
           <a:p>
-            <a:pPr indent="0" marL="0">
+            <a:pPr marL="0" indent="0">
               <a:buNone/>
             </a:pPr>
             <a:r>
@@ -17839,7 +18393,7 @@
             <a:endParaRPr lang="en-US" sz="1250" dirty="0"/>
           </a:p>
           <a:p>
-            <a:pPr indent="0" marL="0">
+            <a:pPr marL="0" indent="0">
               <a:buNone/>
             </a:pPr>
             <a:r>
@@ -17880,6 +18434,13 @@
             <a:tailEnd type="triangle"/>
           </a:ln>
         </p:spPr>
+        <p:txBody>
+          <a:bodyPr/>
+          <a:lstStyle/>
+          <a:p>
+            <a:endParaRPr lang="en-US"/>
+          </a:p>
+        </p:txBody>
       </p:sp>
       <p:sp>
         <p:nvSpPr>
@@ -17907,6 +18468,13 @@
             <a:prstDash val="solid"/>
           </a:ln>
         </p:spPr>
+        <p:txBody>
+          <a:bodyPr/>
+          <a:lstStyle/>
+          <a:p>
+            <a:endParaRPr lang="en-US"/>
+          </a:p>
+        </p:txBody>
       </p:sp>
       <p:sp>
         <p:nvSpPr>
@@ -17932,6 +18500,13 @@
             <a:prstDash val="solid"/>
           </a:ln>
         </p:spPr>
+        <p:txBody>
+          <a:bodyPr/>
+          <a:lstStyle/>
+          <a:p>
+            <a:endParaRPr lang="en-US"/>
+          </a:p>
+        </p:txBody>
       </p:sp>
       <p:sp>
         <p:nvSpPr>
@@ -17954,7 +18529,7 @@
           <a:bodyPr wrap="square" lIns="0" tIns="0" rIns="0" bIns="0" rtlCol="0" anchor="ctr"/>
           <a:lstStyle/>
           <a:p>
-            <a:pPr algn="ctr" indent="0" marL="0">
+            <a:pPr marL="0" indent="0" algn="ctr">
               <a:buNone/>
             </a:pPr>
             <a:r>
@@ -17998,6 +18573,13 @@
             <a:prstDash val="solid"/>
           </a:ln>
         </p:spPr>
+        <p:txBody>
+          <a:bodyPr/>
+          <a:lstStyle/>
+          <a:p>
+            <a:endParaRPr lang="en-US"/>
+          </a:p>
+        </p:txBody>
       </p:sp>
       <p:sp>
         <p:nvSpPr>
@@ -18020,7 +18602,7 @@
           <a:bodyPr wrap="square" lIns="0" tIns="0" rIns="0" bIns="0" rtlCol="0" anchor="ctr"/>
           <a:lstStyle/>
           <a:p>
-            <a:pPr algn="ctr" indent="0" marL="0">
+            <a:pPr marL="0" indent="0" algn="ctr">
               <a:buNone/>
             </a:pPr>
             <a:r>
@@ -18059,7 +18641,7 @@
           <a:bodyPr wrap="square" lIns="0" tIns="0" rIns="0" bIns="0" rtlCol="0" anchor="t"/>
           <a:lstStyle/>
           <a:p>
-            <a:pPr indent="0" marL="0">
+            <a:pPr marL="0" indent="0">
               <a:buNone/>
             </a:pPr>
             <a:r>
@@ -18098,7 +18680,7 @@
           <a:bodyPr wrap="square" lIns="0" tIns="0" rIns="0" bIns="0" rtlCol="0" anchor="t"/>
           <a:lstStyle/>
           <a:p>
-            <a:pPr indent="0" marL="0">
+            <a:pPr marL="0" indent="0">
               <a:buNone/>
             </a:pPr>
             <a:r>
@@ -18142,6 +18724,13 @@
             <a:prstDash val="solid"/>
           </a:ln>
         </p:spPr>
+        <p:txBody>
+          <a:bodyPr/>
+          <a:lstStyle/>
+          <a:p>
+            <a:endParaRPr lang="en-US"/>
+          </a:p>
+        </p:txBody>
       </p:sp>
       <p:sp>
         <p:nvSpPr>
@@ -18164,7 +18753,7 @@
           <a:bodyPr wrap="square" lIns="0" tIns="0" rIns="0" bIns="0" rtlCol="0" anchor="ctr"/>
           <a:lstStyle/>
           <a:p>
-            <a:pPr indent="0" marL="0">
+            <a:pPr marL="0" indent="0">
               <a:buNone/>
             </a:pPr>
             <a:r>
@@ -18181,7 +18770,7 @@
             <a:endParaRPr lang="en-US" sz="1250" dirty="0"/>
           </a:p>
           <a:p>
-            <a:pPr indent="0" marL="0">
+            <a:pPr marL="0" indent="0">
               <a:buNone/>
             </a:pPr>
             <a:r>
@@ -18222,6 +18811,13 @@
             <a:tailEnd type="triangle"/>
           </a:ln>
         </p:spPr>
+        <p:txBody>
+          <a:bodyPr/>
+          <a:lstStyle/>
+          <a:p>
+            <a:endParaRPr lang="en-US"/>
+          </a:p>
+        </p:txBody>
       </p:sp>
       <p:sp>
         <p:nvSpPr>
@@ -18249,6 +18845,13 @@
             <a:prstDash val="solid"/>
           </a:ln>
         </p:spPr>
+        <p:txBody>
+          <a:bodyPr/>
+          <a:lstStyle/>
+          <a:p>
+            <a:endParaRPr lang="en-US"/>
+          </a:p>
+        </p:txBody>
       </p:sp>
       <p:sp>
         <p:nvSpPr>
@@ -18274,6 +18877,13 @@
             <a:prstDash val="solid"/>
           </a:ln>
         </p:spPr>
+        <p:txBody>
+          <a:bodyPr/>
+          <a:lstStyle/>
+          <a:p>
+            <a:endParaRPr lang="en-US"/>
+          </a:p>
+        </p:txBody>
       </p:sp>
       <p:sp>
         <p:nvSpPr>
@@ -18296,7 +18906,7 @@
           <a:bodyPr wrap="square" lIns="0" tIns="0" rIns="0" bIns="0" rtlCol="0" anchor="ctr"/>
           <a:lstStyle/>
           <a:p>
-            <a:pPr algn="ctr" indent="0" marL="0">
+            <a:pPr marL="0" indent="0" algn="ctr">
               <a:buNone/>
             </a:pPr>
             <a:r>
@@ -18340,6 +18950,13 @@
             <a:prstDash val="solid"/>
           </a:ln>
         </p:spPr>
+        <p:txBody>
+          <a:bodyPr/>
+          <a:lstStyle/>
+          <a:p>
+            <a:endParaRPr lang="en-US"/>
+          </a:p>
+        </p:txBody>
       </p:sp>
       <p:sp>
         <p:nvSpPr>
@@ -18362,7 +18979,7 @@
           <a:bodyPr wrap="square" lIns="0" tIns="0" rIns="0" bIns="0" rtlCol="0" anchor="ctr"/>
           <a:lstStyle/>
           <a:p>
-            <a:pPr algn="ctr" indent="0" marL="0">
+            <a:pPr marL="0" indent="0" algn="ctr">
               <a:buNone/>
             </a:pPr>
             <a:r>
@@ -18401,7 +19018,7 @@
           <a:bodyPr wrap="square" lIns="0" tIns="0" rIns="0" bIns="0" rtlCol="0" anchor="t"/>
           <a:lstStyle/>
           <a:p>
-            <a:pPr indent="0" marL="0">
+            <a:pPr marL="0" indent="0">
               <a:buNone/>
             </a:pPr>
             <a:r>
@@ -18440,7 +19057,7 @@
           <a:bodyPr wrap="square" lIns="0" tIns="0" rIns="0" bIns="0" rtlCol="0" anchor="t"/>
           <a:lstStyle/>
           <a:p>
-            <a:pPr indent="0" marL="0">
+            <a:pPr marL="0" indent="0">
               <a:buNone/>
             </a:pPr>
             <a:r>
@@ -18484,6 +19101,13 @@
             <a:prstDash val="solid"/>
           </a:ln>
         </p:spPr>
+        <p:txBody>
+          <a:bodyPr/>
+          <a:lstStyle/>
+          <a:p>
+            <a:endParaRPr lang="en-US"/>
+          </a:p>
+        </p:txBody>
       </p:sp>
       <p:sp>
         <p:nvSpPr>
@@ -18506,7 +19130,7 @@
           <a:bodyPr wrap="square" lIns="0" tIns="0" rIns="0" bIns="0" rtlCol="0" anchor="ctr"/>
           <a:lstStyle/>
           <a:p>
-            <a:pPr indent="0" marL="0">
+            <a:pPr marL="0" indent="0">
               <a:buNone/>
             </a:pPr>
             <a:r>
@@ -18523,7 +19147,7 @@
             <a:endParaRPr lang="en-US" sz="1250" dirty="0"/>
           </a:p>
           <a:p>
-            <a:pPr indent="0" marL="0">
+            <a:pPr marL="0" indent="0">
               <a:buNone/>
             </a:pPr>
             <a:r>
@@ -18562,7 +19186,7 @@
           <a:bodyPr wrap="square" lIns="0" tIns="0" rIns="0" bIns="0" rtlCol="0" anchor="t"/>
           <a:lstStyle/>
           <a:p>
-            <a:pPr indent="0" marL="0">
+            <a:pPr marL="0" indent="0">
               <a:buNone/>
             </a:pPr>
             <a:r>
@@ -18596,6 +19220,7 @@
         <a:solidFill>
           <a:srgbClr val="FFFFFF"/>
         </a:solidFill>
+        <a:effectLst/>
       </p:bgPr>
     </p:bg>
     <p:spTree>
@@ -18633,11 +19258,11 @@
           <a:bodyPr wrap="square" lIns="0" tIns="0" rIns="0" bIns="0" rtlCol="0" anchor="t"/>
           <a:lstStyle/>
           <a:p>
-            <a:pPr indent="0" marL="0">
+            <a:pPr marL="0" indent="0">
               <a:buNone/>
             </a:pPr>
             <a:r>
-              <a:rPr lang="en-US" sz="1100" b="1" spc="200" kern="0" dirty="0">
+              <a:rPr lang="en-US" sz="1100" b="1" kern="0" spc="200" dirty="0">
                 <a:solidFill>
                   <a:srgbClr val="D98C1F"/>
                 </a:solidFill>
@@ -18672,7 +19297,7 @@
           <a:bodyPr wrap="square" lIns="0" tIns="0" rIns="0" bIns="0" rtlCol="0" anchor="ctr"/>
           <a:lstStyle/>
           <a:p>
-            <a:pPr indent="0" marL="0">
+            <a:pPr marL="0" indent="0">
               <a:buNone/>
             </a:pPr>
             <a:r>
@@ -18711,7 +19336,7 @@
           <a:bodyPr wrap="square" lIns="0" tIns="0" rIns="0" bIns="0" rtlCol="0" anchor="t"/>
           <a:lstStyle/>
           <a:p>
-            <a:pPr indent="0" marL="0">
+            <a:pPr marL="0" indent="0">
               <a:buNone/>
             </a:pPr>
             <a:r>
@@ -18755,6 +19380,13 @@
             <a:prstDash val="solid"/>
           </a:ln>
         </p:spPr>
+        <p:txBody>
+          <a:bodyPr/>
+          <a:lstStyle/>
+          <a:p>
+            <a:endParaRPr lang="en-US"/>
+          </a:p>
+        </p:txBody>
       </p:sp>
       <p:sp>
         <p:nvSpPr>
@@ -18777,7 +19409,7 @@
           <a:bodyPr wrap="square" lIns="0" tIns="0" rIns="0" bIns="0" rtlCol="0" anchor="t"/>
           <a:lstStyle/>
           <a:p>
-            <a:pPr indent="0" marL="0">
+            <a:pPr marL="0" indent="0">
               <a:buNone/>
             </a:pPr>
             <a:r>
@@ -18816,7 +19448,7 @@
           <a:bodyPr wrap="square" lIns="0" tIns="0" rIns="0" bIns="0" rtlCol="0" anchor="t"/>
           <a:lstStyle/>
           <a:p>
-            <a:pPr indent="0" marL="0">
+            <a:pPr marL="0" indent="0">
               <a:buNone/>
             </a:pPr>
             <a:r>
@@ -18963,6 +19595,13 @@
             <a:tailEnd type="triangle"/>
           </a:ln>
         </p:spPr>
+        <p:txBody>
+          <a:bodyPr/>
+          <a:lstStyle/>
+          <a:p>
+            <a:endParaRPr lang="en-US"/>
+          </a:p>
+        </p:txBody>
       </p:sp>
       <p:sp>
         <p:nvSpPr>
@@ -18985,7 +19624,7 @@
           <a:bodyPr wrap="square" lIns="0" tIns="0" rIns="0" bIns="0" rtlCol="0" anchor="t"/>
           <a:lstStyle/>
           <a:p>
-            <a:pPr indent="0" marL="0">
+            <a:pPr marL="0" indent="0">
               <a:buNone/>
             </a:pPr>
             <a:r>
@@ -19029,6 +19668,13 @@
             <a:prstDash val="solid"/>
           </a:ln>
         </p:spPr>
+        <p:txBody>
+          <a:bodyPr/>
+          <a:lstStyle/>
+          <a:p>
+            <a:endParaRPr lang="en-US"/>
+          </a:p>
+        </p:txBody>
       </p:sp>
       <p:sp>
         <p:nvSpPr>
@@ -19051,7 +19697,7 @@
           <a:bodyPr wrap="square" lIns="0" tIns="0" rIns="0" bIns="0" rtlCol="0" anchor="t"/>
           <a:lstStyle/>
           <a:p>
-            <a:pPr indent="0" marL="0">
+            <a:pPr marL="0" indent="0">
               <a:buNone/>
             </a:pPr>
             <a:r>
@@ -19068,7 +19714,7 @@
             <a:endParaRPr lang="en-US" sz="1000" dirty="0"/>
           </a:p>
           <a:p>
-            <a:pPr indent="0" marL="0">
+            <a:pPr marL="0" indent="0">
               <a:buNone/>
             </a:pPr>
             <a:r>
@@ -19085,7 +19731,7 @@
             <a:endParaRPr lang="en-US" sz="1000" dirty="0"/>
           </a:p>
           <a:p>
-            <a:pPr indent="0" marL="0">
+            <a:pPr marL="0" indent="0">
               <a:buNone/>
             </a:pPr>
             <a:r>
@@ -19102,7 +19748,7 @@
             <a:endParaRPr lang="en-US" sz="1000" dirty="0"/>
           </a:p>
           <a:p>
-            <a:pPr indent="0" marL="0">
+            <a:pPr marL="0" indent="0">
               <a:buNone/>
             </a:pPr>
             <a:r>
@@ -19119,7 +19765,7 @@
             <a:endParaRPr lang="en-US" sz="1000" dirty="0"/>
           </a:p>
           <a:p>
-            <a:pPr indent="0" marL="0">
+            <a:pPr marL="0" indent="0">
               <a:buNone/>
             </a:pPr>
             <a:r>
@@ -19136,7 +19782,7 @@
             <a:endParaRPr lang="en-US" sz="1000" dirty="0"/>
           </a:p>
           <a:p>
-            <a:pPr indent="0" marL="0">
+            <a:pPr marL="0" indent="0">
               <a:buNone/>
             </a:pPr>
             <a:r>
@@ -19153,7 +19799,7 @@
             <a:endParaRPr lang="en-US" sz="1000" dirty="0"/>
           </a:p>
           <a:p>
-            <a:pPr indent="0" marL="0">
+            <a:pPr marL="0" indent="0">
               <a:buNone/>
             </a:pPr>
             <a:r>
@@ -19170,7 +19816,7 @@
             <a:endParaRPr lang="en-US" sz="1000" dirty="0"/>
           </a:p>
           <a:p>
-            <a:pPr indent="0" marL="0">
+            <a:pPr marL="0" indent="0">
               <a:buNone/>
             </a:pPr>
             <a:r>
@@ -19187,7 +19833,7 @@
             <a:endParaRPr lang="en-US" sz="1000" dirty="0"/>
           </a:p>
           <a:p>
-            <a:pPr indent="0" marL="0">
+            <a:pPr marL="0" indent="0">
               <a:buNone/>
             </a:pPr>
             <a:r>
@@ -19207,7 +19853,7 @@
       </p:sp>
       <p:graphicFrame>
         <p:nvGraphicFramePr>
-          <p:cNvPr id="7" name="Table 0"/>
+          <p:cNvPr id="13" name="Table 0"/>
           <p:cNvGraphicFramePr>
             <a:graphicFrameLocks noGrp="1"/>
           </p:cNvGraphicFramePr>
@@ -19221,15 +19867,27 @@
         </p:nvGraphicFramePr>
         <p:xfrm>
           <a:off x="6035040" y="4389120"/>
-          <a:ext cx="5577840" cy="914400"/>
+          <a:ext cx="5577840" cy="1508760"/>
         </p:xfrm>
         <a:graphic>
           <a:graphicData uri="http://schemas.openxmlformats.org/drawingml/2006/table">
             <a:tbl>
               <a:tblPr/>
               <a:tblGrid>
-                <a:gridCol w="1554480"/>
-                <a:gridCol w="4023360"/>
+                <a:gridCol w="1554480">
+                  <a:extLst>
+                    <a:ext uri="{9D8B030D-6E8A-4147-A177-3AD203B41FA5}">
+                      <a16:colId xmlns:a16="http://schemas.microsoft.com/office/drawing/2014/main" val="20000"/>
+                    </a:ext>
+                  </a:extLst>
+                </a:gridCol>
+                <a:gridCol w="4023360">
+                  <a:extLst>
+                    <a:ext uri="{9D8B030D-6E8A-4147-A177-3AD203B41FA5}">
+                      <a16:colId xmlns:a16="http://schemas.microsoft.com/office/drawing/2014/main" val="20001"/>
+                    </a:ext>
+                  </a:extLst>
+                </a:gridCol>
               </a:tblGrid>
               <a:tr h="301752">
                 <a:tc>
@@ -19237,7 +19895,7 @@
                     <a:bodyPr/>
                     <a:lstStyle/>
                     <a:p>
-                      <a:pPr indent="0" marL="0">
+                      <a:pPr marL="0" indent="0">
                         <a:buNone/>
                       </a:pPr>
                       <a:r>
@@ -19258,7 +19916,7 @@
                       </a:endParaRPr>
                     </a:p>
                   </a:txBody>
-                  <a:tcPr marL="91440" marR="91440" marT="45720" marB="45720" anchor="ctr">
+                  <a:tcPr anchor="ctr">
                     <a:lnL w="9525" cap="flat" cmpd="sng" algn="ctr">
                       <a:solidFill>
                         <a:srgbClr val="BFD8DD"/>
@@ -19305,7 +19963,7 @@
                     <a:bodyPr/>
                     <a:lstStyle/>
                     <a:p>
-                      <a:pPr indent="0" marL="0">
+                      <a:pPr marL="0" indent="0">
                         <a:buNone/>
                       </a:pPr>
                       <a:r>
@@ -19326,7 +19984,7 @@
                       </a:endParaRPr>
                     </a:p>
                   </a:txBody>
-                  <a:tcPr marL="91440" marR="91440" marT="45720" marB="45720" anchor="ctr">
+                  <a:tcPr anchor="ctr">
                     <a:lnL w="9525" cap="flat" cmpd="sng" algn="ctr">
                       <a:solidFill>
                         <a:srgbClr val="BFD8DD"/>
@@ -19368,6 +20026,11 @@
                     </a:solidFill>
                   </a:tcPr>
                 </a:tc>
+                <a:extLst>
+                  <a:ext uri="{0D108BD9-81ED-4DB2-BD59-A6C34878D82A}">
+                    <a16:rowId xmlns:a16="http://schemas.microsoft.com/office/drawing/2014/main" val="10000"/>
+                  </a:ext>
+                </a:extLst>
               </a:tr>
               <a:tr h="301752">
                 <a:tc>
@@ -19375,7 +20038,7 @@
                     <a:bodyPr/>
                     <a:lstStyle/>
                     <a:p>
-                      <a:pPr indent="0" marL="0">
+                      <a:pPr marL="0" indent="0">
                         <a:buNone/>
                       </a:pPr>
                       <a:r>
@@ -19396,7 +20059,7 @@
                       </a:endParaRPr>
                     </a:p>
                   </a:txBody>
-                  <a:tcPr marL="91440" marR="91440" marT="45720" marB="45720" anchor="ctr">
+                  <a:tcPr anchor="ctr">
                     <a:lnL w="9525" cap="flat" cmpd="sng" algn="ctr">
                       <a:solidFill>
                         <a:srgbClr val="BFD8DD"/>
@@ -19443,7 +20106,7 @@
                     <a:bodyPr/>
                     <a:lstStyle/>
                     <a:p>
-                      <a:pPr indent="0" marL="0">
+                      <a:pPr marL="0" indent="0">
                         <a:buNone/>
                       </a:pPr>
                       <a:r>
@@ -19464,7 +20127,7 @@
                       </a:endParaRPr>
                     </a:p>
                   </a:txBody>
-                  <a:tcPr marL="91440" marR="91440" marT="45720" marB="45720" anchor="ctr">
+                  <a:tcPr anchor="ctr">
                     <a:lnL w="9525" cap="flat" cmpd="sng" algn="ctr">
                       <a:solidFill>
                         <a:srgbClr val="BFD8DD"/>
@@ -19506,6 +20169,11 @@
                     </a:solidFill>
                   </a:tcPr>
                 </a:tc>
+                <a:extLst>
+                  <a:ext uri="{0D108BD9-81ED-4DB2-BD59-A6C34878D82A}">
+                    <a16:rowId xmlns:a16="http://schemas.microsoft.com/office/drawing/2014/main" val="10001"/>
+                  </a:ext>
+                </a:extLst>
               </a:tr>
               <a:tr h="301752">
                 <a:tc>
@@ -19513,7 +20181,7 @@
                     <a:bodyPr/>
                     <a:lstStyle/>
                     <a:p>
-                      <a:pPr indent="0" marL="0">
+                      <a:pPr marL="0" indent="0">
                         <a:buNone/>
                       </a:pPr>
                       <a:r>
@@ -19534,7 +20202,7 @@
                       </a:endParaRPr>
                     </a:p>
                   </a:txBody>
-                  <a:tcPr marL="91440" marR="91440" marT="45720" marB="45720" anchor="ctr">
+                  <a:tcPr anchor="ctr">
                     <a:lnL w="9525" cap="flat" cmpd="sng" algn="ctr">
                       <a:solidFill>
                         <a:srgbClr val="BFD8DD"/>
@@ -19581,7 +20249,7 @@
                     <a:bodyPr/>
                     <a:lstStyle/>
                     <a:p>
-                      <a:pPr indent="0" marL="0">
+                      <a:pPr marL="0" indent="0">
                         <a:buNone/>
                       </a:pPr>
                       <a:r>
@@ -19602,7 +20270,7 @@
                       </a:endParaRPr>
                     </a:p>
                   </a:txBody>
-                  <a:tcPr marL="91440" marR="91440" marT="45720" marB="45720" anchor="ctr">
+                  <a:tcPr anchor="ctr">
                     <a:lnL w="9525" cap="flat" cmpd="sng" algn="ctr">
                       <a:solidFill>
                         <a:srgbClr val="BFD8DD"/>
@@ -19644,6 +20312,11 @@
                     </a:solidFill>
                   </a:tcPr>
                 </a:tc>
+                <a:extLst>
+                  <a:ext uri="{0D108BD9-81ED-4DB2-BD59-A6C34878D82A}">
+                    <a16:rowId xmlns:a16="http://schemas.microsoft.com/office/drawing/2014/main" val="10002"/>
+                  </a:ext>
+                </a:extLst>
               </a:tr>
               <a:tr h="301752">
                 <a:tc>
@@ -19651,7 +20324,7 @@
                     <a:bodyPr/>
                     <a:lstStyle/>
                     <a:p>
-                      <a:pPr indent="0" marL="0">
+                      <a:pPr marL="0" indent="0">
                         <a:buNone/>
                       </a:pPr>
                       <a:r>
@@ -19672,7 +20345,7 @@
                       </a:endParaRPr>
                     </a:p>
                   </a:txBody>
-                  <a:tcPr marL="91440" marR="91440" marT="45720" marB="45720" anchor="ctr">
+                  <a:tcPr anchor="ctr">
                     <a:lnL w="9525" cap="flat" cmpd="sng" algn="ctr">
                       <a:solidFill>
                         <a:srgbClr val="BFD8DD"/>
@@ -19719,7 +20392,7 @@
                     <a:bodyPr/>
                     <a:lstStyle/>
                     <a:p>
-                      <a:pPr indent="0" marL="0">
+                      <a:pPr marL="0" indent="0">
                         <a:buNone/>
                       </a:pPr>
                       <a:r>
@@ -19740,7 +20413,7 @@
                       </a:endParaRPr>
                     </a:p>
                   </a:txBody>
-                  <a:tcPr marL="91440" marR="91440" marT="45720" marB="45720" anchor="ctr">
+                  <a:tcPr anchor="ctr">
                     <a:lnL w="9525" cap="flat" cmpd="sng" algn="ctr">
                       <a:solidFill>
                         <a:srgbClr val="BFD8DD"/>
@@ -19782,6 +20455,11 @@
                     </a:solidFill>
                   </a:tcPr>
                 </a:tc>
+                <a:extLst>
+                  <a:ext uri="{0D108BD9-81ED-4DB2-BD59-A6C34878D82A}">
+                    <a16:rowId xmlns:a16="http://schemas.microsoft.com/office/drawing/2014/main" val="10003"/>
+                  </a:ext>
+                </a:extLst>
               </a:tr>
               <a:tr h="301752">
                 <a:tc>
@@ -19789,7 +20467,7 @@
                     <a:bodyPr/>
                     <a:lstStyle/>
                     <a:p>
-                      <a:pPr indent="0" marL="0">
+                      <a:pPr marL="0" indent="0">
                         <a:buNone/>
                       </a:pPr>
                       <a:r>
@@ -19810,7 +20488,7 @@
                       </a:endParaRPr>
                     </a:p>
                   </a:txBody>
-                  <a:tcPr marL="91440" marR="91440" marT="45720" marB="45720" anchor="ctr">
+                  <a:tcPr anchor="ctr">
                     <a:lnL w="9525" cap="flat" cmpd="sng" algn="ctr">
                       <a:solidFill>
                         <a:srgbClr val="BFD8DD"/>
@@ -19857,7 +20535,7 @@
                     <a:bodyPr/>
                     <a:lstStyle/>
                     <a:p>
-                      <a:pPr indent="0" marL="0">
+                      <a:pPr marL="0" indent="0">
                         <a:buNone/>
                       </a:pPr>
                       <a:r>
@@ -19878,7 +20556,7 @@
                       </a:endParaRPr>
                     </a:p>
                   </a:txBody>
-                  <a:tcPr marL="91440" marR="91440" marT="45720" marB="45720" anchor="ctr">
+                  <a:tcPr anchor="ctr">
                     <a:lnL w="9525" cap="flat" cmpd="sng" algn="ctr">
                       <a:solidFill>
                         <a:srgbClr val="BFD8DD"/>
@@ -19920,6 +20598,11 @@
                     </a:solidFill>
                   </a:tcPr>
                 </a:tc>
+                <a:extLst>
+                  <a:ext uri="{0D108BD9-81ED-4DB2-BD59-A6C34878D82A}">
+                    <a16:rowId xmlns:a16="http://schemas.microsoft.com/office/drawing/2014/main" val="10004"/>
+                  </a:ext>
+                </a:extLst>
               </a:tr>
             </a:tbl>
           </a:graphicData>
@@ -19946,7 +20629,7 @@
           <a:bodyPr wrap="square" lIns="0" tIns="0" rIns="0" bIns="0" rtlCol="0" anchor="t"/>
           <a:lstStyle/>
           <a:p>
-            <a:pPr indent="0" marL="0">
+            <a:pPr marL="0" indent="0">
               <a:buNone/>
             </a:pPr>
             <a:r>
@@ -19980,6 +20663,7 @@
         <a:solidFill>
           <a:srgbClr val="FFFFFF"/>
         </a:solidFill>
+        <a:effectLst/>
       </p:bgPr>
     </p:bg>
     <p:spTree>
@@ -20017,11 +20701,11 @@
           <a:bodyPr wrap="square" lIns="0" tIns="0" rIns="0" bIns="0" rtlCol="0" anchor="t"/>
           <a:lstStyle/>
           <a:p>
-            <a:pPr indent="0" marL="0">
+            <a:pPr marL="0" indent="0">
               <a:buNone/>
             </a:pPr>
             <a:r>
-              <a:rPr lang="en-US" sz="1100" b="1" spc="200" kern="0" dirty="0">
+              <a:rPr lang="en-US" sz="1100" b="1" kern="0" spc="200" dirty="0">
                 <a:solidFill>
                   <a:srgbClr val="D98C1F"/>
                 </a:solidFill>
@@ -20056,7 +20740,7 @@
           <a:bodyPr wrap="square" lIns="0" tIns="0" rIns="0" bIns="0" rtlCol="0" anchor="ctr"/>
           <a:lstStyle/>
           <a:p>
-            <a:pPr indent="0" marL="0">
+            <a:pPr marL="0" indent="0">
               <a:buNone/>
             </a:pPr>
             <a:r>
@@ -20090,19 +20774,55 @@
         </p:nvGraphicFramePr>
         <p:xfrm>
           <a:off x="548640" y="1371600"/>
-          <a:ext cx="11064240" cy="914400"/>
+          <a:ext cx="11064240" cy="2944368"/>
         </p:xfrm>
         <a:graphic>
           <a:graphicData uri="http://schemas.openxmlformats.org/drawingml/2006/table">
             <a:tbl>
               <a:tblPr/>
               <a:tblGrid>
-                <a:gridCol w="365760"/>
-                <a:gridCol w="1325880"/>
-                <a:gridCol w="2606040"/>
-                <a:gridCol w="2514600"/>
-                <a:gridCol w="3429000"/>
-                <a:gridCol w="822960"/>
+                <a:gridCol w="365760">
+                  <a:extLst>
+                    <a:ext uri="{9D8B030D-6E8A-4147-A177-3AD203B41FA5}">
+                      <a16:colId xmlns:a16="http://schemas.microsoft.com/office/drawing/2014/main" val="20000"/>
+                    </a:ext>
+                  </a:extLst>
+                </a:gridCol>
+                <a:gridCol w="1325880">
+                  <a:extLst>
+                    <a:ext uri="{9D8B030D-6E8A-4147-A177-3AD203B41FA5}">
+                      <a16:colId xmlns:a16="http://schemas.microsoft.com/office/drawing/2014/main" val="20001"/>
+                    </a:ext>
+                  </a:extLst>
+                </a:gridCol>
+                <a:gridCol w="2606040">
+                  <a:extLst>
+                    <a:ext uri="{9D8B030D-6E8A-4147-A177-3AD203B41FA5}">
+                      <a16:colId xmlns:a16="http://schemas.microsoft.com/office/drawing/2014/main" val="20002"/>
+                    </a:ext>
+                  </a:extLst>
+                </a:gridCol>
+                <a:gridCol w="2514600">
+                  <a:extLst>
+                    <a:ext uri="{9D8B030D-6E8A-4147-A177-3AD203B41FA5}">
+                      <a16:colId xmlns:a16="http://schemas.microsoft.com/office/drawing/2014/main" val="20003"/>
+                    </a:ext>
+                  </a:extLst>
+                </a:gridCol>
+                <a:gridCol w="3429000">
+                  <a:extLst>
+                    <a:ext uri="{9D8B030D-6E8A-4147-A177-3AD203B41FA5}">
+                      <a16:colId xmlns:a16="http://schemas.microsoft.com/office/drawing/2014/main" val="20004"/>
+                    </a:ext>
+                  </a:extLst>
+                </a:gridCol>
+                <a:gridCol w="822960">
+                  <a:extLst>
+                    <a:ext uri="{9D8B030D-6E8A-4147-A177-3AD203B41FA5}">
+                      <a16:colId xmlns:a16="http://schemas.microsoft.com/office/drawing/2014/main" val="20005"/>
+                    </a:ext>
+                  </a:extLst>
+                </a:gridCol>
               </a:tblGrid>
               <a:tr h="329184">
                 <a:tc>
@@ -20110,7 +20830,7 @@
                     <a:bodyPr/>
                     <a:lstStyle/>
                     <a:p>
-                      <a:pPr indent="0" marL="0">
+                      <a:pPr marL="0" indent="0">
                         <a:buNone/>
                       </a:pPr>
                       <a:r>
@@ -20131,7 +20851,7 @@
                       </a:endParaRPr>
                     </a:p>
                   </a:txBody>
-                  <a:tcPr marL="91440" marR="91440" marT="45720" marB="45720" anchor="ctr">
+                  <a:tcPr anchor="ctr">
                     <a:lnL w="9525" cap="flat" cmpd="sng" algn="ctr">
                       <a:solidFill>
                         <a:srgbClr val="BFD8DD"/>
@@ -20178,7 +20898,7 @@
                     <a:bodyPr/>
                     <a:lstStyle/>
                     <a:p>
-                      <a:pPr indent="0" marL="0">
+                      <a:pPr marL="0" indent="0">
                         <a:buNone/>
                       </a:pPr>
                       <a:r>
@@ -20199,7 +20919,7 @@
                       </a:endParaRPr>
                     </a:p>
                   </a:txBody>
-                  <a:tcPr marL="91440" marR="91440" marT="45720" marB="45720" anchor="ctr">
+                  <a:tcPr anchor="ctr">
                     <a:lnL w="9525" cap="flat" cmpd="sng" algn="ctr">
                       <a:solidFill>
                         <a:srgbClr val="BFD8DD"/>
@@ -20246,7 +20966,7 @@
                     <a:bodyPr/>
                     <a:lstStyle/>
                     <a:p>
-                      <a:pPr indent="0" marL="0">
+                      <a:pPr marL="0" indent="0">
                         <a:buNone/>
                       </a:pPr>
                       <a:r>
@@ -20267,7 +20987,7 @@
                       </a:endParaRPr>
                     </a:p>
                   </a:txBody>
-                  <a:tcPr marL="91440" marR="91440" marT="45720" marB="45720" anchor="ctr">
+                  <a:tcPr anchor="ctr">
                     <a:lnL w="9525" cap="flat" cmpd="sng" algn="ctr">
                       <a:solidFill>
                         <a:srgbClr val="BFD8DD"/>
@@ -20314,7 +21034,7 @@
                     <a:bodyPr/>
                     <a:lstStyle/>
                     <a:p>
-                      <a:pPr indent="0" marL="0">
+                      <a:pPr marL="0" indent="0">
                         <a:buNone/>
                       </a:pPr>
                       <a:r>
@@ -20335,7 +21055,7 @@
                       </a:endParaRPr>
                     </a:p>
                   </a:txBody>
-                  <a:tcPr marL="91440" marR="91440" marT="45720" marB="45720" anchor="ctr">
+                  <a:tcPr anchor="ctr">
                     <a:lnL w="9525" cap="flat" cmpd="sng" algn="ctr">
                       <a:solidFill>
                         <a:srgbClr val="BFD8DD"/>
@@ -20382,7 +21102,7 @@
                     <a:bodyPr/>
                     <a:lstStyle/>
                     <a:p>
-                      <a:pPr indent="0" marL="0">
+                      <a:pPr marL="0" indent="0">
                         <a:buNone/>
                       </a:pPr>
                       <a:r>
@@ -20403,7 +21123,7 @@
                       </a:endParaRPr>
                     </a:p>
                   </a:txBody>
-                  <a:tcPr marL="91440" marR="91440" marT="45720" marB="45720" anchor="ctr">
+                  <a:tcPr anchor="ctr">
                     <a:lnL w="9525" cap="flat" cmpd="sng" algn="ctr">
                       <a:solidFill>
                         <a:srgbClr val="BFD8DD"/>
@@ -20450,7 +21170,7 @@
                     <a:bodyPr/>
                     <a:lstStyle/>
                     <a:p>
-                      <a:pPr indent="0" marL="0">
+                      <a:pPr marL="0" indent="0">
                         <a:buNone/>
                       </a:pPr>
                       <a:r>
@@ -20471,7 +21191,7 @@
                       </a:endParaRPr>
                     </a:p>
                   </a:txBody>
-                  <a:tcPr marL="91440" marR="91440" marT="45720" marB="45720" anchor="ctr">
+                  <a:tcPr anchor="ctr">
                     <a:lnL w="9525" cap="flat" cmpd="sng" algn="ctr">
                       <a:solidFill>
                         <a:srgbClr val="BFD8DD"/>
@@ -20513,6 +21233,11 @@
                     </a:solidFill>
                   </a:tcPr>
                 </a:tc>
+                <a:extLst>
+                  <a:ext uri="{0D108BD9-81ED-4DB2-BD59-A6C34878D82A}">
+                    <a16:rowId xmlns:a16="http://schemas.microsoft.com/office/drawing/2014/main" val="10000"/>
+                  </a:ext>
+                </a:extLst>
               </a:tr>
               <a:tr h="658368">
                 <a:tc>
@@ -20520,7 +21245,7 @@
                     <a:bodyPr/>
                     <a:lstStyle/>
                     <a:p>
-                      <a:pPr indent="0" marL="0">
+                      <a:pPr marL="0" indent="0">
                         <a:buNone/>
                       </a:pPr>
                       <a:r>
@@ -20541,7 +21266,7 @@
                       </a:endParaRPr>
                     </a:p>
                   </a:txBody>
-                  <a:tcPr marL="91440" marR="91440" marT="45720" marB="45720" anchor="ctr">
+                  <a:tcPr anchor="ctr">
                     <a:lnL w="9525" cap="flat" cmpd="sng" algn="ctr">
                       <a:solidFill>
                         <a:srgbClr val="BFD8DD"/>
@@ -20588,7 +21313,7 @@
                     <a:bodyPr/>
                     <a:lstStyle/>
                     <a:p>
-                      <a:pPr indent="0" marL="0">
+                      <a:pPr marL="0" indent="0">
                         <a:buNone/>
                       </a:pPr>
                       <a:r>
@@ -20609,7 +21334,7 @@
                       </a:endParaRPr>
                     </a:p>
                   </a:txBody>
-                  <a:tcPr marL="91440" marR="91440" marT="45720" marB="45720" anchor="ctr">
+                  <a:tcPr anchor="ctr">
                     <a:lnL w="9525" cap="flat" cmpd="sng" algn="ctr">
                       <a:solidFill>
                         <a:srgbClr val="BFD8DD"/>
@@ -20656,7 +21381,7 @@
                     <a:bodyPr/>
                     <a:lstStyle/>
                     <a:p>
-                      <a:pPr indent="0" marL="0">
+                      <a:pPr marL="0" indent="0">
                         <a:buNone/>
                       </a:pPr>
                       <a:r>
@@ -20677,7 +21402,7 @@
                       </a:endParaRPr>
                     </a:p>
                   </a:txBody>
-                  <a:tcPr marL="91440" marR="91440" marT="45720" marB="45720" anchor="ctr">
+                  <a:tcPr anchor="ctr">
                     <a:lnL w="9525" cap="flat" cmpd="sng" algn="ctr">
                       <a:solidFill>
                         <a:srgbClr val="BFD8DD"/>
@@ -20724,7 +21449,7 @@
                     <a:bodyPr/>
                     <a:lstStyle/>
                     <a:p>
-                      <a:pPr indent="0" marL="0">
+                      <a:pPr marL="0" indent="0">
                         <a:buNone/>
                       </a:pPr>
                       <a:r>
@@ -20745,7 +21470,7 @@
                       </a:endParaRPr>
                     </a:p>
                   </a:txBody>
-                  <a:tcPr marL="91440" marR="91440" marT="45720" marB="45720" anchor="ctr">
+                  <a:tcPr anchor="ctr">
                     <a:lnL w="9525" cap="flat" cmpd="sng" algn="ctr">
                       <a:solidFill>
                         <a:srgbClr val="BFD8DD"/>
@@ -20792,7 +21517,7 @@
                     <a:bodyPr/>
                     <a:lstStyle/>
                     <a:p>
-                      <a:pPr indent="0" marL="0">
+                      <a:pPr marL="0" indent="0">
                         <a:buNone/>
                       </a:pPr>
                       <a:r>
@@ -20813,7 +21538,7 @@
                       </a:endParaRPr>
                     </a:p>
                   </a:txBody>
-                  <a:tcPr marL="91440" marR="91440" marT="45720" marB="45720" anchor="ctr">
+                  <a:tcPr anchor="ctr">
                     <a:lnL w="9525" cap="flat" cmpd="sng" algn="ctr">
                       <a:solidFill>
                         <a:srgbClr val="BFD8DD"/>
@@ -20860,7 +21585,7 @@
                     <a:bodyPr/>
                     <a:lstStyle/>
                     <a:p>
-                      <a:pPr indent="0" marL="0">
+                      <a:pPr marL="0" indent="0">
                         <a:buNone/>
                       </a:pPr>
                       <a:r>
@@ -20881,7 +21606,7 @@
                       </a:endParaRPr>
                     </a:p>
                   </a:txBody>
-                  <a:tcPr marL="91440" marR="91440" marT="45720" marB="45720" anchor="ctr">
+                  <a:tcPr anchor="ctr">
                     <a:lnL w="9525" cap="flat" cmpd="sng" algn="ctr">
                       <a:solidFill>
                         <a:srgbClr val="BFD8DD"/>
@@ -20923,6 +21648,11 @@
                     </a:solidFill>
                   </a:tcPr>
                 </a:tc>
+                <a:extLst>
+                  <a:ext uri="{0D108BD9-81ED-4DB2-BD59-A6C34878D82A}">
+                    <a16:rowId xmlns:a16="http://schemas.microsoft.com/office/drawing/2014/main" val="10001"/>
+                  </a:ext>
+                </a:extLst>
               </a:tr>
               <a:tr h="731520">
                 <a:tc>
@@ -20930,7 +21660,7 @@
                     <a:bodyPr/>
                     <a:lstStyle/>
                     <a:p>
-                      <a:pPr indent="0" marL="0">
+                      <a:pPr marL="0" indent="0">
                         <a:buNone/>
                       </a:pPr>
                       <a:r>
@@ -20951,7 +21681,7 @@
                       </a:endParaRPr>
                     </a:p>
                   </a:txBody>
-                  <a:tcPr marL="91440" marR="91440" marT="45720" marB="45720" anchor="ctr">
+                  <a:tcPr anchor="ctr">
                     <a:lnL w="9525" cap="flat" cmpd="sng" algn="ctr">
                       <a:solidFill>
                         <a:srgbClr val="BFD8DD"/>
@@ -20998,7 +21728,7 @@
                     <a:bodyPr/>
                     <a:lstStyle/>
                     <a:p>
-                      <a:pPr indent="0" marL="0">
+                      <a:pPr marL="0" indent="0">
                         <a:buNone/>
                       </a:pPr>
                       <a:r>
@@ -21019,7 +21749,7 @@
                       </a:endParaRPr>
                     </a:p>
                   </a:txBody>
-                  <a:tcPr marL="91440" marR="91440" marT="45720" marB="45720" anchor="ctr">
+                  <a:tcPr anchor="ctr">
                     <a:lnL w="9525" cap="flat" cmpd="sng" algn="ctr">
                       <a:solidFill>
                         <a:srgbClr val="BFD8DD"/>
@@ -21066,7 +21796,7 @@
                     <a:bodyPr/>
                     <a:lstStyle/>
                     <a:p>
-                      <a:pPr indent="0" marL="0">
+                      <a:pPr marL="0" indent="0">
                         <a:buNone/>
                       </a:pPr>
                       <a:r>
@@ -21087,7 +21817,7 @@
                       </a:endParaRPr>
                     </a:p>
                   </a:txBody>
-                  <a:tcPr marL="91440" marR="91440" marT="45720" marB="45720" anchor="ctr">
+                  <a:tcPr anchor="ctr">
                     <a:lnL w="9525" cap="flat" cmpd="sng" algn="ctr">
                       <a:solidFill>
                         <a:srgbClr val="BFD8DD"/>
@@ -21134,7 +21864,7 @@
                     <a:bodyPr/>
                     <a:lstStyle/>
                     <a:p>
-                      <a:pPr indent="0" marL="0">
+                      <a:pPr marL="0" indent="0">
                         <a:buNone/>
                       </a:pPr>
                       <a:r>
@@ -21155,7 +21885,7 @@
                       </a:endParaRPr>
                     </a:p>
                   </a:txBody>
-                  <a:tcPr marL="91440" marR="91440" marT="45720" marB="45720" anchor="ctr">
+                  <a:tcPr anchor="ctr">
                     <a:lnL w="9525" cap="flat" cmpd="sng" algn="ctr">
                       <a:solidFill>
                         <a:srgbClr val="BFD8DD"/>
@@ -21202,7 +21932,7 @@
                     <a:bodyPr/>
                     <a:lstStyle/>
                     <a:p>
-                      <a:pPr indent="0" marL="0">
+                      <a:pPr marL="0" indent="0">
                         <a:buNone/>
                       </a:pPr>
                       <a:r>
@@ -21223,7 +21953,7 @@
                       </a:endParaRPr>
                     </a:p>
                   </a:txBody>
-                  <a:tcPr marL="91440" marR="91440" marT="45720" marB="45720" anchor="ctr">
+                  <a:tcPr anchor="ctr">
                     <a:lnL w="9525" cap="flat" cmpd="sng" algn="ctr">
                       <a:solidFill>
                         <a:srgbClr val="BFD8DD"/>
@@ -21270,7 +22000,7 @@
                     <a:bodyPr/>
                     <a:lstStyle/>
                     <a:p>
-                      <a:pPr indent="0" marL="0">
+                      <a:pPr marL="0" indent="0">
                         <a:buNone/>
                       </a:pPr>
                       <a:r>
@@ -21291,7 +22021,7 @@
                       </a:endParaRPr>
                     </a:p>
                   </a:txBody>
-                  <a:tcPr marL="91440" marR="91440" marT="45720" marB="45720" anchor="ctr">
+                  <a:tcPr anchor="ctr">
                     <a:lnL w="9525" cap="flat" cmpd="sng" algn="ctr">
                       <a:solidFill>
                         <a:srgbClr val="BFD8DD"/>
@@ -21333,6 +22063,11 @@
                     </a:solidFill>
                   </a:tcPr>
                 </a:tc>
+                <a:extLst>
+                  <a:ext uri="{0D108BD9-81ED-4DB2-BD59-A6C34878D82A}">
+                    <a16:rowId xmlns:a16="http://schemas.microsoft.com/office/drawing/2014/main" val="10002"/>
+                  </a:ext>
+                </a:extLst>
               </a:tr>
               <a:tr h="566928">
                 <a:tc>
@@ -21340,7 +22075,7 @@
                     <a:bodyPr/>
                     <a:lstStyle/>
                     <a:p>
-                      <a:pPr indent="0" marL="0">
+                      <a:pPr marL="0" indent="0">
                         <a:buNone/>
                       </a:pPr>
                       <a:r>
@@ -21361,7 +22096,7 @@
                       </a:endParaRPr>
                     </a:p>
                   </a:txBody>
-                  <a:tcPr marL="91440" marR="91440" marT="45720" marB="45720" anchor="ctr">
+                  <a:tcPr anchor="ctr">
                     <a:lnL w="9525" cap="flat" cmpd="sng" algn="ctr">
                       <a:solidFill>
                         <a:srgbClr val="BFD8DD"/>
@@ -21408,7 +22143,7 @@
                     <a:bodyPr/>
                     <a:lstStyle/>
                     <a:p>
-                      <a:pPr indent="0" marL="0">
+                      <a:pPr marL="0" indent="0">
                         <a:buNone/>
                       </a:pPr>
                       <a:r>
@@ -21429,7 +22164,7 @@
                       </a:endParaRPr>
                     </a:p>
                   </a:txBody>
-                  <a:tcPr marL="91440" marR="91440" marT="45720" marB="45720" anchor="ctr">
+                  <a:tcPr anchor="ctr">
                     <a:lnL w="9525" cap="flat" cmpd="sng" algn="ctr">
                       <a:solidFill>
                         <a:srgbClr val="BFD8DD"/>
@@ -21476,7 +22211,7 @@
                     <a:bodyPr/>
                     <a:lstStyle/>
                     <a:p>
-                      <a:pPr indent="0" marL="0">
+                      <a:pPr marL="0" indent="0">
                         <a:buNone/>
                       </a:pPr>
                       <a:r>
@@ -21497,7 +22232,7 @@
                       </a:endParaRPr>
                     </a:p>
                   </a:txBody>
-                  <a:tcPr marL="91440" marR="91440" marT="45720" marB="45720" anchor="ctr">
+                  <a:tcPr anchor="ctr">
                     <a:lnL w="9525" cap="flat" cmpd="sng" algn="ctr">
                       <a:solidFill>
                         <a:srgbClr val="BFD8DD"/>
@@ -21544,7 +22279,7 @@
                     <a:bodyPr/>
                     <a:lstStyle/>
                     <a:p>
-                      <a:pPr indent="0" marL="0">
+                      <a:pPr marL="0" indent="0">
                         <a:buNone/>
                       </a:pPr>
                       <a:r>
@@ -21565,7 +22300,7 @@
                       </a:endParaRPr>
                     </a:p>
                   </a:txBody>
-                  <a:tcPr marL="91440" marR="91440" marT="45720" marB="45720" anchor="ctr">
+                  <a:tcPr anchor="ctr">
                     <a:lnL w="9525" cap="flat" cmpd="sng" algn="ctr">
                       <a:solidFill>
                         <a:srgbClr val="BFD8DD"/>
@@ -21612,7 +22347,7 @@
                     <a:bodyPr/>
                     <a:lstStyle/>
                     <a:p>
-                      <a:pPr indent="0" marL="0">
+                      <a:pPr marL="0" indent="0">
                         <a:buNone/>
                       </a:pPr>
                       <a:r>
@@ -21633,7 +22368,7 @@
                       </a:endParaRPr>
                     </a:p>
                   </a:txBody>
-                  <a:tcPr marL="91440" marR="91440" marT="45720" marB="45720" anchor="ctr">
+                  <a:tcPr anchor="ctr">
                     <a:lnL w="9525" cap="flat" cmpd="sng" algn="ctr">
                       <a:solidFill>
                         <a:srgbClr val="BFD8DD"/>
@@ -21680,7 +22415,7 @@
                     <a:bodyPr/>
                     <a:lstStyle/>
                     <a:p>
-                      <a:pPr indent="0" marL="0">
+                      <a:pPr marL="0" indent="0">
                         <a:buNone/>
                       </a:pPr>
                       <a:r>
@@ -21701,7 +22436,7 @@
                       </a:endParaRPr>
                     </a:p>
                   </a:txBody>
-                  <a:tcPr marL="91440" marR="91440" marT="45720" marB="45720" anchor="ctr">
+                  <a:tcPr anchor="ctr">
                     <a:lnL w="9525" cap="flat" cmpd="sng" algn="ctr">
                       <a:solidFill>
                         <a:srgbClr val="BFD8DD"/>
@@ -21743,6 +22478,11 @@
                     </a:solidFill>
                   </a:tcPr>
                 </a:tc>
+                <a:extLst>
+                  <a:ext uri="{0D108BD9-81ED-4DB2-BD59-A6C34878D82A}">
+                    <a16:rowId xmlns:a16="http://schemas.microsoft.com/office/drawing/2014/main" val="10003"/>
+                  </a:ext>
+                </a:extLst>
               </a:tr>
               <a:tr h="658368">
                 <a:tc>
@@ -21750,7 +22490,7 @@
                     <a:bodyPr/>
                     <a:lstStyle/>
                     <a:p>
-                      <a:pPr indent="0" marL="0">
+                      <a:pPr marL="0" indent="0">
                         <a:buNone/>
                       </a:pPr>
                       <a:r>
@@ -21771,7 +22511,7 @@
                       </a:endParaRPr>
                     </a:p>
                   </a:txBody>
-                  <a:tcPr marL="91440" marR="91440" marT="45720" marB="45720" anchor="ctr">
+                  <a:tcPr anchor="ctr">
                     <a:lnL w="9525" cap="flat" cmpd="sng" algn="ctr">
                       <a:solidFill>
                         <a:srgbClr val="BFD8DD"/>
@@ -21818,7 +22558,7 @@
                     <a:bodyPr/>
                     <a:lstStyle/>
                     <a:p>
-                      <a:pPr indent="0" marL="0">
+                      <a:pPr marL="0" indent="0">
                         <a:buNone/>
                       </a:pPr>
                       <a:r>
@@ -21839,7 +22579,7 @@
                       </a:endParaRPr>
                     </a:p>
                   </a:txBody>
-                  <a:tcPr marL="91440" marR="91440" marT="45720" marB="45720" anchor="ctr">
+                  <a:tcPr anchor="ctr">
                     <a:lnL w="9525" cap="flat" cmpd="sng" algn="ctr">
                       <a:solidFill>
                         <a:srgbClr val="BFD8DD"/>
@@ -21886,7 +22626,7 @@
                     <a:bodyPr/>
                     <a:lstStyle/>
                     <a:p>
-                      <a:pPr indent="0" marL="0">
+                      <a:pPr marL="0" indent="0">
                         <a:buNone/>
                       </a:pPr>
                       <a:r>
@@ -21907,7 +22647,7 @@
                       </a:endParaRPr>
                     </a:p>
                   </a:txBody>
-                  <a:tcPr marL="91440" marR="91440" marT="45720" marB="45720" anchor="ctr">
+                  <a:tcPr anchor="ctr">
                     <a:lnL w="9525" cap="flat" cmpd="sng" algn="ctr">
                       <a:solidFill>
                         <a:srgbClr val="BFD8DD"/>
@@ -21954,7 +22694,7 @@
                     <a:bodyPr/>
                     <a:lstStyle/>
                     <a:p>
-                      <a:pPr indent="0" marL="0">
+                      <a:pPr marL="0" indent="0">
                         <a:buNone/>
                       </a:pPr>
                       <a:r>
@@ -21975,7 +22715,7 @@
                       </a:endParaRPr>
                     </a:p>
                   </a:txBody>
-                  <a:tcPr marL="91440" marR="91440" marT="45720" marB="45720" anchor="ctr">
+                  <a:tcPr anchor="ctr">
                     <a:lnL w="9525" cap="flat" cmpd="sng" algn="ctr">
                       <a:solidFill>
                         <a:srgbClr val="BFD8DD"/>
@@ -22022,7 +22762,7 @@
                     <a:bodyPr/>
                     <a:lstStyle/>
                     <a:p>
-                      <a:pPr indent="0" marL="0">
+                      <a:pPr marL="0" indent="0">
                         <a:buNone/>
                       </a:pPr>
                       <a:r>
@@ -22043,7 +22783,7 @@
                       </a:endParaRPr>
                     </a:p>
                   </a:txBody>
-                  <a:tcPr marL="91440" marR="91440" marT="45720" marB="45720" anchor="ctr">
+                  <a:tcPr anchor="ctr">
                     <a:lnL w="9525" cap="flat" cmpd="sng" algn="ctr">
                       <a:solidFill>
                         <a:srgbClr val="BFD8DD"/>
@@ -22090,7 +22830,7 @@
                     <a:bodyPr/>
                     <a:lstStyle/>
                     <a:p>
-                      <a:pPr indent="0" marL="0">
+                      <a:pPr marL="0" indent="0">
                         <a:buNone/>
                       </a:pPr>
                       <a:r>
@@ -22111,7 +22851,7 @@
                       </a:endParaRPr>
                     </a:p>
                   </a:txBody>
-                  <a:tcPr marL="91440" marR="91440" marT="45720" marB="45720" anchor="ctr">
+                  <a:tcPr anchor="ctr">
                     <a:lnL w="9525" cap="flat" cmpd="sng" algn="ctr">
                       <a:solidFill>
                         <a:srgbClr val="BFD8DD"/>
@@ -22153,6 +22893,11 @@
                     </a:solidFill>
                   </a:tcPr>
                 </a:tc>
+                <a:extLst>
+                  <a:ext uri="{0D108BD9-81ED-4DB2-BD59-A6C34878D82A}">
+                    <a16:rowId xmlns:a16="http://schemas.microsoft.com/office/drawing/2014/main" val="10004"/>
+                  </a:ext>
+                </a:extLst>
               </a:tr>
             </a:tbl>
           </a:graphicData>
@@ -22184,6 +22929,13 @@
             <a:prstDash val="solid"/>
           </a:ln>
         </p:spPr>
+        <p:txBody>
+          <a:bodyPr/>
+          <a:lstStyle/>
+          <a:p>
+            <a:endParaRPr lang="en-US"/>
+          </a:p>
+        </p:txBody>
       </p:sp>
       <p:sp>
         <p:nvSpPr>
@@ -22206,7 +22958,7 @@
           <a:bodyPr wrap="square" lIns="0" tIns="0" rIns="0" bIns="0" rtlCol="0" anchor="t"/>
           <a:lstStyle/>
           <a:p>
-            <a:pPr indent="0" marL="0">
+            <a:pPr marL="0" indent="0">
               <a:buNone/>
             </a:pPr>
             <a:r>
@@ -22245,7 +22997,7 @@
           <a:bodyPr wrap="square" lIns="0" tIns="0" rIns="0" bIns="0" rtlCol="0" anchor="t"/>
           <a:lstStyle/>
           <a:p>
-            <a:pPr indent="0" marL="0">
+            <a:pPr marL="0" indent="0">
               <a:buNone/>
             </a:pPr>
             <a:r>
@@ -22265,7 +23017,7 @@
       </p:sp>
       <p:sp>
         <p:nvSpPr>
-          <p:cNvPr id="8" name="Text 5"/>
+          <p:cNvPr id="4" name="Text 5"/>
           <p:cNvSpPr txBox="1"/>
           <p:nvPr/>
         </p:nvSpPr>
@@ -22284,7 +23036,7 @@
           <a:bodyPr wrap="square" lIns="0" tIns="0" rIns="0" bIns="0" rtlCol="0" anchor="t"/>
           <a:lstStyle/>
           <a:p>
-            <a:pPr indent="0" marL="0">
+            <a:pPr marL="0" indent="0">
               <a:buNone/>
             </a:pPr>
             <a:r>
@@ -22328,6 +23080,13 @@
             <a:prstDash val="solid"/>
           </a:ln>
         </p:spPr>
+        <p:txBody>
+          <a:bodyPr/>
+          <a:lstStyle/>
+          <a:p>
+            <a:endParaRPr lang="en-US"/>
+          </a:p>
+        </p:txBody>
       </p:sp>
       <p:sp>
         <p:nvSpPr>
@@ -22350,7 +23109,7 @@
           <a:bodyPr wrap="square" lIns="0" tIns="0" rIns="0" bIns="0" rtlCol="0" anchor="t"/>
           <a:lstStyle/>
           <a:p>
-            <a:pPr indent="0" marL="0">
+            <a:pPr marL="0" indent="0">
               <a:buNone/>
             </a:pPr>
             <a:r>
@@ -22389,7 +23148,7 @@
           <a:bodyPr wrap="square" lIns="0" tIns="0" rIns="0" bIns="0" rtlCol="0" anchor="t"/>
           <a:lstStyle/>
           <a:p>
-            <a:pPr indent="0" marL="0">
+            <a:pPr marL="0" indent="0">
               <a:buNone/>
             </a:pPr>
             <a:r>
@@ -22428,7 +23187,7 @@
           <a:bodyPr wrap="square" lIns="0" tIns="0" rIns="0" bIns="0" rtlCol="0" anchor="t"/>
           <a:lstStyle/>
           <a:p>
-            <a:pPr indent="0" marL="0">
+            <a:pPr marL="0" indent="0">
               <a:buNone/>
             </a:pPr>
             <a:r>
@@ -22462,6 +23221,7 @@
         <a:solidFill>
           <a:srgbClr val="FFFFFF"/>
         </a:solidFill>
+        <a:effectLst/>
       </p:bgPr>
     </p:bg>
     <p:spTree>
@@ -22499,11 +23259,11 @@
           <a:bodyPr wrap="square" lIns="0" tIns="0" rIns="0" bIns="0" rtlCol="0" anchor="t"/>
           <a:lstStyle/>
           <a:p>
-            <a:pPr indent="0" marL="0">
+            <a:pPr marL="0" indent="0">
               <a:buNone/>
             </a:pPr>
             <a:r>
-              <a:rPr lang="en-US" sz="1100" b="1" spc="200" kern="0" dirty="0">
+              <a:rPr lang="en-US" sz="1100" b="1" kern="0" spc="200" dirty="0">
                 <a:solidFill>
                   <a:srgbClr val="D98C1F"/>
                 </a:solidFill>
@@ -22538,7 +23298,7 @@
           <a:bodyPr wrap="square" lIns="0" tIns="0" rIns="0" bIns="0" rtlCol="0" anchor="ctr"/>
           <a:lstStyle/>
           <a:p>
-            <a:pPr indent="0" marL="0">
+            <a:pPr marL="0" indent="0">
               <a:buNone/>
             </a:pPr>
             <a:r>
@@ -22577,7 +23337,7 @@
           <a:bodyPr wrap="square" lIns="0" tIns="0" rIns="0" bIns="0" rtlCol="0" anchor="t"/>
           <a:lstStyle/>
           <a:p>
-            <a:pPr indent="0" marL="0">
+            <a:pPr marL="0" indent="0">
               <a:buNone/>
             </a:pPr>
             <a:r>
@@ -22621,6 +23381,13 @@
             <a:prstDash val="solid"/>
           </a:ln>
         </p:spPr>
+        <p:txBody>
+          <a:bodyPr/>
+          <a:lstStyle/>
+          <a:p>
+            <a:endParaRPr lang="en-US"/>
+          </a:p>
+        </p:txBody>
       </p:sp>
       <p:sp>
         <p:nvSpPr>
@@ -22646,6 +23413,13 @@
             <a:prstDash val="solid"/>
           </a:ln>
         </p:spPr>
+        <p:txBody>
+          <a:bodyPr/>
+          <a:lstStyle/>
+          <a:p>
+            <a:endParaRPr lang="en-US"/>
+          </a:p>
+        </p:txBody>
       </p:sp>
       <p:sp>
         <p:nvSpPr>
@@ -22668,7 +23442,7 @@
           <a:bodyPr wrap="square" lIns="0" tIns="0" rIns="0" bIns="0" rtlCol="0" anchor="ctr"/>
           <a:lstStyle/>
           <a:p>
-            <a:pPr algn="ctr" indent="0" marL="0">
+            <a:pPr marL="0" indent="0" algn="ctr">
               <a:buNone/>
             </a:pPr>
             <a:r>
@@ -22707,7 +23481,7 @@
           <a:bodyPr wrap="square" lIns="0" tIns="0" rIns="0" bIns="0" rtlCol="0" anchor="ctr"/>
           <a:lstStyle/>
           <a:p>
-            <a:pPr indent="0" marL="0">
+            <a:pPr marL="0" indent="0">
               <a:buNone/>
             </a:pPr>
             <a:r>
@@ -22746,7 +23520,7 @@
           <a:bodyPr wrap="square" lIns="0" tIns="0" rIns="0" bIns="0" rtlCol="0" anchor="ctr"/>
           <a:lstStyle/>
           <a:p>
-            <a:pPr algn="r" indent="0" marL="0">
+            <a:pPr marL="0" indent="0" algn="r">
               <a:buNone/>
             </a:pPr>
             <a:r>
@@ -22785,7 +23559,7 @@
           <a:bodyPr wrap="square" lIns="0" tIns="0" rIns="0" bIns="0" rtlCol="0" anchor="t"/>
           <a:lstStyle/>
           <a:p>
-            <a:pPr indent="0" marL="0">
+            <a:pPr marL="0" indent="0">
               <a:buNone/>
             </a:pPr>
             <a:r>
@@ -22824,7 +23598,7 @@
           <a:bodyPr wrap="square" lIns="0" tIns="0" rIns="0" bIns="0" rtlCol="0" anchor="t"/>
           <a:lstStyle/>
           <a:p>
-            <a:pPr indent="0" marL="0">
+            <a:pPr marL="0" indent="0">
               <a:buNone/>
             </a:pPr>
             <a:r>
@@ -22844,7 +23618,7 @@
       </p:sp>
       <p:graphicFrame>
         <p:nvGraphicFramePr>
-          <p:cNvPr id="9" name="Table 0"/>
+          <p:cNvPr id="12" name="Table 0"/>
           <p:cNvGraphicFramePr>
             <a:graphicFrameLocks noGrp="1"/>
           </p:cNvGraphicFramePr>
@@ -22858,16 +23632,34 @@
         </p:nvGraphicFramePr>
         <p:xfrm>
           <a:off x="777240" y="3611880"/>
-          <a:ext cx="3154680" cy="914400"/>
+          <a:ext cx="3154680" cy="877824"/>
         </p:xfrm>
         <a:graphic>
           <a:graphicData uri="http://schemas.openxmlformats.org/drawingml/2006/table">
             <a:tbl>
               <a:tblPr/>
               <a:tblGrid>
-                <a:gridCol w="731520"/>
-                <a:gridCol w="1234440"/>
-                <a:gridCol w="1188720"/>
+                <a:gridCol w="731520">
+                  <a:extLst>
+                    <a:ext uri="{9D8B030D-6E8A-4147-A177-3AD203B41FA5}">
+                      <a16:colId xmlns:a16="http://schemas.microsoft.com/office/drawing/2014/main" val="20000"/>
+                    </a:ext>
+                  </a:extLst>
+                </a:gridCol>
+                <a:gridCol w="1234440">
+                  <a:extLst>
+                    <a:ext uri="{9D8B030D-6E8A-4147-A177-3AD203B41FA5}">
+                      <a16:colId xmlns:a16="http://schemas.microsoft.com/office/drawing/2014/main" val="20001"/>
+                    </a:ext>
+                  </a:extLst>
+                </a:gridCol>
+                <a:gridCol w="1188720">
+                  <a:extLst>
+                    <a:ext uri="{9D8B030D-6E8A-4147-A177-3AD203B41FA5}">
+                      <a16:colId xmlns:a16="http://schemas.microsoft.com/office/drawing/2014/main" val="20002"/>
+                    </a:ext>
+                  </a:extLst>
+                </a:gridCol>
               </a:tblGrid>
               <a:tr h="292608">
                 <a:tc>
@@ -22875,7 +23667,7 @@
                     <a:bodyPr/>
                     <a:lstStyle/>
                     <a:p>
-                      <a:pPr indent="0" marL="0">
+                      <a:pPr marL="0" indent="0">
                         <a:buNone/>
                       </a:pPr>
                       <a:r>
@@ -22896,7 +23688,7 @@
                       </a:endParaRPr>
                     </a:p>
                   </a:txBody>
-                  <a:tcPr marL="91440" marR="91440" marT="45720" marB="45720" anchor="ctr">
+                  <a:tcPr anchor="ctr">
                     <a:lnL w="9525" cap="flat" cmpd="sng" algn="ctr">
                       <a:solidFill>
                         <a:srgbClr val="BFD8DD"/>
@@ -22943,7 +23735,7 @@
                     <a:bodyPr/>
                     <a:lstStyle/>
                     <a:p>
-                      <a:pPr indent="0" marL="0">
+                      <a:pPr marL="0" indent="0">
                         <a:buNone/>
                       </a:pPr>
                       <a:r>
@@ -22964,7 +23756,7 @@
                       </a:endParaRPr>
                     </a:p>
                   </a:txBody>
-                  <a:tcPr marL="91440" marR="91440" marT="45720" marB="45720" anchor="ctr">
+                  <a:tcPr anchor="ctr">
                     <a:lnL w="9525" cap="flat" cmpd="sng" algn="ctr">
                       <a:solidFill>
                         <a:srgbClr val="BFD8DD"/>
@@ -23011,7 +23803,7 @@
                     <a:bodyPr/>
                     <a:lstStyle/>
                     <a:p>
-                      <a:pPr indent="0" marL="0">
+                      <a:pPr marL="0" indent="0">
                         <a:buNone/>
                       </a:pPr>
                       <a:r>
@@ -23032,7 +23824,7 @@
                       </a:endParaRPr>
                     </a:p>
                   </a:txBody>
-                  <a:tcPr marL="91440" marR="91440" marT="45720" marB="45720" anchor="ctr">
+                  <a:tcPr anchor="ctr">
                     <a:lnL w="9525" cap="flat" cmpd="sng" algn="ctr">
                       <a:solidFill>
                         <a:srgbClr val="BFD8DD"/>
@@ -23074,6 +23866,11 @@
                     </a:solidFill>
                   </a:tcPr>
                 </a:tc>
+                <a:extLst>
+                  <a:ext uri="{0D108BD9-81ED-4DB2-BD59-A6C34878D82A}">
+                    <a16:rowId xmlns:a16="http://schemas.microsoft.com/office/drawing/2014/main" val="10000"/>
+                  </a:ext>
+                </a:extLst>
               </a:tr>
               <a:tr h="292608">
                 <a:tc>
@@ -23081,7 +23878,7 @@
                     <a:bodyPr/>
                     <a:lstStyle/>
                     <a:p>
-                      <a:pPr indent="0" marL="0">
+                      <a:pPr marL="0" indent="0">
                         <a:buNone/>
                       </a:pPr>
                       <a:r>
@@ -23102,7 +23899,7 @@
                       </a:endParaRPr>
                     </a:p>
                   </a:txBody>
-                  <a:tcPr marL="91440" marR="91440" marT="45720" marB="45720" anchor="ctr">
+                  <a:tcPr anchor="ctr">
                     <a:lnL w="9525" cap="flat" cmpd="sng" algn="ctr">
                       <a:solidFill>
                         <a:srgbClr val="BFD8DD"/>
@@ -23149,7 +23946,7 @@
                     <a:bodyPr/>
                     <a:lstStyle/>
                     <a:p>
-                      <a:pPr indent="0" marL="0">
+                      <a:pPr marL="0" indent="0">
                         <a:buNone/>
                       </a:pPr>
                       <a:r>
@@ -23170,7 +23967,7 @@
                       </a:endParaRPr>
                     </a:p>
                   </a:txBody>
-                  <a:tcPr marL="91440" marR="91440" marT="45720" marB="45720" anchor="ctr">
+                  <a:tcPr anchor="ctr">
                     <a:lnL w="9525" cap="flat" cmpd="sng" algn="ctr">
                       <a:solidFill>
                         <a:srgbClr val="BFD8DD"/>
@@ -23217,7 +24014,7 @@
                     <a:bodyPr/>
                     <a:lstStyle/>
                     <a:p>
-                      <a:pPr indent="0" marL="0">
+                      <a:pPr marL="0" indent="0">
                         <a:buNone/>
                       </a:pPr>
                       <a:r>
@@ -23238,7 +24035,7 @@
                       </a:endParaRPr>
                     </a:p>
                   </a:txBody>
-                  <a:tcPr marL="91440" marR="91440" marT="45720" marB="45720" anchor="ctr">
+                  <a:tcPr anchor="ctr">
                     <a:lnL w="9525" cap="flat" cmpd="sng" algn="ctr">
                       <a:solidFill>
                         <a:srgbClr val="BFD8DD"/>
@@ -23280,6 +24077,11 @@
                     </a:solidFill>
                   </a:tcPr>
                 </a:tc>
+                <a:extLst>
+                  <a:ext uri="{0D108BD9-81ED-4DB2-BD59-A6C34878D82A}">
+                    <a16:rowId xmlns:a16="http://schemas.microsoft.com/office/drawing/2014/main" val="10001"/>
+                  </a:ext>
+                </a:extLst>
               </a:tr>
               <a:tr h="292608">
                 <a:tc>
@@ -23287,7 +24089,7 @@
                     <a:bodyPr/>
                     <a:lstStyle/>
                     <a:p>
-                      <a:pPr indent="0" marL="0">
+                      <a:pPr marL="0" indent="0">
                         <a:buNone/>
                       </a:pPr>
                       <a:r>
@@ -23308,7 +24110,7 @@
                       </a:endParaRPr>
                     </a:p>
                   </a:txBody>
-                  <a:tcPr marL="91440" marR="91440" marT="45720" marB="45720" anchor="ctr">
+                  <a:tcPr anchor="ctr">
                     <a:lnL w="9525" cap="flat" cmpd="sng" algn="ctr">
                       <a:solidFill>
                         <a:srgbClr val="BFD8DD"/>
@@ -23355,7 +24157,7 @@
                     <a:bodyPr/>
                     <a:lstStyle/>
                     <a:p>
-                      <a:pPr indent="0" marL="0">
+                      <a:pPr marL="0" indent="0">
                         <a:buNone/>
                       </a:pPr>
                       <a:r>
@@ -23376,7 +24178,7 @@
                       </a:endParaRPr>
                     </a:p>
                   </a:txBody>
-                  <a:tcPr marL="91440" marR="91440" marT="45720" marB="45720" anchor="ctr">
+                  <a:tcPr anchor="ctr">
                     <a:lnL w="9525" cap="flat" cmpd="sng" algn="ctr">
                       <a:solidFill>
                         <a:srgbClr val="BFD8DD"/>
@@ -23423,7 +24225,7 @@
                     <a:bodyPr/>
                     <a:lstStyle/>
                     <a:p>
-                      <a:pPr indent="0" marL="0">
+                      <a:pPr marL="0" indent="0">
                         <a:buNone/>
                       </a:pPr>
                       <a:r>
@@ -23444,7 +24246,7 @@
                       </a:endParaRPr>
                     </a:p>
                   </a:txBody>
-                  <a:tcPr marL="91440" marR="91440" marT="45720" marB="45720" anchor="ctr">
+                  <a:tcPr anchor="ctr">
                     <a:lnL w="9525" cap="flat" cmpd="sng" algn="ctr">
                       <a:solidFill>
                         <a:srgbClr val="BFD8DD"/>
@@ -23486,6 +24288,11 @@
                     </a:solidFill>
                   </a:tcPr>
                 </a:tc>
+                <a:extLst>
+                  <a:ext uri="{0D108BD9-81ED-4DB2-BD59-A6C34878D82A}">
+                    <a16:rowId xmlns:a16="http://schemas.microsoft.com/office/drawing/2014/main" val="10002"/>
+                  </a:ext>
+                </a:extLst>
               </a:tr>
             </a:tbl>
           </a:graphicData>
@@ -23517,6 +24324,13 @@
             <a:prstDash val="solid"/>
           </a:ln>
         </p:spPr>
+        <p:txBody>
+          <a:bodyPr/>
+          <a:lstStyle/>
+          <a:p>
+            <a:endParaRPr lang="en-US"/>
+          </a:p>
+        </p:txBody>
       </p:sp>
       <p:sp>
         <p:nvSpPr>
@@ -23542,6 +24356,13 @@
             <a:prstDash val="solid"/>
           </a:ln>
         </p:spPr>
+        <p:txBody>
+          <a:bodyPr/>
+          <a:lstStyle/>
+          <a:p>
+            <a:endParaRPr lang="en-US"/>
+          </a:p>
+        </p:txBody>
       </p:sp>
       <p:sp>
         <p:nvSpPr>
@@ -23564,7 +24385,7 @@
           <a:bodyPr wrap="square" lIns="0" tIns="0" rIns="0" bIns="0" rtlCol="0" anchor="ctr"/>
           <a:lstStyle/>
           <a:p>
-            <a:pPr algn="ctr" indent="0" marL="0">
+            <a:pPr marL="0" indent="0" algn="ctr">
               <a:buNone/>
             </a:pPr>
             <a:r>
@@ -23603,7 +24424,7 @@
           <a:bodyPr wrap="square" lIns="0" tIns="0" rIns="0" bIns="0" rtlCol="0" anchor="ctr"/>
           <a:lstStyle/>
           <a:p>
-            <a:pPr indent="0" marL="0">
+            <a:pPr marL="0" indent="0">
               <a:buNone/>
             </a:pPr>
             <a:r>
@@ -23642,7 +24463,7 @@
           <a:bodyPr wrap="square" lIns="0" tIns="0" rIns="0" bIns="0" rtlCol="0" anchor="ctr"/>
           <a:lstStyle/>
           <a:p>
-            <a:pPr algn="r" indent="0" marL="0">
+            <a:pPr marL="0" indent="0" algn="r">
               <a:buNone/>
             </a:pPr>
             <a:r>
@@ -23681,7 +24502,7 @@
           <a:bodyPr wrap="square" lIns="0" tIns="0" rIns="0" bIns="0" rtlCol="0" anchor="t"/>
           <a:lstStyle/>
           <a:p>
-            <a:pPr indent="0" marL="0">
+            <a:pPr marL="0" indent="0">
               <a:buNone/>
             </a:pPr>
             <a:r>
@@ -23720,7 +24541,7 @@
           <a:bodyPr wrap="square" lIns="0" tIns="0" rIns="0" bIns="0" rtlCol="0" anchor="t"/>
           <a:lstStyle/>
           <a:p>
-            <a:pPr indent="0" marL="0">
+            <a:pPr marL="0" indent="0">
               <a:buNone/>
             </a:pPr>
             <a:r>
@@ -23740,7 +24561,7 @@
       </p:sp>
       <p:graphicFrame>
         <p:nvGraphicFramePr>
-          <p:cNvPr id="17" name="Table 1"/>
+          <p:cNvPr id="20" name="Table 1"/>
           <p:cNvGraphicFramePr>
             <a:graphicFrameLocks noGrp="1"/>
           </p:cNvGraphicFramePr>
@@ -23754,16 +24575,34 @@
         </p:nvGraphicFramePr>
         <p:xfrm>
           <a:off x="4617720" y="3611880"/>
-          <a:ext cx="3154680" cy="914400"/>
+          <a:ext cx="3154680" cy="585216"/>
         </p:xfrm>
         <a:graphic>
           <a:graphicData uri="http://schemas.openxmlformats.org/drawingml/2006/table">
             <a:tbl>
               <a:tblPr/>
               <a:tblGrid>
-                <a:gridCol w="731520"/>
-                <a:gridCol w="1234440"/>
-                <a:gridCol w="1188720"/>
+                <a:gridCol w="731520">
+                  <a:extLst>
+                    <a:ext uri="{9D8B030D-6E8A-4147-A177-3AD203B41FA5}">
+                      <a16:colId xmlns:a16="http://schemas.microsoft.com/office/drawing/2014/main" val="20000"/>
+                    </a:ext>
+                  </a:extLst>
+                </a:gridCol>
+                <a:gridCol w="1234440">
+                  <a:extLst>
+                    <a:ext uri="{9D8B030D-6E8A-4147-A177-3AD203B41FA5}">
+                      <a16:colId xmlns:a16="http://schemas.microsoft.com/office/drawing/2014/main" val="20001"/>
+                    </a:ext>
+                  </a:extLst>
+                </a:gridCol>
+                <a:gridCol w="1188720">
+                  <a:extLst>
+                    <a:ext uri="{9D8B030D-6E8A-4147-A177-3AD203B41FA5}">
+                      <a16:colId xmlns:a16="http://schemas.microsoft.com/office/drawing/2014/main" val="20002"/>
+                    </a:ext>
+                  </a:extLst>
+                </a:gridCol>
               </a:tblGrid>
               <a:tr h="292608">
                 <a:tc>
@@ -23771,7 +24610,7 @@
                     <a:bodyPr/>
                     <a:lstStyle/>
                     <a:p>
-                      <a:pPr indent="0" marL="0">
+                      <a:pPr marL="0" indent="0">
                         <a:buNone/>
                       </a:pPr>
                       <a:r>
@@ -23792,7 +24631,7 @@
                       </a:endParaRPr>
                     </a:p>
                   </a:txBody>
-                  <a:tcPr marL="91440" marR="91440" marT="45720" marB="45720" anchor="ctr">
+                  <a:tcPr anchor="ctr">
                     <a:lnL w="9525" cap="flat" cmpd="sng" algn="ctr">
                       <a:solidFill>
                         <a:srgbClr val="BFD8DD"/>
@@ -23839,7 +24678,7 @@
                     <a:bodyPr/>
                     <a:lstStyle/>
                     <a:p>
-                      <a:pPr indent="0" marL="0">
+                      <a:pPr marL="0" indent="0">
                         <a:buNone/>
                       </a:pPr>
                       <a:r>
@@ -23860,7 +24699,7 @@
                       </a:endParaRPr>
                     </a:p>
                   </a:txBody>
-                  <a:tcPr marL="91440" marR="91440" marT="45720" marB="45720" anchor="ctr">
+                  <a:tcPr anchor="ctr">
                     <a:lnL w="9525" cap="flat" cmpd="sng" algn="ctr">
                       <a:solidFill>
                         <a:srgbClr val="BFD8DD"/>
@@ -23907,7 +24746,7 @@
                     <a:bodyPr/>
                     <a:lstStyle/>
                     <a:p>
-                      <a:pPr indent="0" marL="0">
+                      <a:pPr marL="0" indent="0">
                         <a:buNone/>
                       </a:pPr>
                       <a:r>
@@ -23928,7 +24767,7 @@
                       </a:endParaRPr>
                     </a:p>
                   </a:txBody>
-                  <a:tcPr marL="91440" marR="91440" marT="45720" marB="45720" anchor="ctr">
+                  <a:tcPr anchor="ctr">
                     <a:lnL w="9525" cap="flat" cmpd="sng" algn="ctr">
                       <a:solidFill>
                         <a:srgbClr val="BFD8DD"/>
@@ -23970,6 +24809,11 @@
                     </a:solidFill>
                   </a:tcPr>
                 </a:tc>
+                <a:extLst>
+                  <a:ext uri="{0D108BD9-81ED-4DB2-BD59-A6C34878D82A}">
+                    <a16:rowId xmlns:a16="http://schemas.microsoft.com/office/drawing/2014/main" val="10000"/>
+                  </a:ext>
+                </a:extLst>
               </a:tr>
               <a:tr h="292608">
                 <a:tc>
@@ -23977,7 +24821,7 @@
                     <a:bodyPr/>
                     <a:lstStyle/>
                     <a:p>
-                      <a:pPr indent="0" marL="0">
+                      <a:pPr marL="0" indent="0">
                         <a:buNone/>
                       </a:pPr>
                       <a:r>
@@ -23998,7 +24842,7 @@
                       </a:endParaRPr>
                     </a:p>
                   </a:txBody>
-                  <a:tcPr marL="91440" marR="91440" marT="45720" marB="45720" anchor="ctr">
+                  <a:tcPr anchor="ctr">
                     <a:lnL w="9525" cap="flat" cmpd="sng" algn="ctr">
                       <a:solidFill>
                         <a:srgbClr val="BFD8DD"/>
@@ -24045,7 +24889,7 @@
                     <a:bodyPr/>
                     <a:lstStyle/>
                     <a:p>
-                      <a:pPr indent="0" marL="0">
+                      <a:pPr marL="0" indent="0">
                         <a:buNone/>
                       </a:pPr>
                       <a:r>
@@ -24066,7 +24910,7 @@
                       </a:endParaRPr>
                     </a:p>
                   </a:txBody>
-                  <a:tcPr marL="91440" marR="91440" marT="45720" marB="45720" anchor="ctr">
+                  <a:tcPr anchor="ctr">
                     <a:lnL w="9525" cap="flat" cmpd="sng" algn="ctr">
                       <a:solidFill>
                         <a:srgbClr val="BFD8DD"/>
@@ -24113,7 +24957,7 @@
                     <a:bodyPr/>
                     <a:lstStyle/>
                     <a:p>
-                      <a:pPr indent="0" marL="0">
+                      <a:pPr marL="0" indent="0">
                         <a:buNone/>
                       </a:pPr>
                       <a:r>
@@ -24134,7 +24978,7 @@
                       </a:endParaRPr>
                     </a:p>
                   </a:txBody>
-                  <a:tcPr marL="91440" marR="91440" marT="45720" marB="45720" anchor="ctr">
+                  <a:tcPr anchor="ctr">
                     <a:lnL w="9525" cap="flat" cmpd="sng" algn="ctr">
                       <a:solidFill>
                         <a:srgbClr val="BFD8DD"/>
@@ -24176,6 +25020,11 @@
                     </a:solidFill>
                   </a:tcPr>
                 </a:tc>
+                <a:extLst>
+                  <a:ext uri="{0D108BD9-81ED-4DB2-BD59-A6C34878D82A}">
+                    <a16:rowId xmlns:a16="http://schemas.microsoft.com/office/drawing/2014/main" val="10001"/>
+                  </a:ext>
+                </a:extLst>
               </a:tr>
             </a:tbl>
           </a:graphicData>
@@ -24204,6 +25053,13 @@
             <a:tailEnd type="triangle"/>
           </a:ln>
         </p:spPr>
+        <p:txBody>
+          <a:bodyPr/>
+          <a:lstStyle/>
+          <a:p>
+            <a:endParaRPr lang="en-US"/>
+          </a:p>
+        </p:txBody>
       </p:sp>
       <p:sp>
         <p:nvSpPr>
@@ -24231,6 +25087,13 @@
             <a:prstDash val="solid"/>
           </a:ln>
         </p:spPr>
+        <p:txBody>
+          <a:bodyPr/>
+          <a:lstStyle/>
+          <a:p>
+            <a:endParaRPr lang="en-US"/>
+          </a:p>
+        </p:txBody>
       </p:sp>
       <p:sp>
         <p:nvSpPr>
@@ -24253,7 +25116,7 @@
           <a:bodyPr wrap="square" lIns="0" tIns="0" rIns="0" bIns="0" rtlCol="0" anchor="t"/>
           <a:lstStyle/>
           <a:p>
-            <a:pPr indent="0" marL="0">
+            <a:pPr marL="0" indent="0">
               <a:buNone/>
             </a:pPr>
             <a:r>
@@ -24292,7 +25155,7 @@
           <a:bodyPr wrap="square" lIns="0" tIns="0" rIns="0" bIns="0" rtlCol="0" anchor="t"/>
           <a:lstStyle/>
           <a:p>
-            <a:pPr indent="0" marL="0">
+            <a:pPr marL="0" indent="0">
               <a:buNone/>
             </a:pPr>
             <a:r>
@@ -24331,7 +25194,7 @@
           <a:bodyPr wrap="square" lIns="0" tIns="0" rIns="0" bIns="0" rtlCol="0" anchor="t"/>
           <a:lstStyle/>
           <a:p>
-            <a:pPr indent="0" marL="0">
+            <a:pPr marL="0" indent="0">
               <a:buNone/>
             </a:pPr>
             <a:r>
@@ -24370,7 +25233,7 @@
           <a:bodyPr wrap="square" lIns="0" tIns="0" rIns="0" bIns="0" rtlCol="0" anchor="t"/>
           <a:lstStyle/>
           <a:p>
-            <a:pPr indent="0" marL="0">
+            <a:pPr marL="0" indent="0">
               <a:buNone/>
             </a:pPr>
             <a:r>
@@ -24414,6 +25277,13 @@
             <a:prstDash val="solid"/>
           </a:ln>
         </p:spPr>
+        <p:txBody>
+          <a:bodyPr/>
+          <a:lstStyle/>
+          <a:p>
+            <a:endParaRPr lang="en-US"/>
+          </a:p>
+        </p:txBody>
       </p:sp>
       <p:sp>
         <p:nvSpPr>
@@ -24436,7 +25306,7 @@
           <a:bodyPr wrap="square" lIns="0" tIns="0" rIns="0" bIns="0" rtlCol="0" anchor="ctr"/>
           <a:lstStyle/>
           <a:p>
-            <a:pPr indent="0" marL="0">
+            <a:pPr marL="0" indent="0">
               <a:buNone/>
             </a:pPr>
             <a:r>
@@ -24450,9 +25320,6 @@
               </a:rPr>
               <a:t>Vì sao không chốt bản mới ngay lúc ghi (như Mem0)?  </a:t>
             </a:r>
-            <a:pPr indent="0" marL="0">
-              <a:buNone/>
-            </a:pPr>
             <a:r>
               <a:rPr lang="en-US" sz="1250" dirty="0">
                 <a:solidFill>
@@ -24489,7 +25356,7 @@
           <a:bodyPr wrap="square" lIns="0" tIns="0" rIns="0" bIns="0" rtlCol="0" anchor="t"/>
           <a:lstStyle/>
           <a:p>
-            <a:pPr indent="0" marL="0">
+            <a:pPr marL="0" indent="0">
               <a:buNone/>
             </a:pPr>
             <a:r>
@@ -24523,6 +25390,7 @@
         <a:solidFill>
           <a:srgbClr val="FFFFFF"/>
         </a:solidFill>
+        <a:effectLst/>
       </p:bgPr>
     </p:bg>
     <p:spTree>
@@ -24560,11 +25428,11 @@
           <a:bodyPr wrap="square" lIns="0" tIns="0" rIns="0" bIns="0" rtlCol="0" anchor="t"/>
           <a:lstStyle/>
           <a:p>
-            <a:pPr indent="0" marL="0">
+            <a:pPr marL="0" indent="0">
               <a:buNone/>
             </a:pPr>
             <a:r>
-              <a:rPr lang="en-US" sz="1100" b="1" spc="200" kern="0" dirty="0">
+              <a:rPr lang="en-US" sz="1100" b="1" kern="0" spc="200" dirty="0">
                 <a:solidFill>
                   <a:srgbClr val="D98C1F"/>
                 </a:solidFill>
@@ -24599,7 +25467,7 @@
           <a:bodyPr wrap="square" lIns="0" tIns="0" rIns="0" bIns="0" rtlCol="0" anchor="ctr"/>
           <a:lstStyle/>
           <a:p>
-            <a:pPr indent="0" marL="0">
+            <a:pPr marL="0" indent="0">
               <a:buNone/>
             </a:pPr>
             <a:r>
@@ -24643,6 +25511,13 @@
             <a:prstDash val="solid"/>
           </a:ln>
         </p:spPr>
+        <p:txBody>
+          <a:bodyPr/>
+          <a:lstStyle/>
+          <a:p>
+            <a:endParaRPr lang="en-US"/>
+          </a:p>
+        </p:txBody>
       </p:sp>
       <p:sp>
         <p:nvSpPr>
@@ -24665,7 +25540,7 @@
           <a:bodyPr wrap="square" lIns="0" tIns="0" rIns="0" bIns="0" rtlCol="0" anchor="t"/>
           <a:lstStyle/>
           <a:p>
-            <a:pPr indent="0" marL="0">
+            <a:pPr marL="0" indent="0">
               <a:buNone/>
             </a:pPr>
             <a:r>
@@ -24704,7 +25579,7 @@
           <a:bodyPr wrap="square" lIns="0" tIns="0" rIns="0" bIns="0" rtlCol="0" anchor="t"/>
           <a:lstStyle/>
           <a:p>
-            <a:pPr indent="0" marL="0">
+            <a:pPr marL="0" indent="0">
               <a:buNone/>
             </a:pPr>
             <a:r>
@@ -24748,6 +25623,13 @@
             <a:prstDash val="solid"/>
           </a:ln>
         </p:spPr>
+        <p:txBody>
+          <a:bodyPr/>
+          <a:lstStyle/>
+          <a:p>
+            <a:endParaRPr lang="en-US"/>
+          </a:p>
+        </p:txBody>
       </p:sp>
       <p:sp>
         <p:nvSpPr>
@@ -24770,7 +25652,7 @@
           <a:bodyPr wrap="square" lIns="0" tIns="0" rIns="0" bIns="0" rtlCol="0" anchor="t"/>
           <a:lstStyle/>
           <a:p>
-            <a:pPr indent="0" marL="0">
+            <a:pPr marL="0" indent="0">
               <a:buNone/>
             </a:pPr>
             <a:r>
@@ -24809,7 +25691,7 @@
           <a:bodyPr wrap="square" lIns="0" tIns="0" rIns="0" bIns="0" rtlCol="0" anchor="t"/>
           <a:lstStyle/>
           <a:p>
-            <a:pPr indent="0" marL="0">
+            <a:pPr marL="0" indent="0">
               <a:buNone/>
             </a:pPr>
             <a:r>
@@ -24853,6 +25735,13 @@
             <a:prstDash val="solid"/>
           </a:ln>
         </p:spPr>
+        <p:txBody>
+          <a:bodyPr/>
+          <a:lstStyle/>
+          <a:p>
+            <a:endParaRPr lang="en-US"/>
+          </a:p>
+        </p:txBody>
       </p:sp>
       <p:sp>
         <p:nvSpPr>
@@ -24875,7 +25764,7 @@
           <a:bodyPr wrap="square" lIns="0" tIns="0" rIns="0" bIns="0" rtlCol="0" anchor="t"/>
           <a:lstStyle/>
           <a:p>
-            <a:pPr indent="0" marL="0">
+            <a:pPr marL="0" indent="0">
               <a:buNone/>
             </a:pPr>
             <a:r>
@@ -24914,7 +25803,7 @@
           <a:bodyPr wrap="square" lIns="0" tIns="0" rIns="0" bIns="0" rtlCol="0" anchor="t"/>
           <a:lstStyle/>
           <a:p>
-            <a:pPr indent="0" marL="0">
+            <a:pPr marL="0" indent="0">
               <a:buNone/>
             </a:pPr>
             <a:r>
@@ -24958,6 +25847,13 @@
             <a:prstDash val="solid"/>
           </a:ln>
         </p:spPr>
+        <p:txBody>
+          <a:bodyPr/>
+          <a:lstStyle/>
+          <a:p>
+            <a:endParaRPr lang="en-US"/>
+          </a:p>
+        </p:txBody>
       </p:sp>
       <p:sp>
         <p:nvSpPr>
@@ -24980,7 +25876,7 @@
           <a:bodyPr wrap="square" lIns="0" tIns="0" rIns="0" bIns="0" rtlCol="0" anchor="t"/>
           <a:lstStyle/>
           <a:p>
-            <a:pPr indent="0" marL="0">
+            <a:pPr marL="0" indent="0">
               <a:buNone/>
             </a:pPr>
             <a:r>
@@ -25019,7 +25915,7 @@
           <a:bodyPr wrap="square" lIns="0" tIns="0" rIns="0" bIns="0" rtlCol="0" anchor="t"/>
           <a:lstStyle/>
           <a:p>
-            <a:pPr indent="0" marL="0">
+            <a:pPr marL="0" indent="0">
               <a:buNone/>
             </a:pPr>
             <a:r>
@@ -25063,6 +25959,13 @@
             <a:prstDash val="solid"/>
           </a:ln>
         </p:spPr>
+        <p:txBody>
+          <a:bodyPr/>
+          <a:lstStyle/>
+          <a:p>
+            <a:endParaRPr lang="en-US"/>
+          </a:p>
+        </p:txBody>
       </p:sp>
       <p:sp>
         <p:nvSpPr>
@@ -25085,7 +25988,7 @@
           <a:bodyPr wrap="square" lIns="0" tIns="0" rIns="0" bIns="0" rtlCol="0" anchor="t"/>
           <a:lstStyle/>
           <a:p>
-            <a:pPr indent="0" marL="0">
+            <a:pPr marL="0" indent="0">
               <a:buNone/>
             </a:pPr>
             <a:r>
@@ -25124,7 +26027,7 @@
           <a:bodyPr wrap="square" lIns="0" tIns="0" rIns="0" bIns="0" rtlCol="0" anchor="t"/>
           <a:lstStyle/>
           <a:p>
-            <a:pPr indent="0" marL="0">
+            <a:pPr marL="0" indent="0">
               <a:buNone/>
             </a:pPr>
             <a:r>
@@ -25168,6 +26071,13 @@
             <a:prstDash val="solid"/>
           </a:ln>
         </p:spPr>
+        <p:txBody>
+          <a:bodyPr/>
+          <a:lstStyle/>
+          <a:p>
+            <a:endParaRPr lang="en-US"/>
+          </a:p>
+        </p:txBody>
       </p:sp>
       <p:sp>
         <p:nvSpPr>
@@ -25190,7 +26100,7 @@
           <a:bodyPr wrap="square" lIns="0" tIns="0" rIns="0" bIns="0" rtlCol="0" anchor="t"/>
           <a:lstStyle/>
           <a:p>
-            <a:pPr indent="0" marL="0">
+            <a:pPr marL="0" indent="0">
               <a:buNone/>
             </a:pPr>
             <a:r>
@@ -25229,7 +26139,7 @@
           <a:bodyPr wrap="square" lIns="0" tIns="0" rIns="0" bIns="0" rtlCol="0" anchor="t"/>
           <a:lstStyle/>
           <a:p>
-            <a:pPr indent="0" marL="0">
+            <a:pPr marL="0" indent="0">
               <a:buNone/>
             </a:pPr>
             <a:r>
@@ -25246,7 +26156,7 @@
             <a:endParaRPr lang="en-US" sz="1350" dirty="0"/>
           </a:p>
           <a:p>
-            <a:pPr indent="0" marL="0">
+            <a:pPr marL="0" indent="0">
               <a:buNone/>
             </a:pPr>
             <a:r>
@@ -25285,7 +26195,7 @@
           <a:bodyPr wrap="square" lIns="0" tIns="0" rIns="0" bIns="0" rtlCol="0" anchor="t"/>
           <a:lstStyle/>
           <a:p>
-            <a:pPr indent="0" marL="0">
+            <a:pPr marL="0" indent="0">
               <a:buNone/>
             </a:pPr>
             <a:r>
@@ -25604,4 +26514,319 @@
     </a:ext>
   </a:extLst>
 </a:theme>
+</file>
+
+<file path=ppt/theme/theme2.xml><?xml version="1.0" encoding="utf-8"?>
+<a:theme xmlns:a="http://schemas.openxmlformats.org/drawingml/2006/main" name="Office Theme">
+  <a:themeElements>
+    <a:clrScheme name="Office">
+      <a:dk1>
+        <a:sysClr val="windowText" lastClr="000000"/>
+      </a:dk1>
+      <a:lt1>
+        <a:sysClr val="window" lastClr="FFFFFF"/>
+      </a:lt1>
+      <a:dk2>
+        <a:srgbClr val="0E2841"/>
+      </a:dk2>
+      <a:lt2>
+        <a:srgbClr val="E8E8E8"/>
+      </a:lt2>
+      <a:accent1>
+        <a:srgbClr val="156082"/>
+      </a:accent1>
+      <a:accent2>
+        <a:srgbClr val="E97132"/>
+      </a:accent2>
+      <a:accent3>
+        <a:srgbClr val="196B24"/>
+      </a:accent3>
+      <a:accent4>
+        <a:srgbClr val="0F9ED5"/>
+      </a:accent4>
+      <a:accent5>
+        <a:srgbClr val="A02B93"/>
+      </a:accent5>
+      <a:accent6>
+        <a:srgbClr val="4EA72E"/>
+      </a:accent6>
+      <a:hlink>
+        <a:srgbClr val="467886"/>
+      </a:hlink>
+      <a:folHlink>
+        <a:srgbClr val="96607D"/>
+      </a:folHlink>
+    </a:clrScheme>
+    <a:fontScheme name="Office">
+      <a:majorFont>
+        <a:latin typeface="Aptos Display" panose="02110004020202020204"/>
+        <a:ea typeface=""/>
+        <a:cs typeface=""/>
+        <a:font script="Jpan" typeface="游ゴシック Light"/>
+        <a:font script="Hang" typeface="맑은 고딕"/>
+        <a:font script="Hans" typeface="等线 Light"/>
+        <a:font script="Hant" typeface="新細明體"/>
+        <a:font script="Arab" typeface="Times New Roman"/>
+        <a:font script="Hebr" typeface="Times New Roman"/>
+        <a:font script="Thai" typeface="Angsana New"/>
+        <a:font script="Ethi" typeface="Nyala"/>
+        <a:font script="Beng" typeface="Vrinda"/>
+        <a:font script="Gujr" typeface="Shruti"/>
+        <a:font script="Khmr" typeface="MoolBoran"/>
+        <a:font script="Knda" typeface="Tunga"/>
+        <a:font script="Guru" typeface="Raavi"/>
+        <a:font script="Cans" typeface="Euphemia"/>
+        <a:font script="Cher" typeface="Plantagenet Cherokee"/>
+        <a:font script="Yiii" typeface="Microsoft Yi Baiti"/>
+        <a:font script="Tibt" typeface="Microsoft Himalaya"/>
+        <a:font script="Thaa" typeface="MV Boli"/>
+        <a:font script="Deva" typeface="Mangal"/>
+        <a:font script="Telu" typeface="Gautami"/>
+        <a:font script="Taml" typeface="Latha"/>
+        <a:font script="Syrc" typeface="Estrangelo Edessa"/>
+        <a:font script="Orya" typeface="Kalinga"/>
+        <a:font script="Mlym" typeface="Kartika"/>
+        <a:font script="Laoo" typeface="DokChampa"/>
+        <a:font script="Sinh" typeface="Iskoola Pota"/>
+        <a:font script="Mong" typeface="Mongolian Baiti"/>
+        <a:font script="Viet" typeface="Times New Roman"/>
+        <a:font script="Uigh" typeface="Microsoft Uighur"/>
+        <a:font script="Geor" typeface="Sylfaen"/>
+        <a:font script="Armn" typeface="Arial"/>
+        <a:font script="Bugi" typeface="Leelawadee UI"/>
+        <a:font script="Bopo" typeface="Microsoft JhengHei"/>
+        <a:font script="Java" typeface="Javanese Text"/>
+        <a:font script="Lisu" typeface="Segoe UI"/>
+        <a:font script="Mymr" typeface="Myanmar Text"/>
+        <a:font script="Nkoo" typeface="Ebrima"/>
+        <a:font script="Olck" typeface="Nirmala UI"/>
+        <a:font script="Osma" typeface="Ebrima"/>
+        <a:font script="Phag" typeface="Phagspa"/>
+        <a:font script="Syrn" typeface="Estrangelo Edessa"/>
+        <a:font script="Syrj" typeface="Estrangelo Edessa"/>
+        <a:font script="Syre" typeface="Estrangelo Edessa"/>
+        <a:font script="Sora" typeface="Nirmala UI"/>
+        <a:font script="Tale" typeface="Microsoft Tai Le"/>
+        <a:font script="Talu" typeface="Microsoft New Tai Lue"/>
+        <a:font script="Tfng" typeface="Ebrima"/>
+      </a:majorFont>
+      <a:minorFont>
+        <a:latin typeface="Aptos" panose="02110004020202020204"/>
+        <a:ea typeface=""/>
+        <a:cs typeface=""/>
+        <a:font script="Jpan" typeface="游ゴシック"/>
+        <a:font script="Hang" typeface="맑은 고딕"/>
+        <a:font script="Hans" typeface="等线"/>
+        <a:font script="Hant" typeface="新細明體"/>
+        <a:font script="Arab" typeface="Arial"/>
+        <a:font script="Hebr" typeface="Arial"/>
+        <a:font script="Thai" typeface="Cordia New"/>
+        <a:font script="Ethi" typeface="Nyala"/>
+        <a:font script="Beng" typeface="Vrinda"/>
+        <a:font script="Gujr" typeface="Shruti"/>
+        <a:font script="Khmr" typeface="DaunPenh"/>
+        <a:font script="Knda" typeface="Tunga"/>
+        <a:font script="Guru" typeface="Raavi"/>
+        <a:font script="Cans" typeface="Euphemia"/>
+        <a:font script="Cher" typeface="Plantagenet Cherokee"/>
+        <a:font script="Yiii" typeface="Microsoft Yi Baiti"/>
+        <a:font script="Tibt" typeface="Microsoft Himalaya"/>
+        <a:font script="Thaa" typeface="MV Boli"/>
+        <a:font script="Deva" typeface="Mangal"/>
+        <a:font script="Telu" typeface="Gautami"/>
+        <a:font script="Taml" typeface="Latha"/>
+        <a:font script="Syrc" typeface="Estrangelo Edessa"/>
+        <a:font script="Orya" typeface="Kalinga"/>
+        <a:font script="Mlym" typeface="Kartika"/>
+        <a:font script="Laoo" typeface="DokChampa"/>
+        <a:font script="Sinh" typeface="Iskoola Pota"/>
+        <a:font script="Mong" typeface="Mongolian Baiti"/>
+        <a:font script="Viet" typeface="Arial"/>
+        <a:font script="Uigh" typeface="Microsoft Uighur"/>
+        <a:font script="Geor" typeface="Sylfaen"/>
+        <a:font script="Armn" typeface="Arial"/>
+        <a:font script="Bugi" typeface="Leelawadee UI"/>
+        <a:font script="Bopo" typeface="Microsoft JhengHei"/>
+        <a:font script="Java" typeface="Javanese Text"/>
+        <a:font script="Lisu" typeface="Segoe UI"/>
+        <a:font script="Mymr" typeface="Myanmar Text"/>
+        <a:font script="Nkoo" typeface="Ebrima"/>
+        <a:font script="Olck" typeface="Nirmala UI"/>
+        <a:font script="Osma" typeface="Ebrima"/>
+        <a:font script="Phag" typeface="Phagspa"/>
+        <a:font script="Syrn" typeface="Estrangelo Edessa"/>
+        <a:font script="Syrj" typeface="Estrangelo Edessa"/>
+        <a:font script="Syre" typeface="Estrangelo Edessa"/>
+        <a:font script="Sora" typeface="Nirmala UI"/>
+        <a:font script="Tale" typeface="Microsoft Tai Le"/>
+        <a:font script="Talu" typeface="Microsoft New Tai Lue"/>
+        <a:font script="Tfng" typeface="Ebrima"/>
+      </a:minorFont>
+    </a:fontScheme>
+    <a:fmtScheme name="Office">
+      <a:fillStyleLst>
+        <a:solidFill>
+          <a:schemeClr val="phClr"/>
+        </a:solidFill>
+        <a:gradFill rotWithShape="1">
+          <a:gsLst>
+            <a:gs pos="0">
+              <a:schemeClr val="phClr">
+                <a:lumMod val="110000"/>
+                <a:satMod val="105000"/>
+                <a:tint val="67000"/>
+              </a:schemeClr>
+            </a:gs>
+            <a:gs pos="50000">
+              <a:schemeClr val="phClr">
+                <a:lumMod val="105000"/>
+                <a:satMod val="103000"/>
+                <a:tint val="73000"/>
+              </a:schemeClr>
+            </a:gs>
+            <a:gs pos="100000">
+              <a:schemeClr val="phClr">
+                <a:lumMod val="105000"/>
+                <a:satMod val="109000"/>
+                <a:tint val="81000"/>
+              </a:schemeClr>
+            </a:gs>
+          </a:gsLst>
+          <a:lin ang="5400000" scaled="0"/>
+        </a:gradFill>
+        <a:gradFill rotWithShape="1">
+          <a:gsLst>
+            <a:gs pos="0">
+              <a:schemeClr val="phClr">
+                <a:satMod val="103000"/>
+                <a:lumMod val="102000"/>
+                <a:tint val="94000"/>
+              </a:schemeClr>
+            </a:gs>
+            <a:gs pos="50000">
+              <a:schemeClr val="phClr">
+                <a:satMod val="110000"/>
+                <a:lumMod val="100000"/>
+                <a:shade val="100000"/>
+              </a:schemeClr>
+            </a:gs>
+            <a:gs pos="100000">
+              <a:schemeClr val="phClr">
+                <a:lumMod val="99000"/>
+                <a:satMod val="120000"/>
+                <a:shade val="78000"/>
+              </a:schemeClr>
+            </a:gs>
+          </a:gsLst>
+          <a:lin ang="5400000" scaled="0"/>
+        </a:gradFill>
+      </a:fillStyleLst>
+      <a:lnStyleLst>
+        <a:ln w="12700" cap="flat" cmpd="sng" algn="ctr">
+          <a:solidFill>
+            <a:schemeClr val="phClr"/>
+          </a:solidFill>
+          <a:prstDash val="solid"/>
+          <a:miter lim="800000"/>
+        </a:ln>
+        <a:ln w="19050" cap="flat" cmpd="sng" algn="ctr">
+          <a:solidFill>
+            <a:schemeClr val="phClr"/>
+          </a:solidFill>
+          <a:prstDash val="solid"/>
+          <a:miter lim="800000"/>
+        </a:ln>
+        <a:ln w="25400" cap="flat" cmpd="sng" algn="ctr">
+          <a:solidFill>
+            <a:schemeClr val="phClr"/>
+          </a:solidFill>
+          <a:prstDash val="solid"/>
+          <a:miter lim="800000"/>
+        </a:ln>
+      </a:lnStyleLst>
+      <a:effectStyleLst>
+        <a:effectStyle>
+          <a:effectLst/>
+        </a:effectStyle>
+        <a:effectStyle>
+          <a:effectLst/>
+        </a:effectStyle>
+        <a:effectStyle>
+          <a:effectLst>
+            <a:outerShdw blurRad="57150" dist="19050" dir="5400000" algn="ctr" rotWithShape="0">
+              <a:srgbClr val="000000">
+                <a:alpha val="63000"/>
+              </a:srgbClr>
+            </a:outerShdw>
+          </a:effectLst>
+        </a:effectStyle>
+      </a:effectStyleLst>
+      <a:bgFillStyleLst>
+        <a:solidFill>
+          <a:schemeClr val="phClr"/>
+        </a:solidFill>
+        <a:solidFill>
+          <a:schemeClr val="phClr">
+            <a:tint val="95000"/>
+            <a:satMod val="170000"/>
+          </a:schemeClr>
+        </a:solidFill>
+        <a:gradFill rotWithShape="1">
+          <a:gsLst>
+            <a:gs pos="0">
+              <a:schemeClr val="phClr">
+                <a:tint val="93000"/>
+                <a:satMod val="150000"/>
+                <a:shade val="98000"/>
+                <a:lumMod val="102000"/>
+              </a:schemeClr>
+            </a:gs>
+            <a:gs pos="50000">
+              <a:schemeClr val="phClr">
+                <a:tint val="98000"/>
+                <a:satMod val="130000"/>
+                <a:shade val="90000"/>
+                <a:lumMod val="103000"/>
+              </a:schemeClr>
+            </a:gs>
+            <a:gs pos="100000">
+              <a:schemeClr val="phClr">
+                <a:shade val="63000"/>
+                <a:satMod val="120000"/>
+              </a:schemeClr>
+            </a:gs>
+          </a:gsLst>
+          <a:lin ang="5400000" scaled="0"/>
+        </a:gradFill>
+      </a:bgFillStyleLst>
+    </a:fmtScheme>
+  </a:themeElements>
+  <a:objectDefaults>
+    <a:lnDef>
+      <a:spPr/>
+      <a:bodyPr/>
+      <a:lstStyle/>
+      <a:style>
+        <a:lnRef idx="2">
+          <a:schemeClr val="accent1"/>
+        </a:lnRef>
+        <a:fillRef idx="0">
+          <a:schemeClr val="accent1"/>
+        </a:fillRef>
+        <a:effectRef idx="1">
+          <a:schemeClr val="accent1"/>
+        </a:effectRef>
+        <a:fontRef idx="minor">
+          <a:schemeClr val="tx1"/>
+        </a:fontRef>
+      </a:style>
+    </a:lnDef>
+  </a:objectDefaults>
+  <a:extraClrSchemeLst/>
+  <a:extLst>
+    <a:ext uri="{05A4C25C-085E-4340-85A3-A5531E510DB2}">
+      <thm15:themeFamily xmlns:thm15="http://schemas.microsoft.com/office/thememl/2012/main" name="Office Theme" id="{2E142A2C-CD16-42D6-873A-C26D2A0506FA}" vid="{1BDDFF52-6CD6-40A5-AB3C-68EB2F1E4D0A}"/>
+    </a:ext>
+  </a:extLst>
+</a:theme>
 </file>
--- a/Tuan 4/bao-cao-tuan4-apexmem.pptx
+++ b/Tuan 4/bao-cao-tuan4-apexmem.pptx
@@ -4,9 +4,6 @@
   <p:sldMasterIdLst>
     <p:sldMasterId id="2147483648" r:id="rId1"/>
   </p:sldMasterIdLst>
-  <p:notesMasterIdLst>
-    <p:notesMasterId r:id="rId16"/>
-  </p:notesMasterIdLst>
   <p:sldIdLst>
     <p:sldId id="256" r:id="rId2"/>
     <p:sldId id="257" r:id="rId3"/>
@@ -23,6 +20,9 @@
     <p:sldId id="268" r:id="rId14"/>
     <p:sldId id="269" r:id="rId15"/>
   </p:sldIdLst>
+  <p:notesMasterIdLst>
+    <p:notesMasterId r:id="rId16"/>
+  </p:notesMasterIdLst>
   <p:sldSz cx="12192000" cy="6858000"/>
   <p:notesSz cx="6858000" cy="12192000"/>
   <p:defaultTextStyle>
@@ -117,20 +117,13 @@
       </a:defRPr>
     </a:lvl9pPr>
   </p:defaultTextStyle>
-  <p:extLst>
-    <p:ext uri="{EFAFB233-063F-42B5-8137-9DF3F51BA10A}">
-      <p15:sldGuideLst xmlns:p15="http://schemas.microsoft.com/office/powerpoint/2012/main"/>
-    </p:ext>
-  </p:extLst>
 </p:presentation>
 </file>
 
 <file path=ppt/charts/chart1.xml><?xml version="1.0" encoding="utf-8"?>
-<c:chartSpace xmlns:c="http://schemas.openxmlformats.org/drawingml/2006/chart" xmlns:a="http://schemas.openxmlformats.org/drawingml/2006/main" xmlns:r="http://schemas.openxmlformats.org/officeDocument/2006/relationships" xmlns:c16r2="http://schemas.microsoft.com/office/drawing/2015/06/chart">
+<c:chartSpace xmlns:c="http://schemas.openxmlformats.org/drawingml/2006/chart" xmlns:a="http://schemas.openxmlformats.org/drawingml/2006/main" xmlns:r="http://schemas.openxmlformats.org/officeDocument/2006/relationships">
   <c:date1904 val="0"/>
-  <c:lang val="en-US"/>
   <c:roundedCorners val="1"/>
-  <c:style val="2"/>
   <c:chart>
     <c:title>
       <c:tx>
@@ -147,7 +140,7 @@
               </a:defRPr>
             </a:pPr>
             <a:r>
-              <a:rPr lang="en-US" sz="1200" b="0" i="0" u="none" strike="noStrike">
+              <a:rPr sz="1200" b="0" i="0" u="none" strike="noStrike">
                 <a:solidFill>
                   <a:srgbClr val="1E2A32"/>
                 </a:solidFill>
@@ -158,6 +151,7 @@
           </a:p>
         </c:rich>
       </c:tx>
+      <c:layout/>
       <c:overlay val="0"/>
     </c:title>
     <c:autoTitleDeleted val="0"/>
@@ -190,26 +184,18 @@
           <c:invertIfNegative val="0"/>
           <c:dLbls>
             <c:numFmt formatCode="0.0" sourceLinked="0"/>
-            <c:spPr>
-              <a:noFill/>
-              <a:ln>
-                <a:noFill/>
-              </a:ln>
-              <a:effectLst/>
-            </c:spPr>
             <c:txPr>
               <a:bodyPr/>
               <a:lstStyle/>
               <a:p>
                 <a:pPr>
-                  <a:defRPr sz="900" b="0" i="0" u="none" strike="noStrike">
+                  <a:defRPr b="0" i="0" strike="noStrike" sz="900" u="none">
                     <a:solidFill>
                       <a:srgbClr val="000000"/>
                     </a:solidFill>
                     <a:latin typeface="Arial"/>
                   </a:defRPr>
                 </a:pPr>
-                <a:endParaRPr lang="en-US"/>
               </a:p>
             </c:txPr>
             <c:showLegendKey val="0"/>
@@ -219,37 +205,34 @@
             <c:showPercent val="0"/>
             <c:showBubbleSize val="0"/>
             <c:showLeaderLines val="0"/>
-            <c:extLst>
-              <c:ext xmlns:c15="http://schemas.microsoft.com/office/drawing/2012/chart" uri="{CE6537A1-D6FC-4f65-9D91-7224C49458BB}">
-                <c15:showLeaderLines val="0"/>
-              </c:ext>
-            </c:extLst>
           </c:dLbls>
           <c:cat>
-            <c:strRef>
+            <c:multiLvlStrRef>
               <c:f>Sheet1!$A$2:$A$7</c:f>
-              <c:strCache>
+              <c:multiLvlStrCache>
                 <c:ptCount val="6"/>
-                <c:pt idx="0">
-                  <c:v>single-session-user (3)</c:v>
-                </c:pt>
-                <c:pt idx="1">
-                  <c:v>single-session-assistant (3)</c:v>
-                </c:pt>
-                <c:pt idx="2">
-                  <c:v>single-session-preference (2)</c:v>
-                </c:pt>
-                <c:pt idx="3">
-                  <c:v>multi-session (7)</c:v>
-                </c:pt>
-                <c:pt idx="4">
-                  <c:v>temporal-reasoning (1)</c:v>
-                </c:pt>
-                <c:pt idx="5">
-                  <c:v>knowledge-update (4)</c:v>
-                </c:pt>
-              </c:strCache>
-            </c:strRef>
+                <c:lvl>
+                  <c:pt idx="0">
+                    <c:v>single-session-user (3)</c:v>
+                  </c:pt>
+                  <c:pt idx="1">
+                    <c:v>single-session-assistant (3)</c:v>
+                  </c:pt>
+                  <c:pt idx="2">
+                    <c:v>single-session-preference (2)</c:v>
+                  </c:pt>
+                  <c:pt idx="3">
+                    <c:v>multi-session (7)</c:v>
+                  </c:pt>
+                  <c:pt idx="4">
+                    <c:v>temporal-reasoning (1)</c:v>
+                  </c:pt>
+                  <c:pt idx="5">
+                    <c:v>knowledge-update (4)</c:v>
+                  </c:pt>
+                </c:lvl>
+              </c:multiLvlStrCache>
+            </c:multiLvlStrRef>
           </c:cat>
           <c:val>
             <c:numRef>
@@ -278,11 +261,6 @@
               </c:numCache>
             </c:numRef>
           </c:val>
-          <c:extLst>
-            <c:ext xmlns:c16="http://schemas.microsoft.com/office/drawing/2014/chart" uri="{C3380CC4-5D6E-409C-BE32-E72D297353CC}">
-              <c16:uniqueId val="{00000000-F374-4379-AFAB-9ECE596BCA03}"/>
-            </c:ext>
-          </c:extLst>
         </c:ser>
         <c:ser>
           <c:idx val="1"/>
@@ -307,26 +285,18 @@
           <c:invertIfNegative val="0"/>
           <c:dLbls>
             <c:numFmt formatCode="0.0" sourceLinked="0"/>
-            <c:spPr>
-              <a:noFill/>
-              <a:ln>
-                <a:noFill/>
-              </a:ln>
-              <a:effectLst/>
-            </c:spPr>
             <c:txPr>
               <a:bodyPr/>
               <a:lstStyle/>
               <a:p>
                 <a:pPr>
-                  <a:defRPr sz="900" b="0" i="0" u="none" strike="noStrike">
+                  <a:defRPr b="0" i="0" strike="noStrike" sz="900" u="none">
                     <a:solidFill>
                       <a:srgbClr val="000000"/>
                     </a:solidFill>
                     <a:latin typeface="Arial"/>
                   </a:defRPr>
                 </a:pPr>
-                <a:endParaRPr lang="en-US"/>
               </a:p>
             </c:txPr>
             <c:showLegendKey val="0"/>
@@ -336,37 +306,34 @@
             <c:showPercent val="0"/>
             <c:showBubbleSize val="0"/>
             <c:showLeaderLines val="0"/>
-            <c:extLst>
-              <c:ext xmlns:c15="http://schemas.microsoft.com/office/drawing/2012/chart" uri="{CE6537A1-D6FC-4f65-9D91-7224C49458BB}">
-                <c15:showLeaderLines val="0"/>
-              </c:ext>
-            </c:extLst>
           </c:dLbls>
           <c:cat>
-            <c:strRef>
+            <c:multiLvlStrRef>
               <c:f>Sheet1!$A$2:$A$7</c:f>
-              <c:strCache>
+              <c:multiLvlStrCache>
                 <c:ptCount val="6"/>
-                <c:pt idx="0">
-                  <c:v>single-session-user (3)</c:v>
-                </c:pt>
-                <c:pt idx="1">
-                  <c:v>single-session-assistant (3)</c:v>
-                </c:pt>
-                <c:pt idx="2">
-                  <c:v>single-session-preference (2)</c:v>
-                </c:pt>
-                <c:pt idx="3">
-                  <c:v>multi-session (7)</c:v>
-                </c:pt>
-                <c:pt idx="4">
-                  <c:v>temporal-reasoning (1)</c:v>
-                </c:pt>
-                <c:pt idx="5">
-                  <c:v>knowledge-update (4)</c:v>
-                </c:pt>
-              </c:strCache>
-            </c:strRef>
+                <c:lvl>
+                  <c:pt idx="0">
+                    <c:v>single-session-user (3)</c:v>
+                  </c:pt>
+                  <c:pt idx="1">
+                    <c:v>single-session-assistant (3)</c:v>
+                  </c:pt>
+                  <c:pt idx="2">
+                    <c:v>single-session-preference (2)</c:v>
+                  </c:pt>
+                  <c:pt idx="3">
+                    <c:v>multi-session (7)</c:v>
+                  </c:pt>
+                  <c:pt idx="4">
+                    <c:v>temporal-reasoning (1)</c:v>
+                  </c:pt>
+                  <c:pt idx="5">
+                    <c:v>knowledge-update (4)</c:v>
+                  </c:pt>
+                </c:lvl>
+              </c:multiLvlStrCache>
+            </c:multiLvlStrRef>
           </c:cat>
           <c:val>
             <c:numRef>
@@ -395,23 +362,36 @@
               </c:numCache>
             </c:numRef>
           </c:val>
-          <c:extLst>
-            <c:ext xmlns:c16="http://schemas.microsoft.com/office/drawing/2014/chart" uri="{C3380CC4-5D6E-409C-BE32-E72D297353CC}">
-              <c16:uniqueId val="{00000001-F374-4379-AFAB-9ECE596BCA03}"/>
-            </c:ext>
-          </c:extLst>
         </c:ser>
         <c:dLbls>
+          <c:numFmt formatCode="0.0" sourceLinked="0"/>
+          <c:txPr>
+            <a:bodyPr/>
+            <a:lstStyle/>
+            <a:p>
+              <a:pPr>
+                <a:defRPr b="0" i="0" strike="noStrike" sz="900" u="none">
+                  <a:solidFill>
+                    <a:srgbClr val="000000"/>
+                  </a:solidFill>
+                  <a:latin typeface="Arial"/>
+                </a:defRPr>
+              </a:pPr>
+            </a:p>
+          </c:txPr>
           <c:showLegendKey val="0"/>
           <c:showVal val="1"/>
           <c:showCatName val="0"/>
           <c:showSerName val="0"/>
           <c:showPercent val="0"/>
           <c:showBubbleSize val="0"/>
+          <c:showLeaderLines val="0"/>
         </c:dLbls>
         <c:gapWidth val="60"/>
+        <c:overlap val="0"/>
         <c:axId val="2094734554"/>
         <c:axId val="2094734552"/>
+        <c:axId val="2094734556"/>
       </c:barChart>
       <c:catAx>
         <c:axId val="2094734554"/>
@@ -452,7 +432,6 @@
         <c:crosses val="autoZero"/>
         <c:auto val="1"/>
         <c:lblAlgn val="ctr"/>
-        <c:lblOffset val="100"/>
         <c:noMultiLvlLbl val="1"/>
       </c:catAx>
       <c:valAx>
@@ -463,11 +442,35 @@
           <c:min val="0"/>
         </c:scaling>
         <c:delete val="1"/>
-        <c:axPos val="t"/>
+        <c:axPos val="b"/>
         <c:numFmt formatCode="General" sourceLinked="0"/>
         <c:majorTickMark val="out"/>
         <c:minorTickMark val="none"/>
         <c:tickLblPos val="low"/>
+        <c:spPr>
+          <a:ln w="12700" cap="flat">
+            <a:solidFill>
+              <a:srgbClr val="888888"/>
+            </a:solidFill>
+            <a:prstDash val="solid"/>
+            <a:round/>
+          </a:ln>
+        </c:spPr>
+        <c:txPr>
+          <a:bodyPr/>
+          <a:lstStyle/>
+          <a:p>
+            <a:pPr>
+              <a:defRPr sz="1200" b="0" i="0" u="none" strike="noStrike">
+                <a:solidFill>
+                  <a:srgbClr val="000000"/>
+                </a:solidFill>
+                <a:latin typeface="Arial"/>
+              </a:defRPr>
+            </a:pPr>
+            <a:endParaRPr lang="en-US"/>
+          </a:p>
+        </c:txPr>
         <c:crossAx val="2094734554"/>
         <c:crosses val="autoZero"/>
         <c:crossBetween val="between"/>
@@ -488,7 +491,7 @@
         <a:lstStyle/>
         <a:p>
           <a:pPr>
-            <a:defRPr sz="1100"/>
+            <a:defRPr sz="1100">      </a:defRPr>
           </a:pPr>
           <a:endParaRPr lang="en-US"/>
         </a:p>
@@ -496,7 +499,6 @@
     </c:legend>
     <c:plotVisOnly val="1"/>
     <c:dispBlanksAs val="span"/>
-    <c:showDLblsOverMax val="1"/>
   </c:chart>
   <c:spPr>
     <a:noFill/>
@@ -512,11 +514,9 @@
 </file>
 
 <file path=ppt/charts/chart2.xml><?xml version="1.0" encoding="utf-8"?>
-<c:chartSpace xmlns:c="http://schemas.openxmlformats.org/drawingml/2006/chart" xmlns:a="http://schemas.openxmlformats.org/drawingml/2006/main" xmlns:r="http://schemas.openxmlformats.org/officeDocument/2006/relationships" xmlns:c16r2="http://schemas.microsoft.com/office/drawing/2015/06/chart">
+<c:chartSpace xmlns:c="http://schemas.openxmlformats.org/drawingml/2006/chart" xmlns:a="http://schemas.openxmlformats.org/drawingml/2006/main" xmlns:r="http://schemas.openxmlformats.org/officeDocument/2006/relationships">
   <c:date1904 val="0"/>
-  <c:lang val="en-US"/>
   <c:roundedCorners val="1"/>
-  <c:style val="2"/>
   <c:chart>
     <c:title>
       <c:tx>
@@ -533,7 +533,7 @@
               </a:defRPr>
             </a:pPr>
             <a:r>
-              <a:rPr lang="en-US" sz="1200" b="0" i="0" u="none" strike="noStrike">
+              <a:rPr sz="1200" b="0" i="0" u="none" strike="noStrike">
                 <a:solidFill>
                   <a:srgbClr val="1E2A32"/>
                 </a:solidFill>
@@ -544,6 +544,7 @@
           </a:p>
         </c:rich>
       </c:tx>
+      <c:layout/>
       <c:overlay val="0"/>
     </c:title>
     <c:autoTitleDeleted val="0"/>
@@ -576,26 +577,18 @@
           <c:invertIfNegative val="0"/>
           <c:dLbls>
             <c:numFmt formatCode="#,##0" sourceLinked="0"/>
-            <c:spPr>
-              <a:noFill/>
-              <a:ln>
-                <a:noFill/>
-              </a:ln>
-              <a:effectLst/>
-            </c:spPr>
             <c:txPr>
               <a:bodyPr/>
               <a:lstStyle/>
               <a:p>
                 <a:pPr>
-                  <a:defRPr sz="1000" b="0" i="0" u="none" strike="noStrike">
+                  <a:defRPr b="0" i="0" strike="noStrike" sz="1000" u="none">
                     <a:solidFill>
                       <a:srgbClr val="000000"/>
                     </a:solidFill>
                     <a:latin typeface="Arial"/>
                   </a:defRPr>
                 </a:pPr>
-                <a:endParaRPr lang="en-US"/>
               </a:p>
             </c:txPr>
             <c:showLegendKey val="0"/>
@@ -605,34 +598,31 @@
             <c:showPercent val="0"/>
             <c:showBubbleSize val="0"/>
             <c:showLeaderLines val="0"/>
-            <c:extLst>
-              <c:ext xmlns:c15="http://schemas.microsoft.com/office/drawing/2012/chart" uri="{CE6537A1-D6FC-4f65-9D91-7224C49458BB}">
-                <c15:showLeaderLines val="0"/>
-              </c:ext>
-            </c:extLst>
           </c:dLbls>
           <c:cat>
-            <c:strRef>
+            <c:multiLvlStrRef>
               <c:f>Sheet1!$A$2:$A$6</c:f>
-              <c:strCache>
+              <c:multiLvlStrCache>
                 <c:ptCount val="5"/>
-                <c:pt idx="0">
-                  <c:v>Search</c:v>
-                </c:pt>
-                <c:pt idx="1">
-                  <c:v>GraphSQL</c:v>
-                </c:pt>
-                <c:pt idx="2">
-                  <c:v>SchemaViewer</c:v>
-                </c:pt>
-                <c:pt idx="3">
-                  <c:v>EntityLookup</c:v>
-                </c:pt>
-                <c:pt idx="4">
-                  <c:v>PropertySearch</c:v>
-                </c:pt>
-              </c:strCache>
-            </c:strRef>
+                <c:lvl>
+                  <c:pt idx="0">
+                    <c:v>Search</c:v>
+                  </c:pt>
+                  <c:pt idx="1">
+                    <c:v>GraphSQL</c:v>
+                  </c:pt>
+                  <c:pt idx="2">
+                    <c:v>SchemaViewer</c:v>
+                  </c:pt>
+                  <c:pt idx="3">
+                    <c:v>EntityLookup</c:v>
+                  </c:pt>
+                  <c:pt idx="4">
+                    <c:v>PropertySearch</c:v>
+                  </c:pt>
+                </c:lvl>
+              </c:multiLvlStrCache>
+            </c:multiLvlStrRef>
           </c:cat>
           <c:val>
             <c:numRef>
@@ -658,23 +648,36 @@
               </c:numCache>
             </c:numRef>
           </c:val>
-          <c:extLst>
-            <c:ext xmlns:c16="http://schemas.microsoft.com/office/drawing/2014/chart" uri="{C3380CC4-5D6E-409C-BE32-E72D297353CC}">
-              <c16:uniqueId val="{00000000-0315-4477-BC7B-6EE7DCB56D8E}"/>
-            </c:ext>
-          </c:extLst>
         </c:ser>
         <c:dLbls>
+          <c:numFmt formatCode="#,##0" sourceLinked="0"/>
+          <c:txPr>
+            <a:bodyPr/>
+            <a:lstStyle/>
+            <a:p>
+              <a:pPr>
+                <a:defRPr b="0" i="0" strike="noStrike" sz="1000" u="none">
+                  <a:solidFill>
+                    <a:srgbClr val="000000"/>
+                  </a:solidFill>
+                  <a:latin typeface="Arial"/>
+                </a:defRPr>
+              </a:pPr>
+            </a:p>
+          </c:txPr>
           <c:showLegendKey val="0"/>
           <c:showVal val="1"/>
           <c:showCatName val="0"/>
           <c:showSerName val="0"/>
           <c:showPercent val="0"/>
           <c:showBubbleSize val="0"/>
+          <c:showLeaderLines val="0"/>
         </c:dLbls>
         <c:gapWidth val="150"/>
+        <c:overlap val="0"/>
         <c:axId val="2094734554"/>
         <c:axId val="2094734552"/>
+        <c:axId val="2094734556"/>
       </c:barChart>
       <c:catAx>
         <c:axId val="2094734554"/>
@@ -715,7 +718,6 @@
         <c:crosses val="autoZero"/>
         <c:auto val="1"/>
         <c:lblAlgn val="ctr"/>
-        <c:lblOffset val="100"/>
         <c:noMultiLvlLbl val="1"/>
       </c:catAx>
       <c:valAx>
@@ -725,11 +727,35 @@
           <c:max val="27"/>
         </c:scaling>
         <c:delete val="1"/>
-        <c:axPos val="t"/>
+        <c:axPos val="b"/>
         <c:numFmt formatCode="General" sourceLinked="0"/>
         <c:majorTickMark val="out"/>
         <c:minorTickMark val="none"/>
         <c:tickLblPos val="low"/>
+        <c:spPr>
+          <a:ln w="12700" cap="flat">
+            <a:solidFill>
+              <a:srgbClr val="888888"/>
+            </a:solidFill>
+            <a:prstDash val="solid"/>
+            <a:round/>
+          </a:ln>
+        </c:spPr>
+        <c:txPr>
+          <a:bodyPr/>
+          <a:lstStyle/>
+          <a:p>
+            <a:pPr>
+              <a:defRPr sz="1200" b="0" i="0" u="none" strike="noStrike">
+                <a:solidFill>
+                  <a:srgbClr val="000000"/>
+                </a:solidFill>
+                <a:latin typeface="Arial"/>
+              </a:defRPr>
+            </a:pPr>
+            <a:endParaRPr lang="en-US"/>
+          </a:p>
+        </c:txPr>
         <c:crossAx val="2094734554"/>
         <c:crosses val="autoZero"/>
         <c:crossBetween val="between"/>
@@ -744,7 +770,6 @@
     </c:plotArea>
     <c:plotVisOnly val="1"/>
     <c:dispBlanksAs val="span"/>
-    <c:showDLblsOverMax val="1"/>
   </c:chart>
   <c:spPr>
     <a:noFill/>
@@ -781,10 +806,234 @@
           <a:chExt cx="0" cy="0"/>
         </a:xfrm>
       </p:grpSpPr>
+      <p:sp>
+        <p:nvSpPr>
+          <p:cNvPr id="2" name="Header Placeholder 1"/>
+          <p:cNvSpPr>
+            <a:spLocks noGrp="1"/>
+          </p:cNvSpPr>
+          <p:nvPr>
+            <p:ph type="hdr" sz="quarter"/>
+          </p:nvPr>
+        </p:nvSpPr>
+        <p:spPr>
+          <a:xfrm>
+            <a:off x="0" y="0"/>
+            <a:ext cx="2971800" cy="458788"/>
+          </a:xfrm>
+          <a:prstGeom prst="rect">
+            <a:avLst/>
+          </a:prstGeom>
+        </p:spPr>
+        <p:txBody>
+          <a:bodyPr vert="horz" lIns="91440" tIns="45720" rIns="91440" bIns="45720" rtlCol="0"/>
+          <a:lstStyle>
+            <a:lvl1pPr algn="l">
+              <a:defRPr sz="1200"/>
+            </a:lvl1pPr>
+          </a:lstStyle>
+          <a:p>
+            <a:endParaRPr lang="en-US"/>
+          </a:p>
+        </p:txBody>
+      </p:sp>
+      <p:sp>
+        <p:nvSpPr>
+          <p:cNvPr id="3" name="Date Placeholder 2"/>
+          <p:cNvSpPr>
+            <a:spLocks noGrp="1"/>
+          </p:cNvSpPr>
+          <p:nvPr>
+            <p:ph type="dt" idx="1"/>
+          </p:nvPr>
+        </p:nvSpPr>
+        <p:spPr>
+          <a:xfrm>
+            <a:off x="3884613" y="0"/>
+            <a:ext cx="2971800" cy="458788"/>
+          </a:xfrm>
+          <a:prstGeom prst="rect">
+            <a:avLst/>
+          </a:prstGeom>
+        </p:spPr>
+        <p:txBody>
+          <a:bodyPr vert="horz" lIns="91440" tIns="45720" rIns="91440" bIns="45720" rtlCol="0"/>
+          <a:lstStyle>
+            <a:lvl1pPr algn="r">
+              <a:defRPr sz="1200"/>
+            </a:lvl1pPr>
+          </a:lstStyle>
+          <a:p>
+            <a:fld id="{5282F153-3F37-0F45-9E97-73ACFA13230C}" type="datetimeFigureOut">
+              <a:rPr lang="en-US"/>
+              <a:t>7/23/19</a:t>
+            </a:fld>
+            <a:endParaRPr lang="en-US"/>
+          </a:p>
+        </p:txBody>
+      </p:sp>
+      <p:sp>
+        <p:nvSpPr>
+          <p:cNvPr id="4" name="Slide Image Placeholder 3"/>
+          <p:cNvSpPr>
+            <a:spLocks noGrp="1" noRot="1" noChangeAspect="1"/>
+          </p:cNvSpPr>
+          <p:nvPr>
+            <p:ph type="sldImg" idx="2"/>
+          </p:nvPr>
+        </p:nvSpPr>
+        <p:spPr>
+          <a:xfrm>
+            <a:off x="685800" y="1143000"/>
+            <a:ext cx="5486400" cy="3086100"/>
+          </a:xfrm>
+          <a:prstGeom prst="rect">
+            <a:avLst/>
+          </a:prstGeom>
+          <a:noFill/>
+          <a:ln w="12700">
+            <a:solidFill>
+              <a:prstClr val="black"/>
+            </a:solidFill>
+          </a:ln>
+        </p:spPr>
+        <p:txBody>
+          <a:bodyPr vert="horz" lIns="91440" tIns="45720" rIns="91440" bIns="45720" rtlCol="0" anchor="ctr"/>
+          <a:lstStyle/>
+          <a:p>
+            <a:endParaRPr lang="en-US"/>
+          </a:p>
+        </p:txBody>
+      </p:sp>
+      <p:sp>
+        <p:nvSpPr>
+          <p:cNvPr id="5" name="Notes Placeholder 4"/>
+          <p:cNvSpPr>
+            <a:spLocks noGrp="1"/>
+          </p:cNvSpPr>
+          <p:nvPr>
+            <p:ph type="body" sz="quarter" idx="3"/>
+          </p:nvPr>
+        </p:nvSpPr>
+        <p:spPr>
+          <a:xfrm>
+            <a:off x="685800" y="4400550"/>
+            <a:ext cx="5486400" cy="3600450"/>
+          </a:xfrm>
+          <a:prstGeom prst="rect">
+            <a:avLst/>
+          </a:prstGeom>
+        </p:spPr>
+        <p:txBody>
+          <a:bodyPr vert="horz" lIns="91440" tIns="45720" rIns="91440" bIns="45720" rtlCol="0"/>
+          <a:lstStyle/>
+          <a:p>
+            <a:pPr lvl="0"/>
+            <a:r>
+              <a:rPr lang="en-US"/>
+              <a:t>Click to edit Master text styles</a:t>
+            </a:r>
+          </a:p>
+          <a:p>
+            <a:pPr lvl="1"/>
+            <a:r>
+              <a:rPr lang="en-US"/>
+              <a:t>Second level</a:t>
+            </a:r>
+          </a:p>
+          <a:p>
+            <a:pPr lvl="2"/>
+            <a:r>
+              <a:rPr lang="en-US"/>
+              <a:t>Third level</a:t>
+            </a:r>
+          </a:p>
+          <a:p>
+            <a:pPr lvl="3"/>
+            <a:r>
+              <a:rPr lang="en-US"/>
+              <a:t>Fourth level</a:t>
+            </a:r>
+          </a:p>
+          <a:p>
+            <a:pPr lvl="4"/>
+            <a:r>
+              <a:rPr lang="en-US"/>
+              <a:t>Fifth level</a:t>
+            </a:r>
+          </a:p>
+        </p:txBody>
+      </p:sp>
+      <p:sp>
+        <p:nvSpPr>
+          <p:cNvPr id="6" name="Footer Placeholder 5"/>
+          <p:cNvSpPr>
+            <a:spLocks noGrp="1"/>
+          </p:cNvSpPr>
+          <p:nvPr>
+            <p:ph type="ftr" sz="quarter" idx="4"/>
+          </p:nvPr>
+        </p:nvSpPr>
+        <p:spPr>
+          <a:xfrm>
+            <a:off x="0" y="8685213"/>
+            <a:ext cx="2971800" cy="458787"/>
+          </a:xfrm>
+          <a:prstGeom prst="rect">
+            <a:avLst/>
+          </a:prstGeom>
+        </p:spPr>
+        <p:txBody>
+          <a:bodyPr vert="horz" lIns="91440" tIns="45720" rIns="91440" bIns="45720" rtlCol="0" anchor="b"/>
+          <a:lstStyle>
+            <a:lvl1pPr algn="l">
+              <a:defRPr sz="1200"/>
+            </a:lvl1pPr>
+          </a:lstStyle>
+          <a:p>
+            <a:endParaRPr lang="en-US"/>
+          </a:p>
+        </p:txBody>
+      </p:sp>
+      <p:sp>
+        <p:nvSpPr>
+          <p:cNvPr id="7" name="Slide Number Placeholder 6"/>
+          <p:cNvSpPr>
+            <a:spLocks noGrp="1"/>
+          </p:cNvSpPr>
+          <p:nvPr>
+            <p:ph type="sldNum" sz="quarter" idx="5"/>
+          </p:nvPr>
+        </p:nvSpPr>
+        <p:spPr>
+          <a:xfrm>
+            <a:off x="3884613" y="8685213"/>
+            <a:ext cx="2971800" cy="458787"/>
+          </a:xfrm>
+          <a:prstGeom prst="rect">
+            <a:avLst/>
+          </a:prstGeom>
+        </p:spPr>
+        <p:txBody>
+          <a:bodyPr vert="horz" lIns="91440" tIns="45720" rIns="91440" bIns="45720" rtlCol="0" anchor="b"/>
+          <a:lstStyle>
+            <a:lvl1pPr algn="r">
+              <a:defRPr sz="1200"/>
+            </a:lvl1pPr>
+          </a:lstStyle>
+          <a:p>
+            <a:fld id="{CE5E9CC1-C706-0F49-92D6-E571CC5EEA8F}" type="slidenum">
+              <a:rPr lang="en-US"/>
+              <a:t>‹#›</a:t>
+            </a:fld>
+            <a:endParaRPr lang="en-US"/>
+          </a:p>
+        </p:txBody>
+      </p:sp>
     </p:spTree>
     <p:extLst>
       <p:ext uri="{BB962C8B-B14F-4D97-AF65-F5344CB8AC3E}">
-        <p14:creationId xmlns:p14="http://schemas.microsoft.com/office/powerpoint/2010/main" val="3970332740"/>
+        <p14:creationId xmlns:p14="http://schemas.microsoft.com/office/powerpoint/2010/main" val="1024086991"/>
       </p:ext>
     </p:extLst>
   </p:cSld>
@@ -932,6 +1181,7 @@
               <a:rPr lang="en-US" dirty="0"/>
               <a:t>Em xin chào anh. Tuần này nhóm đã triển khai xong toàn bộ hệ thống theo APEX-MEM và chạy được những kết quả đầu tiên. Báo cáo gồm ba phần: một là lược đồ bộ nhớ, hai là luồng chạy của hệ trên một câu hỏi thật — từng bước gọi công cụ nào, để làm gì — và ba là các kết quả hiện có.</a:t>
             </a:r>
+            <a:endParaRPr lang="en-US" dirty="0"/>
           </a:p>
         </p:txBody>
       </p:sp>
@@ -1019,6 +1269,7 @@
               <a:rPr lang="en-US" dirty="0"/>
               <a:t>Trước khi chạy LLM, nhóm chọn ngưỡng lọc phiên bằng số đo trên 150 câu dev, hoàn toàn không tốn lời gọi LLM. Hai thang đo: recall là tỉ lệ phiên bằng chứng được giữ, so với nhãn answer_session_ids của LongMemEval; 'đủ bằng chứng' là phần trăm câu giữ được tất cả phiên bằng chứng — thang này quan trọng hơn vì câu đa phiên thiếu một phiên là sai. Ngưỡng 0,475 chỉ giữ trung bình 7,7 phiên nhưng bằng hoặc tốt hơn top-10 ở mọi cột. Nhóm không dùng con số 0,2 của bài báo vì bài không nói điểm đó đo trên thang nào; với BGE-M3, hai câu không liên quan đã có cosine khoảng 0,4.</a:t>
             </a:r>
+            <a:endParaRPr lang="en-US" dirty="0"/>
           </a:p>
         </p:txBody>
       </p:sp>
@@ -1106,6 +1357,7 @@
               <a:rPr lang="en-US" dirty="0"/>
               <a:t>Kết quả chính: hệ đầy đủ đúng 18/20, baseline SimpleSearch đúng 16/20. Hai câu hệ đầy đủ thắng là một câu preference và một câu knowledge-update. Nhưng em xin nói rõ: với 20 câu, khoảng tin cậy của 90% là khoảng 70 đến 97%, và chênh lệch 2 câu có p bằng 0,5 theo kiểm định McNemar, nên chưa thể khẳng định hệ đầy đủ tốt hơn baseline. Các ô có 1–2 câu như temporal chỉ để tham khảo. Đây là lý do bước tiếp theo là mở rộng số câu.</a:t>
             </a:r>
+            <a:endParaRPr lang="en-US" dirty="0"/>
           </a:p>
         </p:txBody>
       </p:sp>
@@ -1193,6 +1445,7 @@
               <a:rPr lang="en-US" dirty="0"/>
               <a:t>Về chi phí: mỗi câu hệ đầy đủ tốn khoảng 18 lời gọi LLM, trong đó gần 14 là để dựng đồ thị, chiếm 87% token. Nên muốn giảm chi phí phải nhắm vào pha dựng. Pha trả lời của hệ đầy đủ lại tốn ít token hơn baseline vì chỉ đọc fact liên quan, nhưng chậm hơn vì nhiều vòng gọi công cụ. Biểu đồ bên phải: Search là công cụ được dùng nhiều nhất, GraphSQL xuất hiện ở 12 trên 20 câu, chủ yếu cho phép cộng, đếm và xếp theo thời gian.</a:t>
             </a:r>
+            <a:endParaRPr lang="en-US" dirty="0"/>
           </a:p>
         </p:txBody>
       </p:sp>
@@ -1280,6 +1533,7 @@
               <a:rPr lang="en-US" dirty="0"/>
               <a:t>Hai câu sai đều sai ở cả hai hệ. Câu thứ nhất là câu cần từ chối: người dùng chưa từng nói giá vé bus, nhưng trợ lý trong hội thoại cũ đã ước lượng giá; agent lấy luôn con số đó như thông tin của người dùng. Câu thứ hai là câu thời gian: 'hai tháng trước' là 11/1, lúc đó người dùng đi nghe giảng ở bảo tàng một mình; nhưng bước trích xuất làm mất chi tiết bảo tàng và người đi cùng, và agent không quy đổi 'hai tháng trước' ra ngày cụ thể, nên chọn nhầm lần đi gần nhất. Để kiểm tra việc Luna tự chấm cho chính mình, em đã chấm lại độc lập 20 câu bằng một mô hình khác: trùng cả 20. Nhóm sẽ chấm tay thêm.</a:t>
             </a:r>
+            <a:endParaRPr lang="en-US" dirty="0"/>
           </a:p>
         </p:txBody>
       </p:sp>
@@ -1367,6 +1621,7 @@
               <a:rPr lang="en-US" dirty="0"/>
               <a:t>Em xin tổng kết bằng ba hạn chế nhóm tự nhận thấy: mẫu còn nhỏ; bộ lọc biết trước câu hỏi — giống bài báo nhưng khác trợ lý thật; và mô hình chấm trùng mô hình trả lời. Kế hoạch tuần tới: sửa prompt agent cho hai lỗi vừa thấy — việc rẻ vì không phải dựng lại đồ thị; chạy thêm câu temporal và mở rộng tập dev, đo trên câu khác với câu đã soi lỗi; làm thí nghiệm không lọc phiên; và chấm tay. Em xin hỏi anh một câu: nên ưu tiên mở rộng số câu hay thí nghiệm không lọc phiên trước ạ?</a:t>
             </a:r>
+            <a:endParaRPr lang="en-US" dirty="0"/>
           </a:p>
         </p:txBody>
       </p:sp>
@@ -1454,6 +1709,7 @@
               <a:rPr lang="en-US" dirty="0"/>
               <a:t>Tóm tắt nhanh bốn việc. Điểm quan trọng: hệ đã chạy thông từ đầu đến cuối, và mọi số liệu hôm nay đều từ lần chạy thật trên dữ liệu LongMemEval-S, không phải số ước lượng. Mô hình nền đổi từ GPT-5.5 sang GPT-5.6 Luna vì giới hạn tài khoản; mọi cấu hình so sánh đều dùng cùng một mô hình nên so sánh nội bộ vẫn hợp lệ.</a:t>
             </a:r>
+            <a:endParaRPr lang="en-US" dirty="0"/>
           </a:p>
         </p:txBody>
       </p:sp>
@@ -1539,8 +1795,9 @@
           <a:p>
             <a:r>
               <a:rPr lang="en-US" dirty="0"/>
-              <a:t>Đây là lược đồ bộ nhớ. Ô màu cam ở giữa là bảng facts — trái tim của hệ. Mỗi fact là một bộ ba chủ thể, thuộc tính, giá trị, kèm khoảng thời gian hiệu lực t_from, t_to. Chủ thể trỏ sang bảng entities — người, nơi chốn, đồ vật; người dùng luôn là thực thể tên User. Tên thuộc tính nằm ở bảng properties, bắt buộc snake_case tiếng Anh. Mỗi fact thuộc một sự kiện ở bảng events, sự kiện có mốc thời gian anchor_datetime đã quy về chuẩn ISO lúc ghi — ví dụ người dùng nói 'last week' trong phiên ngày 27/5 thì mốc là 20/5. Cuối cùng, mỗi fact có ít nhất một dòng evidence trỏ về đúng lượt hội thoại gốc trong bảng turns, nên luôn truy ngược được vì sao hệ nhớ điều đó. Chỉ mục vector và tìm kiếm từ khóa chỉ là dẫn xuất, xóa đi dựng lại được.</a:t>
-            </a:r>
+              <a:t>Đây là lược đồ bộ nhớ. Ô màu cam ở giữa là bảng facts — trái tim của hệ. Mỗi fact là một bộ ba chủ thể, thuộc tính, giá trị, kèm khoảng thời gian hiệu lực t_from, t_to. Chủ thể trỏ sang bảng entities — người, nơi chốn, đồ vật; người dùng luôn là thực thể tên User. Tên thuộc tính nằm ở bảng properties, bắt buộc snake_case tiếng Anh. Mỗi fact thuộc một sự kiện ở bảng events, sự kiện có mốc thời gian anchor_datetime đã quy về chuẩn ISO lúc ghi — ví dụ người dùng nói 'last week' trong phiên ngày 27/5 thì mốc là 20/5. Cuối cùng, mỗi fact có ít nhất một dòng evidence trỏ về đúng lượt hội thoại gốc trong bảng turns, nên luôn truy ngược được vì sao hệ nhớ điều đó. Chỉ mục vector và tìm kiếm từ khóa chỉ là dẫn xuất, xóa đi dựng lại được. Nhóm không dùng ChromaDB: mỗi câu chỉ vài nghìn vector nên tìm vét cạn bằng numpy vừa nhanh vừa chính xác tuyệt đối; nếu sau này lên cỡ triệu vector thì thay bằng FAISS mà không phải đụng tới đồ thị. Mũi tên trên sơ đồ là khóa ngoại trỏ tới bảng được tham chiếu, không phải chiều dữ liệu chảy.</a:t>
+            </a:r>
+            <a:endParaRPr lang="en-US" dirty="0"/>
           </a:p>
         </p:txBody>
       </p:sp>
@@ -1628,6 +1885,7 @@
               <a:rPr lang="en-US" dirty="0"/>
               <a:t>Slide này cho thấy lược đồ hoạt động thế nào với câu hỏi cập nhật kiến thức — đúng tình huống N5 lên N4 anh hỏi ở tuần 1. Người dùng nói có 500 follower ở phiên ngày 27/5 — 'tuần trước' nên t_from là 20/5 — rồi phiên sau nói đã lên 600. Hệ không ghi đè: cả hai dòng cùng nằm trong bảng facts. Ba bất biến bên phải: một, append-only được chặn bằng trigger ngay trong SQLite; hai, bản mới nhất được chọn lúc đọc theo thời điểm hiệu lực, bằng SQL tất định chứ không để LLM đoán; ba, agent chỉ có quyền đọc, với ba lớp chặn.</a:t>
             </a:r>
+            <a:endParaRPr lang="en-US" dirty="0"/>
           </a:p>
         </p:txBody>
       </p:sp>
@@ -1715,6 +1973,7 @@
               <a:rPr lang="en-US" dirty="0"/>
               <a:t>Bây giờ em đi qua luồng chạy trên một câu hỏi thật: tổng tiền người dùng kiếm được khi bán hàng ở các chợ, đáp án 495 đô, bằng chứng rải ở 3 phiên trong 47 phiên. Bước 1 lọc phiên, không gọi LLM: chấm điểm từng phiên bằng embedding, giữ 9 phiên, trong đó có đủ 3 phiên bằng chứng. Bước 2 trích xuất: 9 lời gọi LLM, mỗi phiên một lời gọi, ra 64 sự kiện và 149 fact; mọi kiểm tra kiểu dữ liệu làm bằng Python. Bước 3 giải quyết thực thể: User và Assistant là cố định, trùng tên thì dùng lại, không có ứng viên gần thì tạo mới luôn — chỉ khi mơ hồ mới hỏi LLM, như 'Harvest Festival Market' ở đây. Bước 4 ghi append-only. Tổng cộng 13 lời gọi, khoảng 5 phút.</a:t>
             </a:r>
+            <a:endParaRPr lang="en-US" dirty="0"/>
           </a:p>
         </p:txBody>
       </p:sp>
@@ -1802,6 +2061,7 @@
               <a:rPr lang="en-US" dirty="0"/>
               <a:t>Đây là bên trong bước trích xuất với đúng một lượt thật. Câu người dùng nói trong phiên ngày 1/6: vừa bán 15 hũ mứt ở chợ Homemade and Handmade ngày 29/5, thu 225 đô. LLM trả về JSON: một sự kiện market_sale, mốc thời gian là 29/5 chứ không phải ngày của phiên, kèm hai fact là số hũ và doanh thu, đúng kiểu int và float để sau này SQL cộng được. Python kiểm tra tên thuộc tính, kiểu dữ liệu, ngày tháng rồi mới ghi. Bảng dưới là các dòng thực sự được ghi vào 4 bảng; mỗi fact có bằng chứng trỏ về lượt số 99.</a:t>
             </a:r>
+            <a:endParaRPr lang="en-US" dirty="0"/>
           </a:p>
         </p:txBody>
       </p:sp>
@@ -1889,6 +2149,7 @@
               <a:rPr lang="en-US" dirty="0"/>
               <a:t>Sau khi có đồ thị, agent ReAct bắt đầu trả lời. Với câu này agent gọi 4 công cụ. Đầu tiên SchemaViewer để biết có những bảng và thuộc tính nào. Thứ hai Search — tìm lai giữa vector và từ khóa — trả về ngay ba khoản thu 150, 225, 120 từ đúng ba phiên bằng chứng. Thứ ba EntityLookup để xem hồ sơ người dùng. Thứ tư GraphSQL để liệt kê đủ mọi khoản thu, tránh sót. Kết quả 495 đô, đúng. Cả quá trình 3 lời gọi LLM, khoảng 25 giây. Một điểm em muốn nêu thẳng: cùng ý doanh thu nhưng có hai tên thuộc tính khác nhau, bước giải quyết thuộc tính chưa gộp được — ở đây SQL cứu, nhưng đây là chỗ cần cải thiện.</a:t>
             </a:r>
+            <a:endParaRPr lang="en-US" dirty="0"/>
           </a:p>
         </p:txBody>
       </p:sp>
@@ -1976,6 +2237,7 @@
               <a:rPr lang="en-US" dirty="0"/>
               <a:t>Ví dụ thứ hai cho loại câu cập nhật kiến thức. Search trả về cả 600 lẫn 500, mỗi dòng kèm thời điểm hiệu lực. EntityLookup cho thấy bảng giá trị mới nhất của User chỉ còn 600. Agent trả lời 600 và nêu cả mốc 28/5. Tại sao không ghi đè ngay lúc ghi như Mem0? Vì những câu như 'trước đây tôi có bao nhiêu' hay 'tăng bao nhiêu' cần cả bản cũ. Trong 20 câu, 4 câu knowledge-update đều đúng, nhưng số còn nhỏ.</a:t>
             </a:r>
+            <a:endParaRPr lang="en-US" dirty="0"/>
           </a:p>
         </p:txBody>
       </p:sp>
@@ -2063,6 +2325,7 @@
               <a:rPr lang="en-US" dirty="0"/>
               <a:t>Thiết lập: mô hình nền là GPT-5.6 Luna cho mọi vai trò; em ghi lại mô hình thực sự phục vụ ở mọi lời gọi và cả 362 lời gọi đều là Luna, nghĩa là router không lén đổi mô hình. Embedding BGE-M3 nhúng sẵn trên Kaggle, máy local chỉ đọc cache. Tập dev trùng đúng tập dev của notebook tuần 2, tập test chưa mở. Hôm nay em báo cáo trên 20 câu đầu của dev, so hai cấu hình: hệ đầy đủ và baseline SimpleSearch của chính LongMemEval.</a:t>
             </a:r>
+            <a:endParaRPr lang="en-US" dirty="0"/>
           </a:p>
         </p:txBody>
       </p:sp>
@@ -2135,11 +2398,6 @@
 <file path=ppt/slideMasters/slideMaster1.xml><?xml version="1.0" encoding="utf-8"?>
 <p:sldMaster xmlns:a="http://schemas.openxmlformats.org/drawingml/2006/main" xmlns:r="http://schemas.openxmlformats.org/officeDocument/2006/relationships" xmlns:p="http://schemas.openxmlformats.org/presentationml/2006/main">
   <p:cSld>
-    <p:bg>
-      <p:bgRef idx="1001">
-        <a:schemeClr val="bg1"/>
-      </p:bgRef>
-    </p:bg>
     <p:spTree>
       <p:nvGrpSpPr>
         <p:cNvPr id="1" name=""/>
@@ -2422,7 +2680,6 @@
         <a:solidFill>
           <a:srgbClr val="12232E"/>
         </a:solidFill>
-        <a:effectLst/>
       </p:bgPr>
     </p:bg>
     <p:spTree>
@@ -2460,11 +2717,11 @@
           <a:bodyPr wrap="square" lIns="0" tIns="0" rIns="0" bIns="0" rtlCol="0" anchor="t"/>
           <a:lstStyle/>
           <a:p>
-            <a:pPr marL="0" indent="0">
+            <a:pPr indent="0" marL="0">
               <a:buNone/>
             </a:pPr>
             <a:r>
-              <a:rPr lang="en-US" sz="1200" b="1" kern="0" spc="300" dirty="0">
+              <a:rPr lang="en-US" sz="1200" b="1" spc="300" kern="0" dirty="0">
                 <a:solidFill>
                   <a:srgbClr val="D98C1F"/>
                 </a:solidFill>
@@ -2499,7 +2756,7 @@
           <a:bodyPr wrap="square" lIns="0" tIns="0" rIns="0" bIns="0" rtlCol="0" anchor="t"/>
           <a:lstStyle/>
           <a:p>
-            <a:pPr marL="0" indent="0">
+            <a:pPr indent="0" marL="0">
               <a:buNone/>
             </a:pPr>
             <a:r>
@@ -2538,7 +2795,7 @@
           <a:bodyPr wrap="square" lIns="0" tIns="0" rIns="0" bIns="0" rtlCol="0" anchor="t"/>
           <a:lstStyle/>
           <a:p>
-            <a:pPr marL="0" indent="0">
+            <a:pPr indent="0" marL="0">
               <a:buNone/>
             </a:pPr>
             <a:r>
@@ -2555,7 +2812,7 @@
             <a:endParaRPr lang="en-US" sz="1600" dirty="0"/>
           </a:p>
           <a:p>
-            <a:pPr marL="0" indent="0">
+            <a:pPr indent="0" marL="0">
               <a:buNone/>
             </a:pPr>
             <a:r>
@@ -2594,6 +2851,9 @@
           <a:bodyPr wrap="square" lIns="0" tIns="0" rIns="0" bIns="0" rtlCol="0" anchor="t"/>
           <a:lstStyle/>
           <a:p>
+            <a:pPr indent="0" marL="0">
+              <a:buNone/>
+            </a:pPr>
             <a:r>
               <a:rPr lang="en-US" sz="1200" dirty="0">
                 <a:solidFill>
@@ -2603,29 +2863,7 @@
                 <a:ea typeface="Calibri" pitchFamily="34" charset="-122"/>
                 <a:cs typeface="Calibri" pitchFamily="34" charset="-120"/>
               </a:rPr>
-              <a:t> </a:t>
-            </a:r>
-            <a:r>
-              <a:rPr lang="en-US" sz="1200" b="1" dirty="0">
-                <a:solidFill>
-                  <a:srgbClr val="8FA3AB"/>
-                </a:solidFill>
-                <a:latin typeface="Calibri" pitchFamily="34" charset="0"/>
-                <a:ea typeface="Calibri" pitchFamily="34" charset="-122"/>
-                <a:cs typeface="Calibri" pitchFamily="34" charset="-120"/>
-              </a:rPr>
-              <a:t>Đặng Tuấn Phong - Nguyễn Trí Dũng </a:t>
-            </a:r>
-            <a:r>
-              <a:rPr lang="en-US" sz="1200" dirty="0">
-                <a:solidFill>
-                  <a:srgbClr val="8FA3AB"/>
-                </a:solidFill>
-                <a:latin typeface="Calibri" pitchFamily="34" charset="0"/>
-                <a:ea typeface="Calibri" pitchFamily="34" charset="-122"/>
-                <a:cs typeface="Calibri" pitchFamily="34" charset="-120"/>
-              </a:rPr>
-              <a:t>·  09/2026</a:t>
+              <a:t>Nhóm 2 thành viên  ·  09/2026</a:t>
             </a:r>
             <a:endParaRPr lang="en-US" sz="1200" dirty="0"/>
           </a:p>
@@ -2653,13 +2891,6 @@
             <a:prstDash val="solid"/>
           </a:ln>
         </p:spPr>
-        <p:txBody>
-          <a:bodyPr/>
-          <a:lstStyle/>
-          <a:p>
-            <a:endParaRPr lang="en-US"/>
-          </a:p>
-        </p:txBody>
       </p:sp>
       <p:sp>
         <p:nvSpPr>
@@ -2683,13 +2914,6 @@
             <a:prstDash val="solid"/>
           </a:ln>
         </p:spPr>
-        <p:txBody>
-          <a:bodyPr/>
-          <a:lstStyle/>
-          <a:p>
-            <a:endParaRPr lang="en-US"/>
-          </a:p>
-        </p:txBody>
       </p:sp>
       <p:sp>
         <p:nvSpPr>
@@ -2713,13 +2937,6 @@
             <a:prstDash val="solid"/>
           </a:ln>
         </p:spPr>
-        <p:txBody>
-          <a:bodyPr/>
-          <a:lstStyle/>
-          <a:p>
-            <a:endParaRPr lang="en-US"/>
-          </a:p>
-        </p:txBody>
       </p:sp>
       <p:sp>
         <p:nvSpPr>
@@ -2743,13 +2960,6 @@
             <a:prstDash val="solid"/>
           </a:ln>
         </p:spPr>
-        <p:txBody>
-          <a:bodyPr/>
-          <a:lstStyle/>
-          <a:p>
-            <a:endParaRPr lang="en-US"/>
-          </a:p>
-        </p:txBody>
       </p:sp>
       <p:sp>
         <p:nvSpPr>
@@ -2773,13 +2983,6 @@
             <a:prstDash val="solid"/>
           </a:ln>
         </p:spPr>
-        <p:txBody>
-          <a:bodyPr/>
-          <a:lstStyle/>
-          <a:p>
-            <a:endParaRPr lang="en-US"/>
-          </a:p>
-        </p:txBody>
       </p:sp>
       <p:sp>
         <p:nvSpPr>
@@ -2803,13 +3006,6 @@
             <a:prstDash val="solid"/>
           </a:ln>
         </p:spPr>
-        <p:txBody>
-          <a:bodyPr/>
-          <a:lstStyle/>
-          <a:p>
-            <a:endParaRPr lang="en-US"/>
-          </a:p>
-        </p:txBody>
       </p:sp>
       <p:sp>
         <p:nvSpPr>
@@ -2833,13 +3029,6 @@
             <a:prstDash val="solid"/>
           </a:ln>
         </p:spPr>
-        <p:txBody>
-          <a:bodyPr/>
-          <a:lstStyle/>
-          <a:p>
-            <a:endParaRPr lang="en-US"/>
-          </a:p>
-        </p:txBody>
       </p:sp>
       <p:sp>
         <p:nvSpPr>
@@ -2863,13 +3052,6 @@
             <a:prstDash val="solid"/>
           </a:ln>
         </p:spPr>
-        <p:txBody>
-          <a:bodyPr/>
-          <a:lstStyle/>
-          <a:p>
-            <a:endParaRPr lang="en-US"/>
-          </a:p>
-        </p:txBody>
       </p:sp>
       <p:sp>
         <p:nvSpPr>
@@ -2895,13 +3077,6 @@
             <a:prstDash val="solid"/>
           </a:ln>
         </p:spPr>
-        <p:txBody>
-          <a:bodyPr/>
-          <a:lstStyle/>
-          <a:p>
-            <a:endParaRPr lang="en-US"/>
-          </a:p>
-        </p:txBody>
       </p:sp>
       <p:sp>
         <p:nvSpPr>
@@ -2927,13 +3102,6 @@
             <a:prstDash val="solid"/>
           </a:ln>
         </p:spPr>
-        <p:txBody>
-          <a:bodyPr/>
-          <a:lstStyle/>
-          <a:p>
-            <a:endParaRPr lang="en-US"/>
-          </a:p>
-        </p:txBody>
       </p:sp>
       <p:sp>
         <p:nvSpPr>
@@ -2959,13 +3127,6 @@
             <a:prstDash val="solid"/>
           </a:ln>
         </p:spPr>
-        <p:txBody>
-          <a:bodyPr/>
-          <a:lstStyle/>
-          <a:p>
-            <a:endParaRPr lang="en-US"/>
-          </a:p>
-        </p:txBody>
       </p:sp>
       <p:sp>
         <p:nvSpPr>
@@ -2991,13 +3152,6 @@
             <a:prstDash val="solid"/>
           </a:ln>
         </p:spPr>
-        <p:txBody>
-          <a:bodyPr/>
-          <a:lstStyle/>
-          <a:p>
-            <a:endParaRPr lang="en-US"/>
-          </a:p>
-        </p:txBody>
       </p:sp>
       <p:sp>
         <p:nvSpPr>
@@ -3023,13 +3177,6 @@
             <a:prstDash val="solid"/>
           </a:ln>
         </p:spPr>
-        <p:txBody>
-          <a:bodyPr/>
-          <a:lstStyle/>
-          <a:p>
-            <a:endParaRPr lang="en-US"/>
-          </a:p>
-        </p:txBody>
       </p:sp>
       <p:sp>
         <p:nvSpPr>
@@ -3055,13 +3202,6 @@
             <a:prstDash val="solid"/>
           </a:ln>
         </p:spPr>
-        <p:txBody>
-          <a:bodyPr/>
-          <a:lstStyle/>
-          <a:p>
-            <a:endParaRPr lang="en-US"/>
-          </a:p>
-        </p:txBody>
       </p:sp>
       <p:sp>
         <p:nvSpPr>
@@ -3087,13 +3227,6 @@
             <a:prstDash val="solid"/>
           </a:ln>
         </p:spPr>
-        <p:txBody>
-          <a:bodyPr/>
-          <a:lstStyle/>
-          <a:p>
-            <a:endParaRPr lang="en-US"/>
-          </a:p>
-        </p:txBody>
       </p:sp>
     </p:spTree>
   </p:cSld>
@@ -3111,7 +3244,6 @@
         <a:solidFill>
           <a:srgbClr val="FFFFFF"/>
         </a:solidFill>
-        <a:effectLst/>
       </p:bgPr>
     </p:bg>
     <p:spTree>
@@ -3149,11 +3281,11 @@
           <a:bodyPr wrap="square" lIns="0" tIns="0" rIns="0" bIns="0" rtlCol="0" anchor="t"/>
           <a:lstStyle/>
           <a:p>
-            <a:pPr marL="0" indent="0">
+            <a:pPr indent="0" marL="0">
               <a:buNone/>
             </a:pPr>
             <a:r>
-              <a:rPr lang="en-US" sz="1100" b="1" kern="0" spc="200" dirty="0">
+              <a:rPr lang="en-US" sz="1100" b="1" spc="200" kern="0" dirty="0">
                 <a:solidFill>
                   <a:srgbClr val="D98C1F"/>
                 </a:solidFill>
@@ -3188,7 +3320,7 @@
           <a:bodyPr wrap="square" lIns="0" tIns="0" rIns="0" bIns="0" rtlCol="0" anchor="ctr"/>
           <a:lstStyle/>
           <a:p>
-            <a:pPr marL="0" indent="0">
+            <a:pPr indent="0" marL="0">
               <a:buNone/>
             </a:pPr>
             <a:r>
@@ -3222,62 +3354,20 @@
         </p:nvGraphicFramePr>
         <p:xfrm>
           <a:off x="548640" y="1371600"/>
-          <a:ext cx="7223760" cy="2731008"/>
+          <a:ext cx="7223760" cy="914400"/>
         </p:xfrm>
         <a:graphic>
           <a:graphicData uri="http://schemas.openxmlformats.org/drawingml/2006/table">
             <a:tbl>
               <a:tblPr/>
               <a:tblGrid>
-                <a:gridCol w="2651760">
-                  <a:extLst>
-                    <a:ext uri="{9D8B030D-6E8A-4147-A177-3AD203B41FA5}">
-                      <a16:colId xmlns:a16="http://schemas.microsoft.com/office/drawing/2014/main" val="20000"/>
-                    </a:ext>
-                  </a:extLst>
-                </a:gridCol>
-                <a:gridCol w="731520">
-                  <a:extLst>
-                    <a:ext uri="{9D8B030D-6E8A-4147-A177-3AD203B41FA5}">
-                      <a16:colId xmlns:a16="http://schemas.microsoft.com/office/drawing/2014/main" val="20001"/>
-                    </a:ext>
-                  </a:extLst>
-                </a:gridCol>
-                <a:gridCol w="1051560">
-                  <a:extLst>
-                    <a:ext uri="{9D8B030D-6E8A-4147-A177-3AD203B41FA5}">
-                      <a16:colId xmlns:a16="http://schemas.microsoft.com/office/drawing/2014/main" val="20002"/>
-                    </a:ext>
-                  </a:extLst>
-                </a:gridCol>
-                <a:gridCol w="960120">
-                  <a:extLst>
-                    <a:ext uri="{9D8B030D-6E8A-4147-A177-3AD203B41FA5}">
-                      <a16:colId xmlns:a16="http://schemas.microsoft.com/office/drawing/2014/main" val="20003"/>
-                    </a:ext>
-                  </a:extLst>
-                </a:gridCol>
-                <a:gridCol w="594360">
-                  <a:extLst>
-                    <a:ext uri="{9D8B030D-6E8A-4147-A177-3AD203B41FA5}">
-                      <a16:colId xmlns:a16="http://schemas.microsoft.com/office/drawing/2014/main" val="20004"/>
-                    </a:ext>
-                  </a:extLst>
-                </a:gridCol>
-                <a:gridCol w="594360">
-                  <a:extLst>
-                    <a:ext uri="{9D8B030D-6E8A-4147-A177-3AD203B41FA5}">
-                      <a16:colId xmlns:a16="http://schemas.microsoft.com/office/drawing/2014/main" val="20005"/>
-                    </a:ext>
-                  </a:extLst>
-                </a:gridCol>
-                <a:gridCol w="640080">
-                  <a:extLst>
-                    <a:ext uri="{9D8B030D-6E8A-4147-A177-3AD203B41FA5}">
-                      <a16:colId xmlns:a16="http://schemas.microsoft.com/office/drawing/2014/main" val="20006"/>
-                    </a:ext>
-                  </a:extLst>
-                </a:gridCol>
+                <a:gridCol w="2651760"/>
+                <a:gridCol w="731520"/>
+                <a:gridCol w="1051560"/>
+                <a:gridCol w="960120"/>
+                <a:gridCol w="594360"/>
+                <a:gridCol w="594360"/>
+                <a:gridCol w="640080"/>
               </a:tblGrid>
               <a:tr h="384048">
                 <a:tc>
@@ -3285,7 +3375,7 @@
                     <a:bodyPr/>
                     <a:lstStyle/>
                     <a:p>
-                      <a:pPr marL="0" indent="0">
+                      <a:pPr indent="0" marL="0">
                         <a:buNone/>
                       </a:pPr>
                       <a:r>
@@ -3306,7 +3396,7 @@
                       </a:endParaRPr>
                     </a:p>
                   </a:txBody>
-                  <a:tcPr anchor="ctr">
+                  <a:tcPr marL="91440" marR="91440" marT="45720" marB="45720" anchor="ctr">
                     <a:lnL w="9525" cap="flat" cmpd="sng" algn="ctr">
                       <a:solidFill>
                         <a:srgbClr val="BFD8DD"/>
@@ -3353,7 +3443,7 @@
                     <a:bodyPr/>
                     <a:lstStyle/>
                     <a:p>
-                      <a:pPr marL="0" indent="0" algn="ctr">
+                      <a:pPr algn="ctr" indent="0" marL="0">
                         <a:buNone/>
                       </a:pPr>
                       <a:r>
@@ -3374,7 +3464,7 @@
                       </a:endParaRPr>
                     </a:p>
                   </a:txBody>
-                  <a:tcPr anchor="ctr">
+                  <a:tcPr marL="91440" marR="91440" marT="45720" marB="45720" anchor="ctr">
                     <a:lnL w="9525" cap="flat" cmpd="sng" algn="ctr">
                       <a:solidFill>
                         <a:srgbClr val="BFD8DD"/>
@@ -3421,7 +3511,7 @@
                     <a:bodyPr/>
                     <a:lstStyle/>
                     <a:p>
-                      <a:pPr marL="0" indent="0" algn="ctr">
+                      <a:pPr algn="ctr" indent="0" marL="0">
                         <a:buNone/>
                       </a:pPr>
                       <a:r>
@@ -3442,7 +3532,7 @@
                       </a:endParaRPr>
                     </a:p>
                   </a:txBody>
-                  <a:tcPr anchor="ctr">
+                  <a:tcPr marL="91440" marR="91440" marT="45720" marB="45720" anchor="ctr">
                     <a:lnL w="9525" cap="flat" cmpd="sng" algn="ctr">
                       <a:solidFill>
                         <a:srgbClr val="BFD8DD"/>
@@ -3489,7 +3579,7 @@
                     <a:bodyPr/>
                     <a:lstStyle/>
                     <a:p>
-                      <a:pPr marL="0" indent="0" algn="ctr">
+                      <a:pPr algn="ctr" indent="0" marL="0">
                         <a:buNone/>
                       </a:pPr>
                       <a:r>
@@ -3510,7 +3600,7 @@
                       </a:endParaRPr>
                     </a:p>
                   </a:txBody>
-                  <a:tcPr anchor="ctr">
+                  <a:tcPr marL="91440" marR="91440" marT="45720" marB="45720" anchor="ctr">
                     <a:lnL w="9525" cap="flat" cmpd="sng" algn="ctr">
                       <a:solidFill>
                         <a:srgbClr val="BFD8DD"/>
@@ -3557,7 +3647,7 @@
                     <a:bodyPr/>
                     <a:lstStyle/>
                     <a:p>
-                      <a:pPr marL="0" indent="0" algn="ctr">
+                      <a:pPr algn="ctr" indent="0" marL="0">
                         <a:buNone/>
                       </a:pPr>
                       <a:r>
@@ -3578,7 +3668,7 @@
                       </a:endParaRPr>
                     </a:p>
                   </a:txBody>
-                  <a:tcPr anchor="ctr">
+                  <a:tcPr marL="91440" marR="91440" marT="45720" marB="45720" anchor="ctr">
                     <a:lnL w="9525" cap="flat" cmpd="sng" algn="ctr">
                       <a:solidFill>
                         <a:srgbClr val="BFD8DD"/>
@@ -3625,7 +3715,7 @@
                     <a:bodyPr/>
                     <a:lstStyle/>
                     <a:p>
-                      <a:pPr marL="0" indent="0" algn="ctr">
+                      <a:pPr algn="ctr" indent="0" marL="0">
                         <a:buNone/>
                       </a:pPr>
                       <a:r>
@@ -3646,7 +3736,7 @@
                       </a:endParaRPr>
                     </a:p>
                   </a:txBody>
-                  <a:tcPr anchor="ctr">
+                  <a:tcPr marL="91440" marR="91440" marT="45720" marB="45720" anchor="ctr">
                     <a:lnL w="9525" cap="flat" cmpd="sng" algn="ctr">
                       <a:solidFill>
                         <a:srgbClr val="BFD8DD"/>
@@ -3693,7 +3783,7 @@
                     <a:bodyPr/>
                     <a:lstStyle/>
                     <a:p>
-                      <a:pPr marL="0" indent="0" algn="ctr">
+                      <a:pPr algn="ctr" indent="0" marL="0">
                         <a:buNone/>
                       </a:pPr>
                       <a:r>
@@ -3714,7 +3804,7 @@
                       </a:endParaRPr>
                     </a:p>
                   </a:txBody>
-                  <a:tcPr anchor="ctr">
+                  <a:tcPr marL="91440" marR="91440" marT="45720" marB="45720" anchor="ctr">
                     <a:lnL w="9525" cap="flat" cmpd="sng" algn="ctr">
                       <a:solidFill>
                         <a:srgbClr val="BFD8DD"/>
@@ -3756,11 +3846,6 @@
                     </a:solidFill>
                   </a:tcPr>
                 </a:tc>
-                <a:extLst>
-                  <a:ext uri="{0D108BD9-81ED-4DB2-BD59-A6C34878D82A}">
-                    <a16:rowId xmlns:a16="http://schemas.microsoft.com/office/drawing/2014/main" val="10000"/>
-                  </a:ext>
-                </a:extLst>
               </a:tr>
               <a:tr h="384048">
                 <a:tc>
@@ -3768,7 +3853,7 @@
                     <a:bodyPr/>
                     <a:lstStyle/>
                     <a:p>
-                      <a:pPr marL="0" indent="0" algn="l">
+                      <a:pPr algn="l" indent="0" marL="0">
                         <a:buNone/>
                       </a:pPr>
                       <a:r>
@@ -3789,7 +3874,7 @@
                       </a:endParaRPr>
                     </a:p>
                   </a:txBody>
-                  <a:tcPr anchor="ctr">
+                  <a:tcPr marL="91440" marR="91440" marT="45720" marB="45720" anchor="ctr">
                     <a:lnL w="9525" cap="flat" cmpd="sng" algn="ctr">
                       <a:solidFill>
                         <a:srgbClr val="BFD8DD"/>
@@ -3836,7 +3921,7 @@
                     <a:bodyPr/>
                     <a:lstStyle/>
                     <a:p>
-                      <a:pPr marL="0" indent="0" algn="ctr">
+                      <a:pPr algn="ctr" indent="0" marL="0">
                         <a:buNone/>
                       </a:pPr>
                       <a:r>
@@ -3857,7 +3942,7 @@
                       </a:endParaRPr>
                     </a:p>
                   </a:txBody>
-                  <a:tcPr anchor="ctr">
+                  <a:tcPr marL="91440" marR="91440" marT="45720" marB="45720" anchor="ctr">
                     <a:lnL w="9525" cap="flat" cmpd="sng" algn="ctr">
                       <a:solidFill>
                         <a:srgbClr val="BFD8DD"/>
@@ -3904,7 +3989,7 @@
                     <a:bodyPr/>
                     <a:lstStyle/>
                     <a:p>
-                      <a:pPr marL="0" indent="0" algn="ctr">
+                      <a:pPr algn="ctr" indent="0" marL="0">
                         <a:buNone/>
                       </a:pPr>
                       <a:r>
@@ -3925,7 +4010,7 @@
                       </a:endParaRPr>
                     </a:p>
                   </a:txBody>
-                  <a:tcPr anchor="ctr">
+                  <a:tcPr marL="91440" marR="91440" marT="45720" marB="45720" anchor="ctr">
                     <a:lnL w="9525" cap="flat" cmpd="sng" algn="ctr">
                       <a:solidFill>
                         <a:srgbClr val="BFD8DD"/>
@@ -3972,7 +4057,7 @@
                     <a:bodyPr/>
                     <a:lstStyle/>
                     <a:p>
-                      <a:pPr marL="0" indent="0" algn="ctr">
+                      <a:pPr algn="ctr" indent="0" marL="0">
                         <a:buNone/>
                       </a:pPr>
                       <a:r>
@@ -3993,7 +4078,7 @@
                       </a:endParaRPr>
                     </a:p>
                   </a:txBody>
-                  <a:tcPr anchor="ctr">
+                  <a:tcPr marL="91440" marR="91440" marT="45720" marB="45720" anchor="ctr">
                     <a:lnL w="9525" cap="flat" cmpd="sng" algn="ctr">
                       <a:solidFill>
                         <a:srgbClr val="BFD8DD"/>
@@ -4040,7 +4125,7 @@
                     <a:bodyPr/>
                     <a:lstStyle/>
                     <a:p>
-                      <a:pPr marL="0" indent="0" algn="ctr">
+                      <a:pPr algn="ctr" indent="0" marL="0">
                         <a:buNone/>
                       </a:pPr>
                       <a:r>
@@ -4061,7 +4146,7 @@
                       </a:endParaRPr>
                     </a:p>
                   </a:txBody>
-                  <a:tcPr anchor="ctr">
+                  <a:tcPr marL="91440" marR="91440" marT="45720" marB="45720" anchor="ctr">
                     <a:lnL w="9525" cap="flat" cmpd="sng" algn="ctr">
                       <a:solidFill>
                         <a:srgbClr val="BFD8DD"/>
@@ -4108,7 +4193,7 @@
                     <a:bodyPr/>
                     <a:lstStyle/>
                     <a:p>
-                      <a:pPr marL="0" indent="0" algn="ctr">
+                      <a:pPr algn="ctr" indent="0" marL="0">
                         <a:buNone/>
                       </a:pPr>
                       <a:r>
@@ -4129,7 +4214,7 @@
                       </a:endParaRPr>
                     </a:p>
                   </a:txBody>
-                  <a:tcPr anchor="ctr">
+                  <a:tcPr marL="91440" marR="91440" marT="45720" marB="45720" anchor="ctr">
                     <a:lnL w="9525" cap="flat" cmpd="sng" algn="ctr">
                       <a:solidFill>
                         <a:srgbClr val="BFD8DD"/>
@@ -4176,7 +4261,7 @@
                     <a:bodyPr/>
                     <a:lstStyle/>
                     <a:p>
-                      <a:pPr marL="0" indent="0" algn="ctr">
+                      <a:pPr algn="ctr" indent="0" marL="0">
                         <a:buNone/>
                       </a:pPr>
                       <a:r>
@@ -4197,7 +4282,7 @@
                       </a:endParaRPr>
                     </a:p>
                   </a:txBody>
-                  <a:tcPr anchor="ctr">
+                  <a:tcPr marL="91440" marR="91440" marT="45720" marB="45720" anchor="ctr">
                     <a:lnL w="9525" cap="flat" cmpd="sng" algn="ctr">
                       <a:solidFill>
                         <a:srgbClr val="BFD8DD"/>
@@ -4239,11 +4324,6 @@
                     </a:solidFill>
                   </a:tcPr>
                 </a:tc>
-                <a:extLst>
-                  <a:ext uri="{0D108BD9-81ED-4DB2-BD59-A6C34878D82A}">
-                    <a16:rowId xmlns:a16="http://schemas.microsoft.com/office/drawing/2014/main" val="10001"/>
-                  </a:ext>
-                </a:extLst>
               </a:tr>
               <a:tr h="384048">
                 <a:tc>
@@ -4251,7 +4331,7 @@
                     <a:bodyPr/>
                     <a:lstStyle/>
                     <a:p>
-                      <a:pPr marL="0" indent="0" algn="l">
+                      <a:pPr algn="l" indent="0" marL="0">
                         <a:buNone/>
                       </a:pPr>
                       <a:r>
@@ -4272,7 +4352,7 @@
                       </a:endParaRPr>
                     </a:p>
                   </a:txBody>
-                  <a:tcPr anchor="ctr">
+                  <a:tcPr marL="91440" marR="91440" marT="45720" marB="45720" anchor="ctr">
                     <a:lnL w="9525" cap="flat" cmpd="sng" algn="ctr">
                       <a:solidFill>
                         <a:srgbClr val="BFD8DD"/>
@@ -4319,7 +4399,7 @@
                     <a:bodyPr/>
                     <a:lstStyle/>
                     <a:p>
-                      <a:pPr marL="0" indent="0" algn="ctr">
+                      <a:pPr algn="ctr" indent="0" marL="0">
                         <a:buNone/>
                       </a:pPr>
                       <a:r>
@@ -4340,7 +4420,7 @@
                       </a:endParaRPr>
                     </a:p>
                   </a:txBody>
-                  <a:tcPr anchor="ctr">
+                  <a:tcPr marL="91440" marR="91440" marT="45720" marB="45720" anchor="ctr">
                     <a:lnL w="9525" cap="flat" cmpd="sng" algn="ctr">
                       <a:solidFill>
                         <a:srgbClr val="BFD8DD"/>
@@ -4387,7 +4467,7 @@
                     <a:bodyPr/>
                     <a:lstStyle/>
                     <a:p>
-                      <a:pPr marL="0" indent="0" algn="ctr">
+                      <a:pPr algn="ctr" indent="0" marL="0">
                         <a:buNone/>
                       </a:pPr>
                       <a:r>
@@ -4408,7 +4488,7 @@
                       </a:endParaRPr>
                     </a:p>
                   </a:txBody>
-                  <a:tcPr anchor="ctr">
+                  <a:tcPr marL="91440" marR="91440" marT="45720" marB="45720" anchor="ctr">
                     <a:lnL w="9525" cap="flat" cmpd="sng" algn="ctr">
                       <a:solidFill>
                         <a:srgbClr val="BFD8DD"/>
@@ -4455,7 +4535,7 @@
                     <a:bodyPr/>
                     <a:lstStyle/>
                     <a:p>
-                      <a:pPr marL="0" indent="0" algn="ctr">
+                      <a:pPr algn="ctr" indent="0" marL="0">
                         <a:buNone/>
                       </a:pPr>
                       <a:r>
@@ -4476,7 +4556,7 @@
                       </a:endParaRPr>
                     </a:p>
                   </a:txBody>
-                  <a:tcPr anchor="ctr">
+                  <a:tcPr marL="91440" marR="91440" marT="45720" marB="45720" anchor="ctr">
                     <a:lnL w="9525" cap="flat" cmpd="sng" algn="ctr">
                       <a:solidFill>
                         <a:srgbClr val="BFD8DD"/>
@@ -4523,7 +4603,7 @@
                     <a:bodyPr/>
                     <a:lstStyle/>
                     <a:p>
-                      <a:pPr marL="0" indent="0" algn="ctr">
+                      <a:pPr algn="ctr" indent="0" marL="0">
                         <a:buNone/>
                       </a:pPr>
                       <a:r>
@@ -4544,7 +4624,7 @@
                       </a:endParaRPr>
                     </a:p>
                   </a:txBody>
-                  <a:tcPr anchor="ctr">
+                  <a:tcPr marL="91440" marR="91440" marT="45720" marB="45720" anchor="ctr">
                     <a:lnL w="9525" cap="flat" cmpd="sng" algn="ctr">
                       <a:solidFill>
                         <a:srgbClr val="BFD8DD"/>
@@ -4591,7 +4671,7 @@
                     <a:bodyPr/>
                     <a:lstStyle/>
                     <a:p>
-                      <a:pPr marL="0" indent="0" algn="ctr">
+                      <a:pPr algn="ctr" indent="0" marL="0">
                         <a:buNone/>
                       </a:pPr>
                       <a:r>
@@ -4612,7 +4692,7 @@
                       </a:endParaRPr>
                     </a:p>
                   </a:txBody>
-                  <a:tcPr anchor="ctr">
+                  <a:tcPr marL="91440" marR="91440" marT="45720" marB="45720" anchor="ctr">
                     <a:lnL w="9525" cap="flat" cmpd="sng" algn="ctr">
                       <a:solidFill>
                         <a:srgbClr val="BFD8DD"/>
@@ -4659,7 +4739,7 @@
                     <a:bodyPr/>
                     <a:lstStyle/>
                     <a:p>
-                      <a:pPr marL="0" indent="0" algn="ctr">
+                      <a:pPr algn="ctr" indent="0" marL="0">
                         <a:buNone/>
                       </a:pPr>
                       <a:r>
@@ -4680,7 +4760,7 @@
                       </a:endParaRPr>
                     </a:p>
                   </a:txBody>
-                  <a:tcPr anchor="ctr">
+                  <a:tcPr marL="91440" marR="91440" marT="45720" marB="45720" anchor="ctr">
                     <a:lnL w="9525" cap="flat" cmpd="sng" algn="ctr">
                       <a:solidFill>
                         <a:srgbClr val="BFD8DD"/>
@@ -4722,11 +4802,6 @@
                     </a:solidFill>
                   </a:tcPr>
                 </a:tc>
-                <a:extLst>
-                  <a:ext uri="{0D108BD9-81ED-4DB2-BD59-A6C34878D82A}">
-                    <a16:rowId xmlns:a16="http://schemas.microsoft.com/office/drawing/2014/main" val="10002"/>
-                  </a:ext>
-                </a:extLst>
               </a:tr>
               <a:tr h="384048">
                 <a:tc>
@@ -4734,7 +4809,7 @@
                     <a:bodyPr/>
                     <a:lstStyle/>
                     <a:p>
-                      <a:pPr marL="0" indent="0" algn="l">
+                      <a:pPr algn="l" indent="0" marL="0">
                         <a:buNone/>
                       </a:pPr>
                       <a:r>
@@ -4755,7 +4830,7 @@
                       </a:endParaRPr>
                     </a:p>
                   </a:txBody>
-                  <a:tcPr anchor="ctr">
+                  <a:tcPr marL="91440" marR="91440" marT="45720" marB="45720" anchor="ctr">
                     <a:lnL w="9525" cap="flat" cmpd="sng" algn="ctr">
                       <a:solidFill>
                         <a:srgbClr val="BFD8DD"/>
@@ -4802,7 +4877,7 @@
                     <a:bodyPr/>
                     <a:lstStyle/>
                     <a:p>
-                      <a:pPr marL="0" indent="0" algn="ctr">
+                      <a:pPr algn="ctr" indent="0" marL="0">
                         <a:buNone/>
                       </a:pPr>
                       <a:r>
@@ -4823,7 +4898,7 @@
                       </a:endParaRPr>
                     </a:p>
                   </a:txBody>
-                  <a:tcPr anchor="ctr">
+                  <a:tcPr marL="91440" marR="91440" marT="45720" marB="45720" anchor="ctr">
                     <a:lnL w="9525" cap="flat" cmpd="sng" algn="ctr">
                       <a:solidFill>
                         <a:srgbClr val="BFD8DD"/>
@@ -4870,7 +4945,7 @@
                     <a:bodyPr/>
                     <a:lstStyle/>
                     <a:p>
-                      <a:pPr marL="0" indent="0" algn="ctr">
+                      <a:pPr algn="ctr" indent="0" marL="0">
                         <a:buNone/>
                       </a:pPr>
                       <a:r>
@@ -4891,7 +4966,7 @@
                       </a:endParaRPr>
                     </a:p>
                   </a:txBody>
-                  <a:tcPr anchor="ctr">
+                  <a:tcPr marL="91440" marR="91440" marT="45720" marB="45720" anchor="ctr">
                     <a:lnL w="9525" cap="flat" cmpd="sng" algn="ctr">
                       <a:solidFill>
                         <a:srgbClr val="BFD8DD"/>
@@ -4938,7 +5013,7 @@
                     <a:bodyPr/>
                     <a:lstStyle/>
                     <a:p>
-                      <a:pPr marL="0" indent="0" algn="ctr">
+                      <a:pPr algn="ctr" indent="0" marL="0">
                         <a:buNone/>
                       </a:pPr>
                       <a:r>
@@ -4959,7 +5034,7 @@
                       </a:endParaRPr>
                     </a:p>
                   </a:txBody>
-                  <a:tcPr anchor="ctr">
+                  <a:tcPr marL="91440" marR="91440" marT="45720" marB="45720" anchor="ctr">
                     <a:lnL w="9525" cap="flat" cmpd="sng" algn="ctr">
                       <a:solidFill>
                         <a:srgbClr val="BFD8DD"/>
@@ -5006,7 +5081,7 @@
                     <a:bodyPr/>
                     <a:lstStyle/>
                     <a:p>
-                      <a:pPr marL="0" indent="0" algn="ctr">
+                      <a:pPr algn="ctr" indent="0" marL="0">
                         <a:buNone/>
                       </a:pPr>
                       <a:r>
@@ -5027,7 +5102,7 @@
                       </a:endParaRPr>
                     </a:p>
                   </a:txBody>
-                  <a:tcPr anchor="ctr">
+                  <a:tcPr marL="91440" marR="91440" marT="45720" marB="45720" anchor="ctr">
                     <a:lnL w="9525" cap="flat" cmpd="sng" algn="ctr">
                       <a:solidFill>
                         <a:srgbClr val="BFD8DD"/>
@@ -5074,7 +5149,7 @@
                     <a:bodyPr/>
                     <a:lstStyle/>
                     <a:p>
-                      <a:pPr marL="0" indent="0" algn="ctr">
+                      <a:pPr algn="ctr" indent="0" marL="0">
                         <a:buNone/>
                       </a:pPr>
                       <a:r>
@@ -5095,7 +5170,7 @@
                       </a:endParaRPr>
                     </a:p>
                   </a:txBody>
-                  <a:tcPr anchor="ctr">
+                  <a:tcPr marL="91440" marR="91440" marT="45720" marB="45720" anchor="ctr">
                     <a:lnL w="9525" cap="flat" cmpd="sng" algn="ctr">
                       <a:solidFill>
                         <a:srgbClr val="BFD8DD"/>
@@ -5142,7 +5217,7 @@
                     <a:bodyPr/>
                     <a:lstStyle/>
                     <a:p>
-                      <a:pPr marL="0" indent="0" algn="ctr">
+                      <a:pPr algn="ctr" indent="0" marL="0">
                         <a:buNone/>
                       </a:pPr>
                       <a:r>
@@ -5163,7 +5238,7 @@
                       </a:endParaRPr>
                     </a:p>
                   </a:txBody>
-                  <a:tcPr anchor="ctr">
+                  <a:tcPr marL="91440" marR="91440" marT="45720" marB="45720" anchor="ctr">
                     <a:lnL w="9525" cap="flat" cmpd="sng" algn="ctr">
                       <a:solidFill>
                         <a:srgbClr val="BFD8DD"/>
@@ -5205,11 +5280,6 @@
                     </a:solidFill>
                   </a:tcPr>
                 </a:tc>
-                <a:extLst>
-                  <a:ext uri="{0D108BD9-81ED-4DB2-BD59-A6C34878D82A}">
-                    <a16:rowId xmlns:a16="http://schemas.microsoft.com/office/drawing/2014/main" val="10003"/>
-                  </a:ext>
-                </a:extLst>
               </a:tr>
               <a:tr h="384048">
                 <a:tc>
@@ -5217,7 +5287,7 @@
                     <a:bodyPr/>
                     <a:lstStyle/>
                     <a:p>
-                      <a:pPr marL="0" indent="0" algn="l">
+                      <a:pPr algn="l" indent="0" marL="0">
                         <a:buNone/>
                       </a:pPr>
                       <a:r>
@@ -5238,7 +5308,7 @@
                       </a:endParaRPr>
                     </a:p>
                   </a:txBody>
-                  <a:tcPr anchor="ctr">
+                  <a:tcPr marL="91440" marR="91440" marT="45720" marB="45720" anchor="ctr">
                     <a:lnL w="9525" cap="flat" cmpd="sng" algn="ctr">
                       <a:solidFill>
                         <a:srgbClr val="BFD8DD"/>
@@ -5285,7 +5355,7 @@
                     <a:bodyPr/>
                     <a:lstStyle/>
                     <a:p>
-                      <a:pPr marL="0" indent="0" algn="ctr">
+                      <a:pPr algn="ctr" indent="0" marL="0">
                         <a:buNone/>
                       </a:pPr>
                       <a:r>
@@ -5306,7 +5376,7 @@
                       </a:endParaRPr>
                     </a:p>
                   </a:txBody>
-                  <a:tcPr anchor="ctr">
+                  <a:tcPr marL="91440" marR="91440" marT="45720" marB="45720" anchor="ctr">
                     <a:lnL w="9525" cap="flat" cmpd="sng" algn="ctr">
                       <a:solidFill>
                         <a:srgbClr val="BFD8DD"/>
@@ -5353,7 +5423,7 @@
                     <a:bodyPr/>
                     <a:lstStyle/>
                     <a:p>
-                      <a:pPr marL="0" indent="0" algn="ctr">
+                      <a:pPr algn="ctr" indent="0" marL="0">
                         <a:buNone/>
                       </a:pPr>
                       <a:r>
@@ -5374,7 +5444,7 @@
                       </a:endParaRPr>
                     </a:p>
                   </a:txBody>
-                  <a:tcPr anchor="ctr">
+                  <a:tcPr marL="91440" marR="91440" marT="45720" marB="45720" anchor="ctr">
                     <a:lnL w="9525" cap="flat" cmpd="sng" algn="ctr">
                       <a:solidFill>
                         <a:srgbClr val="BFD8DD"/>
@@ -5421,7 +5491,7 @@
                     <a:bodyPr/>
                     <a:lstStyle/>
                     <a:p>
-                      <a:pPr marL="0" indent="0" algn="ctr">
+                      <a:pPr algn="ctr" indent="0" marL="0">
                         <a:buNone/>
                       </a:pPr>
                       <a:r>
@@ -5442,7 +5512,7 @@
                       </a:endParaRPr>
                     </a:p>
                   </a:txBody>
-                  <a:tcPr anchor="ctr">
+                  <a:tcPr marL="91440" marR="91440" marT="45720" marB="45720" anchor="ctr">
                     <a:lnL w="9525" cap="flat" cmpd="sng" algn="ctr">
                       <a:solidFill>
                         <a:srgbClr val="BFD8DD"/>
@@ -5489,7 +5559,7 @@
                     <a:bodyPr/>
                     <a:lstStyle/>
                     <a:p>
-                      <a:pPr marL="0" indent="0" algn="ctr">
+                      <a:pPr algn="ctr" indent="0" marL="0">
                         <a:buNone/>
                       </a:pPr>
                       <a:r>
@@ -5510,7 +5580,7 @@
                       </a:endParaRPr>
                     </a:p>
                   </a:txBody>
-                  <a:tcPr anchor="ctr">
+                  <a:tcPr marL="91440" marR="91440" marT="45720" marB="45720" anchor="ctr">
                     <a:lnL w="9525" cap="flat" cmpd="sng" algn="ctr">
                       <a:solidFill>
                         <a:srgbClr val="BFD8DD"/>
@@ -5557,7 +5627,7 @@
                     <a:bodyPr/>
                     <a:lstStyle/>
                     <a:p>
-                      <a:pPr marL="0" indent="0" algn="ctr">
+                      <a:pPr algn="ctr" indent="0" marL="0">
                         <a:buNone/>
                       </a:pPr>
                       <a:r>
@@ -5578,7 +5648,7 @@
                       </a:endParaRPr>
                     </a:p>
                   </a:txBody>
-                  <a:tcPr anchor="ctr">
+                  <a:tcPr marL="91440" marR="91440" marT="45720" marB="45720" anchor="ctr">
                     <a:lnL w="9525" cap="flat" cmpd="sng" algn="ctr">
                       <a:solidFill>
                         <a:srgbClr val="BFD8DD"/>
@@ -5625,7 +5695,7 @@
                     <a:bodyPr/>
                     <a:lstStyle/>
                     <a:p>
-                      <a:pPr marL="0" indent="0" algn="ctr">
+                      <a:pPr algn="ctr" indent="0" marL="0">
                         <a:buNone/>
                       </a:pPr>
                       <a:r>
@@ -5646,7 +5716,7 @@
                       </a:endParaRPr>
                     </a:p>
                   </a:txBody>
-                  <a:tcPr anchor="ctr">
+                  <a:tcPr marL="91440" marR="91440" marT="45720" marB="45720" anchor="ctr">
                     <a:lnL w="9525" cap="flat" cmpd="sng" algn="ctr">
                       <a:solidFill>
                         <a:srgbClr val="BFD8DD"/>
@@ -5688,11 +5758,6 @@
                     </a:solidFill>
                   </a:tcPr>
                 </a:tc>
-                <a:extLst>
-                  <a:ext uri="{0D108BD9-81ED-4DB2-BD59-A6C34878D82A}">
-                    <a16:rowId xmlns:a16="http://schemas.microsoft.com/office/drawing/2014/main" val="10004"/>
-                  </a:ext>
-                </a:extLst>
               </a:tr>
               <a:tr h="384048">
                 <a:tc>
@@ -5700,7 +5765,7 @@
                     <a:bodyPr/>
                     <a:lstStyle/>
                     <a:p>
-                      <a:pPr marL="0" indent="0" algn="l">
+                      <a:pPr algn="l" indent="0" marL="0">
                         <a:buNone/>
                       </a:pPr>
                       <a:r>
@@ -5721,7 +5786,7 @@
                       </a:endParaRPr>
                     </a:p>
                   </a:txBody>
-                  <a:tcPr anchor="ctr">
+                  <a:tcPr marL="91440" marR="91440" marT="45720" marB="45720" anchor="ctr">
                     <a:lnL w="9525" cap="flat" cmpd="sng" algn="ctr">
                       <a:solidFill>
                         <a:srgbClr val="BFD8DD"/>
@@ -5768,7 +5833,7 @@
                     <a:bodyPr/>
                     <a:lstStyle/>
                     <a:p>
-                      <a:pPr marL="0" indent="0" algn="ctr">
+                      <a:pPr algn="ctr" indent="0" marL="0">
                         <a:buNone/>
                       </a:pPr>
                       <a:r>
@@ -5789,7 +5854,7 @@
                       </a:endParaRPr>
                     </a:p>
                   </a:txBody>
-                  <a:tcPr anchor="ctr">
+                  <a:tcPr marL="91440" marR="91440" marT="45720" marB="45720" anchor="ctr">
                     <a:lnL w="9525" cap="flat" cmpd="sng" algn="ctr">
                       <a:solidFill>
                         <a:srgbClr val="BFD8DD"/>
@@ -5836,7 +5901,7 @@
                     <a:bodyPr/>
                     <a:lstStyle/>
                     <a:p>
-                      <a:pPr marL="0" indent="0" algn="ctr">
+                      <a:pPr algn="ctr" indent="0" marL="0">
                         <a:buNone/>
                       </a:pPr>
                       <a:r>
@@ -5857,7 +5922,7 @@
                       </a:endParaRPr>
                     </a:p>
                   </a:txBody>
-                  <a:tcPr anchor="ctr">
+                  <a:tcPr marL="91440" marR="91440" marT="45720" marB="45720" anchor="ctr">
                     <a:lnL w="9525" cap="flat" cmpd="sng" algn="ctr">
                       <a:solidFill>
                         <a:srgbClr val="BFD8DD"/>
@@ -5904,7 +5969,7 @@
                     <a:bodyPr/>
                     <a:lstStyle/>
                     <a:p>
-                      <a:pPr marL="0" indent="0" algn="ctr">
+                      <a:pPr algn="ctr" indent="0" marL="0">
                         <a:buNone/>
                       </a:pPr>
                       <a:r>
@@ -5925,7 +5990,7 @@
                       </a:endParaRPr>
                     </a:p>
                   </a:txBody>
-                  <a:tcPr anchor="ctr">
+                  <a:tcPr marL="91440" marR="91440" marT="45720" marB="45720" anchor="ctr">
                     <a:lnL w="9525" cap="flat" cmpd="sng" algn="ctr">
                       <a:solidFill>
                         <a:srgbClr val="BFD8DD"/>
@@ -5972,7 +6037,7 @@
                     <a:bodyPr/>
                     <a:lstStyle/>
                     <a:p>
-                      <a:pPr marL="0" indent="0" algn="ctr">
+                      <a:pPr algn="ctr" indent="0" marL="0">
                         <a:buNone/>
                       </a:pPr>
                       <a:r>
@@ -5993,7 +6058,7 @@
                       </a:endParaRPr>
                     </a:p>
                   </a:txBody>
-                  <a:tcPr anchor="ctr">
+                  <a:tcPr marL="91440" marR="91440" marT="45720" marB="45720" anchor="ctr">
                     <a:lnL w="9525" cap="flat" cmpd="sng" algn="ctr">
                       <a:solidFill>
                         <a:srgbClr val="BFD8DD"/>
@@ -6040,7 +6105,7 @@
                     <a:bodyPr/>
                     <a:lstStyle/>
                     <a:p>
-                      <a:pPr marL="0" indent="0" algn="ctr">
+                      <a:pPr algn="ctr" indent="0" marL="0">
                         <a:buNone/>
                       </a:pPr>
                       <a:r>
@@ -6061,7 +6126,7 @@
                       </a:endParaRPr>
                     </a:p>
                   </a:txBody>
-                  <a:tcPr anchor="ctr">
+                  <a:tcPr marL="91440" marR="91440" marT="45720" marB="45720" anchor="ctr">
                     <a:lnL w="9525" cap="flat" cmpd="sng" algn="ctr">
                       <a:solidFill>
                         <a:srgbClr val="BFD8DD"/>
@@ -6108,7 +6173,7 @@
                     <a:bodyPr/>
                     <a:lstStyle/>
                     <a:p>
-                      <a:pPr marL="0" indent="0" algn="ctr">
+                      <a:pPr algn="ctr" indent="0" marL="0">
                         <a:buNone/>
                       </a:pPr>
                       <a:r>
@@ -6129,7 +6194,7 @@
                       </a:endParaRPr>
                     </a:p>
                   </a:txBody>
-                  <a:tcPr anchor="ctr">
+                  <a:tcPr marL="91440" marR="91440" marT="45720" marB="45720" anchor="ctr">
                     <a:lnL w="9525" cap="flat" cmpd="sng" algn="ctr">
                       <a:solidFill>
                         <a:srgbClr val="BFD8DD"/>
@@ -6171,11 +6236,6 @@
                     </a:solidFill>
                   </a:tcPr>
                 </a:tc>
-                <a:extLst>
-                  <a:ext uri="{0D108BD9-81ED-4DB2-BD59-A6C34878D82A}">
-                    <a16:rowId xmlns:a16="http://schemas.microsoft.com/office/drawing/2014/main" val="10005"/>
-                  </a:ext>
-                </a:extLst>
               </a:tr>
               <a:tr h="384048">
                 <a:tc>
@@ -6183,7 +6243,7 @@
                     <a:bodyPr/>
                     <a:lstStyle/>
                     <a:p>
-                      <a:pPr marL="0" indent="0" algn="l">
+                      <a:pPr algn="l" indent="0" marL="0">
                         <a:buNone/>
                       </a:pPr>
                       <a:r>
@@ -6204,7 +6264,7 @@
                       </a:endParaRPr>
                     </a:p>
                   </a:txBody>
-                  <a:tcPr anchor="ctr">
+                  <a:tcPr marL="91440" marR="91440" marT="45720" marB="45720" anchor="ctr">
                     <a:lnL w="9525" cap="flat" cmpd="sng" algn="ctr">
                       <a:solidFill>
                         <a:srgbClr val="BFD8DD"/>
@@ -6251,7 +6311,7 @@
                     <a:bodyPr/>
                     <a:lstStyle/>
                     <a:p>
-                      <a:pPr marL="0" indent="0" algn="ctr">
+                      <a:pPr algn="ctr" indent="0" marL="0">
                         <a:buNone/>
                       </a:pPr>
                       <a:r>
@@ -6272,7 +6332,7 @@
                       </a:endParaRPr>
                     </a:p>
                   </a:txBody>
-                  <a:tcPr anchor="ctr">
+                  <a:tcPr marL="91440" marR="91440" marT="45720" marB="45720" anchor="ctr">
                     <a:lnL w="9525" cap="flat" cmpd="sng" algn="ctr">
                       <a:solidFill>
                         <a:srgbClr val="BFD8DD"/>
@@ -6319,7 +6379,7 @@
                     <a:bodyPr/>
                     <a:lstStyle/>
                     <a:p>
-                      <a:pPr marL="0" indent="0" algn="ctr">
+                      <a:pPr algn="ctr" indent="0" marL="0">
                         <a:buNone/>
                       </a:pPr>
                       <a:r>
@@ -6340,7 +6400,7 @@
                       </a:endParaRPr>
                     </a:p>
                   </a:txBody>
-                  <a:tcPr anchor="ctr">
+                  <a:tcPr marL="91440" marR="91440" marT="45720" marB="45720" anchor="ctr">
                     <a:lnL w="9525" cap="flat" cmpd="sng" algn="ctr">
                       <a:solidFill>
                         <a:srgbClr val="BFD8DD"/>
@@ -6387,7 +6447,7 @@
                     <a:bodyPr/>
                     <a:lstStyle/>
                     <a:p>
-                      <a:pPr marL="0" indent="0" algn="ctr">
+                      <a:pPr algn="ctr" indent="0" marL="0">
                         <a:buNone/>
                       </a:pPr>
                       <a:r>
@@ -6408,7 +6468,7 @@
                       </a:endParaRPr>
                     </a:p>
                   </a:txBody>
-                  <a:tcPr anchor="ctr">
+                  <a:tcPr marL="91440" marR="91440" marT="45720" marB="45720" anchor="ctr">
                     <a:lnL w="9525" cap="flat" cmpd="sng" algn="ctr">
                       <a:solidFill>
                         <a:srgbClr val="BFD8DD"/>
@@ -6455,7 +6515,7 @@
                     <a:bodyPr/>
                     <a:lstStyle/>
                     <a:p>
-                      <a:pPr marL="0" indent="0" algn="ctr">
+                      <a:pPr algn="ctr" indent="0" marL="0">
                         <a:buNone/>
                       </a:pPr>
                       <a:r>
@@ -6476,7 +6536,7 @@
                       </a:endParaRPr>
                     </a:p>
                   </a:txBody>
-                  <a:tcPr anchor="ctr">
+                  <a:tcPr marL="91440" marR="91440" marT="45720" marB="45720" anchor="ctr">
                     <a:lnL w="9525" cap="flat" cmpd="sng" algn="ctr">
                       <a:solidFill>
                         <a:srgbClr val="BFD8DD"/>
@@ -6523,7 +6583,7 @@
                     <a:bodyPr/>
                     <a:lstStyle/>
                     <a:p>
-                      <a:pPr marL="0" indent="0" algn="ctr">
+                      <a:pPr algn="ctr" indent="0" marL="0">
                         <a:buNone/>
                       </a:pPr>
                       <a:r>
@@ -6544,7 +6604,7 @@
                       </a:endParaRPr>
                     </a:p>
                   </a:txBody>
-                  <a:tcPr anchor="ctr">
+                  <a:tcPr marL="91440" marR="91440" marT="45720" marB="45720" anchor="ctr">
                     <a:lnL w="9525" cap="flat" cmpd="sng" algn="ctr">
                       <a:solidFill>
                         <a:srgbClr val="BFD8DD"/>
@@ -6591,7 +6651,7 @@
                     <a:bodyPr/>
                     <a:lstStyle/>
                     <a:p>
-                      <a:pPr marL="0" indent="0" algn="ctr">
+                      <a:pPr algn="ctr" indent="0" marL="0">
                         <a:buNone/>
                       </a:pPr>
                       <a:r>
@@ -6612,7 +6672,7 @@
                       </a:endParaRPr>
                     </a:p>
                   </a:txBody>
-                  <a:tcPr anchor="ctr">
+                  <a:tcPr marL="91440" marR="91440" marT="45720" marB="45720" anchor="ctr">
                     <a:lnL w="9525" cap="flat" cmpd="sng" algn="ctr">
                       <a:solidFill>
                         <a:srgbClr val="BFD8DD"/>
@@ -6654,11 +6714,6 @@
                     </a:solidFill>
                   </a:tcPr>
                 </a:tc>
-                <a:extLst>
-                  <a:ext uri="{0D108BD9-81ED-4DB2-BD59-A6C34878D82A}">
-                    <a16:rowId xmlns:a16="http://schemas.microsoft.com/office/drawing/2014/main" val="10006"/>
-                  </a:ext>
-                </a:extLst>
               </a:tr>
             </a:tbl>
           </a:graphicData>
@@ -6685,7 +6740,7 @@
           <a:bodyPr wrap="square" lIns="0" tIns="0" rIns="0" bIns="0" rtlCol="0" anchor="t"/>
           <a:lstStyle/>
           <a:p>
-            <a:pPr marL="0" indent="0">
+            <a:pPr indent="0" marL="0">
               <a:buNone/>
             </a:pPr>
             <a:r>
@@ -6699,6 +6754,9 @@
               </a:rPr>
               <a:t>Recall</a:t>
             </a:r>
+            <a:pPr indent="0" marL="0">
+              <a:buNone/>
+            </a:pPr>
             <a:r>
               <a:rPr lang="en-US" sz="1100" dirty="0">
                 <a:solidFill>
@@ -6710,6 +6768,9 @@
               </a:rPr>
               <a:t>: tỉ lệ phiên bằng chứng (answer_session_ids — nhãn của LongMemEval) được giữ, TB theo câu.  </a:t>
             </a:r>
+            <a:pPr indent="0" marL="0">
+              <a:buNone/>
+            </a:pPr>
             <a:r>
               <a:rPr lang="en-US" sz="1100" b="1" dirty="0">
                 <a:solidFill>
@@ -6721,6 +6782,9 @@
               </a:rPr>
               <a:t>Đủ bằng chứng</a:t>
             </a:r>
+            <a:pPr indent="0" marL="0">
+              <a:buNone/>
+            </a:pPr>
             <a:r>
               <a:rPr lang="en-US" sz="1100" dirty="0">
                 <a:solidFill>
@@ -6762,13 +6826,6 @@
             <a:prstDash val="solid"/>
           </a:ln>
         </p:spPr>
-        <p:txBody>
-          <a:bodyPr/>
-          <a:lstStyle/>
-          <a:p>
-            <a:endParaRPr lang="en-US"/>
-          </a:p>
-        </p:txBody>
       </p:sp>
       <p:sp>
         <p:nvSpPr>
@@ -6791,7 +6848,7 @@
           <a:bodyPr wrap="square" lIns="0" tIns="0" rIns="0" bIns="0" rtlCol="0" anchor="t"/>
           <a:lstStyle/>
           <a:p>
-            <a:pPr marL="0" indent="0">
+            <a:pPr indent="0" marL="0">
               <a:buNone/>
             </a:pPr>
             <a:r>
@@ -6830,7 +6887,7 @@
           <a:bodyPr wrap="square" lIns="0" tIns="0" rIns="0" bIns="0" rtlCol="0" anchor="t"/>
           <a:lstStyle/>
           <a:p>
-            <a:pPr marL="0" indent="0">
+            <a:pPr indent="0" marL="0">
               <a:buNone/>
             </a:pPr>
             <a:r>
@@ -6874,13 +6931,6 @@
             <a:prstDash val="solid"/>
           </a:ln>
         </p:spPr>
-        <p:txBody>
-          <a:bodyPr/>
-          <a:lstStyle/>
-          <a:p>
-            <a:endParaRPr lang="en-US"/>
-          </a:p>
-        </p:txBody>
       </p:sp>
       <p:sp>
         <p:nvSpPr>
@@ -6903,7 +6953,7 @@
           <a:bodyPr wrap="square" lIns="0" tIns="0" rIns="0" bIns="0" rtlCol="0" anchor="t"/>
           <a:lstStyle/>
           <a:p>
-            <a:pPr marL="0" indent="0">
+            <a:pPr indent="0" marL="0">
               <a:buNone/>
             </a:pPr>
             <a:r>
@@ -6923,7 +6973,7 @@
       </p:sp>
       <p:sp>
         <p:nvSpPr>
-          <p:cNvPr id="4" name="Text 8"/>
+          <p:cNvPr id="11" name="Text 8"/>
           <p:cNvSpPr txBox="1"/>
           <p:nvPr/>
         </p:nvSpPr>
@@ -6942,7 +6992,7 @@
           <a:bodyPr wrap="square" lIns="0" tIns="0" rIns="0" bIns="0" rtlCol="0" anchor="t"/>
           <a:lstStyle/>
           <a:p>
-            <a:pPr marL="0" indent="0">
+            <a:pPr indent="0" marL="0">
               <a:buNone/>
             </a:pPr>
             <a:r>
@@ -6959,7 +7009,7 @@
             <a:endParaRPr lang="en-US" sz="1150" dirty="0"/>
           </a:p>
           <a:p>
-            <a:pPr marL="0" indent="0">
+            <a:pPr indent="0" marL="0">
               <a:buNone/>
             </a:pPr>
             <a:r>
@@ -6976,7 +7026,7 @@
             <a:endParaRPr lang="en-US" sz="1150" dirty="0"/>
           </a:p>
           <a:p>
-            <a:pPr marL="0" indent="0">
+            <a:pPr indent="0" marL="0">
               <a:buNone/>
             </a:pPr>
             <a:r>
@@ -7020,13 +7070,6 @@
             <a:prstDash val="solid"/>
           </a:ln>
         </p:spPr>
-        <p:txBody>
-          <a:bodyPr/>
-          <a:lstStyle/>
-          <a:p>
-            <a:endParaRPr lang="en-US"/>
-          </a:p>
-        </p:txBody>
       </p:sp>
       <p:sp>
         <p:nvSpPr>
@@ -7049,7 +7092,7 @@
           <a:bodyPr wrap="square" lIns="0" tIns="0" rIns="0" bIns="0" rtlCol="0" anchor="ctr"/>
           <a:lstStyle/>
           <a:p>
-            <a:pPr marL="0" indent="0">
+            <a:pPr indent="0" marL="0">
               <a:buNone/>
             </a:pPr>
             <a:r>
@@ -7063,6 +7106,9 @@
               </a:rPr>
               <a:t>Vì sao không dùng Θ = 0,2 như bài báo?  </a:t>
             </a:r>
+            <a:pPr indent="0" marL="0">
+              <a:buNone/>
+            </a:pPr>
             <a:r>
               <a:rPr lang="en-US" sz="1200" dirty="0">
                 <a:solidFill>
@@ -7099,7 +7145,7 @@
           <a:bodyPr wrap="square" lIns="0" tIns="0" rIns="0" bIns="0" rtlCol="0" anchor="t"/>
           <a:lstStyle/>
           <a:p>
-            <a:pPr marL="0" indent="0">
+            <a:pPr indent="0" marL="0">
               <a:buNone/>
             </a:pPr>
             <a:r>
@@ -7133,7 +7179,6 @@
         <a:solidFill>
           <a:srgbClr val="FFFFFF"/>
         </a:solidFill>
-        <a:effectLst/>
       </p:bgPr>
     </p:bg>
     <p:spTree>
@@ -7171,11 +7216,11 @@
           <a:bodyPr wrap="square" lIns="0" tIns="0" rIns="0" bIns="0" rtlCol="0" anchor="t"/>
           <a:lstStyle/>
           <a:p>
-            <a:pPr marL="0" indent="0">
+            <a:pPr indent="0" marL="0">
               <a:buNone/>
             </a:pPr>
             <a:r>
-              <a:rPr lang="en-US" sz="1100" b="1" kern="0" spc="200" dirty="0">
+              <a:rPr lang="en-US" sz="1100" b="1" spc="200" kern="0" dirty="0">
                 <a:solidFill>
                   <a:srgbClr val="D98C1F"/>
                 </a:solidFill>
@@ -7210,7 +7255,7 @@
           <a:bodyPr wrap="square" lIns="0" tIns="0" rIns="0" bIns="0" rtlCol="0" anchor="ctr"/>
           <a:lstStyle/>
           <a:p>
-            <a:pPr marL="0" indent="0">
+            <a:pPr indent="0" marL="0">
               <a:buNone/>
             </a:pPr>
             <a:r>
@@ -7230,7 +7275,7 @@
       </p:sp>
       <p:graphicFrame>
         <p:nvGraphicFramePr>
-          <p:cNvPr id="4" name="Chart 0"/>
+          <p:cNvPr id="4" name="Chart 0" descr=""/>
           <p:cNvGraphicFramePr/>
           <p:nvPr/>
         </p:nvGraphicFramePr>
@@ -7238,9 +7283,9 @@
           <a:off x="457200" y="1325880"/>
           <a:ext cx="7223760" cy="4846320"/>
         </p:xfrm>
-        <a:graphic>
+        <a:graphic xmlns:a="http://schemas.openxmlformats.org/drawingml/2006/main">
           <a:graphicData uri="http://schemas.openxmlformats.org/drawingml/2006/chart">
-            <c:chart xmlns:c="http://schemas.openxmlformats.org/drawingml/2006/chart" xmlns:r="http://schemas.openxmlformats.org/officeDocument/2006/relationships" r:id="rId3"/>
+            <c:chart xmlns:c="http://schemas.openxmlformats.org/drawingml/2006/chart" r:id="rId1"/>
           </a:graphicData>
         </a:graphic>
       </p:graphicFrame>
@@ -7270,13 +7315,6 @@
             <a:prstDash val="solid"/>
           </a:ln>
         </p:spPr>
-        <p:txBody>
-          <a:bodyPr/>
-          <a:lstStyle/>
-          <a:p>
-            <a:endParaRPr lang="en-US"/>
-          </a:p>
-        </p:txBody>
       </p:sp>
       <p:sp>
         <p:nvSpPr>
@@ -7299,7 +7337,7 @@
           <a:bodyPr wrap="square" lIns="0" tIns="0" rIns="0" bIns="0" rtlCol="0" anchor="ctr"/>
           <a:lstStyle/>
           <a:p>
-            <a:pPr marL="0" indent="0">
+            <a:pPr indent="0" marL="0">
               <a:buNone/>
             </a:pPr>
             <a:r>
@@ -7338,7 +7376,7 @@
           <a:bodyPr wrap="square" lIns="0" tIns="0" rIns="0" bIns="0" rtlCol="0" anchor="ctr"/>
           <a:lstStyle/>
           <a:p>
-            <a:pPr marL="0" indent="0">
+            <a:pPr indent="0" marL="0">
               <a:buNone/>
             </a:pPr>
             <a:r>
@@ -7382,13 +7420,6 @@
             <a:prstDash val="solid"/>
           </a:ln>
         </p:spPr>
-        <p:txBody>
-          <a:bodyPr/>
-          <a:lstStyle/>
-          <a:p>
-            <a:endParaRPr lang="en-US"/>
-          </a:p>
-        </p:txBody>
       </p:sp>
       <p:sp>
         <p:nvSpPr>
@@ -7411,7 +7442,7 @@
           <a:bodyPr wrap="square" lIns="0" tIns="0" rIns="0" bIns="0" rtlCol="0" anchor="ctr"/>
           <a:lstStyle/>
           <a:p>
-            <a:pPr marL="0" indent="0">
+            <a:pPr indent="0" marL="0">
               <a:buNone/>
             </a:pPr>
             <a:r>
@@ -7450,7 +7481,7 @@
           <a:bodyPr wrap="square" lIns="0" tIns="0" rIns="0" bIns="0" rtlCol="0" anchor="ctr"/>
           <a:lstStyle/>
           <a:p>
-            <a:pPr marL="0" indent="0">
+            <a:pPr indent="0" marL="0">
               <a:buNone/>
             </a:pPr>
             <a:r>
@@ -7494,13 +7525,6 @@
             <a:prstDash val="solid"/>
           </a:ln>
         </p:spPr>
-        <p:txBody>
-          <a:bodyPr/>
-          <a:lstStyle/>
-          <a:p>
-            <a:endParaRPr lang="en-US"/>
-          </a:p>
-        </p:txBody>
       </p:sp>
       <p:sp>
         <p:nvSpPr>
@@ -7523,7 +7547,7 @@
           <a:bodyPr wrap="square" lIns="0" tIns="0" rIns="0" bIns="0" rtlCol="0" anchor="t"/>
           <a:lstStyle/>
           <a:p>
-            <a:pPr marL="0" indent="0">
+            <a:pPr indent="0" marL="0">
               <a:buNone/>
             </a:pPr>
             <a:r>
@@ -7647,7 +7671,7 @@
           <a:bodyPr wrap="square" lIns="0" tIns="0" rIns="0" bIns="0" rtlCol="0" anchor="t"/>
           <a:lstStyle/>
           <a:p>
-            <a:pPr marL="0" indent="0">
+            <a:pPr indent="0" marL="0">
               <a:buNone/>
             </a:pPr>
             <a:r>
@@ -7681,7 +7705,6 @@
         <a:solidFill>
           <a:srgbClr val="FFFFFF"/>
         </a:solidFill>
-        <a:effectLst/>
       </p:bgPr>
     </p:bg>
     <p:spTree>
@@ -7719,11 +7742,11 @@
           <a:bodyPr wrap="square" lIns="0" tIns="0" rIns="0" bIns="0" rtlCol="0" anchor="t"/>
           <a:lstStyle/>
           <a:p>
-            <a:pPr marL="0" indent="0">
+            <a:pPr indent="0" marL="0">
               <a:buNone/>
             </a:pPr>
             <a:r>
-              <a:rPr lang="en-US" sz="1100" b="1" kern="0" spc="200" dirty="0">
+              <a:rPr lang="en-US" sz="1100" b="1" spc="200" kern="0" dirty="0">
                 <a:solidFill>
                   <a:srgbClr val="D98C1F"/>
                 </a:solidFill>
@@ -7758,7 +7781,7 @@
           <a:bodyPr wrap="square" lIns="0" tIns="0" rIns="0" bIns="0" rtlCol="0" anchor="ctr"/>
           <a:lstStyle/>
           <a:p>
-            <a:pPr marL="0" indent="0">
+            <a:pPr indent="0" marL="0">
               <a:buNone/>
             </a:pPr>
             <a:r>
@@ -7792,34 +7815,16 @@
         </p:nvGraphicFramePr>
         <p:xfrm>
           <a:off x="548640" y="1371600"/>
-          <a:ext cx="5669280" cy="3072384"/>
+          <a:ext cx="5669280" cy="914400"/>
         </p:xfrm>
         <a:graphic>
           <a:graphicData uri="http://schemas.openxmlformats.org/drawingml/2006/table">
             <a:tbl>
               <a:tblPr/>
               <a:tblGrid>
-                <a:gridCol w="2651760">
-                  <a:extLst>
-                    <a:ext uri="{9D8B030D-6E8A-4147-A177-3AD203B41FA5}">
-                      <a16:colId xmlns:a16="http://schemas.microsoft.com/office/drawing/2014/main" val="20000"/>
-                    </a:ext>
-                  </a:extLst>
-                </a:gridCol>
-                <a:gridCol w="1508760">
-                  <a:extLst>
-                    <a:ext uri="{9D8B030D-6E8A-4147-A177-3AD203B41FA5}">
-                      <a16:colId xmlns:a16="http://schemas.microsoft.com/office/drawing/2014/main" val="20001"/>
-                    </a:ext>
-                  </a:extLst>
-                </a:gridCol>
-                <a:gridCol w="1508760">
-                  <a:extLst>
-                    <a:ext uri="{9D8B030D-6E8A-4147-A177-3AD203B41FA5}">
-                      <a16:colId xmlns:a16="http://schemas.microsoft.com/office/drawing/2014/main" val="20002"/>
-                    </a:ext>
-                  </a:extLst>
-                </a:gridCol>
+                <a:gridCol w="2651760"/>
+                <a:gridCol w="1508760"/>
+                <a:gridCol w="1508760"/>
               </a:tblGrid>
               <a:tr h="384048">
                 <a:tc>
@@ -7827,7 +7832,7 @@
                     <a:bodyPr/>
                     <a:lstStyle/>
                     <a:p>
-                      <a:pPr marL="0" indent="0">
+                      <a:pPr indent="0" marL="0">
                         <a:buNone/>
                       </a:pPr>
                       <a:r>
@@ -7848,7 +7853,7 @@
                       </a:endParaRPr>
                     </a:p>
                   </a:txBody>
-                  <a:tcPr anchor="ctr">
+                  <a:tcPr marL="91440" marR="91440" marT="45720" marB="45720" anchor="ctr">
                     <a:lnL w="9525" cap="flat" cmpd="sng" algn="ctr">
                       <a:solidFill>
                         <a:srgbClr val="BFD8DD"/>
@@ -7895,7 +7900,7 @@
                     <a:bodyPr/>
                     <a:lstStyle/>
                     <a:p>
-                      <a:pPr marL="0" indent="0" algn="ctr">
+                      <a:pPr algn="ctr" indent="0" marL="0">
                         <a:buNone/>
                       </a:pPr>
                       <a:r>
@@ -7916,7 +7921,7 @@
                       </a:endParaRPr>
                     </a:p>
                   </a:txBody>
-                  <a:tcPr anchor="ctr">
+                  <a:tcPr marL="91440" marR="91440" marT="45720" marB="45720" anchor="ctr">
                     <a:lnL w="9525" cap="flat" cmpd="sng" algn="ctr">
                       <a:solidFill>
                         <a:srgbClr val="BFD8DD"/>
@@ -7963,7 +7968,7 @@
                     <a:bodyPr/>
                     <a:lstStyle/>
                     <a:p>
-                      <a:pPr marL="0" indent="0" algn="ctr">
+                      <a:pPr algn="ctr" indent="0" marL="0">
                         <a:buNone/>
                       </a:pPr>
                       <a:r>
@@ -7984,7 +7989,7 @@
                       </a:endParaRPr>
                     </a:p>
                   </a:txBody>
-                  <a:tcPr anchor="ctr">
+                  <a:tcPr marL="91440" marR="91440" marT="45720" marB="45720" anchor="ctr">
                     <a:lnL w="9525" cap="flat" cmpd="sng" algn="ctr">
                       <a:solidFill>
                         <a:srgbClr val="BFD8DD"/>
@@ -8026,11 +8031,6 @@
                     </a:solidFill>
                   </a:tcPr>
                 </a:tc>
-                <a:extLst>
-                  <a:ext uri="{0D108BD9-81ED-4DB2-BD59-A6C34878D82A}">
-                    <a16:rowId xmlns:a16="http://schemas.microsoft.com/office/drawing/2014/main" val="10000"/>
-                  </a:ext>
-                </a:extLst>
               </a:tr>
               <a:tr h="384048">
                 <a:tc>
@@ -8038,7 +8038,7 @@
                     <a:bodyPr/>
                     <a:lstStyle/>
                     <a:p>
-                      <a:pPr marL="0" indent="0">
+                      <a:pPr indent="0" marL="0">
                         <a:buNone/>
                       </a:pPr>
                       <a:r>
@@ -8059,7 +8059,7 @@
                       </a:endParaRPr>
                     </a:p>
                   </a:txBody>
-                  <a:tcPr anchor="ctr">
+                  <a:tcPr marL="91440" marR="91440" marT="45720" marB="45720" anchor="ctr">
                     <a:lnL w="9525" cap="flat" cmpd="sng" algn="ctr">
                       <a:solidFill>
                         <a:srgbClr val="BFD8DD"/>
@@ -8106,7 +8106,7 @@
                     <a:bodyPr/>
                     <a:lstStyle/>
                     <a:p>
-                      <a:pPr marL="0" indent="0" algn="ctr">
+                      <a:pPr algn="ctr" indent="0" marL="0">
                         <a:buNone/>
                       </a:pPr>
                       <a:r>
@@ -8127,7 +8127,7 @@
                       </a:endParaRPr>
                     </a:p>
                   </a:txBody>
-                  <a:tcPr anchor="ctr">
+                  <a:tcPr marL="91440" marR="91440" marT="45720" marB="45720" anchor="ctr">
                     <a:lnL w="9525" cap="flat" cmpd="sng" algn="ctr">
                       <a:solidFill>
                         <a:srgbClr val="BFD8DD"/>
@@ -8174,7 +8174,7 @@
                     <a:bodyPr/>
                     <a:lstStyle/>
                     <a:p>
-                      <a:pPr marL="0" indent="0" algn="ctr">
+                      <a:pPr algn="ctr" indent="0" marL="0">
                         <a:buNone/>
                       </a:pPr>
                       <a:r>
@@ -8195,7 +8195,7 @@
                       </a:endParaRPr>
                     </a:p>
                   </a:txBody>
-                  <a:tcPr anchor="ctr">
+                  <a:tcPr marL="91440" marR="91440" marT="45720" marB="45720" anchor="ctr">
                     <a:lnL w="9525" cap="flat" cmpd="sng" algn="ctr">
                       <a:solidFill>
                         <a:srgbClr val="BFD8DD"/>
@@ -8237,11 +8237,6 @@
                     </a:solidFill>
                   </a:tcPr>
                 </a:tc>
-                <a:extLst>
-                  <a:ext uri="{0D108BD9-81ED-4DB2-BD59-A6C34878D82A}">
-                    <a16:rowId xmlns:a16="http://schemas.microsoft.com/office/drawing/2014/main" val="10001"/>
-                  </a:ext>
-                </a:extLst>
               </a:tr>
               <a:tr h="384048">
                 <a:tc>
@@ -8249,7 +8244,7 @@
                     <a:bodyPr/>
                     <a:lstStyle/>
                     <a:p>
-                      <a:pPr marL="0" indent="0">
+                      <a:pPr indent="0" marL="0">
                         <a:buNone/>
                       </a:pPr>
                       <a:r>
@@ -8270,7 +8265,7 @@
                       </a:endParaRPr>
                     </a:p>
                   </a:txBody>
-                  <a:tcPr anchor="ctr">
+                  <a:tcPr marL="91440" marR="91440" marT="45720" marB="45720" anchor="ctr">
                     <a:lnL w="9525" cap="flat" cmpd="sng" algn="ctr">
                       <a:solidFill>
                         <a:srgbClr val="BFD8DD"/>
@@ -8317,7 +8312,7 @@
                     <a:bodyPr/>
                     <a:lstStyle/>
                     <a:p>
-                      <a:pPr marL="0" indent="0" algn="ctr">
+                      <a:pPr algn="ctr" indent="0" marL="0">
                         <a:buNone/>
                       </a:pPr>
                       <a:r>
@@ -8338,7 +8333,7 @@
                       </a:endParaRPr>
                     </a:p>
                   </a:txBody>
-                  <a:tcPr anchor="ctr">
+                  <a:tcPr marL="91440" marR="91440" marT="45720" marB="45720" anchor="ctr">
                     <a:lnL w="9525" cap="flat" cmpd="sng" algn="ctr">
                       <a:solidFill>
                         <a:srgbClr val="BFD8DD"/>
@@ -8385,7 +8380,7 @@
                     <a:bodyPr/>
                     <a:lstStyle/>
                     <a:p>
-                      <a:pPr marL="0" indent="0" algn="ctr">
+                      <a:pPr algn="ctr" indent="0" marL="0">
                         <a:buNone/>
                       </a:pPr>
                       <a:r>
@@ -8406,7 +8401,7 @@
                       </a:endParaRPr>
                     </a:p>
                   </a:txBody>
-                  <a:tcPr anchor="ctr">
+                  <a:tcPr marL="91440" marR="91440" marT="45720" marB="45720" anchor="ctr">
                     <a:lnL w="9525" cap="flat" cmpd="sng" algn="ctr">
                       <a:solidFill>
                         <a:srgbClr val="BFD8DD"/>
@@ -8448,11 +8443,6 @@
                     </a:solidFill>
                   </a:tcPr>
                 </a:tc>
-                <a:extLst>
-                  <a:ext uri="{0D108BD9-81ED-4DB2-BD59-A6C34878D82A}">
-                    <a16:rowId xmlns:a16="http://schemas.microsoft.com/office/drawing/2014/main" val="10002"/>
-                  </a:ext>
-                </a:extLst>
               </a:tr>
               <a:tr h="384048">
                 <a:tc>
@@ -8460,7 +8450,7 @@
                     <a:bodyPr/>
                     <a:lstStyle/>
                     <a:p>
-                      <a:pPr marL="0" indent="0">
+                      <a:pPr indent="0" marL="0">
                         <a:buNone/>
                       </a:pPr>
                       <a:r>
@@ -8481,7 +8471,7 @@
                       </a:endParaRPr>
                     </a:p>
                   </a:txBody>
-                  <a:tcPr anchor="ctr">
+                  <a:tcPr marL="91440" marR="91440" marT="45720" marB="45720" anchor="ctr">
                     <a:lnL w="9525" cap="flat" cmpd="sng" algn="ctr">
                       <a:solidFill>
                         <a:srgbClr val="BFD8DD"/>
@@ -8528,7 +8518,7 @@
                     <a:bodyPr/>
                     <a:lstStyle/>
                     <a:p>
-                      <a:pPr marL="0" indent="0" algn="ctr">
+                      <a:pPr algn="ctr" indent="0" marL="0">
                         <a:buNone/>
                       </a:pPr>
                       <a:r>
@@ -8549,7 +8539,7 @@
                       </a:endParaRPr>
                     </a:p>
                   </a:txBody>
-                  <a:tcPr anchor="ctr">
+                  <a:tcPr marL="91440" marR="91440" marT="45720" marB="45720" anchor="ctr">
                     <a:lnL w="9525" cap="flat" cmpd="sng" algn="ctr">
                       <a:solidFill>
                         <a:srgbClr val="BFD8DD"/>
@@ -8596,7 +8586,7 @@
                     <a:bodyPr/>
                     <a:lstStyle/>
                     <a:p>
-                      <a:pPr marL="0" indent="0" algn="ctr">
+                      <a:pPr algn="ctr" indent="0" marL="0">
                         <a:buNone/>
                       </a:pPr>
                       <a:r>
@@ -8617,7 +8607,7 @@
                       </a:endParaRPr>
                     </a:p>
                   </a:txBody>
-                  <a:tcPr anchor="ctr">
+                  <a:tcPr marL="91440" marR="91440" marT="45720" marB="45720" anchor="ctr">
                     <a:lnL w="9525" cap="flat" cmpd="sng" algn="ctr">
                       <a:solidFill>
                         <a:srgbClr val="BFD8DD"/>
@@ -8659,11 +8649,6 @@
                     </a:solidFill>
                   </a:tcPr>
                 </a:tc>
-                <a:extLst>
-                  <a:ext uri="{0D108BD9-81ED-4DB2-BD59-A6C34878D82A}">
-                    <a16:rowId xmlns:a16="http://schemas.microsoft.com/office/drawing/2014/main" val="10003"/>
-                  </a:ext>
-                </a:extLst>
               </a:tr>
               <a:tr h="384048">
                 <a:tc>
@@ -8671,7 +8656,7 @@
                     <a:bodyPr/>
                     <a:lstStyle/>
                     <a:p>
-                      <a:pPr marL="0" indent="0">
+                      <a:pPr indent="0" marL="0">
                         <a:buNone/>
                       </a:pPr>
                       <a:r>
@@ -8692,7 +8677,7 @@
                       </a:endParaRPr>
                     </a:p>
                   </a:txBody>
-                  <a:tcPr anchor="ctr">
+                  <a:tcPr marL="91440" marR="91440" marT="45720" marB="45720" anchor="ctr">
                     <a:lnL w="9525" cap="flat" cmpd="sng" algn="ctr">
                       <a:solidFill>
                         <a:srgbClr val="BFD8DD"/>
@@ -8739,7 +8724,7 @@
                     <a:bodyPr/>
                     <a:lstStyle/>
                     <a:p>
-                      <a:pPr marL="0" indent="0" algn="ctr">
+                      <a:pPr algn="ctr" indent="0" marL="0">
                         <a:buNone/>
                       </a:pPr>
                       <a:r>
@@ -8760,7 +8745,7 @@
                       </a:endParaRPr>
                     </a:p>
                   </a:txBody>
-                  <a:tcPr anchor="ctr">
+                  <a:tcPr marL="91440" marR="91440" marT="45720" marB="45720" anchor="ctr">
                     <a:lnL w="9525" cap="flat" cmpd="sng" algn="ctr">
                       <a:solidFill>
                         <a:srgbClr val="BFD8DD"/>
@@ -8807,7 +8792,7 @@
                     <a:bodyPr/>
                     <a:lstStyle/>
                     <a:p>
-                      <a:pPr marL="0" indent="0" algn="ctr">
+                      <a:pPr algn="ctr" indent="0" marL="0">
                         <a:buNone/>
                       </a:pPr>
                       <a:r>
@@ -8828,7 +8813,7 @@
                       </a:endParaRPr>
                     </a:p>
                   </a:txBody>
-                  <a:tcPr anchor="ctr">
+                  <a:tcPr marL="91440" marR="91440" marT="45720" marB="45720" anchor="ctr">
                     <a:lnL w="9525" cap="flat" cmpd="sng" algn="ctr">
                       <a:solidFill>
                         <a:srgbClr val="BFD8DD"/>
@@ -8870,11 +8855,6 @@
                     </a:solidFill>
                   </a:tcPr>
                 </a:tc>
-                <a:extLst>
-                  <a:ext uri="{0D108BD9-81ED-4DB2-BD59-A6C34878D82A}">
-                    <a16:rowId xmlns:a16="http://schemas.microsoft.com/office/drawing/2014/main" val="10004"/>
-                  </a:ext>
-                </a:extLst>
               </a:tr>
               <a:tr h="384048">
                 <a:tc>
@@ -8882,7 +8862,7 @@
                     <a:bodyPr/>
                     <a:lstStyle/>
                     <a:p>
-                      <a:pPr marL="0" indent="0">
+                      <a:pPr indent="0" marL="0">
                         <a:buNone/>
                       </a:pPr>
                       <a:r>
@@ -8903,7 +8883,7 @@
                       </a:endParaRPr>
                     </a:p>
                   </a:txBody>
-                  <a:tcPr anchor="ctr">
+                  <a:tcPr marL="91440" marR="91440" marT="45720" marB="45720" anchor="ctr">
                     <a:lnL w="9525" cap="flat" cmpd="sng" algn="ctr">
                       <a:solidFill>
                         <a:srgbClr val="BFD8DD"/>
@@ -8950,7 +8930,7 @@
                     <a:bodyPr/>
                     <a:lstStyle/>
                     <a:p>
-                      <a:pPr marL="0" indent="0" algn="ctr">
+                      <a:pPr algn="ctr" indent="0" marL="0">
                         <a:buNone/>
                       </a:pPr>
                       <a:r>
@@ -8971,7 +8951,7 @@
                       </a:endParaRPr>
                     </a:p>
                   </a:txBody>
-                  <a:tcPr anchor="ctr">
+                  <a:tcPr marL="91440" marR="91440" marT="45720" marB="45720" anchor="ctr">
                     <a:lnL w="9525" cap="flat" cmpd="sng" algn="ctr">
                       <a:solidFill>
                         <a:srgbClr val="BFD8DD"/>
@@ -9018,7 +8998,7 @@
                     <a:bodyPr/>
                     <a:lstStyle/>
                     <a:p>
-                      <a:pPr marL="0" indent="0" algn="ctr">
+                      <a:pPr algn="ctr" indent="0" marL="0">
                         <a:buNone/>
                       </a:pPr>
                       <a:r>
@@ -9039,7 +9019,7 @@
                       </a:endParaRPr>
                     </a:p>
                   </a:txBody>
-                  <a:tcPr anchor="ctr">
+                  <a:tcPr marL="91440" marR="91440" marT="45720" marB="45720" anchor="ctr">
                     <a:lnL w="9525" cap="flat" cmpd="sng" algn="ctr">
                       <a:solidFill>
                         <a:srgbClr val="BFD8DD"/>
@@ -9081,11 +9061,6 @@
                     </a:solidFill>
                   </a:tcPr>
                 </a:tc>
-                <a:extLst>
-                  <a:ext uri="{0D108BD9-81ED-4DB2-BD59-A6C34878D82A}">
-                    <a16:rowId xmlns:a16="http://schemas.microsoft.com/office/drawing/2014/main" val="10005"/>
-                  </a:ext>
-                </a:extLst>
               </a:tr>
               <a:tr h="384048">
                 <a:tc>
@@ -9093,7 +9068,7 @@
                     <a:bodyPr/>
                     <a:lstStyle/>
                     <a:p>
-                      <a:pPr marL="0" indent="0">
+                      <a:pPr indent="0" marL="0">
                         <a:buNone/>
                       </a:pPr>
                       <a:r>
@@ -9114,7 +9089,7 @@
                       </a:endParaRPr>
                     </a:p>
                   </a:txBody>
-                  <a:tcPr anchor="ctr">
+                  <a:tcPr marL="91440" marR="91440" marT="45720" marB="45720" anchor="ctr">
                     <a:lnL w="9525" cap="flat" cmpd="sng" algn="ctr">
                       <a:solidFill>
                         <a:srgbClr val="BFD8DD"/>
@@ -9161,7 +9136,7 @@
                     <a:bodyPr/>
                     <a:lstStyle/>
                     <a:p>
-                      <a:pPr marL="0" indent="0" algn="ctr">
+                      <a:pPr algn="ctr" indent="0" marL="0">
                         <a:buNone/>
                       </a:pPr>
                       <a:r>
@@ -9182,7 +9157,7 @@
                       </a:endParaRPr>
                     </a:p>
                   </a:txBody>
-                  <a:tcPr anchor="ctr">
+                  <a:tcPr marL="91440" marR="91440" marT="45720" marB="45720" anchor="ctr">
                     <a:lnL w="9525" cap="flat" cmpd="sng" algn="ctr">
                       <a:solidFill>
                         <a:srgbClr val="BFD8DD"/>
@@ -9229,7 +9204,7 @@
                     <a:bodyPr/>
                     <a:lstStyle/>
                     <a:p>
-                      <a:pPr marL="0" indent="0" algn="ctr">
+                      <a:pPr algn="ctr" indent="0" marL="0">
                         <a:buNone/>
                       </a:pPr>
                       <a:r>
@@ -9250,7 +9225,7 @@
                       </a:endParaRPr>
                     </a:p>
                   </a:txBody>
-                  <a:tcPr anchor="ctr">
+                  <a:tcPr marL="91440" marR="91440" marT="45720" marB="45720" anchor="ctr">
                     <a:lnL w="9525" cap="flat" cmpd="sng" algn="ctr">
                       <a:solidFill>
                         <a:srgbClr val="BFD8DD"/>
@@ -9292,11 +9267,6 @@
                     </a:solidFill>
                   </a:tcPr>
                 </a:tc>
-                <a:extLst>
-                  <a:ext uri="{0D108BD9-81ED-4DB2-BD59-A6C34878D82A}">
-                    <a16:rowId xmlns:a16="http://schemas.microsoft.com/office/drawing/2014/main" val="10006"/>
-                  </a:ext>
-                </a:extLst>
               </a:tr>
               <a:tr h="384048">
                 <a:tc>
@@ -9304,7 +9274,7 @@
                     <a:bodyPr/>
                     <a:lstStyle/>
                     <a:p>
-                      <a:pPr marL="0" indent="0">
+                      <a:pPr indent="0" marL="0">
                         <a:buNone/>
                       </a:pPr>
                       <a:r>
@@ -9325,7 +9295,7 @@
                       </a:endParaRPr>
                     </a:p>
                   </a:txBody>
-                  <a:tcPr anchor="ctr">
+                  <a:tcPr marL="91440" marR="91440" marT="45720" marB="45720" anchor="ctr">
                     <a:lnL w="9525" cap="flat" cmpd="sng" algn="ctr">
                       <a:solidFill>
                         <a:srgbClr val="BFD8DD"/>
@@ -9372,7 +9342,7 @@
                     <a:bodyPr/>
                     <a:lstStyle/>
                     <a:p>
-                      <a:pPr marL="0" indent="0" algn="ctr">
+                      <a:pPr algn="ctr" indent="0" marL="0">
                         <a:buNone/>
                       </a:pPr>
                       <a:r>
@@ -9393,7 +9363,7 @@
                       </a:endParaRPr>
                     </a:p>
                   </a:txBody>
-                  <a:tcPr anchor="ctr">
+                  <a:tcPr marL="91440" marR="91440" marT="45720" marB="45720" anchor="ctr">
                     <a:lnL w="9525" cap="flat" cmpd="sng" algn="ctr">
                       <a:solidFill>
                         <a:srgbClr val="BFD8DD"/>
@@ -9440,7 +9410,7 @@
                     <a:bodyPr/>
                     <a:lstStyle/>
                     <a:p>
-                      <a:pPr marL="0" indent="0" algn="ctr">
+                      <a:pPr algn="ctr" indent="0" marL="0">
                         <a:buNone/>
                       </a:pPr>
                       <a:r>
@@ -9461,7 +9431,7 @@
                       </a:endParaRPr>
                     </a:p>
                   </a:txBody>
-                  <a:tcPr anchor="ctr">
+                  <a:tcPr marL="91440" marR="91440" marT="45720" marB="45720" anchor="ctr">
                     <a:lnL w="9525" cap="flat" cmpd="sng" algn="ctr">
                       <a:solidFill>
                         <a:srgbClr val="BFD8DD"/>
@@ -9503,11 +9473,6 @@
                     </a:solidFill>
                   </a:tcPr>
                 </a:tc>
-                <a:extLst>
-                  <a:ext uri="{0D108BD9-81ED-4DB2-BD59-A6C34878D82A}">
-                    <a16:rowId xmlns:a16="http://schemas.microsoft.com/office/drawing/2014/main" val="10007"/>
-                  </a:ext>
-                </a:extLst>
               </a:tr>
             </a:tbl>
           </a:graphicData>
@@ -9539,13 +9504,6 @@
             <a:prstDash val="solid"/>
           </a:ln>
         </p:spPr>
-        <p:txBody>
-          <a:bodyPr/>
-          <a:lstStyle/>
-          <a:p>
-            <a:endParaRPr lang="en-US"/>
-          </a:p>
-        </p:txBody>
       </p:sp>
       <p:sp>
         <p:nvSpPr>
@@ -9568,7 +9526,7 @@
           <a:bodyPr wrap="square" lIns="0" tIns="0" rIns="0" bIns="0" rtlCol="0" anchor="ctr"/>
           <a:lstStyle/>
           <a:p>
-            <a:pPr marL="0" indent="0">
+            <a:pPr indent="0" marL="0">
               <a:buNone/>
             </a:pPr>
             <a:r>
@@ -9582,6 +9540,9 @@
               </a:rPr>
               <a:t>Ý nghĩa: </a:t>
             </a:r>
+            <a:pPr indent="0" marL="0">
+              <a:buNone/>
+            </a:pPr>
             <a:r>
               <a:rPr lang="en-US" sz="1200" dirty="0">
                 <a:solidFill>
@@ -9599,7 +9560,7 @@
       </p:sp>
       <p:graphicFrame>
         <p:nvGraphicFramePr>
-          <p:cNvPr id="7" name="Chart 0"/>
+          <p:cNvPr id="7" name="Chart 0" descr=""/>
           <p:cNvGraphicFramePr/>
           <p:nvPr/>
         </p:nvGraphicFramePr>
@@ -9607,9 +9568,9 @@
           <a:off x="6583680" y="1325880"/>
           <a:ext cx="5029200" cy="3566160"/>
         </p:xfrm>
-        <a:graphic>
+        <a:graphic xmlns:a="http://schemas.openxmlformats.org/drawingml/2006/main">
           <a:graphicData uri="http://schemas.openxmlformats.org/drawingml/2006/chart">
-            <c:chart xmlns:c="http://schemas.openxmlformats.org/drawingml/2006/chart" xmlns:r="http://schemas.openxmlformats.org/officeDocument/2006/relationships" r:id="rId3"/>
+            <c:chart xmlns:c="http://schemas.openxmlformats.org/drawingml/2006/chart" r:id="rId1"/>
           </a:graphicData>
         </a:graphic>
       </p:graphicFrame>
@@ -9639,13 +9600,6 @@
             <a:prstDash val="solid"/>
           </a:ln>
         </p:spPr>
-        <p:txBody>
-          <a:bodyPr/>
-          <a:lstStyle/>
-          <a:p>
-            <a:endParaRPr lang="en-US"/>
-          </a:p>
-        </p:txBody>
       </p:sp>
       <p:sp>
         <p:nvSpPr>
@@ -9668,7 +9622,7 @@
           <a:bodyPr wrap="square" lIns="0" tIns="0" rIns="0" bIns="0" rtlCol="0" anchor="ctr"/>
           <a:lstStyle/>
           <a:p>
-            <a:pPr marL="0" indent="0">
+            <a:pPr indent="0" marL="0">
               <a:buNone/>
             </a:pPr>
             <a:r>
@@ -9707,7 +9661,7 @@
           <a:bodyPr wrap="square" lIns="0" tIns="0" rIns="0" bIns="0" rtlCol="0" anchor="t"/>
           <a:lstStyle/>
           <a:p>
-            <a:pPr marL="0" indent="0">
+            <a:pPr indent="0" marL="0">
               <a:buNone/>
             </a:pPr>
             <a:r>
@@ -9741,7 +9695,6 @@
         <a:solidFill>
           <a:srgbClr val="FFFFFF"/>
         </a:solidFill>
-        <a:effectLst/>
       </p:bgPr>
     </p:bg>
     <p:spTree>
@@ -9779,11 +9732,11 @@
           <a:bodyPr wrap="square" lIns="0" tIns="0" rIns="0" bIns="0" rtlCol="0" anchor="t"/>
           <a:lstStyle/>
           <a:p>
-            <a:pPr marL="0" indent="0">
+            <a:pPr indent="0" marL="0">
               <a:buNone/>
             </a:pPr>
             <a:r>
-              <a:rPr lang="en-US" sz="1100" b="1" kern="0" spc="200" dirty="0">
+              <a:rPr lang="en-US" sz="1100" b="1" spc="200" kern="0" dirty="0">
                 <a:solidFill>
                   <a:srgbClr val="D98C1F"/>
                 </a:solidFill>
@@ -9818,7 +9771,7 @@
           <a:bodyPr wrap="square" lIns="0" tIns="0" rIns="0" bIns="0" rtlCol="0" anchor="ctr"/>
           <a:lstStyle/>
           <a:p>
-            <a:pPr marL="0" indent="0">
+            <a:pPr indent="0" marL="0">
               <a:buNone/>
             </a:pPr>
             <a:r>
@@ -9862,13 +9815,6 @@
             <a:prstDash val="solid"/>
           </a:ln>
         </p:spPr>
-        <p:txBody>
-          <a:bodyPr/>
-          <a:lstStyle/>
-          <a:p>
-            <a:endParaRPr lang="en-US"/>
-          </a:p>
-        </p:txBody>
       </p:sp>
       <p:sp>
         <p:nvSpPr>
@@ -9891,7 +9837,7 @@
           <a:bodyPr wrap="square" lIns="0" tIns="0" rIns="0" bIns="0" rtlCol="0" anchor="t"/>
           <a:lstStyle/>
           <a:p>
-            <a:pPr marL="0" indent="0">
+            <a:pPr indent="0" marL="0">
               <a:buNone/>
             </a:pPr>
             <a:r>
@@ -9930,7 +9876,7 @@
           <a:bodyPr wrap="square" lIns="0" tIns="0" rIns="0" bIns="0" rtlCol="0" anchor="t"/>
           <a:lstStyle/>
           <a:p>
-            <a:pPr marL="0" indent="0">
+            <a:pPr indent="0" marL="0">
               <a:buNone/>
             </a:pPr>
             <a:r>
@@ -9969,7 +9915,7 @@
           <a:bodyPr wrap="square" lIns="0" tIns="0" rIns="0" bIns="0" rtlCol="0" anchor="t"/>
           <a:lstStyle/>
           <a:p>
-            <a:pPr marL="0" indent="0">
+            <a:pPr indent="0" marL="0">
               <a:buNone/>
             </a:pPr>
             <a:r>
@@ -9983,6 +9929,9 @@
               </a:rPr>
               <a:t>Đúng ra: </a:t>
             </a:r>
+            <a:pPr indent="0" marL="0">
+              <a:buNone/>
+            </a:pPr>
             <a:r>
               <a:rPr lang="en-US" sz="1250" dirty="0">
                 <a:solidFill>
@@ -10019,7 +9968,7 @@
           <a:bodyPr wrap="square" lIns="0" tIns="0" rIns="0" bIns="0" rtlCol="0" anchor="t"/>
           <a:lstStyle/>
           <a:p>
-            <a:pPr marL="0" indent="0">
+            <a:pPr indent="0" marL="0">
               <a:buNone/>
             </a:pPr>
             <a:r>
@@ -10033,6 +9982,9 @@
               </a:rPr>
               <a:t>Hệ trả lời: </a:t>
             </a:r>
+            <a:pPr indent="0" marL="0">
+              <a:buNone/>
+            </a:pPr>
             <a:r>
               <a:rPr lang="en-US" sz="1250" dirty="0">
                 <a:solidFill>
@@ -10074,13 +10026,6 @@
             <a:prstDash val="solid"/>
           </a:ln>
         </p:spPr>
-        <p:txBody>
-          <a:bodyPr/>
-          <a:lstStyle/>
-          <a:p>
-            <a:endParaRPr lang="en-US"/>
-          </a:p>
-        </p:txBody>
       </p:sp>
       <p:sp>
         <p:nvSpPr>
@@ -10103,7 +10048,7 @@
           <a:bodyPr wrap="square" lIns="0" tIns="0" rIns="0" bIns="0" rtlCol="0" anchor="ctr"/>
           <a:lstStyle/>
           <a:p>
-            <a:pPr marL="0" indent="0">
+            <a:pPr indent="0" marL="0">
               <a:buNone/>
             </a:pPr>
             <a:r>
@@ -10117,6 +10062,9 @@
               </a:rPr>
               <a:t>Nguyên nhân: </a:t>
             </a:r>
+            <a:pPr indent="0" marL="0">
+              <a:buNone/>
+            </a:pPr>
             <a:r>
               <a:rPr lang="en-US" sz="1250" dirty="0">
                 <a:solidFill>
@@ -10158,13 +10106,6 @@
             <a:prstDash val="solid"/>
           </a:ln>
         </p:spPr>
-        <p:txBody>
-          <a:bodyPr/>
-          <a:lstStyle/>
-          <a:p>
-            <a:endParaRPr lang="en-US"/>
-          </a:p>
-        </p:txBody>
       </p:sp>
       <p:sp>
         <p:nvSpPr>
@@ -10187,7 +10128,7 @@
           <a:bodyPr wrap="square" lIns="0" tIns="0" rIns="0" bIns="0" rtlCol="0" anchor="t"/>
           <a:lstStyle/>
           <a:p>
-            <a:pPr marL="0" indent="0">
+            <a:pPr indent="0" marL="0">
               <a:buNone/>
             </a:pPr>
             <a:r>
@@ -10226,7 +10167,7 @@
           <a:bodyPr wrap="square" lIns="0" tIns="0" rIns="0" bIns="0" rtlCol="0" anchor="t"/>
           <a:lstStyle/>
           <a:p>
-            <a:pPr marL="0" indent="0">
+            <a:pPr indent="0" marL="0">
               <a:buNone/>
             </a:pPr>
             <a:r>
@@ -10265,7 +10206,7 @@
           <a:bodyPr wrap="square" lIns="0" tIns="0" rIns="0" bIns="0" rtlCol="0" anchor="t"/>
           <a:lstStyle/>
           <a:p>
-            <a:pPr marL="0" indent="0">
+            <a:pPr indent="0" marL="0">
               <a:buNone/>
             </a:pPr>
             <a:r>
@@ -10279,6 +10220,9 @@
               </a:rPr>
               <a:t>Đúng ra: </a:t>
             </a:r>
+            <a:pPr indent="0" marL="0">
+              <a:buNone/>
+            </a:pPr>
             <a:r>
               <a:rPr lang="en-US" sz="1250" dirty="0">
                 <a:solidFill>
@@ -10315,7 +10259,7 @@
           <a:bodyPr wrap="square" lIns="0" tIns="0" rIns="0" bIns="0" rtlCol="0" anchor="t"/>
           <a:lstStyle/>
           <a:p>
-            <a:pPr marL="0" indent="0">
+            <a:pPr indent="0" marL="0">
               <a:buNone/>
             </a:pPr>
             <a:r>
@@ -10329,6 +10273,9 @@
               </a:rPr>
               <a:t>Hệ trả lời: </a:t>
             </a:r>
+            <a:pPr indent="0" marL="0">
+              <a:buNone/>
+            </a:pPr>
             <a:r>
               <a:rPr lang="en-US" sz="1250" dirty="0">
                 <a:solidFill>
@@ -10370,13 +10317,6 @@
             <a:prstDash val="solid"/>
           </a:ln>
         </p:spPr>
-        <p:txBody>
-          <a:bodyPr/>
-          <a:lstStyle/>
-          <a:p>
-            <a:endParaRPr lang="en-US"/>
-          </a:p>
-        </p:txBody>
       </p:sp>
       <p:sp>
         <p:nvSpPr>
@@ -10399,7 +10339,7 @@
           <a:bodyPr wrap="square" lIns="0" tIns="0" rIns="0" bIns="0" rtlCol="0" anchor="ctr"/>
           <a:lstStyle/>
           <a:p>
-            <a:pPr marL="0" indent="0">
+            <a:pPr indent="0" marL="0">
               <a:buNone/>
             </a:pPr>
             <a:r>
@@ -10413,6 +10353,9 @@
               </a:rPr>
               <a:t>Nguyên nhân: </a:t>
             </a:r>
+            <a:pPr indent="0" marL="0">
+              <a:buNone/>
+            </a:pPr>
             <a:r>
               <a:rPr lang="en-US" sz="1250" dirty="0">
                 <a:solidFill>
@@ -10454,13 +10397,6 @@
             <a:prstDash val="solid"/>
           </a:ln>
         </p:spPr>
-        <p:txBody>
-          <a:bodyPr/>
-          <a:lstStyle/>
-          <a:p>
-            <a:endParaRPr lang="en-US"/>
-          </a:p>
-        </p:txBody>
       </p:sp>
       <p:sp>
         <p:nvSpPr>
@@ -10483,7 +10419,7 @@
           <a:bodyPr wrap="square" lIns="0" tIns="0" rIns="0" bIns="0" rtlCol="0" anchor="ctr"/>
           <a:lstStyle/>
           <a:p>
-            <a:pPr marL="0" indent="0">
+            <a:pPr indent="0" marL="0">
               <a:buNone/>
             </a:pPr>
             <a:r>
@@ -10497,6 +10433,9 @@
               </a:rPr>
               <a:t>Đối chiếu nhãn chấm: </a:t>
             </a:r>
+            <a:pPr indent="0" marL="0">
+              <a:buNone/>
+            </a:pPr>
             <a:r>
               <a:rPr lang="en-US" sz="1150" dirty="0">
                 <a:solidFill>
@@ -10533,7 +10472,7 @@
           <a:bodyPr wrap="square" lIns="0" tIns="0" rIns="0" bIns="0" rtlCol="0" anchor="t"/>
           <a:lstStyle/>
           <a:p>
-            <a:pPr marL="0" indent="0">
+            <a:pPr indent="0" marL="0">
               <a:buNone/>
             </a:pPr>
             <a:r>
@@ -10567,7 +10506,6 @@
         <a:solidFill>
           <a:srgbClr val="FFFFFF"/>
         </a:solidFill>
-        <a:effectLst/>
       </p:bgPr>
     </p:bg>
     <p:spTree>
@@ -10605,11 +10543,11 @@
           <a:bodyPr wrap="square" lIns="0" tIns="0" rIns="0" bIns="0" rtlCol="0" anchor="t"/>
           <a:lstStyle/>
           <a:p>
-            <a:pPr marL="0" indent="0">
+            <a:pPr indent="0" marL="0">
               <a:buNone/>
             </a:pPr>
             <a:r>
-              <a:rPr lang="en-US" sz="1100" b="1" kern="0" spc="200" dirty="0">
+              <a:rPr lang="en-US" sz="1100" b="1" spc="200" kern="0" dirty="0">
                 <a:solidFill>
                   <a:srgbClr val="D98C1F"/>
                 </a:solidFill>
@@ -10644,7 +10582,7 @@
           <a:bodyPr wrap="square" lIns="0" tIns="0" rIns="0" bIns="0" rtlCol="0" anchor="ctr"/>
           <a:lstStyle/>
           <a:p>
-            <a:pPr marL="0" indent="0">
+            <a:pPr indent="0" marL="0">
               <a:buNone/>
             </a:pPr>
             <a:r>
@@ -10683,7 +10621,7 @@
           <a:bodyPr wrap="square" lIns="0" tIns="0" rIns="0" bIns="0" rtlCol="0" anchor="t"/>
           <a:lstStyle/>
           <a:p>
-            <a:pPr marL="0" indent="0">
+            <a:pPr indent="0" marL="0">
               <a:buNone/>
             </a:pPr>
             <a:r>
@@ -10727,13 +10665,6 @@
             <a:prstDash val="solid"/>
           </a:ln>
         </p:spPr>
-        <p:txBody>
-          <a:bodyPr/>
-          <a:lstStyle/>
-          <a:p>
-            <a:endParaRPr lang="en-US"/>
-          </a:p>
-        </p:txBody>
       </p:sp>
       <p:sp>
         <p:nvSpPr>
@@ -10756,7 +10687,7 @@
           <a:bodyPr wrap="square" lIns="0" tIns="0" rIns="0" bIns="0" rtlCol="0" anchor="t"/>
           <a:lstStyle/>
           <a:p>
-            <a:pPr marL="0" indent="0">
+            <a:pPr indent="0" marL="0">
               <a:buNone/>
             </a:pPr>
             <a:r>
@@ -10795,7 +10726,7 @@
           <a:bodyPr wrap="square" lIns="0" tIns="0" rIns="0" bIns="0" rtlCol="0" anchor="t"/>
           <a:lstStyle/>
           <a:p>
-            <a:pPr marL="0" indent="0">
+            <a:pPr indent="0" marL="0">
               <a:buNone/>
             </a:pPr>
             <a:r>
@@ -10839,13 +10770,6 @@
             <a:prstDash val="solid"/>
           </a:ln>
         </p:spPr>
-        <p:txBody>
-          <a:bodyPr/>
-          <a:lstStyle/>
-          <a:p>
-            <a:endParaRPr lang="en-US"/>
-          </a:p>
-        </p:txBody>
       </p:sp>
       <p:sp>
         <p:nvSpPr>
@@ -10868,7 +10792,7 @@
           <a:bodyPr wrap="square" lIns="0" tIns="0" rIns="0" bIns="0" rtlCol="0" anchor="t"/>
           <a:lstStyle/>
           <a:p>
-            <a:pPr marL="0" indent="0">
+            <a:pPr indent="0" marL="0">
               <a:buNone/>
             </a:pPr>
             <a:r>
@@ -10907,7 +10831,7 @@
           <a:bodyPr wrap="square" lIns="0" tIns="0" rIns="0" bIns="0" rtlCol="0" anchor="t"/>
           <a:lstStyle/>
           <a:p>
-            <a:pPr marL="0" indent="0">
+            <a:pPr indent="0" marL="0">
               <a:buNone/>
             </a:pPr>
             <a:r>
@@ -10927,6 +10851,111 @@
       </p:sp>
       <p:sp>
         <p:nvSpPr>
+          <p:cNvPr id="11" name="Shape 9"/>
+          <p:cNvSpPr/>
+          <p:nvPr/>
+        </p:nvSpPr>
+        <p:spPr>
+          <a:xfrm>
+            <a:off x="548640" y="4114800"/>
+            <a:ext cx="5303520" cy="1005840"/>
+          </a:xfrm>
+          <a:prstGeom prst="roundRect">
+            <a:avLst>
+              <a:gd name="adj" fmla="val 5455"/>
+            </a:avLst>
+          </a:prstGeom>
+          <a:solidFill>
+            <a:srgbClr val="FBE9E7"/>
+          </a:solidFill>
+          <a:ln w="12700">
+            <a:solidFill>
+              <a:srgbClr val="FBE9E7"/>
+            </a:solidFill>
+            <a:prstDash val="solid"/>
+          </a:ln>
+        </p:spPr>
+      </p:sp>
+      <p:sp>
+        <p:nvSpPr>
+          <p:cNvPr id="12" name="Text 10"/>
+          <p:cNvSpPr txBox="1"/>
+          <p:nvPr/>
+        </p:nvSpPr>
+        <p:spPr>
+          <a:xfrm>
+            <a:off x="777240" y="4224528"/>
+            <a:ext cx="4937760" cy="320040"/>
+          </a:xfrm>
+          <a:prstGeom prst="rect">
+            <a:avLst/>
+          </a:prstGeom>
+          <a:noFill/>
+          <a:ln/>
+        </p:spPr>
+        <p:txBody>
+          <a:bodyPr wrap="square" lIns="0" tIns="0" rIns="0" bIns="0" rtlCol="0" anchor="t"/>
+          <a:lstStyle/>
+          <a:p>
+            <a:pPr indent="0" marL="0">
+              <a:buNone/>
+            </a:pPr>
+            <a:r>
+              <a:rPr lang="en-US" sz="1350" b="1" dirty="0">
+                <a:solidFill>
+                  <a:srgbClr val="12232E"/>
+                </a:solidFill>
+                <a:latin typeface="Calibri" pitchFamily="34" charset="0"/>
+                <a:ea typeface="Calibri" pitchFamily="34" charset="-122"/>
+                <a:cs typeface="Calibri" pitchFamily="34" charset="-120"/>
+              </a:rPr>
+              <a:t>Judge trùng mô hình trả lời</a:t>
+            </a:r>
+            <a:endParaRPr lang="en-US" sz="1350" dirty="0"/>
+          </a:p>
+        </p:txBody>
+      </p:sp>
+      <p:sp>
+        <p:nvSpPr>
+          <p:cNvPr id="13" name="Text 11"/>
+          <p:cNvSpPr txBox="1"/>
+          <p:nvPr/>
+        </p:nvSpPr>
+        <p:spPr>
+          <a:xfrm>
+            <a:off x="777240" y="4572000"/>
+            <a:ext cx="4937760" cy="502920"/>
+          </a:xfrm>
+          <a:prstGeom prst="rect">
+            <a:avLst/>
+          </a:prstGeom>
+          <a:noFill/>
+          <a:ln/>
+        </p:spPr>
+        <p:txBody>
+          <a:bodyPr wrap="square" lIns="0" tIns="0" rIns="0" bIns="0" rtlCol="0" anchor="t"/>
+          <a:lstStyle/>
+          <a:p>
+            <a:pPr indent="0" marL="0">
+              <a:buNone/>
+            </a:pPr>
+            <a:r>
+              <a:rPr lang="en-US" sz="1150" dirty="0">
+                <a:solidFill>
+                  <a:srgbClr val="1E2A32"/>
+                </a:solidFill>
+                <a:latin typeface="Calibri" pitchFamily="34" charset="0"/>
+                <a:ea typeface="Calibri" pitchFamily="34" charset="-122"/>
+                <a:cs typeface="Calibri" pitchFamily="34" charset="-120"/>
+              </a:rPr>
+              <a:t>Luna tự chấm bài của mình; mới đối chiếu bằng mô hình khác, chưa chấm tay.</a:t>
+            </a:r>
+            <a:endParaRPr lang="en-US" sz="1150" dirty="0"/>
+          </a:p>
+        </p:txBody>
+      </p:sp>
+      <p:sp>
+        <p:nvSpPr>
           <p:cNvPr id="14" name="Text 12"/>
           <p:cNvSpPr txBox="1"/>
           <p:nvPr/>
@@ -10946,7 +10975,7 @@
           <a:bodyPr wrap="square" lIns="0" tIns="0" rIns="0" bIns="0" rtlCol="0" anchor="t"/>
           <a:lstStyle/>
           <a:p>
-            <a:pPr marL="0" indent="0">
+            <a:pPr indent="0" marL="0">
               <a:buNone/>
             </a:pPr>
             <a:r>
@@ -10988,13 +11017,6 @@
             <a:prstDash val="solid"/>
           </a:ln>
         </p:spPr>
-        <p:txBody>
-          <a:bodyPr/>
-          <a:lstStyle/>
-          <a:p>
-            <a:endParaRPr lang="en-US"/>
-          </a:p>
-        </p:txBody>
       </p:sp>
       <p:sp>
         <p:nvSpPr>
@@ -11017,7 +11039,7 @@
           <a:bodyPr wrap="square" lIns="0" tIns="0" rIns="0" bIns="0" rtlCol="0" anchor="ctr"/>
           <a:lstStyle/>
           <a:p>
-            <a:pPr marL="0" indent="0" algn="ctr">
+            <a:pPr algn="ctr" indent="0" marL="0">
               <a:buNone/>
             </a:pPr>
             <a:r>
@@ -11056,7 +11078,7 @@
           <a:bodyPr wrap="square" lIns="0" tIns="0" rIns="0" bIns="0" rtlCol="0" anchor="t"/>
           <a:lstStyle/>
           <a:p>
-            <a:pPr marL="0" indent="0">
+            <a:pPr indent="0" marL="0">
               <a:buNone/>
             </a:pPr>
             <a:r>
@@ -11095,7 +11117,7 @@
           <a:bodyPr wrap="square" lIns="0" tIns="0" rIns="0" bIns="0" rtlCol="0" anchor="t"/>
           <a:lstStyle/>
           <a:p>
-            <a:pPr marL="0" indent="0">
+            <a:pPr indent="0" marL="0">
               <a:buNone/>
             </a:pPr>
             <a:r>
@@ -11137,13 +11159,6 @@
             <a:prstDash val="solid"/>
           </a:ln>
         </p:spPr>
-        <p:txBody>
-          <a:bodyPr/>
-          <a:lstStyle/>
-          <a:p>
-            <a:endParaRPr lang="en-US"/>
-          </a:p>
-        </p:txBody>
       </p:sp>
       <p:sp>
         <p:nvSpPr>
@@ -11166,7 +11181,7 @@
           <a:bodyPr wrap="square" lIns="0" tIns="0" rIns="0" bIns="0" rtlCol="0" anchor="ctr"/>
           <a:lstStyle/>
           <a:p>
-            <a:pPr marL="0" indent="0" algn="ctr">
+            <a:pPr algn="ctr" indent="0" marL="0">
               <a:buNone/>
             </a:pPr>
             <a:r>
@@ -11205,7 +11220,7 @@
           <a:bodyPr wrap="square" lIns="0" tIns="0" rIns="0" bIns="0" rtlCol="0" anchor="t"/>
           <a:lstStyle/>
           <a:p>
-            <a:pPr marL="0" indent="0">
+            <a:pPr indent="0" marL="0">
               <a:buNone/>
             </a:pPr>
             <a:r>
@@ -11217,29 +11232,7 @@
                 <a:ea typeface="Calibri" pitchFamily="34" charset="-122"/>
                 <a:cs typeface="Calibri" pitchFamily="34" charset="-120"/>
               </a:rPr>
-              <a:t>Chạy </a:t>
-            </a:r>
-            <a:r>
-              <a:rPr lang="en-US" sz="1350" b="1" dirty="0" err="1">
-                <a:solidFill>
-                  <a:srgbClr val="12232E"/>
-                </a:solidFill>
-                <a:latin typeface="Calibri" pitchFamily="34" charset="0"/>
-                <a:ea typeface="Calibri" pitchFamily="34" charset="-122"/>
-                <a:cs typeface="Calibri" pitchFamily="34" charset="-120"/>
-              </a:rPr>
-              <a:t>thêm</a:t>
-            </a:r>
-            <a:r>
-              <a:rPr lang="en-US" sz="1350" b="1" dirty="0">
-                <a:solidFill>
-                  <a:srgbClr val="12232E"/>
-                </a:solidFill>
-                <a:latin typeface="Calibri" pitchFamily="34" charset="0"/>
-                <a:ea typeface="Calibri" pitchFamily="34" charset="-122"/>
-                <a:cs typeface="Calibri" pitchFamily="34" charset="-120"/>
-              </a:rPr>
-              <a:t> + mở rộng dev</a:t>
+              <a:t>Chạy thêm 10 câu temporal + mở rộng dev</a:t>
             </a:r>
             <a:endParaRPr lang="en-US" sz="1350" dirty="0"/>
           </a:p>
@@ -11266,7 +11259,7 @@
           <a:bodyPr wrap="square" lIns="0" tIns="0" rIns="0" bIns="0" rtlCol="0" anchor="t"/>
           <a:lstStyle/>
           <a:p>
-            <a:pPr marL="0" indent="0">
+            <a:pPr indent="0" marL="0">
               <a:buNone/>
             </a:pPr>
             <a:r>
@@ -11308,13 +11301,6 @@
             <a:prstDash val="solid"/>
           </a:ln>
         </p:spPr>
-        <p:txBody>
-          <a:bodyPr/>
-          <a:lstStyle/>
-          <a:p>
-            <a:endParaRPr lang="en-US"/>
-          </a:p>
-        </p:txBody>
       </p:sp>
       <p:sp>
         <p:nvSpPr>
@@ -11337,7 +11323,7 @@
           <a:bodyPr wrap="square" lIns="0" tIns="0" rIns="0" bIns="0" rtlCol="0" anchor="ctr"/>
           <a:lstStyle/>
           <a:p>
-            <a:pPr marL="0" indent="0" algn="ctr">
+            <a:pPr algn="ctr" indent="0" marL="0">
               <a:buNone/>
             </a:pPr>
             <a:r>
@@ -11376,7 +11362,7 @@
           <a:bodyPr wrap="square" lIns="0" tIns="0" rIns="0" bIns="0" rtlCol="0" anchor="t"/>
           <a:lstStyle/>
           <a:p>
-            <a:pPr marL="0" indent="0">
+            <a:pPr indent="0" marL="0">
               <a:buNone/>
             </a:pPr>
             <a:r>
@@ -11415,7 +11401,7 @@
           <a:bodyPr wrap="square" lIns="0" tIns="0" rIns="0" bIns="0" rtlCol="0" anchor="t"/>
           <a:lstStyle/>
           <a:p>
-            <a:pPr marL="0" indent="0">
+            <a:pPr indent="0" marL="0">
               <a:buNone/>
             </a:pPr>
             <a:r>
@@ -11457,13 +11443,6 @@
             <a:prstDash val="solid"/>
           </a:ln>
         </p:spPr>
-        <p:txBody>
-          <a:bodyPr/>
-          <a:lstStyle/>
-          <a:p>
-            <a:endParaRPr lang="en-US"/>
-          </a:p>
-        </p:txBody>
       </p:sp>
       <p:sp>
         <p:nvSpPr>
@@ -11486,7 +11465,7 @@
           <a:bodyPr wrap="square" lIns="0" tIns="0" rIns="0" bIns="0" rtlCol="0" anchor="ctr"/>
           <a:lstStyle/>
           <a:p>
-            <a:pPr marL="0" indent="0" algn="ctr">
+            <a:pPr algn="ctr" indent="0" marL="0">
               <a:buNone/>
             </a:pPr>
             <a:r>
@@ -11525,7 +11504,7 @@
           <a:bodyPr wrap="square" lIns="0" tIns="0" rIns="0" bIns="0" rtlCol="0" anchor="t"/>
           <a:lstStyle/>
           <a:p>
-            <a:pPr marL="0" indent="0">
+            <a:pPr indent="0" marL="0">
               <a:buNone/>
             </a:pPr>
             <a:r>
@@ -11564,7 +11543,7 @@
           <a:bodyPr wrap="square" lIns="0" tIns="0" rIns="0" bIns="0" rtlCol="0" anchor="t"/>
           <a:lstStyle/>
           <a:p>
-            <a:pPr marL="0" indent="0">
+            <a:pPr indent="0" marL="0">
               <a:buNone/>
             </a:pPr>
             <a:r>
@@ -11608,13 +11587,6 @@
             <a:prstDash val="solid"/>
           </a:ln>
         </p:spPr>
-        <p:txBody>
-          <a:bodyPr/>
-          <a:lstStyle/>
-          <a:p>
-            <a:endParaRPr lang="en-US"/>
-          </a:p>
-        </p:txBody>
       </p:sp>
       <p:sp>
         <p:nvSpPr>
@@ -11637,7 +11609,7 @@
           <a:bodyPr wrap="square" lIns="0" tIns="0" rIns="0" bIns="0" rtlCol="0" anchor="ctr"/>
           <a:lstStyle/>
           <a:p>
-            <a:pPr marL="0" indent="0">
+            <a:pPr indent="0" marL="0">
               <a:buNone/>
             </a:pPr>
             <a:r>
@@ -11671,7 +11643,6 @@
         <a:solidFill>
           <a:srgbClr val="FFFFFF"/>
         </a:solidFill>
-        <a:effectLst/>
       </p:bgPr>
     </p:bg>
     <p:spTree>
@@ -11709,11 +11680,11 @@
           <a:bodyPr wrap="square" lIns="0" tIns="0" rIns="0" bIns="0" rtlCol="0" anchor="t"/>
           <a:lstStyle/>
           <a:p>
-            <a:pPr marL="0" indent="0">
+            <a:pPr indent="0" marL="0">
               <a:buNone/>
             </a:pPr>
             <a:r>
-              <a:rPr lang="en-US" sz="1100" b="1" kern="0" spc="200" dirty="0">
+              <a:rPr lang="en-US" sz="1100" b="1" spc="200" kern="0" dirty="0">
                 <a:solidFill>
                   <a:srgbClr val="D98C1F"/>
                 </a:solidFill>
@@ -11748,7 +11719,7 @@
           <a:bodyPr wrap="square" lIns="0" tIns="0" rIns="0" bIns="0" rtlCol="0" anchor="ctr"/>
           <a:lstStyle/>
           <a:p>
-            <a:pPr marL="0" indent="0">
+            <a:pPr indent="0" marL="0">
               <a:buNone/>
             </a:pPr>
             <a:r>
@@ -11792,13 +11763,6 @@
             <a:prstDash val="solid"/>
           </a:ln>
         </p:spPr>
-        <p:txBody>
-          <a:bodyPr/>
-          <a:lstStyle/>
-          <a:p>
-            <a:endParaRPr lang="en-US"/>
-          </a:p>
-        </p:txBody>
       </p:sp>
       <p:sp>
         <p:nvSpPr>
@@ -11824,13 +11788,6 @@
             <a:prstDash val="solid"/>
           </a:ln>
         </p:spPr>
-        <p:txBody>
-          <a:bodyPr/>
-          <a:lstStyle/>
-          <a:p>
-            <a:endParaRPr lang="en-US"/>
-          </a:p>
-        </p:txBody>
       </p:sp>
       <p:sp>
         <p:nvSpPr>
@@ -11853,7 +11810,7 @@
           <a:bodyPr wrap="square" lIns="0" tIns="0" rIns="0" bIns="0" rtlCol="0" anchor="ctr"/>
           <a:lstStyle/>
           <a:p>
-            <a:pPr marL="0" indent="0" algn="ctr">
+            <a:pPr algn="ctr" indent="0" marL="0">
               <a:buNone/>
             </a:pPr>
             <a:r>
@@ -11892,7 +11849,7 @@
           <a:bodyPr wrap="square" lIns="0" tIns="0" rIns="0" bIns="0" rtlCol="0" anchor="t"/>
           <a:lstStyle/>
           <a:p>
-            <a:pPr marL="0" indent="0">
+            <a:pPr indent="0" marL="0">
               <a:buNone/>
             </a:pPr>
             <a:r>
@@ -11931,7 +11888,7 @@
           <a:bodyPr wrap="square" lIns="0" tIns="0" rIns="0" bIns="0" rtlCol="0" anchor="t"/>
           <a:lstStyle/>
           <a:p>
-            <a:pPr marL="0" indent="0">
+            <a:pPr indent="0" marL="0">
               <a:buNone/>
             </a:pPr>
             <a:r>
@@ -11975,13 +11932,6 @@
             <a:prstDash val="solid"/>
           </a:ln>
         </p:spPr>
-        <p:txBody>
-          <a:bodyPr/>
-          <a:lstStyle/>
-          <a:p>
-            <a:endParaRPr lang="en-US"/>
-          </a:p>
-        </p:txBody>
       </p:sp>
       <p:sp>
         <p:nvSpPr>
@@ -12007,13 +11957,6 @@
             <a:prstDash val="solid"/>
           </a:ln>
         </p:spPr>
-        <p:txBody>
-          <a:bodyPr/>
-          <a:lstStyle/>
-          <a:p>
-            <a:endParaRPr lang="en-US"/>
-          </a:p>
-        </p:txBody>
       </p:sp>
       <p:sp>
         <p:nvSpPr>
@@ -12036,7 +11979,7 @@
           <a:bodyPr wrap="square" lIns="0" tIns="0" rIns="0" bIns="0" rtlCol="0" anchor="ctr"/>
           <a:lstStyle/>
           <a:p>
-            <a:pPr marL="0" indent="0" algn="ctr">
+            <a:pPr algn="ctr" indent="0" marL="0">
               <a:buNone/>
             </a:pPr>
             <a:r>
@@ -12075,7 +12018,7 @@
           <a:bodyPr wrap="square" lIns="0" tIns="0" rIns="0" bIns="0" rtlCol="0" anchor="t"/>
           <a:lstStyle/>
           <a:p>
-            <a:pPr marL="0" indent="0">
+            <a:pPr indent="0" marL="0">
               <a:buNone/>
             </a:pPr>
             <a:r>
@@ -12114,7 +12057,7 @@
           <a:bodyPr wrap="square" lIns="0" tIns="0" rIns="0" bIns="0" rtlCol="0" anchor="t"/>
           <a:lstStyle/>
           <a:p>
-            <a:pPr marL="0" indent="0">
+            <a:pPr indent="0" marL="0">
               <a:buNone/>
             </a:pPr>
             <a:r>
@@ -12158,13 +12101,6 @@
             <a:prstDash val="solid"/>
           </a:ln>
         </p:spPr>
-        <p:txBody>
-          <a:bodyPr/>
-          <a:lstStyle/>
-          <a:p>
-            <a:endParaRPr lang="en-US"/>
-          </a:p>
-        </p:txBody>
       </p:sp>
       <p:sp>
         <p:nvSpPr>
@@ -12190,13 +12126,6 @@
             <a:prstDash val="solid"/>
           </a:ln>
         </p:spPr>
-        <p:txBody>
-          <a:bodyPr/>
-          <a:lstStyle/>
-          <a:p>
-            <a:endParaRPr lang="en-US"/>
-          </a:p>
-        </p:txBody>
       </p:sp>
       <p:sp>
         <p:nvSpPr>
@@ -12219,7 +12148,7 @@
           <a:bodyPr wrap="square" lIns="0" tIns="0" rIns="0" bIns="0" rtlCol="0" anchor="ctr"/>
           <a:lstStyle/>
           <a:p>
-            <a:pPr marL="0" indent="0" algn="ctr">
+            <a:pPr algn="ctr" indent="0" marL="0">
               <a:buNone/>
             </a:pPr>
             <a:r>
@@ -12258,7 +12187,7 @@
           <a:bodyPr wrap="square" lIns="0" tIns="0" rIns="0" bIns="0" rtlCol="0" anchor="t"/>
           <a:lstStyle/>
           <a:p>
-            <a:pPr marL="0" indent="0">
+            <a:pPr indent="0" marL="0">
               <a:buNone/>
             </a:pPr>
             <a:r>
@@ -12297,7 +12226,7 @@
           <a:bodyPr wrap="square" lIns="0" tIns="0" rIns="0" bIns="0" rtlCol="0" anchor="t"/>
           <a:lstStyle/>
           <a:p>
-            <a:pPr marL="0" indent="0">
+            <a:pPr indent="0" marL="0">
               <a:buNone/>
             </a:pPr>
             <a:r>
@@ -12341,13 +12270,6 @@
             <a:prstDash val="solid"/>
           </a:ln>
         </p:spPr>
-        <p:txBody>
-          <a:bodyPr/>
-          <a:lstStyle/>
-          <a:p>
-            <a:endParaRPr lang="en-US"/>
-          </a:p>
-        </p:txBody>
       </p:sp>
       <p:sp>
         <p:nvSpPr>
@@ -12373,13 +12295,6 @@
             <a:prstDash val="solid"/>
           </a:ln>
         </p:spPr>
-        <p:txBody>
-          <a:bodyPr/>
-          <a:lstStyle/>
-          <a:p>
-            <a:endParaRPr lang="en-US"/>
-          </a:p>
-        </p:txBody>
       </p:sp>
       <p:sp>
         <p:nvSpPr>
@@ -12402,7 +12317,7 @@
           <a:bodyPr wrap="square" lIns="0" tIns="0" rIns="0" bIns="0" rtlCol="0" anchor="ctr"/>
           <a:lstStyle/>
           <a:p>
-            <a:pPr marL="0" indent="0" algn="ctr">
+            <a:pPr algn="ctr" indent="0" marL="0">
               <a:buNone/>
             </a:pPr>
             <a:r>
@@ -12441,7 +12356,7 @@
           <a:bodyPr wrap="square" lIns="0" tIns="0" rIns="0" bIns="0" rtlCol="0" anchor="t"/>
           <a:lstStyle/>
           <a:p>
-            <a:pPr marL="0" indent="0">
+            <a:pPr indent="0" marL="0">
               <a:buNone/>
             </a:pPr>
             <a:r>
@@ -12480,7 +12395,7 @@
           <a:bodyPr wrap="square" lIns="0" tIns="0" rIns="0" bIns="0" rtlCol="0" anchor="t"/>
           <a:lstStyle/>
           <a:p>
-            <a:pPr marL="0" indent="0">
+            <a:pPr indent="0" marL="0">
               <a:buNone/>
             </a:pPr>
             <a:r>
@@ -12524,13 +12439,6 @@
             <a:prstDash val="solid"/>
           </a:ln>
         </p:spPr>
-        <p:txBody>
-          <a:bodyPr/>
-          <a:lstStyle/>
-          <a:p>
-            <a:endParaRPr lang="en-US"/>
-          </a:p>
-        </p:txBody>
       </p:sp>
       <p:sp>
         <p:nvSpPr>
@@ -12553,7 +12461,7 @@
           <a:bodyPr wrap="square" lIns="0" tIns="0" rIns="0" bIns="0" rtlCol="0" anchor="ctr"/>
           <a:lstStyle/>
           <a:p>
-            <a:pPr marL="0" indent="0">
+            <a:pPr indent="0" marL="0">
               <a:buNone/>
             </a:pPr>
             <a:r>
@@ -12567,6 +12475,9 @@
               </a:rPr>
               <a:t>Mô hình nền: </a:t>
             </a:r>
+            <a:pPr indent="0" marL="0">
+              <a:buNone/>
+            </a:pPr>
             <a:r>
               <a:rPr lang="en-US" sz="1300" dirty="0">
                 <a:solidFill>
@@ -12598,7 +12509,6 @@
         <a:solidFill>
           <a:srgbClr val="FFFFFF"/>
         </a:solidFill>
-        <a:effectLst/>
       </p:bgPr>
     </p:bg>
     <p:spTree>
@@ -12636,11 +12546,11 @@
           <a:bodyPr wrap="square" lIns="0" tIns="0" rIns="0" bIns="0" rtlCol="0" anchor="t"/>
           <a:lstStyle/>
           <a:p>
-            <a:pPr marL="0" indent="0">
+            <a:pPr indent="0" marL="0">
               <a:buNone/>
             </a:pPr>
             <a:r>
-              <a:rPr lang="en-US" sz="1100" b="1" kern="0" spc="200" dirty="0">
+              <a:rPr lang="en-US" sz="1100" b="1" spc="200" kern="0" dirty="0">
                 <a:solidFill>
                   <a:srgbClr val="D98C1F"/>
                 </a:solidFill>
@@ -12675,7 +12585,7 @@
           <a:bodyPr wrap="square" lIns="0" tIns="0" rIns="0" bIns="0" rtlCol="0" anchor="ctr"/>
           <a:lstStyle/>
           <a:p>
-            <a:pPr marL="0" indent="0">
+            <a:pPr indent="0" marL="0">
               <a:buNone/>
             </a:pPr>
             <a:r>
@@ -12719,13 +12629,6 @@
             <a:prstDash val="solid"/>
           </a:ln>
         </p:spPr>
-        <p:txBody>
-          <a:bodyPr/>
-          <a:lstStyle/>
-          <a:p>
-            <a:endParaRPr lang="en-US"/>
-          </a:p>
-        </p:txBody>
       </p:sp>
       <p:sp>
         <p:nvSpPr>
@@ -12751,13 +12654,6 @@
             <a:prstDash val="solid"/>
           </a:ln>
         </p:spPr>
-        <p:txBody>
-          <a:bodyPr/>
-          <a:lstStyle/>
-          <a:p>
-            <a:endParaRPr lang="en-US"/>
-          </a:p>
-        </p:txBody>
       </p:sp>
       <p:sp>
         <p:nvSpPr>
@@ -12780,7 +12676,7 @@
           <a:bodyPr wrap="square" lIns="0" tIns="0" rIns="0" bIns="0" rtlCol="0" anchor="ctr"/>
           <a:lstStyle/>
           <a:p>
-            <a:pPr marL="0" indent="0">
+            <a:pPr indent="0" marL="0">
               <a:buNone/>
             </a:pPr>
             <a:r>
@@ -12819,7 +12715,7 @@
           <a:bodyPr wrap="square" lIns="0" tIns="0" rIns="0" bIns="0" rtlCol="0" anchor="ctr"/>
           <a:lstStyle/>
           <a:p>
-            <a:pPr marL="0" indent="0">
+            <a:pPr indent="0" marL="0">
               <a:buNone/>
             </a:pPr>
             <a:r>
@@ -12858,7 +12754,7 @@
           <a:bodyPr wrap="square" lIns="0" tIns="0" rIns="0" bIns="0" rtlCol="0" anchor="ctr"/>
           <a:lstStyle/>
           <a:p>
-            <a:pPr marL="0" indent="0">
+            <a:pPr indent="0" marL="0">
               <a:buNone/>
             </a:pPr>
             <a:r>
@@ -12897,7 +12793,7 @@
           <a:bodyPr wrap="square" lIns="0" tIns="0" rIns="0" bIns="0" rtlCol="0" anchor="ctr"/>
           <a:lstStyle/>
           <a:p>
-            <a:pPr marL="0" indent="0">
+            <a:pPr indent="0" marL="0">
               <a:buNone/>
             </a:pPr>
             <a:r>
@@ -12909,7 +12805,7 @@
                 <a:ea typeface="Courier New" pitchFamily="34" charset="-122"/>
                 <a:cs typeface="Courier New" pitchFamily="34" charset="-120"/>
               </a:rPr>
-              <a:t>type   </a:t>
+              <a:t>type   (35 lớp)</a:t>
             </a:r>
             <a:endParaRPr lang="en-US" sz="950" dirty="0"/>
           </a:p>
@@ -12936,7 +12832,7 @@
           <a:bodyPr wrap="square" lIns="0" tIns="0" rIns="0" bIns="0" rtlCol="0" anchor="ctr"/>
           <a:lstStyle/>
           <a:p>
-            <a:pPr marL="0" indent="0">
+            <a:pPr indent="0" marL="0">
               <a:buNone/>
             </a:pPr>
             <a:r>
@@ -12975,7 +12871,7 @@
           <a:bodyPr wrap="square" lIns="0" tIns="0" rIns="0" bIns="0" rtlCol="0" anchor="ctr"/>
           <a:lstStyle/>
           <a:p>
-            <a:pPr marL="0" indent="0">
+            <a:pPr indent="0" marL="0">
               <a:buNone/>
             </a:pPr>
             <a:r>
@@ -13019,13 +12915,6 @@
             <a:prstDash val="solid"/>
           </a:ln>
         </p:spPr>
-        <p:txBody>
-          <a:bodyPr/>
-          <a:lstStyle/>
-          <a:p>
-            <a:endParaRPr lang="en-US"/>
-          </a:p>
-        </p:txBody>
       </p:sp>
       <p:sp>
         <p:nvSpPr>
@@ -13051,13 +12940,6 @@
             <a:prstDash val="solid"/>
           </a:ln>
         </p:spPr>
-        <p:txBody>
-          <a:bodyPr/>
-          <a:lstStyle/>
-          <a:p>
-            <a:endParaRPr lang="en-US"/>
-          </a:p>
-        </p:txBody>
       </p:sp>
       <p:sp>
         <p:nvSpPr>
@@ -13080,7 +12962,7 @@
           <a:bodyPr wrap="square" lIns="0" tIns="0" rIns="0" bIns="0" rtlCol="0" anchor="ctr"/>
           <a:lstStyle/>
           <a:p>
-            <a:pPr marL="0" indent="0">
+            <a:pPr indent="0" marL="0">
               <a:buNone/>
             </a:pPr>
             <a:r>
@@ -13119,11 +13001,11 @@
           <a:bodyPr wrap="square" lIns="0" tIns="0" rIns="0" bIns="0" rtlCol="0" anchor="ctr"/>
           <a:lstStyle/>
           <a:p>
-            <a:pPr marL="0" indent="0">
+            <a:pPr indent="0" marL="0">
               <a:buNone/>
             </a:pPr>
             <a:r>
-              <a:rPr lang="en-US" sz="950" dirty="0" err="1">
+              <a:rPr lang="en-US" sz="950" dirty="0">
                 <a:solidFill>
                   <a:srgbClr val="1E2A32"/>
                 </a:solidFill>
@@ -13131,8 +13013,36 @@
                 <a:ea typeface="Courier New" pitchFamily="34" charset="-122"/>
                 <a:cs typeface="Courier New" pitchFamily="34" charset="-120"/>
               </a:rPr>
-              <a:t>event_id</a:t>
-            </a:r>
+              <a:t>event_id  → events</a:t>
+            </a:r>
+            <a:endParaRPr lang="en-US" sz="950" dirty="0"/>
+          </a:p>
+        </p:txBody>
+      </p:sp>
+      <p:sp>
+        <p:nvSpPr>
+          <p:cNvPr id="16" name="Text 14"/>
+          <p:cNvSpPr txBox="1"/>
+          <p:nvPr/>
+        </p:nvSpPr>
+        <p:spPr>
+          <a:xfrm>
+            <a:off x="3310128" y="2016252"/>
+            <a:ext cx="2011680" cy="214884"/>
+          </a:xfrm>
+          <a:prstGeom prst="rect">
+            <a:avLst/>
+          </a:prstGeom>
+          <a:noFill/>
+          <a:ln/>
+        </p:spPr>
+        <p:txBody>
+          <a:bodyPr wrap="square" lIns="0" tIns="0" rIns="0" bIns="0" rtlCol="0" anchor="ctr"/>
+          <a:lstStyle/>
+          <a:p>
+            <a:pPr indent="0" marL="0">
+              <a:buNone/>
+            </a:pPr>
             <a:r>
               <a:rPr lang="en-US" sz="950" dirty="0">
                 <a:solidFill>
@@ -13142,57 +13052,7 @@
                 <a:ea typeface="Courier New" pitchFamily="34" charset="-122"/>
                 <a:cs typeface="Courier New" pitchFamily="34" charset="-120"/>
               </a:rPr>
-              <a:t> </a:t>
-            </a:r>
-            <a:endParaRPr lang="en-US" sz="950" dirty="0"/>
-          </a:p>
-        </p:txBody>
-      </p:sp>
-      <p:sp>
-        <p:nvSpPr>
-          <p:cNvPr id="16" name="Text 14"/>
-          <p:cNvSpPr txBox="1"/>
-          <p:nvPr/>
-        </p:nvSpPr>
-        <p:spPr>
-          <a:xfrm>
-            <a:off x="3310128" y="2016252"/>
-            <a:ext cx="2011680" cy="214884"/>
-          </a:xfrm>
-          <a:prstGeom prst="rect">
-            <a:avLst/>
-          </a:prstGeom>
-          <a:noFill/>
-          <a:ln/>
-        </p:spPr>
-        <p:txBody>
-          <a:bodyPr wrap="square" lIns="0" tIns="0" rIns="0" bIns="0" rtlCol="0" anchor="ctr"/>
-          <a:lstStyle/>
-          <a:p>
-            <a:pPr marL="0" indent="0">
-              <a:buNone/>
-            </a:pPr>
-            <a:r>
-              <a:rPr lang="en-US" sz="950" dirty="0" err="1">
-                <a:solidFill>
-                  <a:srgbClr val="1E2A32"/>
-                </a:solidFill>
-                <a:latin typeface="Courier New" pitchFamily="34" charset="0"/>
-                <a:ea typeface="Courier New" pitchFamily="34" charset="-122"/>
-                <a:cs typeface="Courier New" pitchFamily="34" charset="-120"/>
-              </a:rPr>
-              <a:t>entity_id</a:t>
-            </a:r>
-            <a:r>
-              <a:rPr lang="en-US" sz="950" dirty="0">
-                <a:solidFill>
-                  <a:srgbClr val="1E2A32"/>
-                </a:solidFill>
-                <a:latin typeface="Courier New" pitchFamily="34" charset="0"/>
-                <a:ea typeface="Courier New" pitchFamily="34" charset="-122"/>
-                <a:cs typeface="Courier New" pitchFamily="34" charset="-120"/>
-              </a:rPr>
-              <a:t> </a:t>
+              <a:t>entity_id → entities</a:t>
             </a:r>
             <a:endParaRPr lang="en-US" sz="950" dirty="0"/>
           </a:p>
@@ -13224,13 +13084,6 @@
             <a:prstDash val="solid"/>
           </a:ln>
         </p:spPr>
-        <p:txBody>
-          <a:bodyPr/>
-          <a:lstStyle/>
-          <a:p>
-            <a:endParaRPr lang="en-US"/>
-          </a:p>
-        </p:txBody>
       </p:sp>
       <p:sp>
         <p:nvSpPr>
@@ -13256,13 +13109,6 @@
             <a:prstDash val="solid"/>
           </a:ln>
         </p:spPr>
-        <p:txBody>
-          <a:bodyPr/>
-          <a:lstStyle/>
-          <a:p>
-            <a:endParaRPr lang="en-US"/>
-          </a:p>
-        </p:txBody>
       </p:sp>
       <p:sp>
         <p:nvSpPr>
@@ -13285,7 +13131,7 @@
           <a:bodyPr wrap="square" lIns="0" tIns="0" rIns="0" bIns="0" rtlCol="0" anchor="ctr"/>
           <a:lstStyle/>
           <a:p>
-            <a:pPr marL="0" indent="0">
+            <a:pPr indent="0" marL="0">
               <a:buNone/>
             </a:pPr>
             <a:r>
@@ -13324,7 +13170,7 @@
           <a:bodyPr wrap="square" lIns="0" tIns="0" rIns="0" bIns="0" rtlCol="0" anchor="ctr"/>
           <a:lstStyle/>
           <a:p>
-            <a:pPr marL="0" indent="0">
+            <a:pPr indent="0" marL="0">
               <a:buNone/>
             </a:pPr>
             <a:r>
@@ -13363,7 +13209,7 @@
           <a:bodyPr wrap="square" lIns="0" tIns="0" rIns="0" bIns="0" rtlCol="0" anchor="ctr"/>
           <a:lstStyle/>
           <a:p>
-            <a:pPr marL="0" indent="0">
+            <a:pPr indent="0" marL="0">
               <a:buNone/>
             </a:pPr>
             <a:r>
@@ -13402,7 +13248,7 @@
           <a:bodyPr wrap="square" lIns="0" tIns="0" rIns="0" bIns="0" rtlCol="0" anchor="ctr"/>
           <a:lstStyle/>
           <a:p>
-            <a:pPr marL="0" indent="0">
+            <a:pPr indent="0" marL="0">
               <a:buNone/>
             </a:pPr>
             <a:r>
@@ -13441,7 +13287,7 @@
           <a:bodyPr wrap="square" lIns="0" tIns="0" rIns="0" bIns="0" rtlCol="0" anchor="ctr"/>
           <a:lstStyle/>
           <a:p>
-            <a:pPr marL="0" indent="0">
+            <a:pPr indent="0" marL="0">
               <a:buNone/>
             </a:pPr>
             <a:r>
@@ -13480,7 +13326,7 @@
           <a:bodyPr wrap="square" lIns="0" tIns="0" rIns="0" bIns="0" rtlCol="0" anchor="ctr"/>
           <a:lstStyle/>
           <a:p>
-            <a:pPr marL="0" indent="0">
+            <a:pPr indent="0" marL="0">
               <a:buNone/>
             </a:pPr>
             <a:r>
@@ -13524,13 +13370,6 @@
             <a:prstDash val="solid"/>
           </a:ln>
         </p:spPr>
-        <p:txBody>
-          <a:bodyPr/>
-          <a:lstStyle/>
-          <a:p>
-            <a:endParaRPr lang="en-US"/>
-          </a:p>
-        </p:txBody>
       </p:sp>
       <p:sp>
         <p:nvSpPr>
@@ -13556,13 +13395,6 @@
             <a:prstDash val="solid"/>
           </a:ln>
         </p:spPr>
-        <p:txBody>
-          <a:bodyPr/>
-          <a:lstStyle/>
-          <a:p>
-            <a:endParaRPr lang="en-US"/>
-          </a:p>
-        </p:txBody>
       </p:sp>
       <p:sp>
         <p:nvSpPr>
@@ -13585,7 +13417,7 @@
           <a:bodyPr wrap="square" lIns="0" tIns="0" rIns="0" bIns="0" rtlCol="0" anchor="ctr"/>
           <a:lstStyle/>
           <a:p>
-            <a:pPr marL="0" indent="0">
+            <a:pPr indent="0" marL="0">
               <a:buNone/>
             </a:pPr>
             <a:r>
@@ -13624,7 +13456,7 @@
           <a:bodyPr wrap="square" lIns="0" tIns="0" rIns="0" bIns="0" rtlCol="0" anchor="ctr"/>
           <a:lstStyle/>
           <a:p>
-            <a:pPr marL="0" indent="0">
+            <a:pPr indent="0" marL="0">
               <a:buNone/>
             </a:pPr>
             <a:r>
@@ -13663,7 +13495,7 @@
           <a:bodyPr wrap="square" lIns="0" tIns="0" rIns="0" bIns="0" rtlCol="0" anchor="ctr"/>
           <a:lstStyle/>
           <a:p>
-            <a:pPr marL="0" indent="0">
+            <a:pPr indent="0" marL="0">
               <a:buNone/>
             </a:pPr>
             <a:r>
@@ -13675,7 +13507,7 @@
                 <a:ea typeface="Courier New" pitchFamily="34" charset="-122"/>
                 <a:cs typeface="Courier New" pitchFamily="34" charset="-120"/>
               </a:rPr>
-              <a:t>name   </a:t>
+              <a:t>name   (snake_case)</a:t>
             </a:r>
             <a:endParaRPr lang="en-US" sz="950" dirty="0"/>
           </a:p>
@@ -13702,7 +13534,7 @@
           <a:bodyPr wrap="square" lIns="0" tIns="0" rIns="0" bIns="0" rtlCol="0" anchor="ctr"/>
           <a:lstStyle/>
           <a:p>
-            <a:pPr marL="0" indent="0">
+            <a:pPr indent="0" marL="0">
               <a:buNone/>
             </a:pPr>
             <a:r>
@@ -13746,13 +13578,6 @@
             <a:prstDash val="solid"/>
           </a:ln>
         </p:spPr>
-        <p:txBody>
-          <a:bodyPr/>
-          <a:lstStyle/>
-          <a:p>
-            <a:endParaRPr lang="en-US"/>
-          </a:p>
-        </p:txBody>
       </p:sp>
       <p:sp>
         <p:nvSpPr>
@@ -13778,13 +13603,6 @@
             <a:prstDash val="solid"/>
           </a:ln>
         </p:spPr>
-        <p:txBody>
-          <a:bodyPr/>
-          <a:lstStyle/>
-          <a:p>
-            <a:endParaRPr lang="en-US"/>
-          </a:p>
-        </p:txBody>
       </p:sp>
       <p:sp>
         <p:nvSpPr>
@@ -13807,7 +13625,7 @@
           <a:bodyPr wrap="square" lIns="0" tIns="0" rIns="0" bIns="0" rtlCol="0" anchor="ctr"/>
           <a:lstStyle/>
           <a:p>
-            <a:pPr marL="0" indent="0">
+            <a:pPr indent="0" marL="0">
               <a:buNone/>
             </a:pPr>
             <a:r>
@@ -13846,7 +13664,7 @@
           <a:bodyPr wrap="square" lIns="0" tIns="0" rIns="0" bIns="0" rtlCol="0" anchor="ctr"/>
           <a:lstStyle/>
           <a:p>
-            <a:pPr marL="0" indent="0">
+            <a:pPr indent="0" marL="0">
               <a:buNone/>
             </a:pPr>
             <a:r>
@@ -13885,11 +13703,11 @@
           <a:bodyPr wrap="square" lIns="0" tIns="0" rIns="0" bIns="0" rtlCol="0" anchor="ctr"/>
           <a:lstStyle/>
           <a:p>
-            <a:pPr marL="0" indent="0">
+            <a:pPr indent="0" marL="0">
               <a:buNone/>
             </a:pPr>
             <a:r>
-              <a:rPr lang="en-US" sz="950" dirty="0" err="1">
+              <a:rPr lang="en-US" sz="950" dirty="0">
                 <a:solidFill>
                   <a:srgbClr val="1E2A32"/>
                 </a:solidFill>
@@ -13897,8 +13715,36 @@
                 <a:ea typeface="Courier New" pitchFamily="34" charset="-122"/>
                 <a:cs typeface="Courier New" pitchFamily="34" charset="-120"/>
               </a:rPr>
-              <a:t>subject_id</a:t>
-            </a:r>
+              <a:t>subject_id  → entities</a:t>
+            </a:r>
+            <a:endParaRPr lang="en-US" sz="950" dirty="0"/>
+          </a:p>
+        </p:txBody>
+      </p:sp>
+      <p:sp>
+        <p:nvSpPr>
+          <p:cNvPr id="36" name="Text 34"/>
+          <p:cNvSpPr txBox="1"/>
+          <p:nvPr/>
+        </p:nvSpPr>
+        <p:spPr>
+          <a:xfrm>
+            <a:off x="3310128" y="3511296"/>
+            <a:ext cx="2011680" cy="214884"/>
+          </a:xfrm>
+          <a:prstGeom prst="rect">
+            <a:avLst/>
+          </a:prstGeom>
+          <a:noFill/>
+          <a:ln/>
+        </p:spPr>
+        <p:txBody>
+          <a:bodyPr wrap="square" lIns="0" tIns="0" rIns="0" bIns="0" rtlCol="0" anchor="ctr"/>
+          <a:lstStyle/>
+          <a:p>
+            <a:pPr indent="0" marL="0">
+              <a:buNone/>
+            </a:pPr>
             <a:r>
               <a:rPr lang="en-US" sz="950" dirty="0">
                 <a:solidFill>
@@ -13908,7 +13754,7 @@
                 <a:ea typeface="Courier New" pitchFamily="34" charset="-122"/>
                 <a:cs typeface="Courier New" pitchFamily="34" charset="-120"/>
               </a:rPr>
-              <a:t>  </a:t>
+              <a:t>property_id → properties</a:t>
             </a:r>
             <a:endParaRPr lang="en-US" sz="950" dirty="0"/>
           </a:p>
@@ -13916,13 +13762,13 @@
       </p:sp>
       <p:sp>
         <p:nvSpPr>
-          <p:cNvPr id="36" name="Text 34"/>
+          <p:cNvPr id="37" name="Text 35"/>
           <p:cNvSpPr txBox="1"/>
           <p:nvPr/>
         </p:nvSpPr>
         <p:spPr>
           <a:xfrm>
-            <a:off x="3310128" y="3511296"/>
+            <a:off x="3310128" y="3726180"/>
             <a:ext cx="2011680" cy="214884"/>
           </a:xfrm>
           <a:prstGeom prst="rect">
@@ -13935,11 +13781,11 @@
           <a:bodyPr wrap="square" lIns="0" tIns="0" rIns="0" bIns="0" rtlCol="0" anchor="ctr"/>
           <a:lstStyle/>
           <a:p>
-            <a:pPr marL="0" indent="0">
+            <a:pPr indent="0" marL="0">
               <a:buNone/>
             </a:pPr>
             <a:r>
-              <a:rPr lang="en-US" sz="950" dirty="0" err="1">
+              <a:rPr lang="en-US" sz="950" dirty="0">
                 <a:solidFill>
                   <a:srgbClr val="1E2A32"/>
                 </a:solidFill>
@@ -13947,8 +13793,36 @@
                 <a:ea typeface="Courier New" pitchFamily="34" charset="-122"/>
                 <a:cs typeface="Courier New" pitchFamily="34" charset="-120"/>
               </a:rPr>
-              <a:t>property_id</a:t>
-            </a:r>
+              <a:t>value_json · dtype</a:t>
+            </a:r>
+            <a:endParaRPr lang="en-US" sz="950" dirty="0"/>
+          </a:p>
+        </p:txBody>
+      </p:sp>
+      <p:sp>
+        <p:nvSpPr>
+          <p:cNvPr id="38" name="Text 36"/>
+          <p:cNvSpPr txBox="1"/>
+          <p:nvPr/>
+        </p:nvSpPr>
+        <p:spPr>
+          <a:xfrm>
+            <a:off x="3310128" y="3941064"/>
+            <a:ext cx="2011680" cy="214884"/>
+          </a:xfrm>
+          <a:prstGeom prst="rect">
+            <a:avLst/>
+          </a:prstGeom>
+          <a:noFill/>
+          <a:ln/>
+        </p:spPr>
+        <p:txBody>
+          <a:bodyPr wrap="square" lIns="0" tIns="0" rIns="0" bIns="0" rtlCol="0" anchor="ctr"/>
+          <a:lstStyle/>
+          <a:p>
+            <a:pPr indent="0" marL="0">
+              <a:buNone/>
+            </a:pPr>
             <a:r>
               <a:rPr lang="en-US" sz="950" dirty="0">
                 <a:solidFill>
@@ -13958,7 +13832,7 @@
                 <a:ea typeface="Courier New" pitchFamily="34" charset="-122"/>
                 <a:cs typeface="Courier New" pitchFamily="34" charset="-120"/>
               </a:rPr>
-              <a:t> </a:t>
+              <a:t>t_from · t_to</a:t>
             </a:r>
             <a:endParaRPr lang="en-US" sz="950" dirty="0"/>
           </a:p>
@@ -13966,13 +13840,13 @@
       </p:sp>
       <p:sp>
         <p:nvSpPr>
-          <p:cNvPr id="37" name="Text 35"/>
+          <p:cNvPr id="39" name="Text 37"/>
           <p:cNvSpPr txBox="1"/>
           <p:nvPr/>
         </p:nvSpPr>
         <p:spPr>
           <a:xfrm>
-            <a:off x="3310128" y="3726180"/>
+            <a:off x="3310128" y="4155948"/>
             <a:ext cx="2011680" cy="214884"/>
           </a:xfrm>
           <a:prstGeom prst="rect">
@@ -13985,11 +13859,11 @@
           <a:bodyPr wrap="square" lIns="0" tIns="0" rIns="0" bIns="0" rtlCol="0" anchor="ctr"/>
           <a:lstStyle/>
           <a:p>
-            <a:pPr marL="0" indent="0">
+            <a:pPr indent="0" marL="0">
               <a:buNone/>
             </a:pPr>
             <a:r>
-              <a:rPr lang="en-US" sz="950" dirty="0" err="1">
+              <a:rPr lang="en-US" sz="950" dirty="0">
                 <a:solidFill>
                   <a:srgbClr val="1E2A32"/>
                 </a:solidFill>
@@ -13997,7 +13871,7 @@
                 <a:ea typeface="Courier New" pitchFamily="34" charset="-122"/>
                 <a:cs typeface="Courier New" pitchFamily="34" charset="-120"/>
               </a:rPr>
-              <a:t>value_json</a:t>
+              <a:t>confidence</a:t>
             </a:r>
             <a:endParaRPr lang="en-US" sz="950" dirty="0"/>
           </a:p>
@@ -14005,13 +13879,13 @@
       </p:sp>
       <p:sp>
         <p:nvSpPr>
-          <p:cNvPr id="38" name="Text 36"/>
+          <p:cNvPr id="40" name="Text 38"/>
           <p:cNvSpPr txBox="1"/>
           <p:nvPr/>
         </p:nvSpPr>
         <p:spPr>
           <a:xfrm>
-            <a:off x="3310128" y="3941064"/>
+            <a:off x="3310128" y="4370832"/>
             <a:ext cx="2011680" cy="214884"/>
           </a:xfrm>
           <a:prstGeom prst="rect">
@@ -14024,7 +13898,7 @@
           <a:bodyPr wrap="square" lIns="0" tIns="0" rIns="0" bIns="0" rtlCol="0" anchor="ctr"/>
           <a:lstStyle/>
           <a:p>
-            <a:pPr marL="0" indent="0">
+            <a:pPr indent="0" marL="0">
               <a:buNone/>
             </a:pPr>
             <a:r>
@@ -14036,96 +13910,7 @@
                 <a:ea typeface="Courier New" pitchFamily="34" charset="-122"/>
                 <a:cs typeface="Courier New" pitchFamily="34" charset="-120"/>
               </a:rPr>
-              <a:t>t_from · t_to</a:t>
-            </a:r>
-            <a:endParaRPr lang="en-US" sz="950" dirty="0"/>
-          </a:p>
-        </p:txBody>
-      </p:sp>
-      <p:sp>
-        <p:nvSpPr>
-          <p:cNvPr id="39" name="Text 37"/>
-          <p:cNvSpPr txBox="1"/>
-          <p:nvPr/>
-        </p:nvSpPr>
-        <p:spPr>
-          <a:xfrm>
-            <a:off x="3310128" y="4155948"/>
-            <a:ext cx="2011680" cy="214884"/>
-          </a:xfrm>
-          <a:prstGeom prst="rect">
-            <a:avLst/>
-          </a:prstGeom>
-          <a:noFill/>
-          <a:ln/>
-        </p:spPr>
-        <p:txBody>
-          <a:bodyPr wrap="square" lIns="0" tIns="0" rIns="0" bIns="0" rtlCol="0" anchor="ctr"/>
-          <a:lstStyle/>
-          <a:p>
-            <a:pPr marL="0" indent="0">
-              <a:buNone/>
-            </a:pPr>
-            <a:r>
-              <a:rPr lang="en-US" sz="950" dirty="0">
-                <a:solidFill>
-                  <a:srgbClr val="1E2A32"/>
-                </a:solidFill>
-                <a:latin typeface="Courier New" pitchFamily="34" charset="0"/>
-                <a:ea typeface="Courier New" pitchFamily="34" charset="-122"/>
-                <a:cs typeface="Courier New" pitchFamily="34" charset="-120"/>
-              </a:rPr>
-              <a:t>confidence</a:t>
-            </a:r>
-            <a:endParaRPr lang="en-US" sz="950" dirty="0"/>
-          </a:p>
-        </p:txBody>
-      </p:sp>
-      <p:sp>
-        <p:nvSpPr>
-          <p:cNvPr id="40" name="Text 38"/>
-          <p:cNvSpPr txBox="1"/>
-          <p:nvPr/>
-        </p:nvSpPr>
-        <p:spPr>
-          <a:xfrm>
-            <a:off x="3310128" y="4370832"/>
-            <a:ext cx="2011680" cy="214884"/>
-          </a:xfrm>
-          <a:prstGeom prst="rect">
-            <a:avLst/>
-          </a:prstGeom>
-          <a:noFill/>
-          <a:ln/>
-        </p:spPr>
-        <p:txBody>
-          <a:bodyPr wrap="square" lIns="0" tIns="0" rIns="0" bIns="0" rtlCol="0" anchor="ctr"/>
-          <a:lstStyle/>
-          <a:p>
-            <a:pPr marL="0" indent="0">
-              <a:buNone/>
-            </a:pPr>
-            <a:r>
-              <a:rPr lang="en-US" sz="950" dirty="0" err="1">
-                <a:solidFill>
-                  <a:srgbClr val="1E2A32"/>
-                </a:solidFill>
-                <a:latin typeface="Courier New" pitchFamily="34" charset="0"/>
-                <a:ea typeface="Courier New" pitchFamily="34" charset="-122"/>
-                <a:cs typeface="Courier New" pitchFamily="34" charset="-120"/>
-              </a:rPr>
-              <a:t>event_id</a:t>
-            </a:r>
-            <a:r>
-              <a:rPr lang="en-US" sz="950" dirty="0">
-                <a:solidFill>
-                  <a:srgbClr val="1E2A32"/>
-                </a:solidFill>
-                <a:latin typeface="Courier New" pitchFamily="34" charset="0"/>
-                <a:ea typeface="Courier New" pitchFamily="34" charset="-122"/>
-                <a:cs typeface="Courier New" pitchFamily="34" charset="-120"/>
-              </a:rPr>
-              <a:t>    </a:t>
+              <a:t>event_id    → events</a:t>
             </a:r>
             <a:endParaRPr lang="en-US" sz="950" dirty="0"/>
           </a:p>
@@ -14139,12 +13924,12 @@
         </p:nvSpPr>
         <p:spPr>
           <a:xfrm>
-            <a:off x="3200400" y="4892040"/>
-            <a:ext cx="2194560" cy="1083564"/>
+            <a:off x="3200400" y="4846320"/>
+            <a:ext cx="2194560" cy="1298448"/>
           </a:xfrm>
           <a:prstGeom prst="roundRect">
             <a:avLst>
-              <a:gd name="adj" fmla="val 5063"/>
+              <a:gd name="adj" fmla="val 4225"/>
             </a:avLst>
           </a:prstGeom>
           <a:solidFill>
@@ -14157,13 +13942,6 @@
             <a:prstDash val="solid"/>
           </a:ln>
         </p:spPr>
-        <p:txBody>
-          <a:bodyPr/>
-          <a:lstStyle/>
-          <a:p>
-            <a:endParaRPr lang="en-US"/>
-          </a:p>
-        </p:txBody>
       </p:sp>
       <p:sp>
         <p:nvSpPr>
@@ -14173,7 +13951,7 @@
         </p:nvSpPr>
         <p:spPr>
           <a:xfrm>
-            <a:off x="3200400" y="4892040"/>
+            <a:off x="3200400" y="4846320"/>
             <a:ext cx="2194560" cy="329184"/>
           </a:xfrm>
           <a:prstGeom prst="rect">
@@ -14189,13 +13967,6 @@
             <a:prstDash val="solid"/>
           </a:ln>
         </p:spPr>
-        <p:txBody>
-          <a:bodyPr/>
-          <a:lstStyle/>
-          <a:p>
-            <a:endParaRPr lang="en-US"/>
-          </a:p>
-        </p:txBody>
       </p:sp>
       <p:sp>
         <p:nvSpPr>
@@ -14205,7 +13976,7 @@
         </p:nvSpPr>
         <p:spPr>
           <a:xfrm>
-            <a:off x="3310128" y="4892040"/>
+            <a:off x="3310128" y="4846320"/>
             <a:ext cx="2011680" cy="329184"/>
           </a:xfrm>
           <a:prstGeom prst="rect">
@@ -14218,7 +13989,7 @@
           <a:bodyPr wrap="square" lIns="0" tIns="0" rIns="0" bIns="0" rtlCol="0" anchor="ctr"/>
           <a:lstStyle/>
           <a:p>
-            <a:pPr marL="0" indent="0">
+            <a:pPr indent="0" marL="0">
               <a:buNone/>
             </a:pPr>
             <a:r>
@@ -14244,7 +14015,7 @@
         </p:nvSpPr>
         <p:spPr>
           <a:xfrm>
-            <a:off x="3310128" y="5276088"/>
+            <a:off x="3310128" y="5230368"/>
             <a:ext cx="2011680" cy="214884"/>
           </a:xfrm>
           <a:prstGeom prst="rect">
@@ -14257,11 +14028,11 @@
           <a:bodyPr wrap="square" lIns="0" tIns="0" rIns="0" bIns="0" rtlCol="0" anchor="ctr"/>
           <a:lstStyle/>
           <a:p>
-            <a:pPr marL="0" indent="0">
+            <a:pPr indent="0" marL="0">
               <a:buNone/>
             </a:pPr>
             <a:r>
-              <a:rPr lang="en-US" sz="950" dirty="0" err="1">
+              <a:rPr lang="en-US" sz="950" dirty="0">
                 <a:solidFill>
                   <a:srgbClr val="1E2A32"/>
                 </a:solidFill>
@@ -14269,8 +14040,36 @@
                 <a:ea typeface="Courier New" pitchFamily="34" charset="-122"/>
                 <a:cs typeface="Courier New" pitchFamily="34" charset="-120"/>
               </a:rPr>
-              <a:t>fact_id</a:t>
-            </a:r>
+              <a:t>fact_id  → facts</a:t>
+            </a:r>
+            <a:endParaRPr lang="en-US" sz="950" dirty="0"/>
+          </a:p>
+        </p:txBody>
+      </p:sp>
+      <p:sp>
+        <p:nvSpPr>
+          <p:cNvPr id="45" name="Text 43"/>
+          <p:cNvSpPr txBox="1"/>
+          <p:nvPr/>
+        </p:nvSpPr>
+        <p:spPr>
+          <a:xfrm>
+            <a:off x="3310128" y="5445252"/>
+            <a:ext cx="2011680" cy="214884"/>
+          </a:xfrm>
+          <a:prstGeom prst="rect">
+            <a:avLst/>
+          </a:prstGeom>
+          <a:noFill/>
+          <a:ln/>
+        </p:spPr>
+        <p:txBody>
+          <a:bodyPr wrap="square" lIns="0" tIns="0" rIns="0" bIns="0" rtlCol="0" anchor="ctr"/>
+          <a:lstStyle/>
+          <a:p>
+            <a:pPr indent="0" marL="0">
+              <a:buNone/>
+            </a:pPr>
             <a:r>
               <a:rPr lang="en-US" sz="950" dirty="0">
                 <a:solidFill>
@@ -14280,7 +14079,7 @@
                 <a:ea typeface="Courier New" pitchFamily="34" charset="-122"/>
                 <a:cs typeface="Courier New" pitchFamily="34" charset="-120"/>
               </a:rPr>
-              <a:t> </a:t>
+              <a:t>event_id → events</a:t>
             </a:r>
             <a:endParaRPr lang="en-US" sz="950" dirty="0"/>
           </a:p>
@@ -14288,13 +14087,13 @@
       </p:sp>
       <p:sp>
         <p:nvSpPr>
-          <p:cNvPr id="45" name="Text 43"/>
+          <p:cNvPr id="46" name="Text 44"/>
           <p:cNvSpPr txBox="1"/>
           <p:nvPr/>
         </p:nvSpPr>
         <p:spPr>
           <a:xfrm>
-            <a:off x="3310128" y="5490972"/>
+            <a:off x="3310128" y="5660136"/>
             <a:ext cx="2011680" cy="214884"/>
           </a:xfrm>
           <a:prstGeom prst="rect">
@@ -14307,11 +14106,11 @@
           <a:bodyPr wrap="square" lIns="0" tIns="0" rIns="0" bIns="0" rtlCol="0" anchor="ctr"/>
           <a:lstStyle/>
           <a:p>
-            <a:pPr marL="0" indent="0">
+            <a:pPr indent="0" marL="0">
               <a:buNone/>
             </a:pPr>
             <a:r>
-              <a:rPr lang="en-US" sz="950" dirty="0" err="1">
+              <a:rPr lang="en-US" sz="950" dirty="0">
                 <a:solidFill>
                   <a:srgbClr val="1E2A32"/>
                 </a:solidFill>
@@ -14319,8 +14118,36 @@
                 <a:ea typeface="Courier New" pitchFamily="34" charset="-122"/>
                 <a:cs typeface="Courier New" pitchFamily="34" charset="-120"/>
               </a:rPr>
-              <a:t>turn_id</a:t>
-            </a:r>
+              <a:t>turn_id  → turns</a:t>
+            </a:r>
+            <a:endParaRPr lang="en-US" sz="950" dirty="0"/>
+          </a:p>
+        </p:txBody>
+      </p:sp>
+      <p:sp>
+        <p:nvSpPr>
+          <p:cNvPr id="47" name="Text 45"/>
+          <p:cNvSpPr txBox="1"/>
+          <p:nvPr/>
+        </p:nvSpPr>
+        <p:spPr>
+          <a:xfrm>
+            <a:off x="3310128" y="5875020"/>
+            <a:ext cx="2011680" cy="214884"/>
+          </a:xfrm>
+          <a:prstGeom prst="rect">
+            <a:avLst/>
+          </a:prstGeom>
+          <a:noFill/>
+          <a:ln/>
+        </p:spPr>
+        <p:txBody>
+          <a:bodyPr wrap="square" lIns="0" tIns="0" rIns="0" bIns="0" rtlCol="0" anchor="ctr"/>
+          <a:lstStyle/>
+          <a:p>
+            <a:pPr indent="0" marL="0">
+              <a:buNone/>
+            </a:pPr>
             <a:r>
               <a:rPr lang="en-US" sz="950" dirty="0">
                 <a:solidFill>
@@ -14330,7 +14157,7 @@
                 <a:ea typeface="Courier New" pitchFamily="34" charset="-122"/>
                 <a:cs typeface="Courier New" pitchFamily="34" charset="-120"/>
               </a:rPr>
-              <a:t> </a:t>
+              <a:t>span  (trích nguyên văn)</a:t>
             </a:r>
             <a:endParaRPr lang="en-US" sz="950" dirty="0"/>
           </a:p>
@@ -14338,53 +14165,14 @@
       </p:sp>
       <p:sp>
         <p:nvSpPr>
-          <p:cNvPr id="46" name="Text 44"/>
-          <p:cNvSpPr txBox="1"/>
-          <p:nvPr/>
-        </p:nvSpPr>
-        <p:spPr>
-          <a:xfrm>
-            <a:off x="3310128" y="5705856"/>
-            <a:ext cx="2011680" cy="214884"/>
-          </a:xfrm>
-          <a:prstGeom prst="rect">
-            <a:avLst/>
-          </a:prstGeom>
-          <a:noFill/>
-          <a:ln/>
-        </p:spPr>
-        <p:txBody>
-          <a:bodyPr wrap="square" lIns="0" tIns="0" rIns="0" bIns="0" rtlCol="0" anchor="ctr"/>
-          <a:lstStyle/>
-          <a:p>
-            <a:pPr marL="0" indent="0">
-              <a:buNone/>
-            </a:pPr>
-            <a:r>
-              <a:rPr lang="en-US" sz="950" dirty="0">
-                <a:solidFill>
-                  <a:srgbClr val="1E2A32"/>
-                </a:solidFill>
-                <a:latin typeface="Courier New" pitchFamily="34" charset="0"/>
-                <a:ea typeface="Courier New" pitchFamily="34" charset="-122"/>
-                <a:cs typeface="Courier New" pitchFamily="34" charset="-120"/>
-              </a:rPr>
-              <a:t>span  </a:t>
-            </a:r>
-            <a:endParaRPr lang="en-US" sz="950" dirty="0"/>
-          </a:p>
-        </p:txBody>
-      </p:sp>
-      <p:sp>
-        <p:nvSpPr>
-          <p:cNvPr id="47" name="Shape 45"/>
+          <p:cNvPr id="48" name="Shape 46"/>
           <p:cNvSpPr/>
           <p:nvPr/>
         </p:nvSpPr>
         <p:spPr>
           <a:xfrm>
             <a:off x="5897880" y="4526280"/>
-            <a:ext cx="2057400" cy="1593800"/>
+            <a:ext cx="2057400" cy="1298448"/>
           </a:xfrm>
           <a:prstGeom prst="roundRect">
             <a:avLst>
@@ -14401,17 +14189,10 @@
             <a:prstDash val="solid"/>
           </a:ln>
         </p:spPr>
-        <p:txBody>
-          <a:bodyPr/>
-          <a:lstStyle/>
-          <a:p>
-            <a:endParaRPr lang="en-US"/>
-          </a:p>
-        </p:txBody>
-      </p:sp>
-      <p:sp>
-        <p:nvSpPr>
-          <p:cNvPr id="48" name="Shape 46"/>
+      </p:sp>
+      <p:sp>
+        <p:nvSpPr>
+          <p:cNvPr id="49" name="Shape 47"/>
           <p:cNvSpPr/>
           <p:nvPr/>
         </p:nvSpPr>
@@ -14433,17 +14214,10 @@
             <a:prstDash val="solid"/>
           </a:ln>
         </p:spPr>
-        <p:txBody>
-          <a:bodyPr/>
-          <a:lstStyle/>
-          <a:p>
-            <a:endParaRPr lang="en-US"/>
-          </a:p>
-        </p:txBody>
-      </p:sp>
-      <p:sp>
-        <p:nvSpPr>
-          <p:cNvPr id="49" name="Text 47"/>
+      </p:sp>
+      <p:sp>
+        <p:nvSpPr>
+          <p:cNvPr id="50" name="Text 48"/>
           <p:cNvSpPr txBox="1"/>
           <p:nvPr/>
         </p:nvSpPr>
@@ -14462,7 +14236,7 @@
           <a:bodyPr wrap="square" lIns="0" tIns="0" rIns="0" bIns="0" rtlCol="0" anchor="ctr"/>
           <a:lstStyle/>
           <a:p>
-            <a:pPr marL="0" indent="0">
+            <a:pPr indent="0" marL="0">
               <a:buNone/>
             </a:pPr>
             <a:r>
@@ -14482,7 +14256,7 @@
       </p:sp>
       <p:sp>
         <p:nvSpPr>
-          <p:cNvPr id="50" name="Text 48"/>
+          <p:cNvPr id="51" name="Text 49"/>
           <p:cNvSpPr txBox="1"/>
           <p:nvPr/>
         </p:nvSpPr>
@@ -14501,7 +14275,7 @@
           <a:bodyPr wrap="square" lIns="0" tIns="0" rIns="0" bIns="0" rtlCol="0" anchor="ctr"/>
           <a:lstStyle/>
           <a:p>
-            <a:pPr marL="0" indent="0">
+            <a:pPr indent="0" marL="0">
               <a:buNone/>
             </a:pPr>
             <a:r>
@@ -14521,7 +14295,7 @@
       </p:sp>
       <p:sp>
         <p:nvSpPr>
-          <p:cNvPr id="51" name="Text 49"/>
+          <p:cNvPr id="52" name="Text 50"/>
           <p:cNvSpPr txBox="1"/>
           <p:nvPr/>
         </p:nvSpPr>
@@ -14540,7 +14314,7 @@
           <a:bodyPr wrap="square" lIns="0" tIns="0" rIns="0" bIns="0" rtlCol="0" anchor="ctr"/>
           <a:lstStyle/>
           <a:p>
-            <a:pPr marL="0" indent="0">
+            <a:pPr indent="0" marL="0">
               <a:buNone/>
             </a:pPr>
             <a:r>
@@ -14560,7 +14334,7 @@
       </p:sp>
       <p:sp>
         <p:nvSpPr>
-          <p:cNvPr id="52" name="Text 50"/>
+          <p:cNvPr id="53" name="Text 51"/>
           <p:cNvSpPr txBox="1"/>
           <p:nvPr/>
         </p:nvSpPr>
@@ -14579,7 +14353,7 @@
           <a:bodyPr wrap="square" lIns="0" tIns="0" rIns="0" bIns="0" rtlCol="0" anchor="ctr"/>
           <a:lstStyle/>
           <a:p>
-            <a:pPr marL="0" indent="0">
+            <a:pPr indent="0" marL="0">
               <a:buNone/>
             </a:pPr>
             <a:r>
@@ -14591,7 +14365,7 @@
                 <a:ea typeface="Courier New" pitchFamily="34" charset="-122"/>
                 <a:cs typeface="Courier New" pitchFamily="34" charset="-120"/>
               </a:rPr>
-              <a:t>speaker </a:t>
+              <a:t>speaker · text</a:t>
             </a:r>
             <a:endParaRPr lang="en-US" sz="950" dirty="0"/>
           </a:p>
@@ -14599,7 +14373,7 @@
       </p:sp>
       <p:sp>
         <p:nvSpPr>
-          <p:cNvPr id="53" name="Text 51"/>
+          <p:cNvPr id="54" name="Text 52"/>
           <p:cNvSpPr txBox="1"/>
           <p:nvPr/>
         </p:nvSpPr>
@@ -14618,7 +14392,7 @@
           <a:bodyPr wrap="square" lIns="0" tIns="0" rIns="0" bIns="0" rtlCol="0" anchor="ctr"/>
           <a:lstStyle/>
           <a:p>
-            <a:pPr marL="0" indent="0">
+            <a:pPr indent="0" marL="0">
               <a:buNone/>
             </a:pPr>
             <a:r>
@@ -14638,7 +14412,7 @@
       </p:sp>
       <p:sp>
         <p:nvSpPr>
-          <p:cNvPr id="54" name="Shape 52"/>
+          <p:cNvPr id="55" name="Shape 53"/>
           <p:cNvSpPr/>
           <p:nvPr/>
         </p:nvSpPr>
@@ -14659,17 +14433,10 @@
             <a:tailEnd type="triangle"/>
           </a:ln>
         </p:spPr>
-        <p:txBody>
-          <a:bodyPr/>
-          <a:lstStyle/>
-          <a:p>
-            <a:endParaRPr lang="en-US"/>
-          </a:p>
-        </p:txBody>
-      </p:sp>
-      <p:sp>
-        <p:nvSpPr>
-          <p:cNvPr id="55" name="Shape 53"/>
+      </p:sp>
+      <p:sp>
+        <p:nvSpPr>
+          <p:cNvPr id="56" name="Shape 54"/>
           <p:cNvSpPr/>
           <p:nvPr/>
         </p:nvSpPr>
@@ -14690,17 +14457,10 @@
             <a:tailEnd type="triangle"/>
           </a:ln>
         </p:spPr>
-        <p:txBody>
-          <a:bodyPr/>
-          <a:lstStyle/>
-          <a:p>
-            <a:endParaRPr lang="en-US"/>
-          </a:p>
-        </p:txBody>
-      </p:sp>
-      <p:sp>
-        <p:nvSpPr>
-          <p:cNvPr id="56" name="Shape 54"/>
+      </p:sp>
+      <p:sp>
+        <p:nvSpPr>
+          <p:cNvPr id="57" name="Shape 55"/>
           <p:cNvSpPr/>
           <p:nvPr/>
         </p:nvSpPr>
@@ -14721,17 +14481,10 @@
             <a:tailEnd type="triangle"/>
           </a:ln>
         </p:spPr>
-        <p:txBody>
-          <a:bodyPr/>
-          <a:lstStyle/>
-          <a:p>
-            <a:endParaRPr lang="en-US"/>
-          </a:p>
-        </p:txBody>
-      </p:sp>
-      <p:sp>
-        <p:nvSpPr>
-          <p:cNvPr id="57" name="Shape 55"/>
+      </p:sp>
+      <p:sp>
+        <p:nvSpPr>
+          <p:cNvPr id="58" name="Shape 56"/>
           <p:cNvSpPr/>
           <p:nvPr/>
         </p:nvSpPr>
@@ -14752,17 +14505,10 @@
             <a:tailEnd type="triangle"/>
           </a:ln>
         </p:spPr>
-        <p:txBody>
-          <a:bodyPr/>
-          <a:lstStyle/>
-          <a:p>
-            <a:endParaRPr lang="en-US"/>
-          </a:p>
-        </p:txBody>
-      </p:sp>
-      <p:sp>
-        <p:nvSpPr>
-          <p:cNvPr id="58" name="Shape 56"/>
+      </p:sp>
+      <p:sp>
+        <p:nvSpPr>
+          <p:cNvPr id="59" name="Shape 57"/>
           <p:cNvSpPr/>
           <p:nvPr/>
         </p:nvSpPr>
@@ -14783,24 +14529,17 @@
             <a:tailEnd type="triangle"/>
           </a:ln>
         </p:spPr>
-        <p:txBody>
-          <a:bodyPr/>
-          <a:lstStyle/>
-          <a:p>
-            <a:endParaRPr lang="en-US"/>
-          </a:p>
-        </p:txBody>
-      </p:sp>
-      <p:sp>
-        <p:nvSpPr>
-          <p:cNvPr id="59" name="Shape 57"/>
+      </p:sp>
+      <p:sp>
+        <p:nvSpPr>
+          <p:cNvPr id="60" name="Shape 58"/>
           <p:cNvSpPr/>
           <p:nvPr/>
         </p:nvSpPr>
         <p:spPr>
           <a:xfrm flipV="1">
             <a:off x="4297680" y="4572000"/>
-            <a:ext cx="914" cy="320040"/>
+            <a:ext cx="914" cy="274320"/>
           </a:xfrm>
           <a:prstGeom prst="line">
             <a:avLst/>
@@ -14814,17 +14553,10 @@
             <a:tailEnd type="triangle"/>
           </a:ln>
         </p:spPr>
-        <p:txBody>
-          <a:bodyPr/>
-          <a:lstStyle/>
-          <a:p>
-            <a:endParaRPr lang="en-US"/>
-          </a:p>
-        </p:txBody>
-      </p:sp>
-      <p:sp>
-        <p:nvSpPr>
-          <p:cNvPr id="60" name="Shape 58"/>
+      </p:sp>
+      <p:sp>
+        <p:nvSpPr>
+          <p:cNvPr id="61" name="Shape 59"/>
           <p:cNvSpPr/>
           <p:nvPr/>
         </p:nvSpPr>
@@ -14845,17 +14577,73 @@
             <a:tailEnd type="triangle"/>
           </a:ln>
         </p:spPr>
-        <p:txBody>
-          <a:bodyPr/>
-          <a:lstStyle/>
-          <a:p>
-            <a:endParaRPr lang="en-US"/>
-          </a:p>
-        </p:txBody>
-      </p:sp>
-      <p:sp>
-        <p:nvSpPr>
-          <p:cNvPr id="61" name="Shape 59"/>
+      </p:sp>
+      <p:sp>
+        <p:nvSpPr>
+          <p:cNvPr id="62" name="Shape 60"/>
+          <p:cNvSpPr/>
+          <p:nvPr/>
+        </p:nvSpPr>
+        <p:spPr>
+          <a:xfrm>
+            <a:off x="6035040" y="6053328"/>
+            <a:ext cx="320040" cy="914"/>
+          </a:xfrm>
+          <a:prstGeom prst="line">
+            <a:avLst/>
+          </a:prstGeom>
+          <a:noFill/>
+          <a:ln w="19050">
+            <a:solidFill>
+              <a:srgbClr val="2A8A99"/>
+            </a:solidFill>
+            <a:prstDash val="solid"/>
+            <a:tailEnd type="triangle"/>
+          </a:ln>
+        </p:spPr>
+      </p:sp>
+      <p:sp>
+        <p:nvSpPr>
+          <p:cNvPr id="63" name="Text 61"/>
+          <p:cNvSpPr txBox="1"/>
+          <p:nvPr/>
+        </p:nvSpPr>
+        <p:spPr>
+          <a:xfrm>
+            <a:off x="6419088" y="5943600"/>
+            <a:ext cx="1828800" cy="237744"/>
+          </a:xfrm>
+          <a:prstGeom prst="rect">
+            <a:avLst/>
+          </a:prstGeom>
+          <a:noFill/>
+          <a:ln/>
+        </p:spPr>
+        <p:txBody>
+          <a:bodyPr wrap="square" lIns="0" tIns="0" rIns="0" bIns="0" rtlCol="0" anchor="ctr"/>
+          <a:lstStyle/>
+          <a:p>
+            <a:pPr indent="0" marL="0">
+              <a:buNone/>
+            </a:pPr>
+            <a:r>
+              <a:rPr lang="en-US" sz="900" dirty="0">
+                <a:solidFill>
+                  <a:srgbClr val="5B6B73"/>
+                </a:solidFill>
+                <a:latin typeface="Calibri" pitchFamily="34" charset="0"/>
+                <a:ea typeface="Calibri" pitchFamily="34" charset="-122"/>
+                <a:cs typeface="Calibri" pitchFamily="34" charset="-120"/>
+              </a:rPr>
+              <a:t>= khóa ngoại → bảng được tham chiếu</a:t>
+            </a:r>
+            <a:endParaRPr lang="en-US" sz="900" dirty="0"/>
+          </a:p>
+        </p:txBody>
+      </p:sp>
+      <p:sp>
+        <p:nvSpPr>
+          <p:cNvPr id="64" name="Shape 62"/>
           <p:cNvSpPr/>
           <p:nvPr/>
         </p:nvSpPr>
@@ -14877,17 +14665,10 @@
             <a:prstDash val="solid"/>
           </a:ln>
         </p:spPr>
-        <p:txBody>
-          <a:bodyPr/>
-          <a:lstStyle/>
-          <a:p>
-            <a:endParaRPr lang="en-US"/>
-          </a:p>
-        </p:txBody>
-      </p:sp>
-      <p:sp>
-        <p:nvSpPr>
-          <p:cNvPr id="62" name="Text 60"/>
+      </p:sp>
+      <p:sp>
+        <p:nvSpPr>
+          <p:cNvPr id="65" name="Text 63"/>
           <p:cNvSpPr txBox="1"/>
           <p:nvPr/>
         </p:nvSpPr>
@@ -14906,7 +14687,7 @@
           <a:bodyPr wrap="square" lIns="0" tIns="0" rIns="0" bIns="0" rtlCol="0" anchor="ctr"/>
           <a:lstStyle/>
           <a:p>
-            <a:pPr marL="0" indent="0" algn="ctr">
+            <a:pPr algn="ctr" indent="0" marL="0">
               <a:buNone/>
             </a:pPr>
             <a:r>
@@ -14926,7 +14707,7 @@
       </p:sp>
       <p:sp>
         <p:nvSpPr>
-          <p:cNvPr id="63" name="Text 61"/>
+          <p:cNvPr id="66" name="Text 64"/>
           <p:cNvSpPr txBox="1"/>
           <p:nvPr/>
         </p:nvSpPr>
@@ -14945,7 +14726,7 @@
           <a:bodyPr wrap="square" lIns="0" tIns="0" rIns="0" bIns="0" rtlCol="0" anchor="t"/>
           <a:lstStyle/>
           <a:p>
-            <a:pPr marL="0" indent="0">
+            <a:pPr indent="0" marL="0">
               <a:buNone/>
             </a:pPr>
             <a:r>
@@ -14965,7 +14746,7 @@
       </p:sp>
       <p:sp>
         <p:nvSpPr>
-          <p:cNvPr id="64" name="Text 62"/>
+          <p:cNvPr id="67" name="Text 65"/>
           <p:cNvSpPr txBox="1"/>
           <p:nvPr/>
         </p:nvSpPr>
@@ -14984,7 +14765,7 @@
           <a:bodyPr wrap="square" lIns="0" tIns="0" rIns="0" bIns="0" rtlCol="0" anchor="t"/>
           <a:lstStyle/>
           <a:p>
-            <a:pPr marL="0" indent="0">
+            <a:pPr indent="0" marL="0">
               <a:buNone/>
             </a:pPr>
             <a:r>
@@ -15004,7 +14785,7 @@
       </p:sp>
       <p:sp>
         <p:nvSpPr>
-          <p:cNvPr id="65" name="Shape 63"/>
+          <p:cNvPr id="68" name="Shape 66"/>
           <p:cNvSpPr/>
           <p:nvPr/>
         </p:nvSpPr>
@@ -15026,17 +14807,10 @@
             <a:prstDash val="solid"/>
           </a:ln>
         </p:spPr>
-        <p:txBody>
-          <a:bodyPr/>
-          <a:lstStyle/>
-          <a:p>
-            <a:endParaRPr lang="en-US"/>
-          </a:p>
-        </p:txBody>
-      </p:sp>
-      <p:sp>
-        <p:nvSpPr>
-          <p:cNvPr id="66" name="Text 64"/>
+      </p:sp>
+      <p:sp>
+        <p:nvSpPr>
+          <p:cNvPr id="69" name="Text 67"/>
           <p:cNvSpPr txBox="1"/>
           <p:nvPr/>
         </p:nvSpPr>
@@ -15055,7 +14829,7 @@
           <a:bodyPr wrap="square" lIns="0" tIns="0" rIns="0" bIns="0" rtlCol="0" anchor="ctr"/>
           <a:lstStyle/>
           <a:p>
-            <a:pPr marL="0" indent="0" algn="ctr">
+            <a:pPr algn="ctr" indent="0" marL="0">
               <a:buNone/>
             </a:pPr>
             <a:r>
@@ -15075,7 +14849,7 @@
       </p:sp>
       <p:sp>
         <p:nvSpPr>
-          <p:cNvPr id="67" name="Text 65"/>
+          <p:cNvPr id="70" name="Text 68"/>
           <p:cNvSpPr txBox="1"/>
           <p:nvPr/>
         </p:nvSpPr>
@@ -15094,7 +14868,7 @@
           <a:bodyPr wrap="square" lIns="0" tIns="0" rIns="0" bIns="0" rtlCol="0" anchor="t"/>
           <a:lstStyle/>
           <a:p>
-            <a:pPr marL="0" indent="0">
+            <a:pPr indent="0" marL="0">
               <a:buNone/>
             </a:pPr>
             <a:r>
@@ -15114,7 +14888,7 @@
       </p:sp>
       <p:sp>
         <p:nvSpPr>
-          <p:cNvPr id="68" name="Text 66"/>
+          <p:cNvPr id="71" name="Text 69"/>
           <p:cNvSpPr txBox="1"/>
           <p:nvPr/>
         </p:nvSpPr>
@@ -15133,7 +14907,7 @@
           <a:bodyPr wrap="square" lIns="0" tIns="0" rIns="0" bIns="0" rtlCol="0" anchor="t"/>
           <a:lstStyle/>
           <a:p>
-            <a:pPr marL="0" indent="0">
+            <a:pPr indent="0" marL="0">
               <a:buNone/>
             </a:pPr>
             <a:r>
@@ -15153,7 +14927,7 @@
       </p:sp>
       <p:sp>
         <p:nvSpPr>
-          <p:cNvPr id="69" name="Shape 67"/>
+          <p:cNvPr id="72" name="Shape 70"/>
           <p:cNvSpPr/>
           <p:nvPr/>
         </p:nvSpPr>
@@ -15175,17 +14949,10 @@
             <a:prstDash val="solid"/>
           </a:ln>
         </p:spPr>
-        <p:txBody>
-          <a:bodyPr/>
-          <a:lstStyle/>
-          <a:p>
-            <a:endParaRPr lang="en-US"/>
-          </a:p>
-        </p:txBody>
-      </p:sp>
-      <p:sp>
-        <p:nvSpPr>
-          <p:cNvPr id="70" name="Text 68"/>
+      </p:sp>
+      <p:sp>
+        <p:nvSpPr>
+          <p:cNvPr id="73" name="Text 71"/>
           <p:cNvSpPr txBox="1"/>
           <p:nvPr/>
         </p:nvSpPr>
@@ -15204,7 +14971,7 @@
           <a:bodyPr wrap="square" lIns="0" tIns="0" rIns="0" bIns="0" rtlCol="0" anchor="ctr"/>
           <a:lstStyle/>
           <a:p>
-            <a:pPr marL="0" indent="0" algn="ctr">
+            <a:pPr algn="ctr" indent="0" marL="0">
               <a:buNone/>
             </a:pPr>
             <a:r>
@@ -15224,7 +14991,7 @@
       </p:sp>
       <p:sp>
         <p:nvSpPr>
-          <p:cNvPr id="71" name="Text 69"/>
+          <p:cNvPr id="74" name="Text 72"/>
           <p:cNvSpPr txBox="1"/>
           <p:nvPr/>
         </p:nvSpPr>
@@ -15243,7 +15010,7 @@
           <a:bodyPr wrap="square" lIns="0" tIns="0" rIns="0" bIns="0" rtlCol="0" anchor="t"/>
           <a:lstStyle/>
           <a:p>
-            <a:pPr marL="0" indent="0">
+            <a:pPr indent="0" marL="0">
               <a:buNone/>
             </a:pPr>
             <a:r>
@@ -15263,7 +15030,7 @@
       </p:sp>
       <p:sp>
         <p:nvSpPr>
-          <p:cNvPr id="72" name="Text 70"/>
+          <p:cNvPr id="75" name="Text 73"/>
           <p:cNvSpPr txBox="1"/>
           <p:nvPr/>
         </p:nvSpPr>
@@ -15282,7 +15049,7 @@
           <a:bodyPr wrap="square" lIns="0" tIns="0" rIns="0" bIns="0" rtlCol="0" anchor="t"/>
           <a:lstStyle/>
           <a:p>
-            <a:pPr marL="0" indent="0">
+            <a:pPr indent="0" marL="0">
               <a:buNone/>
             </a:pPr>
             <a:r>
@@ -15302,18 +15069,18 @@
       </p:sp>
       <p:sp>
         <p:nvSpPr>
-          <p:cNvPr id="73" name="Shape 71"/>
+          <p:cNvPr id="76" name="Shape 74"/>
           <p:cNvSpPr/>
           <p:nvPr/>
         </p:nvSpPr>
         <p:spPr>
           <a:xfrm>
-            <a:off x="8321040" y="5532120"/>
-            <a:ext cx="3383280" cy="731520"/>
+            <a:off x="8321040" y="5349240"/>
+            <a:ext cx="3383280" cy="914400"/>
           </a:xfrm>
           <a:prstGeom prst="roundRect">
             <a:avLst>
-              <a:gd name="adj" fmla="val 7500"/>
+              <a:gd name="adj" fmla="val 6000"/>
             </a:avLst>
           </a:prstGeom>
           <a:solidFill>
@@ -15326,24 +15093,17 @@
             <a:prstDash val="solid"/>
           </a:ln>
         </p:spPr>
-        <p:txBody>
-          <a:bodyPr/>
-          <a:lstStyle/>
-          <a:p>
-            <a:endParaRPr lang="en-US"/>
-          </a:p>
-        </p:txBody>
-      </p:sp>
-      <p:sp>
-        <p:nvSpPr>
-          <p:cNvPr id="74" name="Text 72"/>
+      </p:sp>
+      <p:sp>
+        <p:nvSpPr>
+          <p:cNvPr id="77" name="Text 75"/>
           <p:cNvSpPr txBox="1"/>
           <p:nvPr/>
         </p:nvSpPr>
         <p:spPr>
           <a:xfrm>
-            <a:off x="8458200" y="5577840"/>
-            <a:ext cx="3154680" cy="640080"/>
+            <a:off x="8458200" y="5394960"/>
+            <a:ext cx="3154680" cy="822960"/>
           </a:xfrm>
           <a:prstGeom prst="rect">
             <a:avLst/>
@@ -15355,11 +15115,11 @@
           <a:bodyPr wrap="square" lIns="0" tIns="0" rIns="0" bIns="0" rtlCol="0" anchor="ctr"/>
           <a:lstStyle/>
           <a:p>
-            <a:pPr marL="0" indent="0">
+            <a:pPr indent="0" marL="0">
               <a:buNone/>
             </a:pPr>
             <a:r>
-              <a:rPr lang="en-US" sz="1050" dirty="0">
+              <a:rPr lang="en-US" sz="1000" dirty="0">
                 <a:solidFill>
                   <a:srgbClr val="1E2A32"/>
                 </a:solidFill>
@@ -15367,15 +15127,15 @@
                 <a:ea typeface="Calibri" pitchFamily="34" charset="-122"/>
                 <a:cs typeface="Calibri" pitchFamily="34" charset="-120"/>
               </a:rPr>
-              <a:t>Chỉ mục vector (BGE-M3) và FTS5 là dẫn xuất — dựng lại được từ 7 bảng. Bảng trace/meta ghi nhật ký, agent không đọc được.</a:t>
-            </a:r>
-            <a:endParaRPr lang="en-US" sz="1050" dirty="0"/>
-          </a:p>
-        </p:txBody>
-      </p:sp>
-      <p:sp>
-        <p:nvSpPr>
-          <p:cNvPr id="75" name="Text 73"/>
+              <a:t>Không dùng ChromaDB: vector BGE-M3 lưu trong cache SQLite, so sánh vét cạn bằng numpy (vài nghìn vector/câu). FTS5 lo từ khóa. Cả hai là dẫn xuất — dựng lại được từ 7 bảng.</a:t>
+            </a:r>
+            <a:endParaRPr lang="en-US" sz="1000" dirty="0"/>
+          </a:p>
+        </p:txBody>
+      </p:sp>
+      <p:sp>
+        <p:nvSpPr>
+          <p:cNvPr id="78" name="Text 76"/>
           <p:cNvSpPr txBox="1"/>
           <p:nvPr/>
         </p:nvSpPr>
@@ -15394,7 +15154,7 @@
           <a:bodyPr wrap="square" lIns="0" tIns="0" rIns="0" bIns="0" rtlCol="0" anchor="t"/>
           <a:lstStyle/>
           <a:p>
-            <a:pPr marL="0" indent="0">
+            <a:pPr indent="0" marL="0">
               <a:buNone/>
             </a:pPr>
             <a:r>
@@ -15409,47 +15169,6 @@
               <a:t>Tên 7 bảng theo Banerjee et al., APEX-MEM, ACL 2026 (§4.3); cột do nhóm thiết kế từ định nghĩa hình thức ở §3.1.</a:t>
             </a:r>
             <a:endParaRPr lang="en-US" sz="900" dirty="0"/>
-          </a:p>
-        </p:txBody>
-      </p:sp>
-      <p:sp>
-        <p:nvSpPr>
-          <p:cNvPr id="77" name="Text 51">
-            <a:extLst>
-              <a:ext uri="{FF2B5EF4-FFF2-40B4-BE49-F238E27FC236}">
-                <a16:creationId xmlns:a16="http://schemas.microsoft.com/office/drawing/2014/main" id="{E810F1AA-709C-6F96-802C-33D22A66680A}"/>
-              </a:ext>
-            </a:extLst>
-          </p:cNvPr>
-          <p:cNvSpPr txBox="1"/>
-          <p:nvPr/>
-        </p:nvSpPr>
-        <p:spPr>
-          <a:xfrm>
-            <a:off x="6007608" y="5777179"/>
-            <a:ext cx="1874520" cy="214884"/>
-          </a:xfrm>
-          <a:prstGeom prst="rect">
-            <a:avLst/>
-          </a:prstGeom>
-          <a:noFill/>
-          <a:ln/>
-        </p:spPr>
-        <p:txBody>
-          <a:bodyPr wrap="square" lIns="0" tIns="0" rIns="0" bIns="0" rtlCol="0" anchor="ctr"/>
-          <a:lstStyle/>
-          <a:p>
-            <a:r>
-              <a:rPr lang="en-US" sz="950" dirty="0">
-                <a:solidFill>
-                  <a:srgbClr val="1E2A32"/>
-                </a:solidFill>
-                <a:latin typeface="Courier New" pitchFamily="34" charset="0"/>
-                <a:cs typeface="Courier New" pitchFamily="34" charset="-120"/>
-              </a:rPr>
-              <a:t>text</a:t>
-            </a:r>
-            <a:endParaRPr lang="en-US" sz="950" dirty="0"/>
           </a:p>
         </p:txBody>
       </p:sp>
@@ -15469,7 +15188,6 @@
         <a:solidFill>
           <a:srgbClr val="FFFFFF"/>
         </a:solidFill>
-        <a:effectLst/>
       </p:bgPr>
     </p:bg>
     <p:spTree>
@@ -15507,11 +15225,11 @@
           <a:bodyPr wrap="square" lIns="0" tIns="0" rIns="0" bIns="0" rtlCol="0" anchor="t"/>
           <a:lstStyle/>
           <a:p>
-            <a:pPr marL="0" indent="0">
+            <a:pPr indent="0" marL="0">
               <a:buNone/>
             </a:pPr>
             <a:r>
-              <a:rPr lang="en-US" sz="1100" b="1" kern="0" spc="200" dirty="0">
+              <a:rPr lang="en-US" sz="1100" b="1" spc="200" kern="0" dirty="0">
                 <a:solidFill>
                   <a:srgbClr val="D98C1F"/>
                 </a:solidFill>
@@ -15546,7 +15264,7 @@
           <a:bodyPr wrap="square" lIns="0" tIns="0" rIns="0" bIns="0" rtlCol="0" anchor="ctr"/>
           <a:lstStyle/>
           <a:p>
-            <a:pPr marL="0" indent="0">
+            <a:pPr indent="0" marL="0">
               <a:buNone/>
             </a:pPr>
             <a:r>
@@ -15585,7 +15303,7 @@
           <a:bodyPr wrap="square" lIns="0" tIns="0" rIns="0" bIns="0" rtlCol="0" anchor="t"/>
           <a:lstStyle/>
           <a:p>
-            <a:pPr marL="0" indent="0">
+            <a:pPr indent="0" marL="0">
               <a:buNone/>
             </a:pPr>
             <a:r>
@@ -15629,13 +15347,6 @@
             <a:prstDash val="solid"/>
           </a:ln>
         </p:spPr>
-        <p:txBody>
-          <a:bodyPr/>
-          <a:lstStyle/>
-          <a:p>
-            <a:endParaRPr lang="en-US"/>
-          </a:p>
-        </p:txBody>
       </p:sp>
       <p:sp>
         <p:nvSpPr>
@@ -15658,7 +15369,7 @@
           <a:bodyPr wrap="square" lIns="0" tIns="0" rIns="0" bIns="0" rtlCol="0" anchor="t"/>
           <a:lstStyle/>
           <a:p>
-            <a:pPr marL="0" indent="0">
+            <a:pPr indent="0" marL="0">
               <a:buNone/>
             </a:pPr>
             <a:r>
@@ -15697,7 +15408,7 @@
           <a:bodyPr wrap="square" lIns="0" tIns="0" rIns="0" bIns="0" rtlCol="0" anchor="t"/>
           <a:lstStyle/>
           <a:p>
-            <a:pPr marL="0" indent="0">
+            <a:pPr indent="0" marL="0">
               <a:buNone/>
             </a:pPr>
             <a:r>
@@ -15736,7 +15447,7 @@
           <a:bodyPr wrap="square" lIns="0" tIns="0" rIns="0" bIns="0" rtlCol="0" anchor="t"/>
           <a:lstStyle/>
           <a:p>
-            <a:pPr marL="0" indent="0">
+            <a:pPr indent="0" marL="0">
               <a:buNone/>
             </a:pPr>
             <a:r>
@@ -15780,13 +15491,6 @@
             <a:prstDash val="solid"/>
           </a:ln>
         </p:spPr>
-        <p:txBody>
-          <a:bodyPr/>
-          <a:lstStyle/>
-          <a:p>
-            <a:endParaRPr lang="en-US"/>
-          </a:p>
-        </p:txBody>
       </p:sp>
       <p:sp>
         <p:nvSpPr>
@@ -15809,7 +15513,7 @@
           <a:bodyPr wrap="square" lIns="0" tIns="0" rIns="0" bIns="0" rtlCol="0" anchor="t"/>
           <a:lstStyle/>
           <a:p>
-            <a:pPr marL="0" indent="0">
+            <a:pPr indent="0" marL="0">
               <a:buNone/>
             </a:pPr>
             <a:r>
@@ -15848,7 +15552,7 @@
           <a:bodyPr wrap="square" lIns="0" tIns="0" rIns="0" bIns="0" rtlCol="0" anchor="t"/>
           <a:lstStyle/>
           <a:p>
-            <a:pPr marL="0" indent="0">
+            <a:pPr indent="0" marL="0">
               <a:buNone/>
             </a:pPr>
             <a:r>
@@ -15887,7 +15591,7 @@
           <a:bodyPr wrap="square" lIns="0" tIns="0" rIns="0" bIns="0" rtlCol="0" anchor="t"/>
           <a:lstStyle/>
           <a:p>
-            <a:pPr marL="0" indent="0">
+            <a:pPr indent="0" marL="0">
               <a:buNone/>
             </a:pPr>
             <a:r>
@@ -15907,7 +15611,7 @@
       </p:sp>
       <p:graphicFrame>
         <p:nvGraphicFramePr>
-          <p:cNvPr id="13" name="Table 0"/>
+          <p:cNvPr id="5" name="Table 0"/>
           <p:cNvGraphicFramePr>
             <a:graphicFrameLocks noGrp="1"/>
           </p:cNvGraphicFramePr>
@@ -15921,41 +15625,17 @@
         </p:nvGraphicFramePr>
         <p:xfrm>
           <a:off x="548640" y="4114800"/>
-          <a:ext cx="5120640" cy="932688"/>
+          <a:ext cx="5120640" cy="914400"/>
         </p:xfrm>
         <a:graphic>
           <a:graphicData uri="http://schemas.openxmlformats.org/drawingml/2006/table">
             <a:tbl>
               <a:tblPr/>
               <a:tblGrid>
-                <a:gridCol w="731520">
-                  <a:extLst>
-                    <a:ext uri="{9D8B030D-6E8A-4147-A177-3AD203B41FA5}">
-                      <a16:colId xmlns:a16="http://schemas.microsoft.com/office/drawing/2014/main" val="20000"/>
-                    </a:ext>
-                  </a:extLst>
-                </a:gridCol>
-                <a:gridCol w="2514600">
-                  <a:extLst>
-                    <a:ext uri="{9D8B030D-6E8A-4147-A177-3AD203B41FA5}">
-                      <a16:colId xmlns:a16="http://schemas.microsoft.com/office/drawing/2014/main" val="20001"/>
-                    </a:ext>
-                  </a:extLst>
-                </a:gridCol>
-                <a:gridCol w="685800">
-                  <a:extLst>
-                    <a:ext uri="{9D8B030D-6E8A-4147-A177-3AD203B41FA5}">
-                      <a16:colId xmlns:a16="http://schemas.microsoft.com/office/drawing/2014/main" val="20002"/>
-                    </a:ext>
-                  </a:extLst>
-                </a:gridCol>
-                <a:gridCol w="1188720">
-                  <a:extLst>
-                    <a:ext uri="{9D8B030D-6E8A-4147-A177-3AD203B41FA5}">
-                      <a16:colId xmlns:a16="http://schemas.microsoft.com/office/drawing/2014/main" val="20003"/>
-                    </a:ext>
-                  </a:extLst>
-                </a:gridCol>
+                <a:gridCol w="731520"/>
+                <a:gridCol w="2514600"/>
+                <a:gridCol w="685800"/>
+                <a:gridCol w="1188720"/>
               </a:tblGrid>
               <a:tr h="310896">
                 <a:tc>
@@ -15963,7 +15643,7 @@
                     <a:bodyPr/>
                     <a:lstStyle/>
                     <a:p>
-                      <a:pPr marL="0" indent="0">
+                      <a:pPr indent="0" marL="0">
                         <a:buNone/>
                       </a:pPr>
                       <a:r>
@@ -15984,7 +15664,7 @@
                       </a:endParaRPr>
                     </a:p>
                   </a:txBody>
-                  <a:tcPr anchor="ctr">
+                  <a:tcPr marL="91440" marR="91440" marT="45720" marB="45720" anchor="ctr">
                     <a:lnL w="9525" cap="flat" cmpd="sng" algn="ctr">
                       <a:solidFill>
                         <a:srgbClr val="BFD8DD"/>
@@ -16031,7 +15711,7 @@
                     <a:bodyPr/>
                     <a:lstStyle/>
                     <a:p>
-                      <a:pPr marL="0" indent="0">
+                      <a:pPr indent="0" marL="0">
                         <a:buNone/>
                       </a:pPr>
                       <a:r>
@@ -16052,7 +15732,7 @@
                       </a:endParaRPr>
                     </a:p>
                   </a:txBody>
-                  <a:tcPr anchor="ctr">
+                  <a:tcPr marL="91440" marR="91440" marT="45720" marB="45720" anchor="ctr">
                     <a:lnL w="9525" cap="flat" cmpd="sng" algn="ctr">
                       <a:solidFill>
                         <a:srgbClr val="BFD8DD"/>
@@ -16099,7 +15779,7 @@
                     <a:bodyPr/>
                     <a:lstStyle/>
                     <a:p>
-                      <a:pPr marL="0" indent="0">
+                      <a:pPr indent="0" marL="0">
                         <a:buNone/>
                       </a:pPr>
                       <a:r>
@@ -16120,7 +15800,7 @@
                       </a:endParaRPr>
                     </a:p>
                   </a:txBody>
-                  <a:tcPr anchor="ctr">
+                  <a:tcPr marL="91440" marR="91440" marT="45720" marB="45720" anchor="ctr">
                     <a:lnL w="9525" cap="flat" cmpd="sng" algn="ctr">
                       <a:solidFill>
                         <a:srgbClr val="BFD8DD"/>
@@ -16167,7 +15847,7 @@
                     <a:bodyPr/>
                     <a:lstStyle/>
                     <a:p>
-                      <a:pPr marL="0" indent="0">
+                      <a:pPr indent="0" marL="0">
                         <a:buNone/>
                       </a:pPr>
                       <a:r>
@@ -16188,7 +15868,7 @@
                       </a:endParaRPr>
                     </a:p>
                   </a:txBody>
-                  <a:tcPr anchor="ctr">
+                  <a:tcPr marL="91440" marR="91440" marT="45720" marB="45720" anchor="ctr">
                     <a:lnL w="9525" cap="flat" cmpd="sng" algn="ctr">
                       <a:solidFill>
                         <a:srgbClr val="BFD8DD"/>
@@ -16230,11 +15910,6 @@
                     </a:solidFill>
                   </a:tcPr>
                 </a:tc>
-                <a:extLst>
-                  <a:ext uri="{0D108BD9-81ED-4DB2-BD59-A6C34878D82A}">
-                    <a16:rowId xmlns:a16="http://schemas.microsoft.com/office/drawing/2014/main" val="10000"/>
-                  </a:ext>
-                </a:extLst>
               </a:tr>
               <a:tr h="310896">
                 <a:tc>
@@ -16242,7 +15917,7 @@
                     <a:bodyPr/>
                     <a:lstStyle/>
                     <a:p>
-                      <a:pPr marL="0" indent="0">
+                      <a:pPr indent="0" marL="0">
                         <a:buNone/>
                       </a:pPr>
                       <a:r>
@@ -16263,7 +15938,7 @@
                       </a:endParaRPr>
                     </a:p>
                   </a:txBody>
-                  <a:tcPr anchor="ctr">
+                  <a:tcPr marL="91440" marR="91440" marT="45720" marB="45720" anchor="ctr">
                     <a:lnL w="9525" cap="flat" cmpd="sng" algn="ctr">
                       <a:solidFill>
                         <a:srgbClr val="BFD8DD"/>
@@ -16310,7 +15985,7 @@
                     <a:bodyPr/>
                     <a:lstStyle/>
                     <a:p>
-                      <a:pPr marL="0" indent="0">
+                      <a:pPr indent="0" marL="0">
                         <a:buNone/>
                       </a:pPr>
                       <a:r>
@@ -16331,7 +16006,7 @@
                       </a:endParaRPr>
                     </a:p>
                   </a:txBody>
-                  <a:tcPr anchor="ctr">
+                  <a:tcPr marL="91440" marR="91440" marT="45720" marB="45720" anchor="ctr">
                     <a:lnL w="9525" cap="flat" cmpd="sng" algn="ctr">
                       <a:solidFill>
                         <a:srgbClr val="BFD8DD"/>
@@ -16378,7 +16053,7 @@
                     <a:bodyPr/>
                     <a:lstStyle/>
                     <a:p>
-                      <a:pPr marL="0" indent="0">
+                      <a:pPr indent="0" marL="0">
                         <a:buNone/>
                       </a:pPr>
                       <a:r>
@@ -16399,7 +16074,7 @@
                       </a:endParaRPr>
                     </a:p>
                   </a:txBody>
-                  <a:tcPr anchor="ctr">
+                  <a:tcPr marL="91440" marR="91440" marT="45720" marB="45720" anchor="ctr">
                     <a:lnL w="9525" cap="flat" cmpd="sng" algn="ctr">
                       <a:solidFill>
                         <a:srgbClr val="BFD8DD"/>
@@ -16446,7 +16121,7 @@
                     <a:bodyPr/>
                     <a:lstStyle/>
                     <a:p>
-                      <a:pPr marL="0" indent="0">
+                      <a:pPr indent="0" marL="0">
                         <a:buNone/>
                       </a:pPr>
                       <a:r>
@@ -16467,7 +16142,7 @@
                       </a:endParaRPr>
                     </a:p>
                   </a:txBody>
-                  <a:tcPr anchor="ctr">
+                  <a:tcPr marL="91440" marR="91440" marT="45720" marB="45720" anchor="ctr">
                     <a:lnL w="9525" cap="flat" cmpd="sng" algn="ctr">
                       <a:solidFill>
                         <a:srgbClr val="BFD8DD"/>
@@ -16509,11 +16184,6 @@
                     </a:solidFill>
                   </a:tcPr>
                 </a:tc>
-                <a:extLst>
-                  <a:ext uri="{0D108BD9-81ED-4DB2-BD59-A6C34878D82A}">
-                    <a16:rowId xmlns:a16="http://schemas.microsoft.com/office/drawing/2014/main" val="10001"/>
-                  </a:ext>
-                </a:extLst>
               </a:tr>
               <a:tr h="310896">
                 <a:tc>
@@ -16521,7 +16191,7 @@
                     <a:bodyPr/>
                     <a:lstStyle/>
                     <a:p>
-                      <a:pPr marL="0" indent="0">
+                      <a:pPr indent="0" marL="0">
                         <a:buNone/>
                       </a:pPr>
                       <a:r>
@@ -16542,7 +16212,7 @@
                       </a:endParaRPr>
                     </a:p>
                   </a:txBody>
-                  <a:tcPr anchor="ctr">
+                  <a:tcPr marL="91440" marR="91440" marT="45720" marB="45720" anchor="ctr">
                     <a:lnL w="9525" cap="flat" cmpd="sng" algn="ctr">
                       <a:solidFill>
                         <a:srgbClr val="BFD8DD"/>
@@ -16589,7 +16259,7 @@
                     <a:bodyPr/>
                     <a:lstStyle/>
                     <a:p>
-                      <a:pPr marL="0" indent="0">
+                      <a:pPr indent="0" marL="0">
                         <a:buNone/>
                       </a:pPr>
                       <a:r>
@@ -16610,7 +16280,7 @@
                       </a:endParaRPr>
                     </a:p>
                   </a:txBody>
-                  <a:tcPr anchor="ctr">
+                  <a:tcPr marL="91440" marR="91440" marT="45720" marB="45720" anchor="ctr">
                     <a:lnL w="9525" cap="flat" cmpd="sng" algn="ctr">
                       <a:solidFill>
                         <a:srgbClr val="BFD8DD"/>
@@ -16657,7 +16327,7 @@
                     <a:bodyPr/>
                     <a:lstStyle/>
                     <a:p>
-                      <a:pPr marL="0" indent="0">
+                      <a:pPr indent="0" marL="0">
                         <a:buNone/>
                       </a:pPr>
                       <a:r>
@@ -16678,7 +16348,7 @@
                       </a:endParaRPr>
                     </a:p>
                   </a:txBody>
-                  <a:tcPr anchor="ctr">
+                  <a:tcPr marL="91440" marR="91440" marT="45720" marB="45720" anchor="ctr">
                     <a:lnL w="9525" cap="flat" cmpd="sng" algn="ctr">
                       <a:solidFill>
                         <a:srgbClr val="BFD8DD"/>
@@ -16725,7 +16395,7 @@
                     <a:bodyPr/>
                     <a:lstStyle/>
                     <a:p>
-                      <a:pPr marL="0" indent="0">
+                      <a:pPr indent="0" marL="0">
                         <a:buNone/>
                       </a:pPr>
                       <a:r>
@@ -16746,7 +16416,7 @@
                       </a:endParaRPr>
                     </a:p>
                   </a:txBody>
-                  <a:tcPr anchor="ctr">
+                  <a:tcPr marL="91440" marR="91440" marT="45720" marB="45720" anchor="ctr">
                     <a:lnL w="9525" cap="flat" cmpd="sng" algn="ctr">
                       <a:solidFill>
                         <a:srgbClr val="BFD8DD"/>
@@ -16788,11 +16458,6 @@
                     </a:solidFill>
                   </a:tcPr>
                 </a:tc>
-                <a:extLst>
-                  <a:ext uri="{0D108BD9-81ED-4DB2-BD59-A6C34878D82A}">
-                    <a16:rowId xmlns:a16="http://schemas.microsoft.com/office/drawing/2014/main" val="10002"/>
-                  </a:ext>
-                </a:extLst>
               </a:tr>
             </a:tbl>
           </a:graphicData>
@@ -16824,13 +16489,6 @@
             <a:prstDash val="solid"/>
           </a:ln>
         </p:spPr>
-        <p:txBody>
-          <a:bodyPr/>
-          <a:lstStyle/>
-          <a:p>
-            <a:endParaRPr lang="en-US"/>
-          </a:p>
-        </p:txBody>
       </p:sp>
       <p:sp>
         <p:nvSpPr>
@@ -16853,7 +16511,7 @@
           <a:bodyPr wrap="square" lIns="0" tIns="0" rIns="0" bIns="0" rtlCol="0" anchor="ctr"/>
           <a:lstStyle/>
           <a:p>
-            <a:pPr marL="0" indent="0">
+            <a:pPr indent="0" marL="0">
               <a:buNone/>
             </a:pPr>
             <a:r>
@@ -16897,13 +16555,6 @@
             <a:prstDash val="solid"/>
           </a:ln>
         </p:spPr>
-        <p:txBody>
-          <a:bodyPr/>
-          <a:lstStyle/>
-          <a:p>
-            <a:endParaRPr lang="en-US"/>
-          </a:p>
-        </p:txBody>
       </p:sp>
       <p:sp>
         <p:nvSpPr>
@@ -16929,13 +16580,6 @@
             <a:prstDash val="solid"/>
           </a:ln>
         </p:spPr>
-        <p:txBody>
-          <a:bodyPr/>
-          <a:lstStyle/>
-          <a:p>
-            <a:endParaRPr lang="en-US"/>
-          </a:p>
-        </p:txBody>
       </p:sp>
       <p:sp>
         <p:nvSpPr>
@@ -16958,7 +16602,7 @@
           <a:bodyPr wrap="square" lIns="0" tIns="0" rIns="0" bIns="0" rtlCol="0" anchor="ctr"/>
           <a:lstStyle/>
           <a:p>
-            <a:pPr marL="0" indent="0" algn="ctr">
+            <a:pPr algn="ctr" indent="0" marL="0">
               <a:buNone/>
             </a:pPr>
             <a:r>
@@ -16997,7 +16641,7 @@
           <a:bodyPr wrap="square" lIns="0" tIns="0" rIns="0" bIns="0" rtlCol="0" anchor="t"/>
           <a:lstStyle/>
           <a:p>
-            <a:pPr marL="0" indent="0">
+            <a:pPr indent="0" marL="0">
               <a:buNone/>
             </a:pPr>
             <a:r>
@@ -17036,7 +16680,7 @@
           <a:bodyPr wrap="square" lIns="0" tIns="0" rIns="0" bIns="0" rtlCol="0" anchor="t"/>
           <a:lstStyle/>
           <a:p>
-            <a:pPr marL="0" indent="0">
+            <a:pPr indent="0" marL="0">
               <a:buNone/>
             </a:pPr>
             <a:r>
@@ -17080,13 +16724,6 @@
             <a:prstDash val="solid"/>
           </a:ln>
         </p:spPr>
-        <p:txBody>
-          <a:bodyPr/>
-          <a:lstStyle/>
-          <a:p>
-            <a:endParaRPr lang="en-US"/>
-          </a:p>
-        </p:txBody>
       </p:sp>
       <p:sp>
         <p:nvSpPr>
@@ -17112,13 +16749,6 @@
             <a:prstDash val="solid"/>
           </a:ln>
         </p:spPr>
-        <p:txBody>
-          <a:bodyPr/>
-          <a:lstStyle/>
-          <a:p>
-            <a:endParaRPr lang="en-US"/>
-          </a:p>
-        </p:txBody>
       </p:sp>
       <p:sp>
         <p:nvSpPr>
@@ -17141,7 +16771,7 @@
           <a:bodyPr wrap="square" lIns="0" tIns="0" rIns="0" bIns="0" rtlCol="0" anchor="ctr"/>
           <a:lstStyle/>
           <a:p>
-            <a:pPr marL="0" indent="0" algn="ctr">
+            <a:pPr algn="ctr" indent="0" marL="0">
               <a:buNone/>
             </a:pPr>
             <a:r>
@@ -17180,7 +16810,7 @@
           <a:bodyPr wrap="square" lIns="0" tIns="0" rIns="0" bIns="0" rtlCol="0" anchor="t"/>
           <a:lstStyle/>
           <a:p>
-            <a:pPr marL="0" indent="0">
+            <a:pPr indent="0" marL="0">
               <a:buNone/>
             </a:pPr>
             <a:r>
@@ -17219,7 +16849,7 @@
           <a:bodyPr wrap="square" lIns="0" tIns="0" rIns="0" bIns="0" rtlCol="0" anchor="t"/>
           <a:lstStyle/>
           <a:p>
-            <a:pPr marL="0" indent="0">
+            <a:pPr indent="0" marL="0">
               <a:buNone/>
             </a:pPr>
             <a:r>
@@ -17263,13 +16893,6 @@
             <a:prstDash val="solid"/>
           </a:ln>
         </p:spPr>
-        <p:txBody>
-          <a:bodyPr/>
-          <a:lstStyle/>
-          <a:p>
-            <a:endParaRPr lang="en-US"/>
-          </a:p>
-        </p:txBody>
       </p:sp>
       <p:sp>
         <p:nvSpPr>
@@ -17295,13 +16918,6 @@
             <a:prstDash val="solid"/>
           </a:ln>
         </p:spPr>
-        <p:txBody>
-          <a:bodyPr/>
-          <a:lstStyle/>
-          <a:p>
-            <a:endParaRPr lang="en-US"/>
-          </a:p>
-        </p:txBody>
       </p:sp>
       <p:sp>
         <p:nvSpPr>
@@ -17324,7 +16940,7 @@
           <a:bodyPr wrap="square" lIns="0" tIns="0" rIns="0" bIns="0" rtlCol="0" anchor="ctr"/>
           <a:lstStyle/>
           <a:p>
-            <a:pPr marL="0" indent="0" algn="ctr">
+            <a:pPr algn="ctr" indent="0" marL="0">
               <a:buNone/>
             </a:pPr>
             <a:r>
@@ -17363,7 +16979,7 @@
           <a:bodyPr wrap="square" lIns="0" tIns="0" rIns="0" bIns="0" rtlCol="0" anchor="t"/>
           <a:lstStyle/>
           <a:p>
-            <a:pPr marL="0" indent="0">
+            <a:pPr indent="0" marL="0">
               <a:buNone/>
             </a:pPr>
             <a:r>
@@ -17402,7 +17018,7 @@
           <a:bodyPr wrap="square" lIns="0" tIns="0" rIns="0" bIns="0" rtlCol="0" anchor="t"/>
           <a:lstStyle/>
           <a:p>
-            <a:pPr marL="0" indent="0">
+            <a:pPr indent="0" marL="0">
               <a:buNone/>
             </a:pPr>
             <a:r>
@@ -17441,7 +17057,7 @@
           <a:bodyPr wrap="square" lIns="0" tIns="0" rIns="0" bIns="0" rtlCol="0" anchor="t"/>
           <a:lstStyle/>
           <a:p>
-            <a:pPr marL="0" indent="0">
+            <a:pPr indent="0" marL="0">
               <a:buNone/>
             </a:pPr>
             <a:r>
@@ -17475,7 +17091,6 @@
         <a:solidFill>
           <a:srgbClr val="FFFFFF"/>
         </a:solidFill>
-        <a:effectLst/>
       </p:bgPr>
     </p:bg>
     <p:spTree>
@@ -17513,11 +17128,11 @@
           <a:bodyPr wrap="square" lIns="0" tIns="0" rIns="0" bIns="0" rtlCol="0" anchor="t"/>
           <a:lstStyle/>
           <a:p>
-            <a:pPr marL="0" indent="0">
+            <a:pPr indent="0" marL="0">
               <a:buNone/>
             </a:pPr>
             <a:r>
-              <a:rPr lang="en-US" sz="1100" b="1" kern="0" spc="200" dirty="0">
+              <a:rPr lang="en-US" sz="1100" b="1" spc="200" kern="0" dirty="0">
                 <a:solidFill>
                   <a:srgbClr val="D98C1F"/>
                 </a:solidFill>
@@ -17552,7 +17167,7 @@
           <a:bodyPr wrap="square" lIns="0" tIns="0" rIns="0" bIns="0" rtlCol="0" anchor="ctr"/>
           <a:lstStyle/>
           <a:p>
-            <a:pPr marL="0" indent="0">
+            <a:pPr indent="0" marL="0">
               <a:buNone/>
             </a:pPr>
             <a:r>
@@ -17596,13 +17211,6 @@
             <a:prstDash val="solid"/>
           </a:ln>
         </p:spPr>
-        <p:txBody>
-          <a:bodyPr/>
-          <a:lstStyle/>
-          <a:p>
-            <a:endParaRPr lang="en-US"/>
-          </a:p>
-        </p:txBody>
       </p:sp>
       <p:sp>
         <p:nvSpPr>
@@ -17625,7 +17233,7 @@
           <a:bodyPr wrap="square" lIns="0" tIns="0" rIns="0" bIns="0" rtlCol="0" anchor="ctr"/>
           <a:lstStyle/>
           <a:p>
-            <a:pPr marL="0" indent="0">
+            <a:pPr indent="0" marL="0">
               <a:buNone/>
             </a:pPr>
             <a:r>
@@ -17639,6 +17247,9 @@
               </a:rPr>
               <a:t>Ví dụ: câu multi-session 2b8f3739 — </a:t>
             </a:r>
+            <a:pPr indent="0" marL="0">
+              <a:buNone/>
+            </a:pPr>
             <a:r>
               <a:rPr lang="en-US" sz="1250" dirty="0">
                 <a:solidFill>
@@ -17680,13 +17291,6 @@
             <a:prstDash val="solid"/>
           </a:ln>
         </p:spPr>
-        <p:txBody>
-          <a:bodyPr/>
-          <a:lstStyle/>
-          <a:p>
-            <a:endParaRPr lang="en-US"/>
-          </a:p>
-        </p:txBody>
       </p:sp>
       <p:sp>
         <p:nvSpPr>
@@ -17712,13 +17316,6 @@
             <a:prstDash val="solid"/>
           </a:ln>
         </p:spPr>
-        <p:txBody>
-          <a:bodyPr/>
-          <a:lstStyle/>
-          <a:p>
-            <a:endParaRPr lang="en-US"/>
-          </a:p>
-        </p:txBody>
       </p:sp>
       <p:sp>
         <p:nvSpPr>
@@ -17741,7 +17338,7 @@
           <a:bodyPr wrap="square" lIns="0" tIns="0" rIns="0" bIns="0" rtlCol="0" anchor="ctr"/>
           <a:lstStyle/>
           <a:p>
-            <a:pPr marL="0" indent="0" algn="ctr">
+            <a:pPr algn="ctr" indent="0" marL="0">
               <a:buNone/>
             </a:pPr>
             <a:r>
@@ -17785,13 +17382,6 @@
             <a:prstDash val="solid"/>
           </a:ln>
         </p:spPr>
-        <p:txBody>
-          <a:bodyPr/>
-          <a:lstStyle/>
-          <a:p>
-            <a:endParaRPr lang="en-US"/>
-          </a:p>
-        </p:txBody>
       </p:sp>
       <p:sp>
         <p:nvSpPr>
@@ -17814,7 +17404,7 @@
           <a:bodyPr wrap="square" lIns="0" tIns="0" rIns="0" bIns="0" rtlCol="0" anchor="ctr"/>
           <a:lstStyle/>
           <a:p>
-            <a:pPr marL="0" indent="0" algn="ctr">
+            <a:pPr algn="ctr" indent="0" marL="0">
               <a:buNone/>
             </a:pPr>
             <a:r>
@@ -17853,7 +17443,7 @@
           <a:bodyPr wrap="square" lIns="0" tIns="0" rIns="0" bIns="0" rtlCol="0" anchor="t"/>
           <a:lstStyle/>
           <a:p>
-            <a:pPr marL="0" indent="0">
+            <a:pPr indent="0" marL="0">
               <a:buNone/>
             </a:pPr>
             <a:r>
@@ -17892,7 +17482,7 @@
           <a:bodyPr wrap="square" lIns="0" tIns="0" rIns="0" bIns="0" rtlCol="0" anchor="t"/>
           <a:lstStyle/>
           <a:p>
-            <a:pPr marL="0" indent="0">
+            <a:pPr indent="0" marL="0">
               <a:buNone/>
             </a:pPr>
             <a:r>
@@ -17909,7 +17499,7 @@
             <a:endParaRPr lang="en-US" sz="1250" dirty="0"/>
           </a:p>
           <a:p>
-            <a:pPr marL="0" indent="0">
+            <a:pPr indent="0" marL="0">
               <a:buNone/>
             </a:pPr>
             <a:r>
@@ -17953,13 +17543,6 @@
             <a:prstDash val="solid"/>
           </a:ln>
         </p:spPr>
-        <p:txBody>
-          <a:bodyPr/>
-          <a:lstStyle/>
-          <a:p>
-            <a:endParaRPr lang="en-US"/>
-          </a:p>
-        </p:txBody>
       </p:sp>
       <p:sp>
         <p:nvSpPr>
@@ -17982,7 +17565,7 @@
           <a:bodyPr wrap="square" lIns="0" tIns="0" rIns="0" bIns="0" rtlCol="0" anchor="ctr"/>
           <a:lstStyle/>
           <a:p>
-            <a:pPr marL="0" indent="0">
+            <a:pPr indent="0" marL="0">
               <a:buNone/>
             </a:pPr>
             <a:r>
@@ -17999,7 +17582,7 @@
             <a:endParaRPr lang="en-US" sz="1250" dirty="0"/>
           </a:p>
           <a:p>
-            <a:pPr marL="0" indent="0">
+            <a:pPr indent="0" marL="0">
               <a:buNone/>
             </a:pPr>
             <a:r>
@@ -18040,13 +17623,6 @@
             <a:tailEnd type="triangle"/>
           </a:ln>
         </p:spPr>
-        <p:txBody>
-          <a:bodyPr/>
-          <a:lstStyle/>
-          <a:p>
-            <a:endParaRPr lang="en-US"/>
-          </a:p>
-        </p:txBody>
       </p:sp>
       <p:sp>
         <p:nvSpPr>
@@ -18074,13 +17650,6 @@
             <a:prstDash val="solid"/>
           </a:ln>
         </p:spPr>
-        <p:txBody>
-          <a:bodyPr/>
-          <a:lstStyle/>
-          <a:p>
-            <a:endParaRPr lang="en-US"/>
-          </a:p>
-        </p:txBody>
       </p:sp>
       <p:sp>
         <p:nvSpPr>
@@ -18106,13 +17675,6 @@
             <a:prstDash val="solid"/>
           </a:ln>
         </p:spPr>
-        <p:txBody>
-          <a:bodyPr/>
-          <a:lstStyle/>
-          <a:p>
-            <a:endParaRPr lang="en-US"/>
-          </a:p>
-        </p:txBody>
       </p:sp>
       <p:sp>
         <p:nvSpPr>
@@ -18135,7 +17697,7 @@
           <a:bodyPr wrap="square" lIns="0" tIns="0" rIns="0" bIns="0" rtlCol="0" anchor="ctr"/>
           <a:lstStyle/>
           <a:p>
-            <a:pPr marL="0" indent="0" algn="ctr">
+            <a:pPr algn="ctr" indent="0" marL="0">
               <a:buNone/>
             </a:pPr>
             <a:r>
@@ -18179,13 +17741,6 @@
             <a:prstDash val="solid"/>
           </a:ln>
         </p:spPr>
-        <p:txBody>
-          <a:bodyPr/>
-          <a:lstStyle/>
-          <a:p>
-            <a:endParaRPr lang="en-US"/>
-          </a:p>
-        </p:txBody>
       </p:sp>
       <p:sp>
         <p:nvSpPr>
@@ -18208,7 +17763,7 @@
           <a:bodyPr wrap="square" lIns="0" tIns="0" rIns="0" bIns="0" rtlCol="0" anchor="ctr"/>
           <a:lstStyle/>
           <a:p>
-            <a:pPr marL="0" indent="0" algn="ctr">
+            <a:pPr algn="ctr" indent="0" marL="0">
               <a:buNone/>
             </a:pPr>
             <a:r>
@@ -18247,7 +17802,7 @@
           <a:bodyPr wrap="square" lIns="0" tIns="0" rIns="0" bIns="0" rtlCol="0" anchor="t"/>
           <a:lstStyle/>
           <a:p>
-            <a:pPr marL="0" indent="0">
+            <a:pPr indent="0" marL="0">
               <a:buNone/>
             </a:pPr>
             <a:r>
@@ -18286,7 +17841,7 @@
           <a:bodyPr wrap="square" lIns="0" tIns="0" rIns="0" bIns="0" rtlCol="0" anchor="t"/>
           <a:lstStyle/>
           <a:p>
-            <a:pPr marL="0" indent="0">
+            <a:pPr indent="0" marL="0">
               <a:buNone/>
             </a:pPr>
             <a:r>
@@ -18303,7 +17858,7 @@
             <a:endParaRPr lang="en-US" sz="1250" dirty="0"/>
           </a:p>
           <a:p>
-            <a:pPr marL="0" indent="0">
+            <a:pPr indent="0" marL="0">
               <a:buNone/>
             </a:pPr>
             <a:r>
@@ -18347,13 +17902,6 @@
             <a:prstDash val="solid"/>
           </a:ln>
         </p:spPr>
-        <p:txBody>
-          <a:bodyPr/>
-          <a:lstStyle/>
-          <a:p>
-            <a:endParaRPr lang="en-US"/>
-          </a:p>
-        </p:txBody>
       </p:sp>
       <p:sp>
         <p:nvSpPr>
@@ -18376,7 +17924,7 @@
           <a:bodyPr wrap="square" lIns="0" tIns="0" rIns="0" bIns="0" rtlCol="0" anchor="ctr"/>
           <a:lstStyle/>
           <a:p>
-            <a:pPr marL="0" indent="0">
+            <a:pPr indent="0" marL="0">
               <a:buNone/>
             </a:pPr>
             <a:r>
@@ -18393,7 +17941,7 @@
             <a:endParaRPr lang="en-US" sz="1250" dirty="0"/>
           </a:p>
           <a:p>
-            <a:pPr marL="0" indent="0">
+            <a:pPr indent="0" marL="0">
               <a:buNone/>
             </a:pPr>
             <a:r>
@@ -18434,13 +17982,6 @@
             <a:tailEnd type="triangle"/>
           </a:ln>
         </p:spPr>
-        <p:txBody>
-          <a:bodyPr/>
-          <a:lstStyle/>
-          <a:p>
-            <a:endParaRPr lang="en-US"/>
-          </a:p>
-        </p:txBody>
       </p:sp>
       <p:sp>
         <p:nvSpPr>
@@ -18468,13 +18009,6 @@
             <a:prstDash val="solid"/>
           </a:ln>
         </p:spPr>
-        <p:txBody>
-          <a:bodyPr/>
-          <a:lstStyle/>
-          <a:p>
-            <a:endParaRPr lang="en-US"/>
-          </a:p>
-        </p:txBody>
       </p:sp>
       <p:sp>
         <p:nvSpPr>
@@ -18500,13 +18034,6 @@
             <a:prstDash val="solid"/>
           </a:ln>
         </p:spPr>
-        <p:txBody>
-          <a:bodyPr/>
-          <a:lstStyle/>
-          <a:p>
-            <a:endParaRPr lang="en-US"/>
-          </a:p>
-        </p:txBody>
       </p:sp>
       <p:sp>
         <p:nvSpPr>
@@ -18529,7 +18056,7 @@
           <a:bodyPr wrap="square" lIns="0" tIns="0" rIns="0" bIns="0" rtlCol="0" anchor="ctr"/>
           <a:lstStyle/>
           <a:p>
-            <a:pPr marL="0" indent="0" algn="ctr">
+            <a:pPr algn="ctr" indent="0" marL="0">
               <a:buNone/>
             </a:pPr>
             <a:r>
@@ -18573,13 +18100,6 @@
             <a:prstDash val="solid"/>
           </a:ln>
         </p:spPr>
-        <p:txBody>
-          <a:bodyPr/>
-          <a:lstStyle/>
-          <a:p>
-            <a:endParaRPr lang="en-US"/>
-          </a:p>
-        </p:txBody>
       </p:sp>
       <p:sp>
         <p:nvSpPr>
@@ -18602,7 +18122,7 @@
           <a:bodyPr wrap="square" lIns="0" tIns="0" rIns="0" bIns="0" rtlCol="0" anchor="ctr"/>
           <a:lstStyle/>
           <a:p>
-            <a:pPr marL="0" indent="0" algn="ctr">
+            <a:pPr algn="ctr" indent="0" marL="0">
               <a:buNone/>
             </a:pPr>
             <a:r>
@@ -18641,7 +18161,7 @@
           <a:bodyPr wrap="square" lIns="0" tIns="0" rIns="0" bIns="0" rtlCol="0" anchor="t"/>
           <a:lstStyle/>
           <a:p>
-            <a:pPr marL="0" indent="0">
+            <a:pPr indent="0" marL="0">
               <a:buNone/>
             </a:pPr>
             <a:r>
@@ -18680,7 +18200,7 @@
           <a:bodyPr wrap="square" lIns="0" tIns="0" rIns="0" bIns="0" rtlCol="0" anchor="t"/>
           <a:lstStyle/>
           <a:p>
-            <a:pPr marL="0" indent="0">
+            <a:pPr indent="0" marL="0">
               <a:buNone/>
             </a:pPr>
             <a:r>
@@ -18724,13 +18244,6 @@
             <a:prstDash val="solid"/>
           </a:ln>
         </p:spPr>
-        <p:txBody>
-          <a:bodyPr/>
-          <a:lstStyle/>
-          <a:p>
-            <a:endParaRPr lang="en-US"/>
-          </a:p>
-        </p:txBody>
       </p:sp>
       <p:sp>
         <p:nvSpPr>
@@ -18753,7 +18266,7 @@
           <a:bodyPr wrap="square" lIns="0" tIns="0" rIns="0" bIns="0" rtlCol="0" anchor="ctr"/>
           <a:lstStyle/>
           <a:p>
-            <a:pPr marL="0" indent="0">
+            <a:pPr indent="0" marL="0">
               <a:buNone/>
             </a:pPr>
             <a:r>
@@ -18770,7 +18283,7 @@
             <a:endParaRPr lang="en-US" sz="1250" dirty="0"/>
           </a:p>
           <a:p>
-            <a:pPr marL="0" indent="0">
+            <a:pPr indent="0" marL="0">
               <a:buNone/>
             </a:pPr>
             <a:r>
@@ -18811,13 +18324,6 @@
             <a:tailEnd type="triangle"/>
           </a:ln>
         </p:spPr>
-        <p:txBody>
-          <a:bodyPr/>
-          <a:lstStyle/>
-          <a:p>
-            <a:endParaRPr lang="en-US"/>
-          </a:p>
-        </p:txBody>
       </p:sp>
       <p:sp>
         <p:nvSpPr>
@@ -18845,13 +18351,6 @@
             <a:prstDash val="solid"/>
           </a:ln>
         </p:spPr>
-        <p:txBody>
-          <a:bodyPr/>
-          <a:lstStyle/>
-          <a:p>
-            <a:endParaRPr lang="en-US"/>
-          </a:p>
-        </p:txBody>
       </p:sp>
       <p:sp>
         <p:nvSpPr>
@@ -18877,13 +18376,6 @@
             <a:prstDash val="solid"/>
           </a:ln>
         </p:spPr>
-        <p:txBody>
-          <a:bodyPr/>
-          <a:lstStyle/>
-          <a:p>
-            <a:endParaRPr lang="en-US"/>
-          </a:p>
-        </p:txBody>
       </p:sp>
       <p:sp>
         <p:nvSpPr>
@@ -18906,7 +18398,7 @@
           <a:bodyPr wrap="square" lIns="0" tIns="0" rIns="0" bIns="0" rtlCol="0" anchor="ctr"/>
           <a:lstStyle/>
           <a:p>
-            <a:pPr marL="0" indent="0" algn="ctr">
+            <a:pPr algn="ctr" indent="0" marL="0">
               <a:buNone/>
             </a:pPr>
             <a:r>
@@ -18950,13 +18442,6 @@
             <a:prstDash val="solid"/>
           </a:ln>
         </p:spPr>
-        <p:txBody>
-          <a:bodyPr/>
-          <a:lstStyle/>
-          <a:p>
-            <a:endParaRPr lang="en-US"/>
-          </a:p>
-        </p:txBody>
       </p:sp>
       <p:sp>
         <p:nvSpPr>
@@ -18979,7 +18464,7 @@
           <a:bodyPr wrap="square" lIns="0" tIns="0" rIns="0" bIns="0" rtlCol="0" anchor="ctr"/>
           <a:lstStyle/>
           <a:p>
-            <a:pPr marL="0" indent="0" algn="ctr">
+            <a:pPr algn="ctr" indent="0" marL="0">
               <a:buNone/>
             </a:pPr>
             <a:r>
@@ -19018,7 +18503,7 @@
           <a:bodyPr wrap="square" lIns="0" tIns="0" rIns="0" bIns="0" rtlCol="0" anchor="t"/>
           <a:lstStyle/>
           <a:p>
-            <a:pPr marL="0" indent="0">
+            <a:pPr indent="0" marL="0">
               <a:buNone/>
             </a:pPr>
             <a:r>
@@ -19057,7 +18542,7 @@
           <a:bodyPr wrap="square" lIns="0" tIns="0" rIns="0" bIns="0" rtlCol="0" anchor="t"/>
           <a:lstStyle/>
           <a:p>
-            <a:pPr marL="0" indent="0">
+            <a:pPr indent="0" marL="0">
               <a:buNone/>
             </a:pPr>
             <a:r>
@@ -19101,13 +18586,6 @@
             <a:prstDash val="solid"/>
           </a:ln>
         </p:spPr>
-        <p:txBody>
-          <a:bodyPr/>
-          <a:lstStyle/>
-          <a:p>
-            <a:endParaRPr lang="en-US"/>
-          </a:p>
-        </p:txBody>
       </p:sp>
       <p:sp>
         <p:nvSpPr>
@@ -19130,7 +18608,7 @@
           <a:bodyPr wrap="square" lIns="0" tIns="0" rIns="0" bIns="0" rtlCol="0" anchor="ctr"/>
           <a:lstStyle/>
           <a:p>
-            <a:pPr marL="0" indent="0">
+            <a:pPr indent="0" marL="0">
               <a:buNone/>
             </a:pPr>
             <a:r>
@@ -19147,7 +18625,7 @@
             <a:endParaRPr lang="en-US" sz="1250" dirty="0"/>
           </a:p>
           <a:p>
-            <a:pPr marL="0" indent="0">
+            <a:pPr indent="0" marL="0">
               <a:buNone/>
             </a:pPr>
             <a:r>
@@ -19186,7 +18664,7 @@
           <a:bodyPr wrap="square" lIns="0" tIns="0" rIns="0" bIns="0" rtlCol="0" anchor="t"/>
           <a:lstStyle/>
           <a:p>
-            <a:pPr marL="0" indent="0">
+            <a:pPr indent="0" marL="0">
               <a:buNone/>
             </a:pPr>
             <a:r>
@@ -19220,7 +18698,6 @@
         <a:solidFill>
           <a:srgbClr val="FFFFFF"/>
         </a:solidFill>
-        <a:effectLst/>
       </p:bgPr>
     </p:bg>
     <p:spTree>
@@ -19258,11 +18735,11 @@
           <a:bodyPr wrap="square" lIns="0" tIns="0" rIns="0" bIns="0" rtlCol="0" anchor="t"/>
           <a:lstStyle/>
           <a:p>
-            <a:pPr marL="0" indent="0">
+            <a:pPr indent="0" marL="0">
               <a:buNone/>
             </a:pPr>
             <a:r>
-              <a:rPr lang="en-US" sz="1100" b="1" kern="0" spc="200" dirty="0">
+              <a:rPr lang="en-US" sz="1100" b="1" spc="200" kern="0" dirty="0">
                 <a:solidFill>
                   <a:srgbClr val="D98C1F"/>
                 </a:solidFill>
@@ -19297,7 +18774,7 @@
           <a:bodyPr wrap="square" lIns="0" tIns="0" rIns="0" bIns="0" rtlCol="0" anchor="ctr"/>
           <a:lstStyle/>
           <a:p>
-            <a:pPr marL="0" indent="0">
+            <a:pPr indent="0" marL="0">
               <a:buNone/>
             </a:pPr>
             <a:r>
@@ -19336,7 +18813,7 @@
           <a:bodyPr wrap="square" lIns="0" tIns="0" rIns="0" bIns="0" rtlCol="0" anchor="t"/>
           <a:lstStyle/>
           <a:p>
-            <a:pPr marL="0" indent="0">
+            <a:pPr indent="0" marL="0">
               <a:buNone/>
             </a:pPr>
             <a:r>
@@ -19380,13 +18857,6 @@
             <a:prstDash val="solid"/>
           </a:ln>
         </p:spPr>
-        <p:txBody>
-          <a:bodyPr/>
-          <a:lstStyle/>
-          <a:p>
-            <a:endParaRPr lang="en-US"/>
-          </a:p>
-        </p:txBody>
       </p:sp>
       <p:sp>
         <p:nvSpPr>
@@ -19409,7 +18879,7 @@
           <a:bodyPr wrap="square" lIns="0" tIns="0" rIns="0" bIns="0" rtlCol="0" anchor="t"/>
           <a:lstStyle/>
           <a:p>
-            <a:pPr marL="0" indent="0">
+            <a:pPr indent="0" marL="0">
               <a:buNone/>
             </a:pPr>
             <a:r>
@@ -19448,7 +18918,7 @@
           <a:bodyPr wrap="square" lIns="0" tIns="0" rIns="0" bIns="0" rtlCol="0" anchor="t"/>
           <a:lstStyle/>
           <a:p>
-            <a:pPr marL="0" indent="0">
+            <a:pPr indent="0" marL="0">
               <a:buNone/>
             </a:pPr>
             <a:r>
@@ -19595,13 +19065,6 @@
             <a:tailEnd type="triangle"/>
           </a:ln>
         </p:spPr>
-        <p:txBody>
-          <a:bodyPr/>
-          <a:lstStyle/>
-          <a:p>
-            <a:endParaRPr lang="en-US"/>
-          </a:p>
-        </p:txBody>
       </p:sp>
       <p:sp>
         <p:nvSpPr>
@@ -19624,7 +19087,7 @@
           <a:bodyPr wrap="square" lIns="0" tIns="0" rIns="0" bIns="0" rtlCol="0" anchor="t"/>
           <a:lstStyle/>
           <a:p>
-            <a:pPr marL="0" indent="0">
+            <a:pPr indent="0" marL="0">
               <a:buNone/>
             </a:pPr>
             <a:r>
@@ -19668,13 +19131,6 @@
             <a:prstDash val="solid"/>
           </a:ln>
         </p:spPr>
-        <p:txBody>
-          <a:bodyPr/>
-          <a:lstStyle/>
-          <a:p>
-            <a:endParaRPr lang="en-US"/>
-          </a:p>
-        </p:txBody>
       </p:sp>
       <p:sp>
         <p:nvSpPr>
@@ -19697,7 +19153,7 @@
           <a:bodyPr wrap="square" lIns="0" tIns="0" rIns="0" bIns="0" rtlCol="0" anchor="t"/>
           <a:lstStyle/>
           <a:p>
-            <a:pPr marL="0" indent="0">
+            <a:pPr indent="0" marL="0">
               <a:buNone/>
             </a:pPr>
             <a:r>
@@ -19714,7 +19170,7 @@
             <a:endParaRPr lang="en-US" sz="1000" dirty="0"/>
           </a:p>
           <a:p>
-            <a:pPr marL="0" indent="0">
+            <a:pPr indent="0" marL="0">
               <a:buNone/>
             </a:pPr>
             <a:r>
@@ -19731,7 +19187,7 @@
             <a:endParaRPr lang="en-US" sz="1000" dirty="0"/>
           </a:p>
           <a:p>
-            <a:pPr marL="0" indent="0">
+            <a:pPr indent="0" marL="0">
               <a:buNone/>
             </a:pPr>
             <a:r>
@@ -19748,7 +19204,7 @@
             <a:endParaRPr lang="en-US" sz="1000" dirty="0"/>
           </a:p>
           <a:p>
-            <a:pPr marL="0" indent="0">
+            <a:pPr indent="0" marL="0">
               <a:buNone/>
             </a:pPr>
             <a:r>
@@ -19765,7 +19221,7 @@
             <a:endParaRPr lang="en-US" sz="1000" dirty="0"/>
           </a:p>
           <a:p>
-            <a:pPr marL="0" indent="0">
+            <a:pPr indent="0" marL="0">
               <a:buNone/>
             </a:pPr>
             <a:r>
@@ -19782,7 +19238,7 @@
             <a:endParaRPr lang="en-US" sz="1000" dirty="0"/>
           </a:p>
           <a:p>
-            <a:pPr marL="0" indent="0">
+            <a:pPr indent="0" marL="0">
               <a:buNone/>
             </a:pPr>
             <a:r>
@@ -19799,7 +19255,7 @@
             <a:endParaRPr lang="en-US" sz="1000" dirty="0"/>
           </a:p>
           <a:p>
-            <a:pPr marL="0" indent="0">
+            <a:pPr indent="0" marL="0">
               <a:buNone/>
             </a:pPr>
             <a:r>
@@ -19816,7 +19272,7 @@
             <a:endParaRPr lang="en-US" sz="1000" dirty="0"/>
           </a:p>
           <a:p>
-            <a:pPr marL="0" indent="0">
+            <a:pPr indent="0" marL="0">
               <a:buNone/>
             </a:pPr>
             <a:r>
@@ -19833,7 +19289,7 @@
             <a:endParaRPr lang="en-US" sz="1000" dirty="0"/>
           </a:p>
           <a:p>
-            <a:pPr marL="0" indent="0">
+            <a:pPr indent="0" marL="0">
               <a:buNone/>
             </a:pPr>
             <a:r>
@@ -19853,7 +19309,7 @@
       </p:sp>
       <p:graphicFrame>
         <p:nvGraphicFramePr>
-          <p:cNvPr id="13" name="Table 0"/>
+          <p:cNvPr id="7" name="Table 0"/>
           <p:cNvGraphicFramePr>
             <a:graphicFrameLocks noGrp="1"/>
           </p:cNvGraphicFramePr>
@@ -19867,27 +19323,15 @@
         </p:nvGraphicFramePr>
         <p:xfrm>
           <a:off x="6035040" y="4389120"/>
-          <a:ext cx="5577840" cy="1508760"/>
+          <a:ext cx="5577840" cy="914400"/>
         </p:xfrm>
         <a:graphic>
           <a:graphicData uri="http://schemas.openxmlformats.org/drawingml/2006/table">
             <a:tbl>
               <a:tblPr/>
               <a:tblGrid>
-                <a:gridCol w="1554480">
-                  <a:extLst>
-                    <a:ext uri="{9D8B030D-6E8A-4147-A177-3AD203B41FA5}">
-                      <a16:colId xmlns:a16="http://schemas.microsoft.com/office/drawing/2014/main" val="20000"/>
-                    </a:ext>
-                  </a:extLst>
-                </a:gridCol>
-                <a:gridCol w="4023360">
-                  <a:extLst>
-                    <a:ext uri="{9D8B030D-6E8A-4147-A177-3AD203B41FA5}">
-                      <a16:colId xmlns:a16="http://schemas.microsoft.com/office/drawing/2014/main" val="20001"/>
-                    </a:ext>
-                  </a:extLst>
-                </a:gridCol>
+                <a:gridCol w="1554480"/>
+                <a:gridCol w="4023360"/>
               </a:tblGrid>
               <a:tr h="301752">
                 <a:tc>
@@ -19895,7 +19339,7 @@
                     <a:bodyPr/>
                     <a:lstStyle/>
                     <a:p>
-                      <a:pPr marL="0" indent="0">
+                      <a:pPr indent="0" marL="0">
                         <a:buNone/>
                       </a:pPr>
                       <a:r>
@@ -19916,7 +19360,7 @@
                       </a:endParaRPr>
                     </a:p>
                   </a:txBody>
-                  <a:tcPr anchor="ctr">
+                  <a:tcPr marL="91440" marR="91440" marT="45720" marB="45720" anchor="ctr">
                     <a:lnL w="9525" cap="flat" cmpd="sng" algn="ctr">
                       <a:solidFill>
                         <a:srgbClr val="BFD8DD"/>
@@ -19963,7 +19407,7 @@
                     <a:bodyPr/>
                     <a:lstStyle/>
                     <a:p>
-                      <a:pPr marL="0" indent="0">
+                      <a:pPr indent="0" marL="0">
                         <a:buNone/>
                       </a:pPr>
                       <a:r>
@@ -19984,7 +19428,7 @@
                       </a:endParaRPr>
                     </a:p>
                   </a:txBody>
-                  <a:tcPr anchor="ctr">
+                  <a:tcPr marL="91440" marR="91440" marT="45720" marB="45720" anchor="ctr">
                     <a:lnL w="9525" cap="flat" cmpd="sng" algn="ctr">
                       <a:solidFill>
                         <a:srgbClr val="BFD8DD"/>
@@ -20026,11 +19470,6 @@
                     </a:solidFill>
                   </a:tcPr>
                 </a:tc>
-                <a:extLst>
-                  <a:ext uri="{0D108BD9-81ED-4DB2-BD59-A6C34878D82A}">
-                    <a16:rowId xmlns:a16="http://schemas.microsoft.com/office/drawing/2014/main" val="10000"/>
-                  </a:ext>
-                </a:extLst>
               </a:tr>
               <a:tr h="301752">
                 <a:tc>
@@ -20038,7 +19477,7 @@
                     <a:bodyPr/>
                     <a:lstStyle/>
                     <a:p>
-                      <a:pPr marL="0" indent="0">
+                      <a:pPr indent="0" marL="0">
                         <a:buNone/>
                       </a:pPr>
                       <a:r>
@@ -20059,7 +19498,7 @@
                       </a:endParaRPr>
                     </a:p>
                   </a:txBody>
-                  <a:tcPr anchor="ctr">
+                  <a:tcPr marL="91440" marR="91440" marT="45720" marB="45720" anchor="ctr">
                     <a:lnL w="9525" cap="flat" cmpd="sng" algn="ctr">
                       <a:solidFill>
                         <a:srgbClr val="BFD8DD"/>
@@ -20106,7 +19545,7 @@
                     <a:bodyPr/>
                     <a:lstStyle/>
                     <a:p>
-                      <a:pPr marL="0" indent="0">
+                      <a:pPr indent="0" marL="0">
                         <a:buNone/>
                       </a:pPr>
                       <a:r>
@@ -20127,7 +19566,7 @@
                       </a:endParaRPr>
                     </a:p>
                   </a:txBody>
-                  <a:tcPr anchor="ctr">
+                  <a:tcPr marL="91440" marR="91440" marT="45720" marB="45720" anchor="ctr">
                     <a:lnL w="9525" cap="flat" cmpd="sng" algn="ctr">
                       <a:solidFill>
                         <a:srgbClr val="BFD8DD"/>
@@ -20169,11 +19608,6 @@
                     </a:solidFill>
                   </a:tcPr>
                 </a:tc>
-                <a:extLst>
-                  <a:ext uri="{0D108BD9-81ED-4DB2-BD59-A6C34878D82A}">
-                    <a16:rowId xmlns:a16="http://schemas.microsoft.com/office/drawing/2014/main" val="10001"/>
-                  </a:ext>
-                </a:extLst>
               </a:tr>
               <a:tr h="301752">
                 <a:tc>
@@ -20181,7 +19615,7 @@
                     <a:bodyPr/>
                     <a:lstStyle/>
                     <a:p>
-                      <a:pPr marL="0" indent="0">
+                      <a:pPr indent="0" marL="0">
                         <a:buNone/>
                       </a:pPr>
                       <a:r>
@@ -20202,7 +19636,7 @@
                       </a:endParaRPr>
                     </a:p>
                   </a:txBody>
-                  <a:tcPr anchor="ctr">
+                  <a:tcPr marL="91440" marR="91440" marT="45720" marB="45720" anchor="ctr">
                     <a:lnL w="9525" cap="flat" cmpd="sng" algn="ctr">
                       <a:solidFill>
                         <a:srgbClr val="BFD8DD"/>
@@ -20249,7 +19683,7 @@
                     <a:bodyPr/>
                     <a:lstStyle/>
                     <a:p>
-                      <a:pPr marL="0" indent="0">
+                      <a:pPr indent="0" marL="0">
                         <a:buNone/>
                       </a:pPr>
                       <a:r>
@@ -20270,7 +19704,7 @@
                       </a:endParaRPr>
                     </a:p>
                   </a:txBody>
-                  <a:tcPr anchor="ctr">
+                  <a:tcPr marL="91440" marR="91440" marT="45720" marB="45720" anchor="ctr">
                     <a:lnL w="9525" cap="flat" cmpd="sng" algn="ctr">
                       <a:solidFill>
                         <a:srgbClr val="BFD8DD"/>
@@ -20312,11 +19746,6 @@
                     </a:solidFill>
                   </a:tcPr>
                 </a:tc>
-                <a:extLst>
-                  <a:ext uri="{0D108BD9-81ED-4DB2-BD59-A6C34878D82A}">
-                    <a16:rowId xmlns:a16="http://schemas.microsoft.com/office/drawing/2014/main" val="10002"/>
-                  </a:ext>
-                </a:extLst>
               </a:tr>
               <a:tr h="301752">
                 <a:tc>
@@ -20324,7 +19753,7 @@
                     <a:bodyPr/>
                     <a:lstStyle/>
                     <a:p>
-                      <a:pPr marL="0" indent="0">
+                      <a:pPr indent="0" marL="0">
                         <a:buNone/>
                       </a:pPr>
                       <a:r>
@@ -20345,7 +19774,7 @@
                       </a:endParaRPr>
                     </a:p>
                   </a:txBody>
-                  <a:tcPr anchor="ctr">
+                  <a:tcPr marL="91440" marR="91440" marT="45720" marB="45720" anchor="ctr">
                     <a:lnL w="9525" cap="flat" cmpd="sng" algn="ctr">
                       <a:solidFill>
                         <a:srgbClr val="BFD8DD"/>
@@ -20392,7 +19821,7 @@
                     <a:bodyPr/>
                     <a:lstStyle/>
                     <a:p>
-                      <a:pPr marL="0" indent="0">
+                      <a:pPr indent="0" marL="0">
                         <a:buNone/>
                       </a:pPr>
                       <a:r>
@@ -20413,7 +19842,7 @@
                       </a:endParaRPr>
                     </a:p>
                   </a:txBody>
-                  <a:tcPr anchor="ctr">
+                  <a:tcPr marL="91440" marR="91440" marT="45720" marB="45720" anchor="ctr">
                     <a:lnL w="9525" cap="flat" cmpd="sng" algn="ctr">
                       <a:solidFill>
                         <a:srgbClr val="BFD8DD"/>
@@ -20455,11 +19884,6 @@
                     </a:solidFill>
                   </a:tcPr>
                 </a:tc>
-                <a:extLst>
-                  <a:ext uri="{0D108BD9-81ED-4DB2-BD59-A6C34878D82A}">
-                    <a16:rowId xmlns:a16="http://schemas.microsoft.com/office/drawing/2014/main" val="10003"/>
-                  </a:ext>
-                </a:extLst>
               </a:tr>
               <a:tr h="301752">
                 <a:tc>
@@ -20467,7 +19891,7 @@
                     <a:bodyPr/>
                     <a:lstStyle/>
                     <a:p>
-                      <a:pPr marL="0" indent="0">
+                      <a:pPr indent="0" marL="0">
                         <a:buNone/>
                       </a:pPr>
                       <a:r>
@@ -20488,7 +19912,7 @@
                       </a:endParaRPr>
                     </a:p>
                   </a:txBody>
-                  <a:tcPr anchor="ctr">
+                  <a:tcPr marL="91440" marR="91440" marT="45720" marB="45720" anchor="ctr">
                     <a:lnL w="9525" cap="flat" cmpd="sng" algn="ctr">
                       <a:solidFill>
                         <a:srgbClr val="BFD8DD"/>
@@ -20535,7 +19959,7 @@
                     <a:bodyPr/>
                     <a:lstStyle/>
                     <a:p>
-                      <a:pPr marL="0" indent="0">
+                      <a:pPr indent="0" marL="0">
                         <a:buNone/>
                       </a:pPr>
                       <a:r>
@@ -20556,7 +19980,7 @@
                       </a:endParaRPr>
                     </a:p>
                   </a:txBody>
-                  <a:tcPr anchor="ctr">
+                  <a:tcPr marL="91440" marR="91440" marT="45720" marB="45720" anchor="ctr">
                     <a:lnL w="9525" cap="flat" cmpd="sng" algn="ctr">
                       <a:solidFill>
                         <a:srgbClr val="BFD8DD"/>
@@ -20598,11 +20022,6 @@
                     </a:solidFill>
                   </a:tcPr>
                 </a:tc>
-                <a:extLst>
-                  <a:ext uri="{0D108BD9-81ED-4DB2-BD59-A6C34878D82A}">
-                    <a16:rowId xmlns:a16="http://schemas.microsoft.com/office/drawing/2014/main" val="10004"/>
-                  </a:ext>
-                </a:extLst>
               </a:tr>
             </a:tbl>
           </a:graphicData>
@@ -20629,7 +20048,7 @@
           <a:bodyPr wrap="square" lIns="0" tIns="0" rIns="0" bIns="0" rtlCol="0" anchor="t"/>
           <a:lstStyle/>
           <a:p>
-            <a:pPr marL="0" indent="0">
+            <a:pPr indent="0" marL="0">
               <a:buNone/>
             </a:pPr>
             <a:r>
@@ -20663,7 +20082,6 @@
         <a:solidFill>
           <a:srgbClr val="FFFFFF"/>
         </a:solidFill>
-        <a:effectLst/>
       </p:bgPr>
     </p:bg>
     <p:spTree>
@@ -20701,11 +20119,11 @@
           <a:bodyPr wrap="square" lIns="0" tIns="0" rIns="0" bIns="0" rtlCol="0" anchor="t"/>
           <a:lstStyle/>
           <a:p>
-            <a:pPr marL="0" indent="0">
+            <a:pPr indent="0" marL="0">
               <a:buNone/>
             </a:pPr>
             <a:r>
-              <a:rPr lang="en-US" sz="1100" b="1" kern="0" spc="200" dirty="0">
+              <a:rPr lang="en-US" sz="1100" b="1" spc="200" kern="0" dirty="0">
                 <a:solidFill>
                   <a:srgbClr val="D98C1F"/>
                 </a:solidFill>
@@ -20740,7 +20158,7 @@
           <a:bodyPr wrap="square" lIns="0" tIns="0" rIns="0" bIns="0" rtlCol="0" anchor="ctr"/>
           <a:lstStyle/>
           <a:p>
-            <a:pPr marL="0" indent="0">
+            <a:pPr indent="0" marL="0">
               <a:buNone/>
             </a:pPr>
             <a:r>
@@ -20774,55 +20192,19 @@
         </p:nvGraphicFramePr>
         <p:xfrm>
           <a:off x="548640" y="1371600"/>
-          <a:ext cx="11064240" cy="2944368"/>
+          <a:ext cx="11064240" cy="914400"/>
         </p:xfrm>
         <a:graphic>
           <a:graphicData uri="http://schemas.openxmlformats.org/drawingml/2006/table">
             <a:tbl>
               <a:tblPr/>
               <a:tblGrid>
-                <a:gridCol w="365760">
-                  <a:extLst>
-                    <a:ext uri="{9D8B030D-6E8A-4147-A177-3AD203B41FA5}">
-                      <a16:colId xmlns:a16="http://schemas.microsoft.com/office/drawing/2014/main" val="20000"/>
-                    </a:ext>
-                  </a:extLst>
-                </a:gridCol>
-                <a:gridCol w="1325880">
-                  <a:extLst>
-                    <a:ext uri="{9D8B030D-6E8A-4147-A177-3AD203B41FA5}">
-                      <a16:colId xmlns:a16="http://schemas.microsoft.com/office/drawing/2014/main" val="20001"/>
-                    </a:ext>
-                  </a:extLst>
-                </a:gridCol>
-                <a:gridCol w="2606040">
-                  <a:extLst>
-                    <a:ext uri="{9D8B030D-6E8A-4147-A177-3AD203B41FA5}">
-                      <a16:colId xmlns:a16="http://schemas.microsoft.com/office/drawing/2014/main" val="20002"/>
-                    </a:ext>
-                  </a:extLst>
-                </a:gridCol>
-                <a:gridCol w="2514600">
-                  <a:extLst>
-                    <a:ext uri="{9D8B030D-6E8A-4147-A177-3AD203B41FA5}">
-                      <a16:colId xmlns:a16="http://schemas.microsoft.com/office/drawing/2014/main" val="20003"/>
-                    </a:ext>
-                  </a:extLst>
-                </a:gridCol>
-                <a:gridCol w="3429000">
-                  <a:extLst>
-                    <a:ext uri="{9D8B030D-6E8A-4147-A177-3AD203B41FA5}">
-                      <a16:colId xmlns:a16="http://schemas.microsoft.com/office/drawing/2014/main" val="20004"/>
-                    </a:ext>
-                  </a:extLst>
-                </a:gridCol>
-                <a:gridCol w="822960">
-                  <a:extLst>
-                    <a:ext uri="{9D8B030D-6E8A-4147-A177-3AD203B41FA5}">
-                      <a16:colId xmlns:a16="http://schemas.microsoft.com/office/drawing/2014/main" val="20005"/>
-                    </a:ext>
-                  </a:extLst>
-                </a:gridCol>
+                <a:gridCol w="365760"/>
+                <a:gridCol w="1325880"/>
+                <a:gridCol w="2606040"/>
+                <a:gridCol w="2514600"/>
+                <a:gridCol w="3429000"/>
+                <a:gridCol w="822960"/>
               </a:tblGrid>
               <a:tr h="329184">
                 <a:tc>
@@ -20830,7 +20212,7 @@
                     <a:bodyPr/>
                     <a:lstStyle/>
                     <a:p>
-                      <a:pPr marL="0" indent="0">
+                      <a:pPr indent="0" marL="0">
                         <a:buNone/>
                       </a:pPr>
                       <a:r>
@@ -20851,7 +20233,7 @@
                       </a:endParaRPr>
                     </a:p>
                   </a:txBody>
-                  <a:tcPr anchor="ctr">
+                  <a:tcPr marL="91440" marR="91440" marT="45720" marB="45720" anchor="ctr">
                     <a:lnL w="9525" cap="flat" cmpd="sng" algn="ctr">
                       <a:solidFill>
                         <a:srgbClr val="BFD8DD"/>
@@ -20898,7 +20280,7 @@
                     <a:bodyPr/>
                     <a:lstStyle/>
                     <a:p>
-                      <a:pPr marL="0" indent="0">
+                      <a:pPr indent="0" marL="0">
                         <a:buNone/>
                       </a:pPr>
                       <a:r>
@@ -20919,7 +20301,7 @@
                       </a:endParaRPr>
                     </a:p>
                   </a:txBody>
-                  <a:tcPr anchor="ctr">
+                  <a:tcPr marL="91440" marR="91440" marT="45720" marB="45720" anchor="ctr">
                     <a:lnL w="9525" cap="flat" cmpd="sng" algn="ctr">
                       <a:solidFill>
                         <a:srgbClr val="BFD8DD"/>
@@ -20966,7 +20348,7 @@
                     <a:bodyPr/>
                     <a:lstStyle/>
                     <a:p>
-                      <a:pPr marL="0" indent="0">
+                      <a:pPr indent="0" marL="0">
                         <a:buNone/>
                       </a:pPr>
                       <a:r>
@@ -20987,7 +20369,7 @@
                       </a:endParaRPr>
                     </a:p>
                   </a:txBody>
-                  <a:tcPr anchor="ctr">
+                  <a:tcPr marL="91440" marR="91440" marT="45720" marB="45720" anchor="ctr">
                     <a:lnL w="9525" cap="flat" cmpd="sng" algn="ctr">
                       <a:solidFill>
                         <a:srgbClr val="BFD8DD"/>
@@ -21034,7 +20416,7 @@
                     <a:bodyPr/>
                     <a:lstStyle/>
                     <a:p>
-                      <a:pPr marL="0" indent="0">
+                      <a:pPr indent="0" marL="0">
                         <a:buNone/>
                       </a:pPr>
                       <a:r>
@@ -21055,7 +20437,7 @@
                       </a:endParaRPr>
                     </a:p>
                   </a:txBody>
-                  <a:tcPr anchor="ctr">
+                  <a:tcPr marL="91440" marR="91440" marT="45720" marB="45720" anchor="ctr">
                     <a:lnL w="9525" cap="flat" cmpd="sng" algn="ctr">
                       <a:solidFill>
                         <a:srgbClr val="BFD8DD"/>
@@ -21102,7 +20484,7 @@
                     <a:bodyPr/>
                     <a:lstStyle/>
                     <a:p>
-                      <a:pPr marL="0" indent="0">
+                      <a:pPr indent="0" marL="0">
                         <a:buNone/>
                       </a:pPr>
                       <a:r>
@@ -21123,7 +20505,7 @@
                       </a:endParaRPr>
                     </a:p>
                   </a:txBody>
-                  <a:tcPr anchor="ctr">
+                  <a:tcPr marL="91440" marR="91440" marT="45720" marB="45720" anchor="ctr">
                     <a:lnL w="9525" cap="flat" cmpd="sng" algn="ctr">
                       <a:solidFill>
                         <a:srgbClr val="BFD8DD"/>
@@ -21170,7 +20552,7 @@
                     <a:bodyPr/>
                     <a:lstStyle/>
                     <a:p>
-                      <a:pPr marL="0" indent="0">
+                      <a:pPr indent="0" marL="0">
                         <a:buNone/>
                       </a:pPr>
                       <a:r>
@@ -21191,7 +20573,7 @@
                       </a:endParaRPr>
                     </a:p>
                   </a:txBody>
-                  <a:tcPr anchor="ctr">
+                  <a:tcPr marL="91440" marR="91440" marT="45720" marB="45720" anchor="ctr">
                     <a:lnL w="9525" cap="flat" cmpd="sng" algn="ctr">
                       <a:solidFill>
                         <a:srgbClr val="BFD8DD"/>
@@ -21233,11 +20615,6 @@
                     </a:solidFill>
                   </a:tcPr>
                 </a:tc>
-                <a:extLst>
-                  <a:ext uri="{0D108BD9-81ED-4DB2-BD59-A6C34878D82A}">
-                    <a16:rowId xmlns:a16="http://schemas.microsoft.com/office/drawing/2014/main" val="10000"/>
-                  </a:ext>
-                </a:extLst>
               </a:tr>
               <a:tr h="658368">
                 <a:tc>
@@ -21245,7 +20622,7 @@
                     <a:bodyPr/>
                     <a:lstStyle/>
                     <a:p>
-                      <a:pPr marL="0" indent="0">
+                      <a:pPr indent="0" marL="0">
                         <a:buNone/>
                       </a:pPr>
                       <a:r>
@@ -21266,7 +20643,7 @@
                       </a:endParaRPr>
                     </a:p>
                   </a:txBody>
-                  <a:tcPr anchor="ctr">
+                  <a:tcPr marL="91440" marR="91440" marT="45720" marB="45720" anchor="ctr">
                     <a:lnL w="9525" cap="flat" cmpd="sng" algn="ctr">
                       <a:solidFill>
                         <a:srgbClr val="BFD8DD"/>
@@ -21313,7 +20690,7 @@
                     <a:bodyPr/>
                     <a:lstStyle/>
                     <a:p>
-                      <a:pPr marL="0" indent="0">
+                      <a:pPr indent="0" marL="0">
                         <a:buNone/>
                       </a:pPr>
                       <a:r>
@@ -21334,7 +20711,7 @@
                       </a:endParaRPr>
                     </a:p>
                   </a:txBody>
-                  <a:tcPr anchor="ctr">
+                  <a:tcPr marL="91440" marR="91440" marT="45720" marB="45720" anchor="ctr">
                     <a:lnL w="9525" cap="flat" cmpd="sng" algn="ctr">
                       <a:solidFill>
                         <a:srgbClr val="BFD8DD"/>
@@ -21381,7 +20758,7 @@
                     <a:bodyPr/>
                     <a:lstStyle/>
                     <a:p>
-                      <a:pPr marL="0" indent="0">
+                      <a:pPr indent="0" marL="0">
                         <a:buNone/>
                       </a:pPr>
                       <a:r>
@@ -21402,7 +20779,7 @@
                       </a:endParaRPr>
                     </a:p>
                   </a:txBody>
-                  <a:tcPr anchor="ctr">
+                  <a:tcPr marL="91440" marR="91440" marT="45720" marB="45720" anchor="ctr">
                     <a:lnL w="9525" cap="flat" cmpd="sng" algn="ctr">
                       <a:solidFill>
                         <a:srgbClr val="BFD8DD"/>
@@ -21449,7 +20826,7 @@
                     <a:bodyPr/>
                     <a:lstStyle/>
                     <a:p>
-                      <a:pPr marL="0" indent="0">
+                      <a:pPr indent="0" marL="0">
                         <a:buNone/>
                       </a:pPr>
                       <a:r>
@@ -21470,7 +20847,7 @@
                       </a:endParaRPr>
                     </a:p>
                   </a:txBody>
-                  <a:tcPr anchor="ctr">
+                  <a:tcPr marL="91440" marR="91440" marT="45720" marB="45720" anchor="ctr">
                     <a:lnL w="9525" cap="flat" cmpd="sng" algn="ctr">
                       <a:solidFill>
                         <a:srgbClr val="BFD8DD"/>
@@ -21517,7 +20894,7 @@
                     <a:bodyPr/>
                     <a:lstStyle/>
                     <a:p>
-                      <a:pPr marL="0" indent="0">
+                      <a:pPr indent="0" marL="0">
                         <a:buNone/>
                       </a:pPr>
                       <a:r>
@@ -21538,7 +20915,7 @@
                       </a:endParaRPr>
                     </a:p>
                   </a:txBody>
-                  <a:tcPr anchor="ctr">
+                  <a:tcPr marL="91440" marR="91440" marT="45720" marB="45720" anchor="ctr">
                     <a:lnL w="9525" cap="flat" cmpd="sng" algn="ctr">
                       <a:solidFill>
                         <a:srgbClr val="BFD8DD"/>
@@ -21585,7 +20962,7 @@
                     <a:bodyPr/>
                     <a:lstStyle/>
                     <a:p>
-                      <a:pPr marL="0" indent="0">
+                      <a:pPr indent="0" marL="0">
                         <a:buNone/>
                       </a:pPr>
                       <a:r>
@@ -21606,7 +20983,7 @@
                       </a:endParaRPr>
                     </a:p>
                   </a:txBody>
-                  <a:tcPr anchor="ctr">
+                  <a:tcPr marL="91440" marR="91440" marT="45720" marB="45720" anchor="ctr">
                     <a:lnL w="9525" cap="flat" cmpd="sng" algn="ctr">
                       <a:solidFill>
                         <a:srgbClr val="BFD8DD"/>
@@ -21648,11 +21025,6 @@
                     </a:solidFill>
                   </a:tcPr>
                 </a:tc>
-                <a:extLst>
-                  <a:ext uri="{0D108BD9-81ED-4DB2-BD59-A6C34878D82A}">
-                    <a16:rowId xmlns:a16="http://schemas.microsoft.com/office/drawing/2014/main" val="10001"/>
-                  </a:ext>
-                </a:extLst>
               </a:tr>
               <a:tr h="731520">
                 <a:tc>
@@ -21660,7 +21032,7 @@
                     <a:bodyPr/>
                     <a:lstStyle/>
                     <a:p>
-                      <a:pPr marL="0" indent="0">
+                      <a:pPr indent="0" marL="0">
                         <a:buNone/>
                       </a:pPr>
                       <a:r>
@@ -21681,7 +21053,7 @@
                       </a:endParaRPr>
                     </a:p>
                   </a:txBody>
-                  <a:tcPr anchor="ctr">
+                  <a:tcPr marL="91440" marR="91440" marT="45720" marB="45720" anchor="ctr">
                     <a:lnL w="9525" cap="flat" cmpd="sng" algn="ctr">
                       <a:solidFill>
                         <a:srgbClr val="BFD8DD"/>
@@ -21728,7 +21100,7 @@
                     <a:bodyPr/>
                     <a:lstStyle/>
                     <a:p>
-                      <a:pPr marL="0" indent="0">
+                      <a:pPr indent="0" marL="0">
                         <a:buNone/>
                       </a:pPr>
                       <a:r>
@@ -21749,7 +21121,7 @@
                       </a:endParaRPr>
                     </a:p>
                   </a:txBody>
-                  <a:tcPr anchor="ctr">
+                  <a:tcPr marL="91440" marR="91440" marT="45720" marB="45720" anchor="ctr">
                     <a:lnL w="9525" cap="flat" cmpd="sng" algn="ctr">
                       <a:solidFill>
                         <a:srgbClr val="BFD8DD"/>
@@ -21796,7 +21168,7 @@
                     <a:bodyPr/>
                     <a:lstStyle/>
                     <a:p>
-                      <a:pPr marL="0" indent="0">
+                      <a:pPr indent="0" marL="0">
                         <a:buNone/>
                       </a:pPr>
                       <a:r>
@@ -21817,7 +21189,7 @@
                       </a:endParaRPr>
                     </a:p>
                   </a:txBody>
-                  <a:tcPr anchor="ctr">
+                  <a:tcPr marL="91440" marR="91440" marT="45720" marB="45720" anchor="ctr">
                     <a:lnL w="9525" cap="flat" cmpd="sng" algn="ctr">
                       <a:solidFill>
                         <a:srgbClr val="BFD8DD"/>
@@ -21864,7 +21236,7 @@
                     <a:bodyPr/>
                     <a:lstStyle/>
                     <a:p>
-                      <a:pPr marL="0" indent="0">
+                      <a:pPr indent="0" marL="0">
                         <a:buNone/>
                       </a:pPr>
                       <a:r>
@@ -21885,7 +21257,7 @@
                       </a:endParaRPr>
                     </a:p>
                   </a:txBody>
-                  <a:tcPr anchor="ctr">
+                  <a:tcPr marL="91440" marR="91440" marT="45720" marB="45720" anchor="ctr">
                     <a:lnL w="9525" cap="flat" cmpd="sng" algn="ctr">
                       <a:solidFill>
                         <a:srgbClr val="BFD8DD"/>
@@ -21932,7 +21304,7 @@
                     <a:bodyPr/>
                     <a:lstStyle/>
                     <a:p>
-                      <a:pPr marL="0" indent="0">
+                      <a:pPr indent="0" marL="0">
                         <a:buNone/>
                       </a:pPr>
                       <a:r>
@@ -21953,7 +21325,7 @@
                       </a:endParaRPr>
                     </a:p>
                   </a:txBody>
-                  <a:tcPr anchor="ctr">
+                  <a:tcPr marL="91440" marR="91440" marT="45720" marB="45720" anchor="ctr">
                     <a:lnL w="9525" cap="flat" cmpd="sng" algn="ctr">
                       <a:solidFill>
                         <a:srgbClr val="BFD8DD"/>
@@ -22000,7 +21372,7 @@
                     <a:bodyPr/>
                     <a:lstStyle/>
                     <a:p>
-                      <a:pPr marL="0" indent="0">
+                      <a:pPr indent="0" marL="0">
                         <a:buNone/>
                       </a:pPr>
                       <a:r>
@@ -22021,7 +21393,7 @@
                       </a:endParaRPr>
                     </a:p>
                   </a:txBody>
-                  <a:tcPr anchor="ctr">
+                  <a:tcPr marL="91440" marR="91440" marT="45720" marB="45720" anchor="ctr">
                     <a:lnL w="9525" cap="flat" cmpd="sng" algn="ctr">
                       <a:solidFill>
                         <a:srgbClr val="BFD8DD"/>
@@ -22063,11 +21435,6 @@
                     </a:solidFill>
                   </a:tcPr>
                 </a:tc>
-                <a:extLst>
-                  <a:ext uri="{0D108BD9-81ED-4DB2-BD59-A6C34878D82A}">
-                    <a16:rowId xmlns:a16="http://schemas.microsoft.com/office/drawing/2014/main" val="10002"/>
-                  </a:ext>
-                </a:extLst>
               </a:tr>
               <a:tr h="566928">
                 <a:tc>
@@ -22075,7 +21442,7 @@
                     <a:bodyPr/>
                     <a:lstStyle/>
                     <a:p>
-                      <a:pPr marL="0" indent="0">
+                      <a:pPr indent="0" marL="0">
                         <a:buNone/>
                       </a:pPr>
                       <a:r>
@@ -22096,7 +21463,7 @@
                       </a:endParaRPr>
                     </a:p>
                   </a:txBody>
-                  <a:tcPr anchor="ctr">
+                  <a:tcPr marL="91440" marR="91440" marT="45720" marB="45720" anchor="ctr">
                     <a:lnL w="9525" cap="flat" cmpd="sng" algn="ctr">
                       <a:solidFill>
                         <a:srgbClr val="BFD8DD"/>
@@ -22143,7 +21510,7 @@
                     <a:bodyPr/>
                     <a:lstStyle/>
                     <a:p>
-                      <a:pPr marL="0" indent="0">
+                      <a:pPr indent="0" marL="0">
                         <a:buNone/>
                       </a:pPr>
                       <a:r>
@@ -22164,7 +21531,7 @@
                       </a:endParaRPr>
                     </a:p>
                   </a:txBody>
-                  <a:tcPr anchor="ctr">
+                  <a:tcPr marL="91440" marR="91440" marT="45720" marB="45720" anchor="ctr">
                     <a:lnL w="9525" cap="flat" cmpd="sng" algn="ctr">
                       <a:solidFill>
                         <a:srgbClr val="BFD8DD"/>
@@ -22211,7 +21578,7 @@
                     <a:bodyPr/>
                     <a:lstStyle/>
                     <a:p>
-                      <a:pPr marL="0" indent="0">
+                      <a:pPr indent="0" marL="0">
                         <a:buNone/>
                       </a:pPr>
                       <a:r>
@@ -22232,7 +21599,7 @@
                       </a:endParaRPr>
                     </a:p>
                   </a:txBody>
-                  <a:tcPr anchor="ctr">
+                  <a:tcPr marL="91440" marR="91440" marT="45720" marB="45720" anchor="ctr">
                     <a:lnL w="9525" cap="flat" cmpd="sng" algn="ctr">
                       <a:solidFill>
                         <a:srgbClr val="BFD8DD"/>
@@ -22279,7 +21646,7 @@
                     <a:bodyPr/>
                     <a:lstStyle/>
                     <a:p>
-                      <a:pPr marL="0" indent="0">
+                      <a:pPr indent="0" marL="0">
                         <a:buNone/>
                       </a:pPr>
                       <a:r>
@@ -22300,7 +21667,7 @@
                       </a:endParaRPr>
                     </a:p>
                   </a:txBody>
-                  <a:tcPr anchor="ctr">
+                  <a:tcPr marL="91440" marR="91440" marT="45720" marB="45720" anchor="ctr">
                     <a:lnL w="9525" cap="flat" cmpd="sng" algn="ctr">
                       <a:solidFill>
                         <a:srgbClr val="BFD8DD"/>
@@ -22347,7 +21714,7 @@
                     <a:bodyPr/>
                     <a:lstStyle/>
                     <a:p>
-                      <a:pPr marL="0" indent="0">
+                      <a:pPr indent="0" marL="0">
                         <a:buNone/>
                       </a:pPr>
                       <a:r>
@@ -22368,7 +21735,7 @@
                       </a:endParaRPr>
                     </a:p>
                   </a:txBody>
-                  <a:tcPr anchor="ctr">
+                  <a:tcPr marL="91440" marR="91440" marT="45720" marB="45720" anchor="ctr">
                     <a:lnL w="9525" cap="flat" cmpd="sng" algn="ctr">
                       <a:solidFill>
                         <a:srgbClr val="BFD8DD"/>
@@ -22415,7 +21782,7 @@
                     <a:bodyPr/>
                     <a:lstStyle/>
                     <a:p>
-                      <a:pPr marL="0" indent="0">
+                      <a:pPr indent="0" marL="0">
                         <a:buNone/>
                       </a:pPr>
                       <a:r>
@@ -22436,7 +21803,7 @@
                       </a:endParaRPr>
                     </a:p>
                   </a:txBody>
-                  <a:tcPr anchor="ctr">
+                  <a:tcPr marL="91440" marR="91440" marT="45720" marB="45720" anchor="ctr">
                     <a:lnL w="9525" cap="flat" cmpd="sng" algn="ctr">
                       <a:solidFill>
                         <a:srgbClr val="BFD8DD"/>
@@ -22478,11 +21845,6 @@
                     </a:solidFill>
                   </a:tcPr>
                 </a:tc>
-                <a:extLst>
-                  <a:ext uri="{0D108BD9-81ED-4DB2-BD59-A6C34878D82A}">
-                    <a16:rowId xmlns:a16="http://schemas.microsoft.com/office/drawing/2014/main" val="10003"/>
-                  </a:ext>
-                </a:extLst>
               </a:tr>
               <a:tr h="658368">
                 <a:tc>
@@ -22490,7 +21852,7 @@
                     <a:bodyPr/>
                     <a:lstStyle/>
                     <a:p>
-                      <a:pPr marL="0" indent="0">
+                      <a:pPr indent="0" marL="0">
                         <a:buNone/>
                       </a:pPr>
                       <a:r>
@@ -22511,7 +21873,7 @@
                       </a:endParaRPr>
                     </a:p>
                   </a:txBody>
-                  <a:tcPr anchor="ctr">
+                  <a:tcPr marL="91440" marR="91440" marT="45720" marB="45720" anchor="ctr">
                     <a:lnL w="9525" cap="flat" cmpd="sng" algn="ctr">
                       <a:solidFill>
                         <a:srgbClr val="BFD8DD"/>
@@ -22558,7 +21920,7 @@
                     <a:bodyPr/>
                     <a:lstStyle/>
                     <a:p>
-                      <a:pPr marL="0" indent="0">
+                      <a:pPr indent="0" marL="0">
                         <a:buNone/>
                       </a:pPr>
                       <a:r>
@@ -22579,7 +21941,7 @@
                       </a:endParaRPr>
                     </a:p>
                   </a:txBody>
-                  <a:tcPr anchor="ctr">
+                  <a:tcPr marL="91440" marR="91440" marT="45720" marB="45720" anchor="ctr">
                     <a:lnL w="9525" cap="flat" cmpd="sng" algn="ctr">
                       <a:solidFill>
                         <a:srgbClr val="BFD8DD"/>
@@ -22626,7 +21988,7 @@
                     <a:bodyPr/>
                     <a:lstStyle/>
                     <a:p>
-                      <a:pPr marL="0" indent="0">
+                      <a:pPr indent="0" marL="0">
                         <a:buNone/>
                       </a:pPr>
                       <a:r>
@@ -22647,7 +22009,7 @@
                       </a:endParaRPr>
                     </a:p>
                   </a:txBody>
-                  <a:tcPr anchor="ctr">
+                  <a:tcPr marL="91440" marR="91440" marT="45720" marB="45720" anchor="ctr">
                     <a:lnL w="9525" cap="flat" cmpd="sng" algn="ctr">
                       <a:solidFill>
                         <a:srgbClr val="BFD8DD"/>
@@ -22694,7 +22056,7 @@
                     <a:bodyPr/>
                     <a:lstStyle/>
                     <a:p>
-                      <a:pPr marL="0" indent="0">
+                      <a:pPr indent="0" marL="0">
                         <a:buNone/>
                       </a:pPr>
                       <a:r>
@@ -22715,7 +22077,7 @@
                       </a:endParaRPr>
                     </a:p>
                   </a:txBody>
-                  <a:tcPr anchor="ctr">
+                  <a:tcPr marL="91440" marR="91440" marT="45720" marB="45720" anchor="ctr">
                     <a:lnL w="9525" cap="flat" cmpd="sng" algn="ctr">
                       <a:solidFill>
                         <a:srgbClr val="BFD8DD"/>
@@ -22762,7 +22124,7 @@
                     <a:bodyPr/>
                     <a:lstStyle/>
                     <a:p>
-                      <a:pPr marL="0" indent="0">
+                      <a:pPr indent="0" marL="0">
                         <a:buNone/>
                       </a:pPr>
                       <a:r>
@@ -22783,7 +22145,7 @@
                       </a:endParaRPr>
                     </a:p>
                   </a:txBody>
-                  <a:tcPr anchor="ctr">
+                  <a:tcPr marL="91440" marR="91440" marT="45720" marB="45720" anchor="ctr">
                     <a:lnL w="9525" cap="flat" cmpd="sng" algn="ctr">
                       <a:solidFill>
                         <a:srgbClr val="BFD8DD"/>
@@ -22830,7 +22192,7 @@
                     <a:bodyPr/>
                     <a:lstStyle/>
                     <a:p>
-                      <a:pPr marL="0" indent="0">
+                      <a:pPr indent="0" marL="0">
                         <a:buNone/>
                       </a:pPr>
                       <a:r>
@@ -22851,7 +22213,7 @@
                       </a:endParaRPr>
                     </a:p>
                   </a:txBody>
-                  <a:tcPr anchor="ctr">
+                  <a:tcPr marL="91440" marR="91440" marT="45720" marB="45720" anchor="ctr">
                     <a:lnL w="9525" cap="flat" cmpd="sng" algn="ctr">
                       <a:solidFill>
                         <a:srgbClr val="BFD8DD"/>
@@ -22893,11 +22255,6 @@
                     </a:solidFill>
                   </a:tcPr>
                 </a:tc>
-                <a:extLst>
-                  <a:ext uri="{0D108BD9-81ED-4DB2-BD59-A6C34878D82A}">
-                    <a16:rowId xmlns:a16="http://schemas.microsoft.com/office/drawing/2014/main" val="10004"/>
-                  </a:ext>
-                </a:extLst>
               </a:tr>
             </a:tbl>
           </a:graphicData>
@@ -22929,13 +22286,6 @@
             <a:prstDash val="solid"/>
           </a:ln>
         </p:spPr>
-        <p:txBody>
-          <a:bodyPr/>
-          <a:lstStyle/>
-          <a:p>
-            <a:endParaRPr lang="en-US"/>
-          </a:p>
-        </p:txBody>
       </p:sp>
       <p:sp>
         <p:nvSpPr>
@@ -22958,7 +22308,7 @@
           <a:bodyPr wrap="square" lIns="0" tIns="0" rIns="0" bIns="0" rtlCol="0" anchor="t"/>
           <a:lstStyle/>
           <a:p>
-            <a:pPr marL="0" indent="0">
+            <a:pPr indent="0" marL="0">
               <a:buNone/>
             </a:pPr>
             <a:r>
@@ -22997,7 +22347,7 @@
           <a:bodyPr wrap="square" lIns="0" tIns="0" rIns="0" bIns="0" rtlCol="0" anchor="t"/>
           <a:lstStyle/>
           <a:p>
-            <a:pPr marL="0" indent="0">
+            <a:pPr indent="0" marL="0">
               <a:buNone/>
             </a:pPr>
             <a:r>
@@ -23017,7 +22367,7 @@
       </p:sp>
       <p:sp>
         <p:nvSpPr>
-          <p:cNvPr id="4" name="Text 5"/>
+          <p:cNvPr id="8" name="Text 5"/>
           <p:cNvSpPr txBox="1"/>
           <p:nvPr/>
         </p:nvSpPr>
@@ -23036,7 +22386,7 @@
           <a:bodyPr wrap="square" lIns="0" tIns="0" rIns="0" bIns="0" rtlCol="0" anchor="t"/>
           <a:lstStyle/>
           <a:p>
-            <a:pPr marL="0" indent="0">
+            <a:pPr indent="0" marL="0">
               <a:buNone/>
             </a:pPr>
             <a:r>
@@ -23080,13 +22430,6 @@
             <a:prstDash val="solid"/>
           </a:ln>
         </p:spPr>
-        <p:txBody>
-          <a:bodyPr/>
-          <a:lstStyle/>
-          <a:p>
-            <a:endParaRPr lang="en-US"/>
-          </a:p>
-        </p:txBody>
       </p:sp>
       <p:sp>
         <p:nvSpPr>
@@ -23109,7 +22452,7 @@
           <a:bodyPr wrap="square" lIns="0" tIns="0" rIns="0" bIns="0" rtlCol="0" anchor="t"/>
           <a:lstStyle/>
           <a:p>
-            <a:pPr marL="0" indent="0">
+            <a:pPr indent="0" marL="0">
               <a:buNone/>
             </a:pPr>
             <a:r>
@@ -23148,7 +22491,7 @@
           <a:bodyPr wrap="square" lIns="0" tIns="0" rIns="0" bIns="0" rtlCol="0" anchor="t"/>
           <a:lstStyle/>
           <a:p>
-            <a:pPr marL="0" indent="0">
+            <a:pPr indent="0" marL="0">
               <a:buNone/>
             </a:pPr>
             <a:r>
@@ -23187,7 +22530,7 @@
           <a:bodyPr wrap="square" lIns="0" tIns="0" rIns="0" bIns="0" rtlCol="0" anchor="t"/>
           <a:lstStyle/>
           <a:p>
-            <a:pPr marL="0" indent="0">
+            <a:pPr indent="0" marL="0">
               <a:buNone/>
             </a:pPr>
             <a:r>
@@ -23221,7 +22564,6 @@
         <a:solidFill>
           <a:srgbClr val="FFFFFF"/>
         </a:solidFill>
-        <a:effectLst/>
       </p:bgPr>
     </p:bg>
     <p:spTree>
@@ -23259,11 +22601,11 @@
           <a:bodyPr wrap="square" lIns="0" tIns="0" rIns="0" bIns="0" rtlCol="0" anchor="t"/>
           <a:lstStyle/>
           <a:p>
-            <a:pPr marL="0" indent="0">
+            <a:pPr indent="0" marL="0">
               <a:buNone/>
             </a:pPr>
             <a:r>
-              <a:rPr lang="en-US" sz="1100" b="1" kern="0" spc="200" dirty="0">
+              <a:rPr lang="en-US" sz="1100" b="1" spc="200" kern="0" dirty="0">
                 <a:solidFill>
                   <a:srgbClr val="D98C1F"/>
                 </a:solidFill>
@@ -23298,7 +22640,7 @@
           <a:bodyPr wrap="square" lIns="0" tIns="0" rIns="0" bIns="0" rtlCol="0" anchor="ctr"/>
           <a:lstStyle/>
           <a:p>
-            <a:pPr marL="0" indent="0">
+            <a:pPr indent="0" marL="0">
               <a:buNone/>
             </a:pPr>
             <a:r>
@@ -23337,7 +22679,7 @@
           <a:bodyPr wrap="square" lIns="0" tIns="0" rIns="0" bIns="0" rtlCol="0" anchor="t"/>
           <a:lstStyle/>
           <a:p>
-            <a:pPr marL="0" indent="0">
+            <a:pPr indent="0" marL="0">
               <a:buNone/>
             </a:pPr>
             <a:r>
@@ -23381,13 +22723,6 @@
             <a:prstDash val="solid"/>
           </a:ln>
         </p:spPr>
-        <p:txBody>
-          <a:bodyPr/>
-          <a:lstStyle/>
-          <a:p>
-            <a:endParaRPr lang="en-US"/>
-          </a:p>
-        </p:txBody>
       </p:sp>
       <p:sp>
         <p:nvSpPr>
@@ -23413,13 +22748,6 @@
             <a:prstDash val="solid"/>
           </a:ln>
         </p:spPr>
-        <p:txBody>
-          <a:bodyPr/>
-          <a:lstStyle/>
-          <a:p>
-            <a:endParaRPr lang="en-US"/>
-          </a:p>
-        </p:txBody>
       </p:sp>
       <p:sp>
         <p:nvSpPr>
@@ -23442,7 +22770,7 @@
           <a:bodyPr wrap="square" lIns="0" tIns="0" rIns="0" bIns="0" rtlCol="0" anchor="ctr"/>
           <a:lstStyle/>
           <a:p>
-            <a:pPr marL="0" indent="0" algn="ctr">
+            <a:pPr algn="ctr" indent="0" marL="0">
               <a:buNone/>
             </a:pPr>
             <a:r>
@@ -23481,7 +22809,7 @@
           <a:bodyPr wrap="square" lIns="0" tIns="0" rIns="0" bIns="0" rtlCol="0" anchor="ctr"/>
           <a:lstStyle/>
           <a:p>
-            <a:pPr marL="0" indent="0">
+            <a:pPr indent="0" marL="0">
               <a:buNone/>
             </a:pPr>
             <a:r>
@@ -23520,7 +22848,7 @@
           <a:bodyPr wrap="square" lIns="0" tIns="0" rIns="0" bIns="0" rtlCol="0" anchor="ctr"/>
           <a:lstStyle/>
           <a:p>
-            <a:pPr marL="0" indent="0" algn="r">
+            <a:pPr algn="r" indent="0" marL="0">
               <a:buNone/>
             </a:pPr>
             <a:r>
@@ -23559,7 +22887,7 @@
           <a:bodyPr wrap="square" lIns="0" tIns="0" rIns="0" bIns="0" rtlCol="0" anchor="t"/>
           <a:lstStyle/>
           <a:p>
-            <a:pPr marL="0" indent="0">
+            <a:pPr indent="0" marL="0">
               <a:buNone/>
             </a:pPr>
             <a:r>
@@ -23598,7 +22926,7 @@
           <a:bodyPr wrap="square" lIns="0" tIns="0" rIns="0" bIns="0" rtlCol="0" anchor="t"/>
           <a:lstStyle/>
           <a:p>
-            <a:pPr marL="0" indent="0">
+            <a:pPr indent="0" marL="0">
               <a:buNone/>
             </a:pPr>
             <a:r>
@@ -23618,7 +22946,7 @@
       </p:sp>
       <p:graphicFrame>
         <p:nvGraphicFramePr>
-          <p:cNvPr id="12" name="Table 0"/>
+          <p:cNvPr id="9" name="Table 0"/>
           <p:cNvGraphicFramePr>
             <a:graphicFrameLocks noGrp="1"/>
           </p:cNvGraphicFramePr>
@@ -23632,34 +22960,16 @@
         </p:nvGraphicFramePr>
         <p:xfrm>
           <a:off x="777240" y="3611880"/>
-          <a:ext cx="3154680" cy="877824"/>
+          <a:ext cx="3154680" cy="914400"/>
         </p:xfrm>
         <a:graphic>
           <a:graphicData uri="http://schemas.openxmlformats.org/drawingml/2006/table">
             <a:tbl>
               <a:tblPr/>
               <a:tblGrid>
-                <a:gridCol w="731520">
-                  <a:extLst>
-                    <a:ext uri="{9D8B030D-6E8A-4147-A177-3AD203B41FA5}">
-                      <a16:colId xmlns:a16="http://schemas.microsoft.com/office/drawing/2014/main" val="20000"/>
-                    </a:ext>
-                  </a:extLst>
-                </a:gridCol>
-                <a:gridCol w="1234440">
-                  <a:extLst>
-                    <a:ext uri="{9D8B030D-6E8A-4147-A177-3AD203B41FA5}">
-                      <a16:colId xmlns:a16="http://schemas.microsoft.com/office/drawing/2014/main" val="20001"/>
-                    </a:ext>
-                  </a:extLst>
-                </a:gridCol>
-                <a:gridCol w="1188720">
-                  <a:extLst>
-                    <a:ext uri="{9D8B030D-6E8A-4147-A177-3AD203B41FA5}">
-                      <a16:colId xmlns:a16="http://schemas.microsoft.com/office/drawing/2014/main" val="20002"/>
-                    </a:ext>
-                  </a:extLst>
-                </a:gridCol>
+                <a:gridCol w="731520"/>
+                <a:gridCol w="1234440"/>
+                <a:gridCol w="1188720"/>
               </a:tblGrid>
               <a:tr h="292608">
                 <a:tc>
@@ -23667,7 +22977,7 @@
                     <a:bodyPr/>
                     <a:lstStyle/>
                     <a:p>
-                      <a:pPr marL="0" indent="0">
+                      <a:pPr indent="0" marL="0">
                         <a:buNone/>
                       </a:pPr>
                       <a:r>
@@ -23688,7 +22998,7 @@
                       </a:endParaRPr>
                     </a:p>
                   </a:txBody>
-                  <a:tcPr anchor="ctr">
+                  <a:tcPr marL="91440" marR="91440" marT="45720" marB="45720" anchor="ctr">
                     <a:lnL w="9525" cap="flat" cmpd="sng" algn="ctr">
                       <a:solidFill>
                         <a:srgbClr val="BFD8DD"/>
@@ -23735,7 +23045,7 @@
                     <a:bodyPr/>
                     <a:lstStyle/>
                     <a:p>
-                      <a:pPr marL="0" indent="0">
+                      <a:pPr indent="0" marL="0">
                         <a:buNone/>
                       </a:pPr>
                       <a:r>
@@ -23756,7 +23066,7 @@
                       </a:endParaRPr>
                     </a:p>
                   </a:txBody>
-                  <a:tcPr anchor="ctr">
+                  <a:tcPr marL="91440" marR="91440" marT="45720" marB="45720" anchor="ctr">
                     <a:lnL w="9525" cap="flat" cmpd="sng" algn="ctr">
                       <a:solidFill>
                         <a:srgbClr val="BFD8DD"/>
@@ -23803,7 +23113,7 @@
                     <a:bodyPr/>
                     <a:lstStyle/>
                     <a:p>
-                      <a:pPr marL="0" indent="0">
+                      <a:pPr indent="0" marL="0">
                         <a:buNone/>
                       </a:pPr>
                       <a:r>
@@ -23824,7 +23134,7 @@
                       </a:endParaRPr>
                     </a:p>
                   </a:txBody>
-                  <a:tcPr anchor="ctr">
+                  <a:tcPr marL="91440" marR="91440" marT="45720" marB="45720" anchor="ctr">
                     <a:lnL w="9525" cap="flat" cmpd="sng" algn="ctr">
                       <a:solidFill>
                         <a:srgbClr val="BFD8DD"/>
@@ -23866,11 +23176,6 @@
                     </a:solidFill>
                   </a:tcPr>
                 </a:tc>
-                <a:extLst>
-                  <a:ext uri="{0D108BD9-81ED-4DB2-BD59-A6C34878D82A}">
-                    <a16:rowId xmlns:a16="http://schemas.microsoft.com/office/drawing/2014/main" val="10000"/>
-                  </a:ext>
-                </a:extLst>
               </a:tr>
               <a:tr h="292608">
                 <a:tc>
@@ -23878,7 +23183,7 @@
                     <a:bodyPr/>
                     <a:lstStyle/>
                     <a:p>
-                      <a:pPr marL="0" indent="0">
+                      <a:pPr indent="0" marL="0">
                         <a:buNone/>
                       </a:pPr>
                       <a:r>
@@ -23899,7 +23204,7 @@
                       </a:endParaRPr>
                     </a:p>
                   </a:txBody>
-                  <a:tcPr anchor="ctr">
+                  <a:tcPr marL="91440" marR="91440" marT="45720" marB="45720" anchor="ctr">
                     <a:lnL w="9525" cap="flat" cmpd="sng" algn="ctr">
                       <a:solidFill>
                         <a:srgbClr val="BFD8DD"/>
@@ -23946,7 +23251,7 @@
                     <a:bodyPr/>
                     <a:lstStyle/>
                     <a:p>
-                      <a:pPr marL="0" indent="0">
+                      <a:pPr indent="0" marL="0">
                         <a:buNone/>
                       </a:pPr>
                       <a:r>
@@ -23967,7 +23272,7 @@
                       </a:endParaRPr>
                     </a:p>
                   </a:txBody>
-                  <a:tcPr anchor="ctr">
+                  <a:tcPr marL="91440" marR="91440" marT="45720" marB="45720" anchor="ctr">
                     <a:lnL w="9525" cap="flat" cmpd="sng" algn="ctr">
                       <a:solidFill>
                         <a:srgbClr val="BFD8DD"/>
@@ -24014,7 +23319,7 @@
                     <a:bodyPr/>
                     <a:lstStyle/>
                     <a:p>
-                      <a:pPr marL="0" indent="0">
+                      <a:pPr indent="0" marL="0">
                         <a:buNone/>
                       </a:pPr>
                       <a:r>
@@ -24035,7 +23340,7 @@
                       </a:endParaRPr>
                     </a:p>
                   </a:txBody>
-                  <a:tcPr anchor="ctr">
+                  <a:tcPr marL="91440" marR="91440" marT="45720" marB="45720" anchor="ctr">
                     <a:lnL w="9525" cap="flat" cmpd="sng" algn="ctr">
                       <a:solidFill>
                         <a:srgbClr val="BFD8DD"/>
@@ -24077,11 +23382,6 @@
                     </a:solidFill>
                   </a:tcPr>
                 </a:tc>
-                <a:extLst>
-                  <a:ext uri="{0D108BD9-81ED-4DB2-BD59-A6C34878D82A}">
-                    <a16:rowId xmlns:a16="http://schemas.microsoft.com/office/drawing/2014/main" val="10001"/>
-                  </a:ext>
-                </a:extLst>
               </a:tr>
               <a:tr h="292608">
                 <a:tc>
@@ -24089,7 +23389,7 @@
                     <a:bodyPr/>
                     <a:lstStyle/>
                     <a:p>
-                      <a:pPr marL="0" indent="0">
+                      <a:pPr indent="0" marL="0">
                         <a:buNone/>
                       </a:pPr>
                       <a:r>
@@ -24110,7 +23410,7 @@
                       </a:endParaRPr>
                     </a:p>
                   </a:txBody>
-                  <a:tcPr anchor="ctr">
+                  <a:tcPr marL="91440" marR="91440" marT="45720" marB="45720" anchor="ctr">
                     <a:lnL w="9525" cap="flat" cmpd="sng" algn="ctr">
                       <a:solidFill>
                         <a:srgbClr val="BFD8DD"/>
@@ -24157,7 +23457,7 @@
                     <a:bodyPr/>
                     <a:lstStyle/>
                     <a:p>
-                      <a:pPr marL="0" indent="0">
+                      <a:pPr indent="0" marL="0">
                         <a:buNone/>
                       </a:pPr>
                       <a:r>
@@ -24178,7 +23478,7 @@
                       </a:endParaRPr>
                     </a:p>
                   </a:txBody>
-                  <a:tcPr anchor="ctr">
+                  <a:tcPr marL="91440" marR="91440" marT="45720" marB="45720" anchor="ctr">
                     <a:lnL w="9525" cap="flat" cmpd="sng" algn="ctr">
                       <a:solidFill>
                         <a:srgbClr val="BFD8DD"/>
@@ -24225,7 +23525,7 @@
                     <a:bodyPr/>
                     <a:lstStyle/>
                     <a:p>
-                      <a:pPr marL="0" indent="0">
+                      <a:pPr indent="0" marL="0">
                         <a:buNone/>
                       </a:pPr>
                       <a:r>
@@ -24246,7 +23546,7 @@
                       </a:endParaRPr>
                     </a:p>
                   </a:txBody>
-                  <a:tcPr anchor="ctr">
+                  <a:tcPr marL="91440" marR="91440" marT="45720" marB="45720" anchor="ctr">
                     <a:lnL w="9525" cap="flat" cmpd="sng" algn="ctr">
                       <a:solidFill>
                         <a:srgbClr val="BFD8DD"/>
@@ -24288,11 +23588,6 @@
                     </a:solidFill>
                   </a:tcPr>
                 </a:tc>
-                <a:extLst>
-                  <a:ext uri="{0D108BD9-81ED-4DB2-BD59-A6C34878D82A}">
-                    <a16:rowId xmlns:a16="http://schemas.microsoft.com/office/drawing/2014/main" val="10002"/>
-                  </a:ext>
-                </a:extLst>
               </a:tr>
             </a:tbl>
           </a:graphicData>
@@ -24324,13 +23619,6 @@
             <a:prstDash val="solid"/>
           </a:ln>
         </p:spPr>
-        <p:txBody>
-          <a:bodyPr/>
-          <a:lstStyle/>
-          <a:p>
-            <a:endParaRPr lang="en-US"/>
-          </a:p>
-        </p:txBody>
       </p:sp>
       <p:sp>
         <p:nvSpPr>
@@ -24356,13 +23644,6 @@
             <a:prstDash val="solid"/>
           </a:ln>
         </p:spPr>
-        <p:txBody>
-          <a:bodyPr/>
-          <a:lstStyle/>
-          <a:p>
-            <a:endParaRPr lang="en-US"/>
-          </a:p>
-        </p:txBody>
       </p:sp>
       <p:sp>
         <p:nvSpPr>
@@ -24385,7 +23666,7 @@
           <a:bodyPr wrap="square" lIns="0" tIns="0" rIns="0" bIns="0" rtlCol="0" anchor="ctr"/>
           <a:lstStyle/>
           <a:p>
-            <a:pPr marL="0" indent="0" algn="ctr">
+            <a:pPr algn="ctr" indent="0" marL="0">
               <a:buNone/>
             </a:pPr>
             <a:r>
@@ -24424,7 +23705,7 @@
           <a:bodyPr wrap="square" lIns="0" tIns="0" rIns="0" bIns="0" rtlCol="0" anchor="ctr"/>
           <a:lstStyle/>
           <a:p>
-            <a:pPr marL="0" indent="0">
+            <a:pPr indent="0" marL="0">
               <a:buNone/>
             </a:pPr>
             <a:r>
@@ -24463,7 +23744,7 @@
           <a:bodyPr wrap="square" lIns="0" tIns="0" rIns="0" bIns="0" rtlCol="0" anchor="ctr"/>
           <a:lstStyle/>
           <a:p>
-            <a:pPr marL="0" indent="0" algn="r">
+            <a:pPr algn="r" indent="0" marL="0">
               <a:buNone/>
             </a:pPr>
             <a:r>
@@ -24502,7 +23783,7 @@
           <a:bodyPr wrap="square" lIns="0" tIns="0" rIns="0" bIns="0" rtlCol="0" anchor="t"/>
           <a:lstStyle/>
           <a:p>
-            <a:pPr marL="0" indent="0">
+            <a:pPr indent="0" marL="0">
               <a:buNone/>
             </a:pPr>
             <a:r>
@@ -24541,7 +23822,7 @@
           <a:bodyPr wrap="square" lIns="0" tIns="0" rIns="0" bIns="0" rtlCol="0" anchor="t"/>
           <a:lstStyle/>
           <a:p>
-            <a:pPr marL="0" indent="0">
+            <a:pPr indent="0" marL="0">
               <a:buNone/>
             </a:pPr>
             <a:r>
@@ -24561,7 +23842,7 @@
       </p:sp>
       <p:graphicFrame>
         <p:nvGraphicFramePr>
-          <p:cNvPr id="20" name="Table 1"/>
+          <p:cNvPr id="17" name="Table 1"/>
           <p:cNvGraphicFramePr>
             <a:graphicFrameLocks noGrp="1"/>
           </p:cNvGraphicFramePr>
@@ -24575,34 +23856,16 @@
         </p:nvGraphicFramePr>
         <p:xfrm>
           <a:off x="4617720" y="3611880"/>
-          <a:ext cx="3154680" cy="585216"/>
+          <a:ext cx="3154680" cy="914400"/>
         </p:xfrm>
         <a:graphic>
           <a:graphicData uri="http://schemas.openxmlformats.org/drawingml/2006/table">
             <a:tbl>
               <a:tblPr/>
               <a:tblGrid>
-                <a:gridCol w="731520">
-                  <a:extLst>
-                    <a:ext uri="{9D8B030D-6E8A-4147-A177-3AD203B41FA5}">
-                      <a16:colId xmlns:a16="http://schemas.microsoft.com/office/drawing/2014/main" val="20000"/>
-                    </a:ext>
-                  </a:extLst>
-                </a:gridCol>
-                <a:gridCol w="1234440">
-                  <a:extLst>
-                    <a:ext uri="{9D8B030D-6E8A-4147-A177-3AD203B41FA5}">
-                      <a16:colId xmlns:a16="http://schemas.microsoft.com/office/drawing/2014/main" val="20001"/>
-                    </a:ext>
-                  </a:extLst>
-                </a:gridCol>
-                <a:gridCol w="1188720">
-                  <a:extLst>
-                    <a:ext uri="{9D8B030D-6E8A-4147-A177-3AD203B41FA5}">
-                      <a16:colId xmlns:a16="http://schemas.microsoft.com/office/drawing/2014/main" val="20002"/>
-                    </a:ext>
-                  </a:extLst>
-                </a:gridCol>
+                <a:gridCol w="731520"/>
+                <a:gridCol w="1234440"/>
+                <a:gridCol w="1188720"/>
               </a:tblGrid>
               <a:tr h="292608">
                 <a:tc>
@@ -24610,7 +23873,7 @@
                     <a:bodyPr/>
                     <a:lstStyle/>
                     <a:p>
-                      <a:pPr marL="0" indent="0">
+                      <a:pPr indent="0" marL="0">
                         <a:buNone/>
                       </a:pPr>
                       <a:r>
@@ -24631,7 +23894,7 @@
                       </a:endParaRPr>
                     </a:p>
                   </a:txBody>
-                  <a:tcPr anchor="ctr">
+                  <a:tcPr marL="91440" marR="91440" marT="45720" marB="45720" anchor="ctr">
                     <a:lnL w="9525" cap="flat" cmpd="sng" algn="ctr">
                       <a:solidFill>
                         <a:srgbClr val="BFD8DD"/>
@@ -24678,7 +23941,7 @@
                     <a:bodyPr/>
                     <a:lstStyle/>
                     <a:p>
-                      <a:pPr marL="0" indent="0">
+                      <a:pPr indent="0" marL="0">
                         <a:buNone/>
                       </a:pPr>
                       <a:r>
@@ -24699,7 +23962,7 @@
                       </a:endParaRPr>
                     </a:p>
                   </a:txBody>
-                  <a:tcPr anchor="ctr">
+                  <a:tcPr marL="91440" marR="91440" marT="45720" marB="45720" anchor="ctr">
                     <a:lnL w="9525" cap="flat" cmpd="sng" algn="ctr">
                       <a:solidFill>
                         <a:srgbClr val="BFD8DD"/>
@@ -24746,7 +24009,7 @@
                     <a:bodyPr/>
                     <a:lstStyle/>
                     <a:p>
-                      <a:pPr marL="0" indent="0">
+                      <a:pPr indent="0" marL="0">
                         <a:buNone/>
                       </a:pPr>
                       <a:r>
@@ -24767,7 +24030,7 @@
                       </a:endParaRPr>
                     </a:p>
                   </a:txBody>
-                  <a:tcPr anchor="ctr">
+                  <a:tcPr marL="91440" marR="91440" marT="45720" marB="45720" anchor="ctr">
                     <a:lnL w="9525" cap="flat" cmpd="sng" algn="ctr">
                       <a:solidFill>
                         <a:srgbClr val="BFD8DD"/>
@@ -24809,11 +24072,6 @@
                     </a:solidFill>
                   </a:tcPr>
                 </a:tc>
-                <a:extLst>
-                  <a:ext uri="{0D108BD9-81ED-4DB2-BD59-A6C34878D82A}">
-                    <a16:rowId xmlns:a16="http://schemas.microsoft.com/office/drawing/2014/main" val="10000"/>
-                  </a:ext>
-                </a:extLst>
               </a:tr>
               <a:tr h="292608">
                 <a:tc>
@@ -24821,7 +24079,7 @@
                     <a:bodyPr/>
                     <a:lstStyle/>
                     <a:p>
-                      <a:pPr marL="0" indent="0">
+                      <a:pPr indent="0" marL="0">
                         <a:buNone/>
                       </a:pPr>
                       <a:r>
@@ -24842,7 +24100,7 @@
                       </a:endParaRPr>
                     </a:p>
                   </a:txBody>
-                  <a:tcPr anchor="ctr">
+                  <a:tcPr marL="91440" marR="91440" marT="45720" marB="45720" anchor="ctr">
                     <a:lnL w="9525" cap="flat" cmpd="sng" algn="ctr">
                       <a:solidFill>
                         <a:srgbClr val="BFD8DD"/>
@@ -24889,7 +24147,7 @@
                     <a:bodyPr/>
                     <a:lstStyle/>
                     <a:p>
-                      <a:pPr marL="0" indent="0">
+                      <a:pPr indent="0" marL="0">
                         <a:buNone/>
                       </a:pPr>
                       <a:r>
@@ -24910,7 +24168,7 @@
                       </a:endParaRPr>
                     </a:p>
                   </a:txBody>
-                  <a:tcPr anchor="ctr">
+                  <a:tcPr marL="91440" marR="91440" marT="45720" marB="45720" anchor="ctr">
                     <a:lnL w="9525" cap="flat" cmpd="sng" algn="ctr">
                       <a:solidFill>
                         <a:srgbClr val="BFD8DD"/>
@@ -24957,7 +24215,7 @@
                     <a:bodyPr/>
                     <a:lstStyle/>
                     <a:p>
-                      <a:pPr marL="0" indent="0">
+                      <a:pPr indent="0" marL="0">
                         <a:buNone/>
                       </a:pPr>
                       <a:r>
@@ -24978,7 +24236,7 @@
                       </a:endParaRPr>
                     </a:p>
                   </a:txBody>
-                  <a:tcPr anchor="ctr">
+                  <a:tcPr marL="91440" marR="91440" marT="45720" marB="45720" anchor="ctr">
                     <a:lnL w="9525" cap="flat" cmpd="sng" algn="ctr">
                       <a:solidFill>
                         <a:srgbClr val="BFD8DD"/>
@@ -25020,11 +24278,6 @@
                     </a:solidFill>
                   </a:tcPr>
                 </a:tc>
-                <a:extLst>
-                  <a:ext uri="{0D108BD9-81ED-4DB2-BD59-A6C34878D82A}">
-                    <a16:rowId xmlns:a16="http://schemas.microsoft.com/office/drawing/2014/main" val="10001"/>
-                  </a:ext>
-                </a:extLst>
               </a:tr>
             </a:tbl>
           </a:graphicData>
@@ -25053,13 +24306,6 @@
             <a:tailEnd type="triangle"/>
           </a:ln>
         </p:spPr>
-        <p:txBody>
-          <a:bodyPr/>
-          <a:lstStyle/>
-          <a:p>
-            <a:endParaRPr lang="en-US"/>
-          </a:p>
-        </p:txBody>
       </p:sp>
       <p:sp>
         <p:nvSpPr>
@@ -25087,13 +24333,6 @@
             <a:prstDash val="solid"/>
           </a:ln>
         </p:spPr>
-        <p:txBody>
-          <a:bodyPr/>
-          <a:lstStyle/>
-          <a:p>
-            <a:endParaRPr lang="en-US"/>
-          </a:p>
-        </p:txBody>
       </p:sp>
       <p:sp>
         <p:nvSpPr>
@@ -25116,7 +24355,7 @@
           <a:bodyPr wrap="square" lIns="0" tIns="0" rIns="0" bIns="0" rtlCol="0" anchor="t"/>
           <a:lstStyle/>
           <a:p>
-            <a:pPr marL="0" indent="0">
+            <a:pPr indent="0" marL="0">
               <a:buNone/>
             </a:pPr>
             <a:r>
@@ -25155,7 +24394,7 @@
           <a:bodyPr wrap="square" lIns="0" tIns="0" rIns="0" bIns="0" rtlCol="0" anchor="t"/>
           <a:lstStyle/>
           <a:p>
-            <a:pPr marL="0" indent="0">
+            <a:pPr indent="0" marL="0">
               <a:buNone/>
             </a:pPr>
             <a:r>
@@ -25194,7 +24433,7 @@
           <a:bodyPr wrap="square" lIns="0" tIns="0" rIns="0" bIns="0" rtlCol="0" anchor="t"/>
           <a:lstStyle/>
           <a:p>
-            <a:pPr marL="0" indent="0">
+            <a:pPr indent="0" marL="0">
               <a:buNone/>
             </a:pPr>
             <a:r>
@@ -25233,7 +24472,7 @@
           <a:bodyPr wrap="square" lIns="0" tIns="0" rIns="0" bIns="0" rtlCol="0" anchor="t"/>
           <a:lstStyle/>
           <a:p>
-            <a:pPr marL="0" indent="0">
+            <a:pPr indent="0" marL="0">
               <a:buNone/>
             </a:pPr>
             <a:r>
@@ -25277,13 +24516,6 @@
             <a:prstDash val="solid"/>
           </a:ln>
         </p:spPr>
-        <p:txBody>
-          <a:bodyPr/>
-          <a:lstStyle/>
-          <a:p>
-            <a:endParaRPr lang="en-US"/>
-          </a:p>
-        </p:txBody>
       </p:sp>
       <p:sp>
         <p:nvSpPr>
@@ -25306,7 +24538,7 @@
           <a:bodyPr wrap="square" lIns="0" tIns="0" rIns="0" bIns="0" rtlCol="0" anchor="ctr"/>
           <a:lstStyle/>
           <a:p>
-            <a:pPr marL="0" indent="0">
+            <a:pPr indent="0" marL="0">
               <a:buNone/>
             </a:pPr>
             <a:r>
@@ -25320,6 +24552,9 @@
               </a:rPr>
               <a:t>Vì sao không chốt bản mới ngay lúc ghi (như Mem0)?  </a:t>
             </a:r>
+            <a:pPr indent="0" marL="0">
+              <a:buNone/>
+            </a:pPr>
             <a:r>
               <a:rPr lang="en-US" sz="1250" dirty="0">
                 <a:solidFill>
@@ -25356,7 +24591,7 @@
           <a:bodyPr wrap="square" lIns="0" tIns="0" rIns="0" bIns="0" rtlCol="0" anchor="t"/>
           <a:lstStyle/>
           <a:p>
-            <a:pPr marL="0" indent="0">
+            <a:pPr indent="0" marL="0">
               <a:buNone/>
             </a:pPr>
             <a:r>
@@ -25390,7 +24625,6 @@
         <a:solidFill>
           <a:srgbClr val="FFFFFF"/>
         </a:solidFill>
-        <a:effectLst/>
       </p:bgPr>
     </p:bg>
     <p:spTree>
@@ -25428,11 +24662,11 @@
           <a:bodyPr wrap="square" lIns="0" tIns="0" rIns="0" bIns="0" rtlCol="0" anchor="t"/>
           <a:lstStyle/>
           <a:p>
-            <a:pPr marL="0" indent="0">
+            <a:pPr indent="0" marL="0">
               <a:buNone/>
             </a:pPr>
             <a:r>
-              <a:rPr lang="en-US" sz="1100" b="1" kern="0" spc="200" dirty="0">
+              <a:rPr lang="en-US" sz="1100" b="1" spc="200" kern="0" dirty="0">
                 <a:solidFill>
                   <a:srgbClr val="D98C1F"/>
                 </a:solidFill>
@@ -25467,7 +24701,7 @@
           <a:bodyPr wrap="square" lIns="0" tIns="0" rIns="0" bIns="0" rtlCol="0" anchor="ctr"/>
           <a:lstStyle/>
           <a:p>
-            <a:pPr marL="0" indent="0">
+            <a:pPr indent="0" marL="0">
               <a:buNone/>
             </a:pPr>
             <a:r>
@@ -25511,13 +24745,6 @@
             <a:prstDash val="solid"/>
           </a:ln>
         </p:spPr>
-        <p:txBody>
-          <a:bodyPr/>
-          <a:lstStyle/>
-          <a:p>
-            <a:endParaRPr lang="en-US"/>
-          </a:p>
-        </p:txBody>
       </p:sp>
       <p:sp>
         <p:nvSpPr>
@@ -25540,7 +24767,7 @@
           <a:bodyPr wrap="square" lIns="0" tIns="0" rIns="0" bIns="0" rtlCol="0" anchor="t"/>
           <a:lstStyle/>
           <a:p>
-            <a:pPr marL="0" indent="0">
+            <a:pPr indent="0" marL="0">
               <a:buNone/>
             </a:pPr>
             <a:r>
@@ -25579,7 +24806,7 @@
           <a:bodyPr wrap="square" lIns="0" tIns="0" rIns="0" bIns="0" rtlCol="0" anchor="t"/>
           <a:lstStyle/>
           <a:p>
-            <a:pPr marL="0" indent="0">
+            <a:pPr indent="0" marL="0">
               <a:buNone/>
             </a:pPr>
             <a:r>
@@ -25623,13 +24850,6 @@
             <a:prstDash val="solid"/>
           </a:ln>
         </p:spPr>
-        <p:txBody>
-          <a:bodyPr/>
-          <a:lstStyle/>
-          <a:p>
-            <a:endParaRPr lang="en-US"/>
-          </a:p>
-        </p:txBody>
       </p:sp>
       <p:sp>
         <p:nvSpPr>
@@ -25652,7 +24872,7 @@
           <a:bodyPr wrap="square" lIns="0" tIns="0" rIns="0" bIns="0" rtlCol="0" anchor="t"/>
           <a:lstStyle/>
           <a:p>
-            <a:pPr marL="0" indent="0">
+            <a:pPr indent="0" marL="0">
               <a:buNone/>
             </a:pPr>
             <a:r>
@@ -25691,7 +24911,7 @@
           <a:bodyPr wrap="square" lIns="0" tIns="0" rIns="0" bIns="0" rtlCol="0" anchor="t"/>
           <a:lstStyle/>
           <a:p>
-            <a:pPr marL="0" indent="0">
+            <a:pPr indent="0" marL="0">
               <a:buNone/>
             </a:pPr>
             <a:r>
@@ -25735,13 +24955,6 @@
             <a:prstDash val="solid"/>
           </a:ln>
         </p:spPr>
-        <p:txBody>
-          <a:bodyPr/>
-          <a:lstStyle/>
-          <a:p>
-            <a:endParaRPr lang="en-US"/>
-          </a:p>
-        </p:txBody>
       </p:sp>
       <p:sp>
         <p:nvSpPr>
@@ -25764,7 +24977,7 @@
           <a:bodyPr wrap="square" lIns="0" tIns="0" rIns="0" bIns="0" rtlCol="0" anchor="t"/>
           <a:lstStyle/>
           <a:p>
-            <a:pPr marL="0" indent="0">
+            <a:pPr indent="0" marL="0">
               <a:buNone/>
             </a:pPr>
             <a:r>
@@ -25803,7 +25016,7 @@
           <a:bodyPr wrap="square" lIns="0" tIns="0" rIns="0" bIns="0" rtlCol="0" anchor="t"/>
           <a:lstStyle/>
           <a:p>
-            <a:pPr marL="0" indent="0">
+            <a:pPr indent="0" marL="0">
               <a:buNone/>
             </a:pPr>
             <a:r>
@@ -25847,13 +25060,6 @@
             <a:prstDash val="solid"/>
           </a:ln>
         </p:spPr>
-        <p:txBody>
-          <a:bodyPr/>
-          <a:lstStyle/>
-          <a:p>
-            <a:endParaRPr lang="en-US"/>
-          </a:p>
-        </p:txBody>
       </p:sp>
       <p:sp>
         <p:nvSpPr>
@@ -25876,7 +25082,7 @@
           <a:bodyPr wrap="square" lIns="0" tIns="0" rIns="0" bIns="0" rtlCol="0" anchor="t"/>
           <a:lstStyle/>
           <a:p>
-            <a:pPr marL="0" indent="0">
+            <a:pPr indent="0" marL="0">
               <a:buNone/>
             </a:pPr>
             <a:r>
@@ -25915,7 +25121,7 @@
           <a:bodyPr wrap="square" lIns="0" tIns="0" rIns="0" bIns="0" rtlCol="0" anchor="t"/>
           <a:lstStyle/>
           <a:p>
-            <a:pPr marL="0" indent="0">
+            <a:pPr indent="0" marL="0">
               <a:buNone/>
             </a:pPr>
             <a:r>
@@ -25959,13 +25165,6 @@
             <a:prstDash val="solid"/>
           </a:ln>
         </p:spPr>
-        <p:txBody>
-          <a:bodyPr/>
-          <a:lstStyle/>
-          <a:p>
-            <a:endParaRPr lang="en-US"/>
-          </a:p>
-        </p:txBody>
       </p:sp>
       <p:sp>
         <p:nvSpPr>
@@ -25988,7 +25187,7 @@
           <a:bodyPr wrap="square" lIns="0" tIns="0" rIns="0" bIns="0" rtlCol="0" anchor="t"/>
           <a:lstStyle/>
           <a:p>
-            <a:pPr marL="0" indent="0">
+            <a:pPr indent="0" marL="0">
               <a:buNone/>
             </a:pPr>
             <a:r>
@@ -26027,7 +25226,7 @@
           <a:bodyPr wrap="square" lIns="0" tIns="0" rIns="0" bIns="0" rtlCol="0" anchor="t"/>
           <a:lstStyle/>
           <a:p>
-            <a:pPr marL="0" indent="0">
+            <a:pPr indent="0" marL="0">
               <a:buNone/>
             </a:pPr>
             <a:r>
@@ -26071,13 +25270,6 @@
             <a:prstDash val="solid"/>
           </a:ln>
         </p:spPr>
-        <p:txBody>
-          <a:bodyPr/>
-          <a:lstStyle/>
-          <a:p>
-            <a:endParaRPr lang="en-US"/>
-          </a:p>
-        </p:txBody>
       </p:sp>
       <p:sp>
         <p:nvSpPr>
@@ -26100,7 +25292,7 @@
           <a:bodyPr wrap="square" lIns="0" tIns="0" rIns="0" bIns="0" rtlCol="0" anchor="t"/>
           <a:lstStyle/>
           <a:p>
-            <a:pPr marL="0" indent="0">
+            <a:pPr indent="0" marL="0">
               <a:buNone/>
             </a:pPr>
             <a:r>
@@ -26139,7 +25331,7 @@
           <a:bodyPr wrap="square" lIns="0" tIns="0" rIns="0" bIns="0" rtlCol="0" anchor="t"/>
           <a:lstStyle/>
           <a:p>
-            <a:pPr marL="0" indent="0">
+            <a:pPr indent="0" marL="0">
               <a:buNone/>
             </a:pPr>
             <a:r>
@@ -26156,7 +25348,7 @@
             <a:endParaRPr lang="en-US" sz="1350" dirty="0"/>
           </a:p>
           <a:p>
-            <a:pPr marL="0" indent="0">
+            <a:pPr indent="0" marL="0">
               <a:buNone/>
             </a:pPr>
             <a:r>
@@ -26195,7 +25387,7 @@
           <a:bodyPr wrap="square" lIns="0" tIns="0" rIns="0" bIns="0" rtlCol="0" anchor="t"/>
           <a:lstStyle/>
           <a:p>
-            <a:pPr marL="0" indent="0">
+            <a:pPr indent="0" marL="0">
               <a:buNone/>
             </a:pPr>
             <a:r>
@@ -26514,319 +25706,4 @@
     </a:ext>
   </a:extLst>
 </a:theme>
-</file>
-
-<file path=ppt/theme/theme2.xml><?xml version="1.0" encoding="utf-8"?>
-<a:theme xmlns:a="http://schemas.openxmlformats.org/drawingml/2006/main" name="Office Theme">
-  <a:themeElements>
-    <a:clrScheme name="Office">
-      <a:dk1>
-        <a:sysClr val="windowText" lastClr="000000"/>
-      </a:dk1>
-      <a:lt1>
-        <a:sysClr val="window" lastClr="FFFFFF"/>
-      </a:lt1>
-      <a:dk2>
-        <a:srgbClr val="0E2841"/>
-      </a:dk2>
-      <a:lt2>
-        <a:srgbClr val="E8E8E8"/>
-      </a:lt2>
-      <a:accent1>
-        <a:srgbClr val="156082"/>
-      </a:accent1>
-      <a:accent2>
-        <a:srgbClr val="E97132"/>
-      </a:accent2>
-      <a:accent3>
-        <a:srgbClr val="196B24"/>
-      </a:accent3>
-      <a:accent4>
-        <a:srgbClr val="0F9ED5"/>
-      </a:accent4>
-      <a:accent5>
-        <a:srgbClr val="A02B93"/>
-      </a:accent5>
-      <a:accent6>
-        <a:srgbClr val="4EA72E"/>
-      </a:accent6>
-      <a:hlink>
-        <a:srgbClr val="467886"/>
-      </a:hlink>
-      <a:folHlink>
-        <a:srgbClr val="96607D"/>
-      </a:folHlink>
-    </a:clrScheme>
-    <a:fontScheme name="Office">
-      <a:majorFont>
-        <a:latin typeface="Aptos Display" panose="02110004020202020204"/>
-        <a:ea typeface=""/>
-        <a:cs typeface=""/>
-        <a:font script="Jpan" typeface="游ゴシック Light"/>
-        <a:font script="Hang" typeface="맑은 고딕"/>
-        <a:font script="Hans" typeface="等线 Light"/>
-        <a:font script="Hant" typeface="新細明體"/>
-        <a:font script="Arab" typeface="Times New Roman"/>
-        <a:font script="Hebr" typeface="Times New Roman"/>
-        <a:font script="Thai" typeface="Angsana New"/>
-        <a:font script="Ethi" typeface="Nyala"/>
-        <a:font script="Beng" typeface="Vrinda"/>
-        <a:font script="Gujr" typeface="Shruti"/>
-        <a:font script="Khmr" typeface="MoolBoran"/>
-        <a:font script="Knda" typeface="Tunga"/>
-        <a:font script="Guru" typeface="Raavi"/>
-        <a:font script="Cans" typeface="Euphemia"/>
-        <a:font script="Cher" typeface="Plantagenet Cherokee"/>
-        <a:font script="Yiii" typeface="Microsoft Yi Baiti"/>
-        <a:font script="Tibt" typeface="Microsoft Himalaya"/>
-        <a:font script="Thaa" typeface="MV Boli"/>
-        <a:font script="Deva" typeface="Mangal"/>
-        <a:font script="Telu" typeface="Gautami"/>
-        <a:font script="Taml" typeface="Latha"/>
-        <a:font script="Syrc" typeface="Estrangelo Edessa"/>
-        <a:font script="Orya" typeface="Kalinga"/>
-        <a:font script="Mlym" typeface="Kartika"/>
-        <a:font script="Laoo" typeface="DokChampa"/>
-        <a:font script="Sinh" typeface="Iskoola Pota"/>
-        <a:font script="Mong" typeface="Mongolian Baiti"/>
-        <a:font script="Viet" typeface="Times New Roman"/>
-        <a:font script="Uigh" typeface="Microsoft Uighur"/>
-        <a:font script="Geor" typeface="Sylfaen"/>
-        <a:font script="Armn" typeface="Arial"/>
-        <a:font script="Bugi" typeface="Leelawadee UI"/>
-        <a:font script="Bopo" typeface="Microsoft JhengHei"/>
-        <a:font script="Java" typeface="Javanese Text"/>
-        <a:font script="Lisu" typeface="Segoe UI"/>
-        <a:font script="Mymr" typeface="Myanmar Text"/>
-        <a:font script="Nkoo" typeface="Ebrima"/>
-        <a:font script="Olck" typeface="Nirmala UI"/>
-        <a:font script="Osma" typeface="Ebrima"/>
-        <a:font script="Phag" typeface="Phagspa"/>
-        <a:font script="Syrn" typeface="Estrangelo Edessa"/>
-        <a:font script="Syrj" typeface="Estrangelo Edessa"/>
-        <a:font script="Syre" typeface="Estrangelo Edessa"/>
-        <a:font script="Sora" typeface="Nirmala UI"/>
-        <a:font script="Tale" typeface="Microsoft Tai Le"/>
-        <a:font script="Talu" typeface="Microsoft New Tai Lue"/>
-        <a:font script="Tfng" typeface="Ebrima"/>
-      </a:majorFont>
-      <a:minorFont>
-        <a:latin typeface="Aptos" panose="02110004020202020204"/>
-        <a:ea typeface=""/>
-        <a:cs typeface=""/>
-        <a:font script="Jpan" typeface="游ゴシック"/>
-        <a:font script="Hang" typeface="맑은 고딕"/>
-        <a:font script="Hans" typeface="等线"/>
-        <a:font script="Hant" typeface="新細明體"/>
-        <a:font script="Arab" typeface="Arial"/>
-        <a:font script="Hebr" typeface="Arial"/>
-        <a:font script="Thai" typeface="Cordia New"/>
-        <a:font script="Ethi" typeface="Nyala"/>
-        <a:font script="Beng" typeface="Vrinda"/>
-        <a:font script="Gujr" typeface="Shruti"/>
-        <a:font script="Khmr" typeface="DaunPenh"/>
-        <a:font script="Knda" typeface="Tunga"/>
-        <a:font script="Guru" typeface="Raavi"/>
-        <a:font script="Cans" typeface="Euphemia"/>
-        <a:font script="Cher" typeface="Plantagenet Cherokee"/>
-        <a:font script="Yiii" typeface="Microsoft Yi Baiti"/>
-        <a:font script="Tibt" typeface="Microsoft Himalaya"/>
-        <a:font script="Thaa" typeface="MV Boli"/>
-        <a:font script="Deva" typeface="Mangal"/>
-        <a:font script="Telu" typeface="Gautami"/>
-        <a:font script="Taml" typeface="Latha"/>
-        <a:font script="Syrc" typeface="Estrangelo Edessa"/>
-        <a:font script="Orya" typeface="Kalinga"/>
-        <a:font script="Mlym" typeface="Kartika"/>
-        <a:font script="Laoo" typeface="DokChampa"/>
-        <a:font script="Sinh" typeface="Iskoola Pota"/>
-        <a:font script="Mong" typeface="Mongolian Baiti"/>
-        <a:font script="Viet" typeface="Arial"/>
-        <a:font script="Uigh" typeface="Microsoft Uighur"/>
-        <a:font script="Geor" typeface="Sylfaen"/>
-        <a:font script="Armn" typeface="Arial"/>
-        <a:font script="Bugi" typeface="Leelawadee UI"/>
-        <a:font script="Bopo" typeface="Microsoft JhengHei"/>
-        <a:font script="Java" typeface="Javanese Text"/>
-        <a:font script="Lisu" typeface="Segoe UI"/>
-        <a:font script="Mymr" typeface="Myanmar Text"/>
-        <a:font script="Nkoo" typeface="Ebrima"/>
-        <a:font script="Olck" typeface="Nirmala UI"/>
-        <a:font script="Osma" typeface="Ebrima"/>
-        <a:font script="Phag" typeface="Phagspa"/>
-        <a:font script="Syrn" typeface="Estrangelo Edessa"/>
-        <a:font script="Syrj" typeface="Estrangelo Edessa"/>
-        <a:font script="Syre" typeface="Estrangelo Edessa"/>
-        <a:font script="Sora" typeface="Nirmala UI"/>
-        <a:font script="Tale" typeface="Microsoft Tai Le"/>
-        <a:font script="Talu" typeface="Microsoft New Tai Lue"/>
-        <a:font script="Tfng" typeface="Ebrima"/>
-      </a:minorFont>
-    </a:fontScheme>
-    <a:fmtScheme name="Office">
-      <a:fillStyleLst>
-        <a:solidFill>
-          <a:schemeClr val="phClr"/>
-        </a:solidFill>
-        <a:gradFill rotWithShape="1">
-          <a:gsLst>
-            <a:gs pos="0">
-              <a:schemeClr val="phClr">
-                <a:lumMod val="110000"/>
-                <a:satMod val="105000"/>
-                <a:tint val="67000"/>
-              </a:schemeClr>
-            </a:gs>
-            <a:gs pos="50000">
-              <a:schemeClr val="phClr">
-                <a:lumMod val="105000"/>
-                <a:satMod val="103000"/>
-                <a:tint val="73000"/>
-              </a:schemeClr>
-            </a:gs>
-            <a:gs pos="100000">
-              <a:schemeClr val="phClr">
-                <a:lumMod val="105000"/>
-                <a:satMod val="109000"/>
-                <a:tint val="81000"/>
-              </a:schemeClr>
-            </a:gs>
-          </a:gsLst>
-          <a:lin ang="5400000" scaled="0"/>
-        </a:gradFill>
-        <a:gradFill rotWithShape="1">
-          <a:gsLst>
-            <a:gs pos="0">
-              <a:schemeClr val="phClr">
-                <a:satMod val="103000"/>
-                <a:lumMod val="102000"/>
-                <a:tint val="94000"/>
-              </a:schemeClr>
-            </a:gs>
-            <a:gs pos="50000">
-              <a:schemeClr val="phClr">
-                <a:satMod val="110000"/>
-                <a:lumMod val="100000"/>
-                <a:shade val="100000"/>
-              </a:schemeClr>
-            </a:gs>
-            <a:gs pos="100000">
-              <a:schemeClr val="phClr">
-                <a:lumMod val="99000"/>
-                <a:satMod val="120000"/>
-                <a:shade val="78000"/>
-              </a:schemeClr>
-            </a:gs>
-          </a:gsLst>
-          <a:lin ang="5400000" scaled="0"/>
-        </a:gradFill>
-      </a:fillStyleLst>
-      <a:lnStyleLst>
-        <a:ln w="12700" cap="flat" cmpd="sng" algn="ctr">
-          <a:solidFill>
-            <a:schemeClr val="phClr"/>
-          </a:solidFill>
-          <a:prstDash val="solid"/>
-          <a:miter lim="800000"/>
-        </a:ln>
-        <a:ln w="19050" cap="flat" cmpd="sng" algn="ctr">
-          <a:solidFill>
-            <a:schemeClr val="phClr"/>
-          </a:solidFill>
-          <a:prstDash val="solid"/>
-          <a:miter lim="800000"/>
-        </a:ln>
-        <a:ln w="25400" cap="flat" cmpd="sng" algn="ctr">
-          <a:solidFill>
-            <a:schemeClr val="phClr"/>
-          </a:solidFill>
-          <a:prstDash val="solid"/>
-          <a:miter lim="800000"/>
-        </a:ln>
-      </a:lnStyleLst>
-      <a:effectStyleLst>
-        <a:effectStyle>
-          <a:effectLst/>
-        </a:effectStyle>
-        <a:effectStyle>
-          <a:effectLst/>
-        </a:effectStyle>
-        <a:effectStyle>
-          <a:effectLst>
-            <a:outerShdw blurRad="57150" dist="19050" dir="5400000" algn="ctr" rotWithShape="0">
-              <a:srgbClr val="000000">
-                <a:alpha val="63000"/>
-              </a:srgbClr>
-            </a:outerShdw>
-          </a:effectLst>
-        </a:effectStyle>
-      </a:effectStyleLst>
-      <a:bgFillStyleLst>
-        <a:solidFill>
-          <a:schemeClr val="phClr"/>
-        </a:solidFill>
-        <a:solidFill>
-          <a:schemeClr val="phClr">
-            <a:tint val="95000"/>
-            <a:satMod val="170000"/>
-          </a:schemeClr>
-        </a:solidFill>
-        <a:gradFill rotWithShape="1">
-          <a:gsLst>
-            <a:gs pos="0">
-              <a:schemeClr val="phClr">
-                <a:tint val="93000"/>
-                <a:satMod val="150000"/>
-                <a:shade val="98000"/>
-                <a:lumMod val="102000"/>
-              </a:schemeClr>
-            </a:gs>
-            <a:gs pos="50000">
-              <a:schemeClr val="phClr">
-                <a:tint val="98000"/>
-                <a:satMod val="130000"/>
-                <a:shade val="90000"/>
-                <a:lumMod val="103000"/>
-              </a:schemeClr>
-            </a:gs>
-            <a:gs pos="100000">
-              <a:schemeClr val="phClr">
-                <a:shade val="63000"/>
-                <a:satMod val="120000"/>
-              </a:schemeClr>
-            </a:gs>
-          </a:gsLst>
-          <a:lin ang="5400000" scaled="0"/>
-        </a:gradFill>
-      </a:bgFillStyleLst>
-    </a:fmtScheme>
-  </a:themeElements>
-  <a:objectDefaults>
-    <a:lnDef>
-      <a:spPr/>
-      <a:bodyPr/>
-      <a:lstStyle/>
-      <a:style>
-        <a:lnRef idx="2">
-          <a:schemeClr val="accent1"/>
-        </a:lnRef>
-        <a:fillRef idx="0">
-          <a:schemeClr val="accent1"/>
-        </a:fillRef>
-        <a:effectRef idx="1">
-          <a:schemeClr val="accent1"/>
-        </a:effectRef>
-        <a:fontRef idx="minor">
-          <a:schemeClr val="tx1"/>
-        </a:fontRef>
-      </a:style>
-    </a:lnDef>
-  </a:objectDefaults>
-  <a:extraClrSchemeLst/>
-  <a:extLst>
-    <a:ext uri="{05A4C25C-085E-4340-85A3-A5531E510DB2}">
-      <thm15:themeFamily xmlns:thm15="http://schemas.microsoft.com/office/thememl/2012/main" name="Office Theme" id="{2E142A2C-CD16-42D6-873A-C26D2A0506FA}" vid="{1BDDFF52-6CD6-40A5-AB3C-68EB2F1E4D0A}"/>
-    </a:ext>
-  </a:extLst>
-</a:theme>
 </file>